--- a/识价镜_Agent_技术面试演示_黑金模板版.pptx
+++ b/识价镜_Agent_技术面试演示_黑金模板版.pptx
@@ -2,15 +2,14 @@
 <file path=ppt/presentation.xml><?xml version="1.0" encoding="utf-8"?>
 <p:presentation xmlns:p="http://schemas.openxmlformats.org/presentationml/2006/main">
   <p:sldMasterIdLst>
-    <p:sldMasterId xmlns:r="http://schemas.openxmlformats.org/officeDocument/2006/relationships" id="2147483648" r:id="Rec2c1059e2444be5"/>
+    <p:sldMasterId xmlns:r="http://schemas.openxmlformats.org/officeDocument/2006/relationships" id="2147483648" r:id="R3900f8e8f1964f2b"/>
   </p:sldMasterIdLst>
   <p:notesMasterIdLst>
-    <p:notesMasterId xmlns:r="http://schemas.openxmlformats.org/officeDocument/2006/relationships" r:id="R05a15f710dd34345"/>
+    <p:notesMasterId xmlns:r="http://schemas.openxmlformats.org/officeDocument/2006/relationships" r:id="R8aa2f9b7068b403c"/>
   </p:notesMasterIdLst>
   <p:sldIdLst>
-    <p:sldId xmlns:r="http://schemas.openxmlformats.org/officeDocument/2006/relationships" id="256" r:id="R822e6edc4a984e05"/>
-    <p:sldId xmlns:r="http://schemas.openxmlformats.org/officeDocument/2006/relationships" id="257" r:id="R927c4e39745c4096"/>
-    <p:sldId xmlns:r="http://schemas.openxmlformats.org/officeDocument/2006/relationships" id="258" r:id="Rc184301b7ae34107"/>
+    <p:sldId xmlns:r="http://schemas.openxmlformats.org/officeDocument/2006/relationships" id="256" r:id="R4d9c06456d194175"/>
+    <p:sldId xmlns:r="http://schemas.openxmlformats.org/officeDocument/2006/relationships" id="257" r:id="R0fd6e79c5a0342b8"/>
   </p:sldIdLst>
   <p:sldSz cx="12192000" cy="6858000"/>
   <p:notesSz cx="6858000" cy="9144000"/>
@@ -530,106 +529,6 @@
 </p:notes>
 </file>
 
-<file path=ppt/notesSlides/notesSlide3.xml><?xml version="1.0" encoding="utf-8"?>
-<p:notes xmlns:p="http://schemas.openxmlformats.org/presentationml/2006/main">
-  <p:cSld>
-    <p:spTree>
-      <p:nvGrpSpPr>
-        <p:cNvPr id="1" name=""/>
-        <p:cNvGrpSpPr/>
-        <p:nvPr/>
-      </p:nvGrpSpPr>
-      <p:grpSpPr>
-        <a:xfrm xmlns:a="http://schemas.openxmlformats.org/drawingml/2006/main"/>
-      </p:grpSpPr>
-      <p:sp>
-        <p:nvSpPr>
-          <p:cNvPr id="2" name="Slide Image Placeholder 1"/>
-          <p:cNvSpPr>
-            <a:spLocks xmlns:a="http://schemas.openxmlformats.org/drawingml/2006/main" noGrp="1"/>
-          </p:cNvSpPr>
-          <p:nvPr>
-            <p:ph type="sldImg" idx="0"/>
-          </p:nvPr>
-        </p:nvSpPr>
-        <p:spPr/>
-      </p:sp>
-      <p:sp>
-        <p:nvSpPr>
-          <p:cNvPr id="3" name="Notes Placeholder 2"/>
-          <p:cNvSpPr>
-            <a:spLocks xmlns:a="http://schemas.openxmlformats.org/drawingml/2006/main" noGrp="1"/>
-          </p:cNvSpPr>
-          <p:nvPr>
-            <p:ph type="body" idx="1"/>
-          </p:nvPr>
-        </p:nvSpPr>
-        <p:spPr/>
-        <p:txBody>
-          <a:bodyPr xmlns:a="http://schemas.openxmlformats.org/drawingml/2006/main"/>
-          <a:lstStyle xmlns:a="http://schemas.openxmlformats.org/drawingml/2006/main"/>
-          <a:p xmlns:a="http://schemas.openxmlformats.org/drawingml/2006/main">
-            <a:r>
-              <a:t>核心问题：相似图不等于同款商品，只有确定可比较对象后价格比较才有意义。</a:t>
-            </a:r>
-          </a:p>
-          <a:p xmlns:a="http://schemas.openxmlformats.org/drawingml/2006/main">
-            <a:r>
-              <a:t/>
-            </a:r>
-          </a:p>
-          <a:p xmlns:a="http://schemas.openxmlformats.org/drawingml/2006/main">
-            <a:r>
-              <a:t>[Sources]</a:t>
-            </a:r>
-          </a:p>
-          <a:p xmlns:a="http://schemas.openxmlformats.org/drawingml/2006/main">
-            <a:r>
-              <a:t>- D:\实习\简历\output\pdf\张思成_简历.pdf</a:t>
-            </a:r>
-          </a:p>
-          <a:p xmlns:a="http://schemas.openxmlformats.org/drawingml/2006/main">
-            <a:r>
-              <a:t>- D:\E.C.26-B\src\shijiajing_agent\contracts.py</a:t>
-            </a:r>
-          </a:p>
-          <a:p xmlns:a="http://schemas.openxmlformats.org/drawingml/2006/main">
-            <a:r>
-              <a:t>- D:\E.C.26-B\docs\architecture.md</a:t>
-            </a:r>
-          </a:p>
-          <a:p xmlns:a="http://schemas.openxmlformats.org/drawingml/2006/main">
-            <a:r>
-              <a:t>[/Sources]</a:t>
-            </a:r>
-          </a:p>
-        </p:txBody>
-      </p:sp>
-      <p:sp>
-        <p:nvSpPr>
-          <p:cNvPr id="4" name="Slide Number Placeholder 3"/>
-          <p:cNvSpPr>
-            <a:spLocks xmlns:a="http://schemas.openxmlformats.org/drawingml/2006/main" noGrp="1"/>
-          </p:cNvSpPr>
-          <p:nvPr>
-            <p:ph type="sldNum" idx="5"/>
-          </p:nvPr>
-        </p:nvSpPr>
-        <p:spPr/>
-        <p:txBody>
-          <a:bodyPr xmlns:a="http://schemas.openxmlformats.org/drawingml/2006/main"/>
-          <a:lstStyle xmlns:a="http://schemas.openxmlformats.org/drawingml/2006/main"/>
-          <a:p xmlns:a="http://schemas.openxmlformats.org/drawingml/2006/main"/>
-        </p:txBody>
-      </p:sp>
-    </p:spTree>
-  </p:cSld>
-  <p:clrMapOvr>
-    <a:masterClrMapping xmlns:a="http://schemas.openxmlformats.org/drawingml/2006/main"/>
-  </p:clrMapOvr>
-</p:notes>
-</file>
-
 <file path=ppt/slideLayouts/slideLayout1.xml><?xml version="1.0" encoding="utf-8"?>
 <p:sldLayout xmlns:p="http://schemas.openxmlformats.org/presentationml/2006/main" type="obj" preserve="1">
   <p:cSld name="标题和内容">
@@ -855,7 +754,7 @@
           <p:nvPr/>
         </p:nvPicPr>
         <p:blipFill>
-          <a:blip xmlns:r="http://schemas.openxmlformats.org/officeDocument/2006/relationships" xmlns:a="http://schemas.openxmlformats.org/drawingml/2006/main" r:embed="R0519c6e3c963467c"/>
+          <a:blip xmlns:r="http://schemas.openxmlformats.org/officeDocument/2006/relationships" xmlns:a="http://schemas.openxmlformats.org/drawingml/2006/main" r:embed="Rd69bf00caa8747d5"/>
           <a:srcRect xmlns:a="http://schemas.openxmlformats.org/drawingml/2006/main" l="0" t="0" r="39" b="0"/>
           <a:stretch xmlns:a="http://schemas.openxmlformats.org/drawingml/2006/main">
             <a:fillRect l="0" t="0" r="0" b="0"/>
@@ -1361,7 +1260,7 @@
           <p:nvPr/>
         </p:nvPicPr>
         <p:blipFill>
-          <a:blip xmlns:r="http://schemas.openxmlformats.org/officeDocument/2006/relationships" xmlns:a="http://schemas.openxmlformats.org/drawingml/2006/main" r:embed="Red6d688ead5e4ee3"/>
+          <a:blip xmlns:r="http://schemas.openxmlformats.org/officeDocument/2006/relationships" xmlns:a="http://schemas.openxmlformats.org/drawingml/2006/main" r:embed="Rd566d0ffcb29459a"/>
           <a:srcRect xmlns:a="http://schemas.openxmlformats.org/drawingml/2006/main" l="0" t="0" r="39" b="0"/>
           <a:stretch xmlns:a="http://schemas.openxmlformats.org/drawingml/2006/main">
             <a:fillRect l="0" t="0" r="0" b="0"/>
@@ -4672,7 +4571,7 @@
           <p:nvPr/>
         </p:nvPicPr>
         <p:blipFill>
-          <a:blip xmlns:r="http://schemas.openxmlformats.org/officeDocument/2006/relationships" xmlns:a="http://schemas.openxmlformats.org/drawingml/2006/main" r:embed="R729103086b234305"/>
+          <a:blip xmlns:r="http://schemas.openxmlformats.org/officeDocument/2006/relationships" xmlns:a="http://schemas.openxmlformats.org/drawingml/2006/main" r:embed="R94b5a03229434850"/>
           <a:srcRect xmlns:a="http://schemas.openxmlformats.org/drawingml/2006/main" l="0" t="0" r="39" b="0"/>
           <a:stretch xmlns:a="http://schemas.openxmlformats.org/drawingml/2006/main">
             <a:fillRect l="0" t="0" r="0" b="0"/>
@@ -5250,7 +5149,7 @@
           <p:nvPr/>
         </p:nvPicPr>
         <p:blipFill>
-          <a:blip xmlns:r="http://schemas.openxmlformats.org/officeDocument/2006/relationships" xmlns:a="http://schemas.openxmlformats.org/drawingml/2006/main" r:embed="R0dcd427deaf744f8"/>
+          <a:blip xmlns:r="http://schemas.openxmlformats.org/officeDocument/2006/relationships" xmlns:a="http://schemas.openxmlformats.org/drawingml/2006/main" r:embed="R6537900708134468"/>
           <a:srcRect xmlns:a="http://schemas.openxmlformats.org/drawingml/2006/main" l="0" t="0" r="39" b="0"/>
           <a:stretch xmlns:a="http://schemas.openxmlformats.org/drawingml/2006/main">
             <a:fillRect l="0" t="0" r="0" b="0"/>
@@ -5906,18 +5805,18 @@
   </p:cSld>
   <p:clrMap bg1="dk1" tx1="lt1" bg2="dk2" tx2="lt2" accent1="accent1" accent2="accent2" accent3="accent3" accent4="accent4" accent5="accent5" accent6="accent6" hlink="hlink" folHlink="folHlink"/>
   <p:sldLayoutIdLst>
-    <p:sldLayoutId xmlns:r="http://schemas.openxmlformats.org/officeDocument/2006/relationships" id="2147483649" r:id="R14a4437234884ef0"/>
-    <p:sldLayoutId xmlns:r="http://schemas.openxmlformats.org/officeDocument/2006/relationships" id="2147483650" r:id="Rd7e709f0f8ad4684"/>
-    <p:sldLayoutId xmlns:r="http://schemas.openxmlformats.org/officeDocument/2006/relationships" id="2147483651" r:id="R8ffa080493744d2b"/>
-    <p:sldLayoutId xmlns:r="http://schemas.openxmlformats.org/officeDocument/2006/relationships" id="2147483652" r:id="Rdb7b110c143e4fbe"/>
-    <p:sldLayoutId xmlns:r="http://schemas.openxmlformats.org/officeDocument/2006/relationships" id="2147483653" r:id="R0e6d4d653031423f"/>
-    <p:sldLayoutId xmlns:r="http://schemas.openxmlformats.org/officeDocument/2006/relationships" id="2147483654" r:id="R19ce52b3cd214eca"/>
-    <p:sldLayoutId xmlns:r="http://schemas.openxmlformats.org/officeDocument/2006/relationships" id="2147483655" r:id="R6fb5575260044f5c"/>
-    <p:sldLayoutId xmlns:r="http://schemas.openxmlformats.org/officeDocument/2006/relationships" id="2147483656" r:id="Re5cb31cc1aeb494c"/>
-    <p:sldLayoutId xmlns:r="http://schemas.openxmlformats.org/officeDocument/2006/relationships" id="2147483657" r:id="R1350d8cef1654dc0"/>
-    <p:sldLayoutId xmlns:r="http://schemas.openxmlformats.org/officeDocument/2006/relationships" id="2147483658" r:id="R878e5ab26d2244e3"/>
-    <p:sldLayoutId xmlns:r="http://schemas.openxmlformats.org/officeDocument/2006/relationships" id="2147483659" r:id="R00ae445272e447f0"/>
-    <p:sldLayoutId xmlns:r="http://schemas.openxmlformats.org/officeDocument/2006/relationships" id="2147483660" r:id="R1f48c6337e7b48a9"/>
+    <p:sldLayoutId xmlns:r="http://schemas.openxmlformats.org/officeDocument/2006/relationships" id="2147483649" r:id="R6a232b08e344448d"/>
+    <p:sldLayoutId xmlns:r="http://schemas.openxmlformats.org/officeDocument/2006/relationships" id="2147483650" r:id="Rbdbfb65af35e40ce"/>
+    <p:sldLayoutId xmlns:r="http://schemas.openxmlformats.org/officeDocument/2006/relationships" id="2147483651" r:id="R8086fe0a2b414f4b"/>
+    <p:sldLayoutId xmlns:r="http://schemas.openxmlformats.org/officeDocument/2006/relationships" id="2147483652" r:id="R6ad8b82ba8894ab0"/>
+    <p:sldLayoutId xmlns:r="http://schemas.openxmlformats.org/officeDocument/2006/relationships" id="2147483653" r:id="R9b35321b8551423a"/>
+    <p:sldLayoutId xmlns:r="http://schemas.openxmlformats.org/officeDocument/2006/relationships" id="2147483654" r:id="R7fbf79bd9faf42c0"/>
+    <p:sldLayoutId xmlns:r="http://schemas.openxmlformats.org/officeDocument/2006/relationships" id="2147483655" r:id="R004cdba36c834db1"/>
+    <p:sldLayoutId xmlns:r="http://schemas.openxmlformats.org/officeDocument/2006/relationships" id="2147483656" r:id="R2c69bb9d6def45fa"/>
+    <p:sldLayoutId xmlns:r="http://schemas.openxmlformats.org/officeDocument/2006/relationships" id="2147483657" r:id="Ra8fd9ff9b56044dc"/>
+    <p:sldLayoutId xmlns:r="http://schemas.openxmlformats.org/officeDocument/2006/relationships" id="2147483658" r:id="R357337961a3a40ef"/>
+    <p:sldLayoutId xmlns:r="http://schemas.openxmlformats.org/officeDocument/2006/relationships" id="2147483659" r:id="R3f13b2a8d9634786"/>
+    <p:sldLayoutId xmlns:r="http://schemas.openxmlformats.org/officeDocument/2006/relationships" id="2147483660" r:id="R404e404bd4e44e4e"/>
   </p:sldLayoutIdLst>
   <p:txStyles>
     <p:titleStyle>
@@ -8219,3426 +8118,6 @@
 </p:sld>
 </file>
 
-<file path=ppt/slides/slide3.xml><?xml version="1.0" encoding="utf-8"?>
-<p:sld xmlns:p="http://schemas.openxmlformats.org/presentationml/2006/main">
-  <p:cSld>
-    <p:spTree>
-      <p:nvGrpSpPr>
-        <p:cNvPr id="1" name=""/>
-        <p:cNvGrpSpPr/>
-        <p:nvPr/>
-      </p:nvGrpSpPr>
-      <p:grpSpPr>
-        <a:xfrm xmlns:a="http://schemas.openxmlformats.org/drawingml/2006/main"/>
-      </p:grpSpPr>
-      <p:sp>
-        <p:nvSpPr>
-          <p:cNvPr id="3" name="文本框 2">
-            <a:extLst xmlns:a="http://schemas.openxmlformats.org/drawingml/2006/main">
-              <a:ext uri="{FF2B5EF4-FFF2-40B4-BE49-F238E27FC236}">
-                <a16:creationId xmlns:a16="http://schemas.microsoft.com/office/drawing/2014/main" id="{6CC809C5-11F5-48B5-842B-679FA1B0EACC}"/>
-              </a:ext>
-            </a:extLst>
-          </p:cNvPr>
-          <p:cNvSpPr>
-            <a:spLocks xmlns:a="http://schemas.openxmlformats.org/drawingml/2006/main" noGrp="1"/>
-          </p:cNvSpPr>
-          <p:nvPr/>
-        </p:nvSpPr>
-        <p:spPr>
-          <a:xfrm xmlns:a="http://schemas.openxmlformats.org/drawingml/2006/main">
-            <a:off x="533400" y="357188"/>
-            <a:ext cx="11125200" cy="500063"/>
-          </a:xfrm>
-          <a:prstGeom xmlns:a="http://schemas.openxmlformats.org/drawingml/2006/main" prst="rect">
-            <a:avLst/>
-          </a:prstGeom>
-          <a:noFill xmlns:a="http://schemas.openxmlformats.org/drawingml/2006/main"/>
-        </p:spPr>
-        <p:txBody>
-          <a:bodyPr xmlns:a="http://schemas.openxmlformats.org/drawingml/2006/main" wrap="square" lIns="0" tIns="0" rIns="0" bIns="0" anchor="t">
-            <a:noAutofit/>
-          </a:bodyPr>
-          <a:lstStyle xmlns:a="http://schemas.openxmlformats.org/drawingml/2006/main"/>
-          <a:p xmlns:a="http://schemas.openxmlformats.org/drawingml/2006/main">
-            <a:pPr algn="l">
-              <a:lnSpc>
-                <a:spcPct val="100000"/>
-              </a:lnSpc>
-              <a:buNone/>
-            </a:pPr>
-            <a:r>
-              <a:rPr sz="3000" b="1">
-                <a:solidFill>
-                  <a:srgbClr val="F4F4F5"/>
-                </a:solidFill>
-                <a:latin typeface="Microsoft YaHei"/>
-                <a:ea typeface="Microsoft YaHei"/>
-                <a:cs typeface="Microsoft YaHei"/>
-              </a:rPr>
-              <a:t>不是找相似图，而是确定可比较对象</a:t>
-            </a:r>
-            <a:endParaRPr sz="3000" b="1">
-              <a:solidFill>
-                <a:srgbClr val="F4F4F5"/>
-              </a:solidFill>
-              <a:latin typeface="Microsoft YaHei"/>
-              <a:ea typeface="Microsoft YaHei"/>
-              <a:cs typeface="Microsoft YaHei"/>
-            </a:endParaRPr>
-          </a:p>
-        </p:txBody>
-      </p:sp>
-      <p:sp>
-        <p:nvSpPr>
-          <p:cNvPr id="4" name="任意多边形 3">
-            <a:extLst xmlns:a="http://schemas.openxmlformats.org/drawingml/2006/main">
-              <a:ext uri="{FF2B5EF4-FFF2-40B4-BE49-F238E27FC236}">
-                <a16:creationId xmlns:a16="http://schemas.microsoft.com/office/drawing/2014/main" id="{A834284C-63F4-478B-B3F1-71196238632E}"/>
-              </a:ext>
-            </a:extLst>
-          </p:cNvPr>
-          <p:cNvSpPr>
-            <a:spLocks xmlns:a="http://schemas.openxmlformats.org/drawingml/2006/main" noGrp="1"/>
-          </p:cNvSpPr>
-          <p:nvPr/>
-        </p:nvSpPr>
-        <p:spPr>
-          <a:xfrm xmlns:a="http://schemas.openxmlformats.org/drawingml/2006/main">
-            <a:off x="575945" y="1109345"/>
-            <a:ext cx="5400675" cy="4090035"/>
-          </a:xfrm>
-          <a:custGeom xmlns:a="http://schemas.openxmlformats.org/drawingml/2006/main">
-            <a:gdLst>
-              <a:gd name="sw" fmla="*/ 1 w 8505"/>
-              <a:gd name="sh" fmla="*/ 1 h 6440"/>
-              <a:gd name="mins" fmla="min sw sh"/>
-              <a:gd name="dsw" fmla="+- 0 sw mins"/>
-              <a:gd name="dsh" fmla="+- 0 sh mins"/>
-              <a:gd name="p0x0" fmla="*/ 120 w 8505"/>
-              <a:gd name="p0y0" fmla="*/ 0 h 6440"/>
-              <a:gd name="p0x1" fmla="*/ 8385 w 8505"/>
-              <a:gd name="p0y1" fmla="*/ 0 h 6440"/>
-              <a:gd name="p0x2" fmla="*/ 8451 w 8505"/>
-              <a:gd name="p0y2" fmla="*/ 0 h 6440"/>
-              <a:gd name="p0x3" fmla="*/ 8505 w 8505"/>
-              <a:gd name="p0y3" fmla="*/ 53 h 6440"/>
-              <a:gd name="p0x4" fmla="*/ 8505 w 8505"/>
-              <a:gd name="p0y4" fmla="*/ 120 h 6440"/>
-              <a:gd name="p0x5" fmla="*/ 8505 w 8505"/>
-              <a:gd name="p0y5" fmla="*/ 6320 h 6440"/>
-              <a:gd name="p0x6" fmla="*/ 8505 w 8505"/>
-              <a:gd name="p0y6" fmla="*/ 6387 h 6440"/>
-              <a:gd name="p0x7" fmla="*/ 8451 w 8505"/>
-              <a:gd name="p0y7" fmla="*/ 6440 h 6440"/>
-              <a:gd name="p0x8" fmla="*/ 8385 w 8505"/>
-              <a:gd name="p0y8" fmla="*/ 6440 h 6440"/>
-              <a:gd name="p0x9" fmla="*/ 120 w 8505"/>
-              <a:gd name="p0y9" fmla="*/ 6440 h 6440"/>
-              <a:gd name="p0x10" fmla="*/ 53 w 8505"/>
-              <a:gd name="p0y10" fmla="*/ 6440 h 6440"/>
-              <a:gd name="p0x11" fmla="*/ 0 w 8505"/>
-              <a:gd name="p0y11" fmla="*/ 6387 h 6440"/>
-              <a:gd name="p0x12" fmla="*/ 0 w 8505"/>
-              <a:gd name="p0y12" fmla="*/ 6320 h 6440"/>
-              <a:gd name="p0x13" fmla="*/ 0 w 8505"/>
-              <a:gd name="p0y13" fmla="*/ 120 h 6440"/>
-              <a:gd name="p0x14" fmla="*/ 0 w 8505"/>
-              <a:gd name="p0y14" fmla="*/ 53 h 6440"/>
-              <a:gd name="p0x15" fmla="*/ 53 w 8505"/>
-              <a:gd name="p0y15" fmla="*/ 0 h 6440"/>
-              <a:gd name="p0x16" fmla="*/ 120 w 8505"/>
-              <a:gd name="p0y16" fmla="*/ 0 h 6440"/>
-            </a:gdLst>
-            <a:pathLst>
-              <a:path w="0" h="0">
-                <a:moveTo>
-                  <a:pt x="0" y="0"/>
-                </a:moveTo>
-                <a:lnTo>
-                  <a:pt x="0" y="0"/>
-                </a:lnTo>
-                <a:cubicBezTo>
-                  <a:pt x="0" y="0"/>
-                  <a:pt x="0" y="0"/>
-                  <a:pt x="0" y="0"/>
-                </a:cubicBezTo>
-                <a:lnTo>
-                  <a:pt x="0" y="0"/>
-                </a:lnTo>
-                <a:cubicBezTo>
-                  <a:pt x="0" y="0"/>
-                  <a:pt x="0" y="0"/>
-                  <a:pt x="0" y="0"/>
-                </a:cubicBezTo>
-                <a:lnTo>
-                  <a:pt x="0" y="0"/>
-                </a:lnTo>
-                <a:cubicBezTo>
-                  <a:pt x="0" y="0"/>
-                  <a:pt x="0" y="0"/>
-                  <a:pt x="0" y="0"/>
-                </a:cubicBezTo>
-                <a:lnTo>
-                  <a:pt x="0" y="0"/>
-                </a:lnTo>
-                <a:cubicBezTo>
-                  <a:pt x="0" y="0"/>
-                  <a:pt x="0" y="0"/>
-                  <a:pt x="0" y="0"/>
-                </a:cubicBezTo>
-                <a:close/>
-              </a:path>
-            </a:pathLst>
-          </a:custGeom>
-          <a:solidFill xmlns:a="http://schemas.openxmlformats.org/drawingml/2006/main">
-            <a:srgbClr val="FFFFFF">
-              <a:alpha val="10980"/>
-            </a:srgbClr>
-          </a:solidFill>
-          <a:ln xmlns:a="http://schemas.openxmlformats.org/drawingml/2006/main" w="9525" cmpd="sng">
-            <a:solidFill>
-              <a:srgbClr val="FFFFFF">
-                <a:alpha val="10980"/>
-              </a:srgbClr>
-            </a:solidFill>
-            <a:prstDash val="solid"/>
-          </a:ln>
-          <a:effectLst xmlns:a="http://schemas.openxmlformats.org/drawingml/2006/main">
-            <a:outerShdw blurRad="142875" algn="ctr" rotWithShape="0">
-              <a:schemeClr val="accent2">
-                <a:alpha val="12157"/>
-              </a:schemeClr>
-            </a:outerShdw>
-          </a:effectLst>
-        </p:spPr>
-        <p:style>
-          <a:lnRef xmlns:a="http://schemas.openxmlformats.org/drawingml/2006/main" idx="2">
-            <a:schemeClr val="accent1">
-              <a:lumMod val="75000"/>
-            </a:schemeClr>
-          </a:lnRef>
-          <a:fillRef xmlns:a="http://schemas.openxmlformats.org/drawingml/2006/main" idx="1">
-            <a:schemeClr val="accent1"/>
-          </a:fillRef>
-          <a:effectRef xmlns:a="http://schemas.openxmlformats.org/drawingml/2006/main" idx="0">
-            <a:srgbClr val="FFFFFF"/>
-          </a:effectRef>
-          <a:fontRef xmlns:a="http://schemas.openxmlformats.org/drawingml/2006/main" idx="minor">
-            <a:schemeClr val="lt1"/>
-          </a:fontRef>
-        </p:style>
-        <p:txBody>
-          <a:bodyPr xmlns:a="http://schemas.openxmlformats.org/drawingml/2006/main" anchor="ctr"/>
-          <a:lstStyle xmlns:a="http://schemas.openxmlformats.org/drawingml/2006/main"/>
-          <a:p xmlns:a="http://schemas.openxmlformats.org/drawingml/2006/main">
-            <a:pPr algn="ctr">
-              <a:buNone/>
-            </a:pPr>
-            <a:endParaRPr/>
-          </a:p>
-        </p:txBody>
-      </p:sp>
-      <p:sp>
-        <p:nvSpPr>
-          <p:cNvPr id="5" name="文本框 4">
-            <a:extLst xmlns:a="http://schemas.openxmlformats.org/drawingml/2006/main">
-              <a:ext uri="{FF2B5EF4-FFF2-40B4-BE49-F238E27FC236}">
-                <a16:creationId xmlns:a16="http://schemas.microsoft.com/office/drawing/2014/main" id="{CE243B75-A665-4385-BFFD-04E50778A3D4}"/>
-              </a:ext>
-            </a:extLst>
-          </p:cNvPr>
-          <p:cNvSpPr>
-            <a:spLocks xmlns:a="http://schemas.openxmlformats.org/drawingml/2006/main" noGrp="1"/>
-          </p:cNvSpPr>
-          <p:nvPr/>
-        </p:nvSpPr>
-        <p:spPr>
-          <a:xfrm xmlns:a="http://schemas.openxmlformats.org/drawingml/2006/main">
-            <a:off x="771525" y="1288732"/>
-            <a:ext cx="5010150" cy="365760"/>
-          </a:xfrm>
-          <a:prstGeom xmlns:a="http://schemas.openxmlformats.org/drawingml/2006/main" prst="rect">
-            <a:avLst/>
-          </a:prstGeom>
-          <a:noFill xmlns:a="http://schemas.openxmlformats.org/drawingml/2006/main"/>
-        </p:spPr>
-        <p:txBody>
-          <a:bodyPr xmlns:a="http://schemas.openxmlformats.org/drawingml/2006/main" wrap="square" lIns="0" tIns="0" rIns="0" bIns="0" anchor="t">
-            <a:noAutofit/>
-          </a:bodyPr>
-          <a:lstStyle xmlns:a="http://schemas.openxmlformats.org/drawingml/2006/main"/>
-          <a:p xmlns:a="http://schemas.openxmlformats.org/drawingml/2006/main">
-            <a:pPr algn="l">
-              <a:lnSpc>
-                <a:spcPct val="104000"/>
-              </a:lnSpc>
-              <a:buNone/>
-            </a:pPr>
-            <a:r>
-              <a:rPr sz="2100" b="1" spc="42">
-                <a:solidFill>
-                  <a:srgbClr val="F4F4F5"/>
-                </a:solidFill>
-                <a:latin typeface="Microsoft YaHei"/>
-                <a:ea typeface="Microsoft YaHei"/>
-                <a:cs typeface="Microsoft YaHei"/>
-              </a:rPr>
-              <a:t>为什么普通图搜不够</a:t>
-            </a:r>
-            <a:endParaRPr sz="2100" b="1" spc="42">
-              <a:solidFill>
-                <a:srgbClr val="F4F4F5"/>
-              </a:solidFill>
-              <a:latin typeface="Microsoft YaHei"/>
-              <a:ea typeface="Microsoft YaHei"/>
-              <a:cs typeface="Microsoft YaHei"/>
-            </a:endParaRPr>
-          </a:p>
-        </p:txBody>
-      </p:sp>
-      <p:sp>
-        <p:nvSpPr>
-          <p:cNvPr id="6" name="任意多边形 5">
-            <a:extLst xmlns:a="http://schemas.openxmlformats.org/drawingml/2006/main">
-              <a:ext uri="{FF2B5EF4-FFF2-40B4-BE49-F238E27FC236}">
-                <a16:creationId xmlns:a16="http://schemas.microsoft.com/office/drawing/2014/main" id="{32BDD4D5-607F-48E0-AAB2-D34BCC5846E6}"/>
-              </a:ext>
-            </a:extLst>
-          </p:cNvPr>
-          <p:cNvSpPr>
-            <a:spLocks xmlns:a="http://schemas.openxmlformats.org/drawingml/2006/main" noGrp="1"/>
-          </p:cNvSpPr>
-          <p:nvPr/>
-        </p:nvSpPr>
-        <p:spPr>
-          <a:xfrm xmlns:a="http://schemas.openxmlformats.org/drawingml/2006/main">
-            <a:off x="771525" y="1835785"/>
-            <a:ext cx="342900" cy="342900"/>
-          </a:xfrm>
-          <a:custGeom xmlns:a="http://schemas.openxmlformats.org/drawingml/2006/main">
-            <a:gdLst>
-              <a:gd name="sw" fmla="*/ 1 w 540"/>
-              <a:gd name="sh" fmla="*/ 1 h 540"/>
-              <a:gd name="mins" fmla="min sw sh"/>
-              <a:gd name="dsw" fmla="+- 0 sw mins"/>
-              <a:gd name="dsh" fmla="+- 0 sh mins"/>
-              <a:gd name="p0x0" fmla="*/ 120 w 540"/>
-              <a:gd name="p0y0" fmla="*/ 0 h 540"/>
-              <a:gd name="p0x1" fmla="*/ 420 w 540"/>
-              <a:gd name="p0y1" fmla="*/ 0 h 540"/>
-              <a:gd name="p0x2" fmla="*/ 486 w 540"/>
-              <a:gd name="p0y2" fmla="*/ 0 h 540"/>
-              <a:gd name="p0x3" fmla="*/ 540 w 540"/>
-              <a:gd name="p0y3" fmla="*/ 53 h 540"/>
-              <a:gd name="p0x4" fmla="*/ 540 w 540"/>
-              <a:gd name="p0y4" fmla="*/ 120 h 540"/>
-              <a:gd name="p0x5" fmla="*/ 540 w 540"/>
-              <a:gd name="p0y5" fmla="*/ 420 h 540"/>
-              <a:gd name="p0x6" fmla="*/ 540 w 540"/>
-              <a:gd name="p0y6" fmla="*/ 486 h 540"/>
-              <a:gd name="p0x7" fmla="*/ 486 w 540"/>
-              <a:gd name="p0y7" fmla="*/ 540 h 540"/>
-              <a:gd name="p0x8" fmla="*/ 420 w 540"/>
-              <a:gd name="p0y8" fmla="*/ 540 h 540"/>
-              <a:gd name="p0x9" fmla="*/ 120 w 540"/>
-              <a:gd name="p0y9" fmla="*/ 540 h 540"/>
-              <a:gd name="p0x10" fmla="*/ 53 w 540"/>
-              <a:gd name="p0y10" fmla="*/ 540 h 540"/>
-              <a:gd name="p0x11" fmla="*/ 0 w 540"/>
-              <a:gd name="p0y11" fmla="*/ 486 h 540"/>
-              <a:gd name="p0x12" fmla="*/ 0 w 540"/>
-              <a:gd name="p0y12" fmla="*/ 420 h 540"/>
-              <a:gd name="p0x13" fmla="*/ 0 w 540"/>
-              <a:gd name="p0y13" fmla="*/ 120 h 540"/>
-              <a:gd name="p0x14" fmla="*/ 0 w 540"/>
-              <a:gd name="p0y14" fmla="*/ 53 h 540"/>
-              <a:gd name="p0x15" fmla="*/ 53 w 540"/>
-              <a:gd name="p0y15" fmla="*/ 0 h 540"/>
-              <a:gd name="p0x16" fmla="*/ 120 w 540"/>
-              <a:gd name="p0y16" fmla="*/ 0 h 540"/>
-            </a:gdLst>
-            <a:pathLst>
-              <a:path w="0" h="0">
-                <a:moveTo>
-                  <a:pt x="0" y="0"/>
-                </a:moveTo>
-                <a:lnTo>
-                  <a:pt x="0" y="0"/>
-                </a:lnTo>
-                <a:cubicBezTo>
-                  <a:pt x="0" y="0"/>
-                  <a:pt x="0" y="0"/>
-                  <a:pt x="0" y="0"/>
-                </a:cubicBezTo>
-                <a:lnTo>
-                  <a:pt x="0" y="0"/>
-                </a:lnTo>
-                <a:cubicBezTo>
-                  <a:pt x="0" y="0"/>
-                  <a:pt x="0" y="0"/>
-                  <a:pt x="0" y="0"/>
-                </a:cubicBezTo>
-                <a:lnTo>
-                  <a:pt x="0" y="0"/>
-                </a:lnTo>
-                <a:cubicBezTo>
-                  <a:pt x="0" y="0"/>
-                  <a:pt x="0" y="0"/>
-                  <a:pt x="0" y="0"/>
-                </a:cubicBezTo>
-                <a:lnTo>
-                  <a:pt x="0" y="0"/>
-                </a:lnTo>
-                <a:cubicBezTo>
-                  <a:pt x="0" y="0"/>
-                  <a:pt x="0" y="0"/>
-                  <a:pt x="0" y="0"/>
-                </a:cubicBezTo>
-                <a:close/>
-              </a:path>
-            </a:pathLst>
-          </a:custGeom>
-          <a:solidFill xmlns:a="http://schemas.openxmlformats.org/drawingml/2006/main">
-            <a:schemeClr val="accent1">
-              <a:alpha val="16078"/>
-            </a:schemeClr>
-          </a:solidFill>
-          <a:ln xmlns:a="http://schemas.openxmlformats.org/drawingml/2006/main">
-            <a:noFill/>
-          </a:ln>
-        </p:spPr>
-        <p:style>
-          <a:lnRef xmlns:a="http://schemas.openxmlformats.org/drawingml/2006/main" idx="2">
-            <a:schemeClr val="accent1">
-              <a:lumMod val="75000"/>
-            </a:schemeClr>
-          </a:lnRef>
-          <a:fillRef xmlns:a="http://schemas.openxmlformats.org/drawingml/2006/main" idx="1">
-            <a:schemeClr val="accent1"/>
-          </a:fillRef>
-          <a:effectRef xmlns:a="http://schemas.openxmlformats.org/drawingml/2006/main" idx="0">
-            <a:srgbClr val="FFFFFF"/>
-          </a:effectRef>
-          <a:fontRef xmlns:a="http://schemas.openxmlformats.org/drawingml/2006/main" idx="minor">
-            <a:schemeClr val="lt1"/>
-          </a:fontRef>
-        </p:style>
-        <p:txBody>
-          <a:bodyPr xmlns:a="http://schemas.openxmlformats.org/drawingml/2006/main" anchor="ctr"/>
-          <a:lstStyle xmlns:a="http://schemas.openxmlformats.org/drawingml/2006/main"/>
-          <a:p xmlns:a="http://schemas.openxmlformats.org/drawingml/2006/main">
-            <a:pPr algn="ctr">
-              <a:buNone/>
-            </a:pPr>
-            <a:endParaRPr/>
-          </a:p>
-        </p:txBody>
-      </p:sp>
-      <p:sp>
-        <p:nvSpPr>
-          <p:cNvPr id="7" name="文本框 6">
-            <a:extLst xmlns:a="http://schemas.openxmlformats.org/drawingml/2006/main">
-              <a:ext uri="{FF2B5EF4-FFF2-40B4-BE49-F238E27FC236}">
-                <a16:creationId xmlns:a16="http://schemas.microsoft.com/office/drawing/2014/main" id="{86845DFB-C29D-4793-8ADA-F44D2C9B64B3}"/>
-              </a:ext>
-            </a:extLst>
-          </p:cNvPr>
-          <p:cNvSpPr>
-            <a:spLocks xmlns:a="http://schemas.openxmlformats.org/drawingml/2006/main" noGrp="1"/>
-          </p:cNvSpPr>
-          <p:nvPr/>
-        </p:nvSpPr>
-        <p:spPr>
-          <a:xfrm xmlns:a="http://schemas.openxmlformats.org/drawingml/2006/main">
-            <a:off x="812159" y="1885626"/>
-            <a:ext cx="471116" cy="239078"/>
-          </a:xfrm>
-          <a:prstGeom xmlns:a="http://schemas.openxmlformats.org/drawingml/2006/main" prst="rect">
-            <a:avLst/>
-          </a:prstGeom>
-          <a:noFill xmlns:a="http://schemas.openxmlformats.org/drawingml/2006/main"/>
-        </p:spPr>
-        <p:txBody>
-          <a:bodyPr xmlns:a="http://schemas.openxmlformats.org/drawingml/2006/main" wrap="square" lIns="0" tIns="0" rIns="0" bIns="0" anchor="t">
-            <a:noAutofit/>
-          </a:bodyPr>
-          <a:lstStyle xmlns:a="http://schemas.openxmlformats.org/drawingml/2006/main"/>
-          <a:p xmlns:a="http://schemas.openxmlformats.org/drawingml/2006/main">
-            <a:pPr algn="l">
-              <a:lnSpc>
-                <a:spcPct val="83000"/>
-              </a:lnSpc>
-              <a:buNone/>
-            </a:pPr>
-            <a:r>
-              <a:rPr sz="1650" b="1">
-                <a:solidFill>
-                  <a:srgbClr val="AF753D"/>
-                </a:solidFill>
-                <a:latin typeface="Microsoft YaHei"/>
-                <a:ea typeface="Microsoft YaHei"/>
-                <a:cs typeface="Microsoft YaHei"/>
-              </a:rPr>
-              <a:t>01</a:t>
-            </a:r>
-            <a:endParaRPr sz="1650" b="1">
-              <a:solidFill>
-                <a:srgbClr val="AF753D"/>
-              </a:solidFill>
-              <a:latin typeface="Microsoft YaHei"/>
-              <a:ea typeface="Microsoft YaHei"/>
-              <a:cs typeface="Microsoft YaHei"/>
-            </a:endParaRPr>
-          </a:p>
-        </p:txBody>
-      </p:sp>
-      <p:sp>
-        <p:nvSpPr>
-          <p:cNvPr id="8" name="文本框 7">
-            <a:extLst xmlns:a="http://schemas.openxmlformats.org/drawingml/2006/main">
-              <a:ext uri="{FF2B5EF4-FFF2-40B4-BE49-F238E27FC236}">
-                <a16:creationId xmlns:a16="http://schemas.microsoft.com/office/drawing/2014/main" id="{B3D7A74C-28DD-4B8C-AA13-7ED13F3C299F}"/>
-              </a:ext>
-            </a:extLst>
-          </p:cNvPr>
-          <p:cNvSpPr>
-            <a:spLocks xmlns:a="http://schemas.openxmlformats.org/drawingml/2006/main" noGrp="1"/>
-          </p:cNvSpPr>
-          <p:nvPr/>
-        </p:nvSpPr>
-        <p:spPr>
-          <a:xfrm xmlns:a="http://schemas.openxmlformats.org/drawingml/2006/main">
-            <a:off x="1228725" y="1874196"/>
-            <a:ext cx="2286000" cy="261938"/>
-          </a:xfrm>
-          <a:prstGeom xmlns:a="http://schemas.openxmlformats.org/drawingml/2006/main" prst="rect">
-            <a:avLst/>
-          </a:prstGeom>
-          <a:noFill xmlns:a="http://schemas.openxmlformats.org/drawingml/2006/main"/>
-        </p:spPr>
-        <p:txBody>
-          <a:bodyPr xmlns:a="http://schemas.openxmlformats.org/drawingml/2006/main" wrap="square" lIns="0" tIns="0" rIns="0" bIns="0" anchor="t">
-            <a:noAutofit/>
-          </a:bodyPr>
-          <a:lstStyle xmlns:a="http://schemas.openxmlformats.org/drawingml/2006/main"/>
-          <a:p xmlns:a="http://schemas.openxmlformats.org/drawingml/2006/main">
-            <a:pPr algn="l">
-              <a:lnSpc>
-                <a:spcPct val="104000"/>
-              </a:lnSpc>
-              <a:buNone/>
-            </a:pPr>
-            <a:r>
-              <a:rPr sz="1500" b="1">
-                <a:solidFill>
-                  <a:schemeClr val="tx2">
-                    <a:lumMod val="4356"/>
-                    <a:lumOff val="95644"/>
-                  </a:schemeClr>
-                </a:solidFill>
-                <a:latin typeface="Microsoft YaHei"/>
-                <a:ea typeface="Microsoft YaHei"/>
-                <a:cs typeface="Microsoft YaHei"/>
-              </a:rPr>
-              <a:t>只有图片，没有商品名</a:t>
-            </a:r>
-            <a:endParaRPr sz="1500" b="1">
-              <a:solidFill>
-                <a:schemeClr val="tx2">
-                  <a:lumMod val="4356"/>
-                  <a:lumOff val="95644"/>
-                </a:schemeClr>
-              </a:solidFill>
-              <a:latin typeface="Microsoft YaHei"/>
-              <a:ea typeface="Microsoft YaHei"/>
-              <a:cs typeface="Microsoft YaHei"/>
-            </a:endParaRPr>
-          </a:p>
-        </p:txBody>
-      </p:sp>
-      <p:sp>
-        <p:nvSpPr>
-          <p:cNvPr id="9" name="任意多边形 8">
-            <a:extLst xmlns:a="http://schemas.openxmlformats.org/drawingml/2006/main">
-              <a:ext uri="{FF2B5EF4-FFF2-40B4-BE49-F238E27FC236}">
-                <a16:creationId xmlns:a16="http://schemas.microsoft.com/office/drawing/2014/main" id="{A6630C45-5327-470B-B281-F5383522DFDE}"/>
-              </a:ext>
-            </a:extLst>
-          </p:cNvPr>
-          <p:cNvSpPr>
-            <a:spLocks xmlns:a="http://schemas.openxmlformats.org/drawingml/2006/main" noGrp="1"/>
-          </p:cNvSpPr>
-          <p:nvPr/>
-        </p:nvSpPr>
-        <p:spPr>
-          <a:xfrm xmlns:a="http://schemas.openxmlformats.org/drawingml/2006/main">
-            <a:off x="771525" y="2376170"/>
-            <a:ext cx="342900" cy="342900"/>
-          </a:xfrm>
-          <a:custGeom xmlns:a="http://schemas.openxmlformats.org/drawingml/2006/main">
-            <a:gdLst>
-              <a:gd name="sw" fmla="*/ 1 w 540"/>
-              <a:gd name="sh" fmla="*/ 1 h 540"/>
-              <a:gd name="mins" fmla="min sw sh"/>
-              <a:gd name="dsw" fmla="+- 0 sw mins"/>
-              <a:gd name="dsh" fmla="+- 0 sh mins"/>
-              <a:gd name="p0x0" fmla="*/ 120 w 540"/>
-              <a:gd name="p0y0" fmla="*/ 0 h 540"/>
-              <a:gd name="p0x1" fmla="*/ 420 w 540"/>
-              <a:gd name="p0y1" fmla="*/ 0 h 540"/>
-              <a:gd name="p0x2" fmla="*/ 486 w 540"/>
-              <a:gd name="p0y2" fmla="*/ 0 h 540"/>
-              <a:gd name="p0x3" fmla="*/ 540 w 540"/>
-              <a:gd name="p0y3" fmla="*/ 53 h 540"/>
-              <a:gd name="p0x4" fmla="*/ 540 w 540"/>
-              <a:gd name="p0y4" fmla="*/ 120 h 540"/>
-              <a:gd name="p0x5" fmla="*/ 540 w 540"/>
-              <a:gd name="p0y5" fmla="*/ 420 h 540"/>
-              <a:gd name="p0x6" fmla="*/ 540 w 540"/>
-              <a:gd name="p0y6" fmla="*/ 486 h 540"/>
-              <a:gd name="p0x7" fmla="*/ 486 w 540"/>
-              <a:gd name="p0y7" fmla="*/ 540 h 540"/>
-              <a:gd name="p0x8" fmla="*/ 420 w 540"/>
-              <a:gd name="p0y8" fmla="*/ 540 h 540"/>
-              <a:gd name="p0x9" fmla="*/ 120 w 540"/>
-              <a:gd name="p0y9" fmla="*/ 540 h 540"/>
-              <a:gd name="p0x10" fmla="*/ 53 w 540"/>
-              <a:gd name="p0y10" fmla="*/ 540 h 540"/>
-              <a:gd name="p0x11" fmla="*/ 0 w 540"/>
-              <a:gd name="p0y11" fmla="*/ 486 h 540"/>
-              <a:gd name="p0x12" fmla="*/ 0 w 540"/>
-              <a:gd name="p0y12" fmla="*/ 420 h 540"/>
-              <a:gd name="p0x13" fmla="*/ 0 w 540"/>
-              <a:gd name="p0y13" fmla="*/ 120 h 540"/>
-              <a:gd name="p0x14" fmla="*/ 0 w 540"/>
-              <a:gd name="p0y14" fmla="*/ 53 h 540"/>
-              <a:gd name="p0x15" fmla="*/ 53 w 540"/>
-              <a:gd name="p0y15" fmla="*/ 0 h 540"/>
-              <a:gd name="p0x16" fmla="*/ 120 w 540"/>
-              <a:gd name="p0y16" fmla="*/ 0 h 540"/>
-            </a:gdLst>
-            <a:pathLst>
-              <a:path w="0" h="0">
-                <a:moveTo>
-                  <a:pt x="0" y="0"/>
-                </a:moveTo>
-                <a:lnTo>
-                  <a:pt x="0" y="0"/>
-                </a:lnTo>
-                <a:cubicBezTo>
-                  <a:pt x="0" y="0"/>
-                  <a:pt x="0" y="0"/>
-                  <a:pt x="0" y="0"/>
-                </a:cubicBezTo>
-                <a:lnTo>
-                  <a:pt x="0" y="0"/>
-                </a:lnTo>
-                <a:cubicBezTo>
-                  <a:pt x="0" y="0"/>
-                  <a:pt x="0" y="0"/>
-                  <a:pt x="0" y="0"/>
-                </a:cubicBezTo>
-                <a:lnTo>
-                  <a:pt x="0" y="0"/>
-                </a:lnTo>
-                <a:cubicBezTo>
-                  <a:pt x="0" y="0"/>
-                  <a:pt x="0" y="0"/>
-                  <a:pt x="0" y="0"/>
-                </a:cubicBezTo>
-                <a:lnTo>
-                  <a:pt x="0" y="0"/>
-                </a:lnTo>
-                <a:cubicBezTo>
-                  <a:pt x="0" y="0"/>
-                  <a:pt x="0" y="0"/>
-                  <a:pt x="0" y="0"/>
-                </a:cubicBezTo>
-                <a:close/>
-              </a:path>
-            </a:pathLst>
-          </a:custGeom>
-          <a:solidFill xmlns:a="http://schemas.openxmlformats.org/drawingml/2006/main">
-            <a:schemeClr val="accent1">
-              <a:alpha val="16078"/>
-            </a:schemeClr>
-          </a:solidFill>
-          <a:ln xmlns:a="http://schemas.openxmlformats.org/drawingml/2006/main">
-            <a:noFill/>
-          </a:ln>
-        </p:spPr>
-        <p:style>
-          <a:lnRef xmlns:a="http://schemas.openxmlformats.org/drawingml/2006/main" idx="2">
-            <a:schemeClr val="accent1">
-              <a:lumMod val="75000"/>
-            </a:schemeClr>
-          </a:lnRef>
-          <a:fillRef xmlns:a="http://schemas.openxmlformats.org/drawingml/2006/main" idx="1">
-            <a:schemeClr val="accent1"/>
-          </a:fillRef>
-          <a:effectRef xmlns:a="http://schemas.openxmlformats.org/drawingml/2006/main" idx="0">
-            <a:srgbClr val="FFFFFF"/>
-          </a:effectRef>
-          <a:fontRef xmlns:a="http://schemas.openxmlformats.org/drawingml/2006/main" idx="minor">
-            <a:schemeClr val="lt1"/>
-          </a:fontRef>
-        </p:style>
-        <p:txBody>
-          <a:bodyPr xmlns:a="http://schemas.openxmlformats.org/drawingml/2006/main" anchor="ctr"/>
-          <a:lstStyle xmlns:a="http://schemas.openxmlformats.org/drawingml/2006/main"/>
-          <a:p xmlns:a="http://schemas.openxmlformats.org/drawingml/2006/main">
-            <a:pPr algn="ctr">
-              <a:buNone/>
-            </a:pPr>
-            <a:endParaRPr/>
-          </a:p>
-        </p:txBody>
-      </p:sp>
-      <p:sp>
-        <p:nvSpPr>
-          <p:cNvPr id="10" name="文本框 9">
-            <a:extLst xmlns:a="http://schemas.openxmlformats.org/drawingml/2006/main">
-              <a:ext uri="{FF2B5EF4-FFF2-40B4-BE49-F238E27FC236}">
-                <a16:creationId xmlns:a16="http://schemas.microsoft.com/office/drawing/2014/main" id="{963561B0-ED28-494D-8C9F-3EEA93C42813}"/>
-              </a:ext>
-            </a:extLst>
-          </p:cNvPr>
-          <p:cNvSpPr>
-            <a:spLocks xmlns:a="http://schemas.openxmlformats.org/drawingml/2006/main" noGrp="1"/>
-          </p:cNvSpPr>
-          <p:nvPr/>
-        </p:nvSpPr>
-        <p:spPr>
-          <a:xfrm xmlns:a="http://schemas.openxmlformats.org/drawingml/2006/main">
-            <a:off x="812159" y="2426313"/>
-            <a:ext cx="471116" cy="239078"/>
-          </a:xfrm>
-          <a:prstGeom xmlns:a="http://schemas.openxmlformats.org/drawingml/2006/main" prst="rect">
-            <a:avLst/>
-          </a:prstGeom>
-          <a:noFill xmlns:a="http://schemas.openxmlformats.org/drawingml/2006/main"/>
-        </p:spPr>
-        <p:txBody>
-          <a:bodyPr xmlns:a="http://schemas.openxmlformats.org/drawingml/2006/main" wrap="square" lIns="0" tIns="0" rIns="0" bIns="0" anchor="t">
-            <a:noAutofit/>
-          </a:bodyPr>
-          <a:lstStyle xmlns:a="http://schemas.openxmlformats.org/drawingml/2006/main"/>
-          <a:p xmlns:a="http://schemas.openxmlformats.org/drawingml/2006/main">
-            <a:pPr algn="l">
-              <a:lnSpc>
-                <a:spcPct val="83000"/>
-              </a:lnSpc>
-              <a:buNone/>
-            </a:pPr>
-            <a:r>
-              <a:rPr sz="1650" b="1">
-                <a:solidFill>
-                  <a:srgbClr val="AF753D"/>
-                </a:solidFill>
-                <a:latin typeface="Microsoft YaHei"/>
-                <a:ea typeface="Microsoft YaHei"/>
-                <a:cs typeface="Microsoft YaHei"/>
-              </a:rPr>
-              <a:t>02</a:t>
-            </a:r>
-            <a:endParaRPr sz="1650" b="1">
-              <a:solidFill>
-                <a:srgbClr val="AF753D"/>
-              </a:solidFill>
-              <a:latin typeface="Microsoft YaHei"/>
-              <a:ea typeface="Microsoft YaHei"/>
-              <a:cs typeface="Microsoft YaHei"/>
-            </a:endParaRPr>
-          </a:p>
-        </p:txBody>
-      </p:sp>
-      <p:sp>
-        <p:nvSpPr>
-          <p:cNvPr id="11" name="文本框 10">
-            <a:extLst xmlns:a="http://schemas.openxmlformats.org/drawingml/2006/main">
-              <a:ext uri="{FF2B5EF4-FFF2-40B4-BE49-F238E27FC236}">
-                <a16:creationId xmlns:a16="http://schemas.microsoft.com/office/drawing/2014/main" id="{1E84E92B-EBA6-4E57-80D9-DAA326EAF761}"/>
-              </a:ext>
-            </a:extLst>
-          </p:cNvPr>
-          <p:cNvSpPr>
-            <a:spLocks xmlns:a="http://schemas.openxmlformats.org/drawingml/2006/main" noGrp="1"/>
-          </p:cNvSpPr>
-          <p:nvPr/>
-        </p:nvSpPr>
-        <p:spPr>
-          <a:xfrm xmlns:a="http://schemas.openxmlformats.org/drawingml/2006/main">
-            <a:off x="1228725" y="2414883"/>
-            <a:ext cx="3619500" cy="261938"/>
-          </a:xfrm>
-          <a:prstGeom xmlns:a="http://schemas.openxmlformats.org/drawingml/2006/main" prst="rect">
-            <a:avLst/>
-          </a:prstGeom>
-          <a:noFill xmlns:a="http://schemas.openxmlformats.org/drawingml/2006/main"/>
-        </p:spPr>
-        <p:txBody>
-          <a:bodyPr xmlns:a="http://schemas.openxmlformats.org/drawingml/2006/main" wrap="square" lIns="0" tIns="0" rIns="0" bIns="0" anchor="t">
-            <a:noAutofit/>
-          </a:bodyPr>
-          <a:lstStyle xmlns:a="http://schemas.openxmlformats.org/drawingml/2006/main"/>
-          <a:p xmlns:a="http://schemas.openxmlformats.org/drawingml/2006/main">
-            <a:pPr algn="l">
-              <a:lnSpc>
-                <a:spcPct val="104000"/>
-              </a:lnSpc>
-              <a:buNone/>
-            </a:pPr>
-            <a:r>
-              <a:rPr sz="1500" b="1">
-                <a:solidFill>
-                  <a:schemeClr val="tx2">
-                    <a:lumMod val="4356"/>
-                    <a:lumOff val="95644"/>
-                  </a:schemeClr>
-                </a:solidFill>
-                <a:latin typeface="Microsoft YaHei"/>
-                <a:ea typeface="Microsoft YaHei"/>
-                <a:cs typeface="Microsoft YaHei"/>
-              </a:rPr>
-              <a:t>缺少品牌、型号、规格等检索词</a:t>
-            </a:r>
-            <a:endParaRPr sz="1500" b="1">
-              <a:solidFill>
-                <a:schemeClr val="tx2">
-                  <a:lumMod val="4356"/>
-                  <a:lumOff val="95644"/>
-                </a:schemeClr>
-              </a:solidFill>
-              <a:latin typeface="Microsoft YaHei"/>
-              <a:ea typeface="Microsoft YaHei"/>
-              <a:cs typeface="Microsoft YaHei"/>
-            </a:endParaRPr>
-          </a:p>
-        </p:txBody>
-      </p:sp>
-      <p:sp>
-        <p:nvSpPr>
-          <p:cNvPr id="12" name="任意多边形 11">
-            <a:extLst xmlns:a="http://schemas.openxmlformats.org/drawingml/2006/main">
-              <a:ext uri="{FF2B5EF4-FFF2-40B4-BE49-F238E27FC236}">
-                <a16:creationId xmlns:a16="http://schemas.microsoft.com/office/drawing/2014/main" id="{5DA6AA57-C9D3-4AB1-ACE8-F3110486FEA2}"/>
-              </a:ext>
-            </a:extLst>
-          </p:cNvPr>
-          <p:cNvSpPr>
-            <a:spLocks xmlns:a="http://schemas.openxmlformats.org/drawingml/2006/main" noGrp="1"/>
-          </p:cNvSpPr>
-          <p:nvPr/>
-        </p:nvSpPr>
-        <p:spPr>
-          <a:xfrm xmlns:a="http://schemas.openxmlformats.org/drawingml/2006/main">
-            <a:off x="771525" y="2917190"/>
-            <a:ext cx="342900" cy="342900"/>
-          </a:xfrm>
-          <a:custGeom xmlns:a="http://schemas.openxmlformats.org/drawingml/2006/main">
-            <a:gdLst>
-              <a:gd name="sw" fmla="*/ 1 w 540"/>
-              <a:gd name="sh" fmla="*/ 1 h 540"/>
-              <a:gd name="mins" fmla="min sw sh"/>
-              <a:gd name="dsw" fmla="+- 0 sw mins"/>
-              <a:gd name="dsh" fmla="+- 0 sh mins"/>
-              <a:gd name="p0x0" fmla="*/ 120 w 540"/>
-              <a:gd name="p0y0" fmla="*/ 0 h 540"/>
-              <a:gd name="p0x1" fmla="*/ 420 w 540"/>
-              <a:gd name="p0y1" fmla="*/ 0 h 540"/>
-              <a:gd name="p0x2" fmla="*/ 486 w 540"/>
-              <a:gd name="p0y2" fmla="*/ 0 h 540"/>
-              <a:gd name="p0x3" fmla="*/ 540 w 540"/>
-              <a:gd name="p0y3" fmla="*/ 53 h 540"/>
-              <a:gd name="p0x4" fmla="*/ 540 w 540"/>
-              <a:gd name="p0y4" fmla="*/ 120 h 540"/>
-              <a:gd name="p0x5" fmla="*/ 540 w 540"/>
-              <a:gd name="p0y5" fmla="*/ 420 h 540"/>
-              <a:gd name="p0x6" fmla="*/ 540 w 540"/>
-              <a:gd name="p0y6" fmla="*/ 486 h 540"/>
-              <a:gd name="p0x7" fmla="*/ 486 w 540"/>
-              <a:gd name="p0y7" fmla="*/ 540 h 540"/>
-              <a:gd name="p0x8" fmla="*/ 420 w 540"/>
-              <a:gd name="p0y8" fmla="*/ 540 h 540"/>
-              <a:gd name="p0x9" fmla="*/ 120 w 540"/>
-              <a:gd name="p0y9" fmla="*/ 540 h 540"/>
-              <a:gd name="p0x10" fmla="*/ 53 w 540"/>
-              <a:gd name="p0y10" fmla="*/ 540 h 540"/>
-              <a:gd name="p0x11" fmla="*/ 0 w 540"/>
-              <a:gd name="p0y11" fmla="*/ 486 h 540"/>
-              <a:gd name="p0x12" fmla="*/ 0 w 540"/>
-              <a:gd name="p0y12" fmla="*/ 420 h 540"/>
-              <a:gd name="p0x13" fmla="*/ 0 w 540"/>
-              <a:gd name="p0y13" fmla="*/ 120 h 540"/>
-              <a:gd name="p0x14" fmla="*/ 0 w 540"/>
-              <a:gd name="p0y14" fmla="*/ 53 h 540"/>
-              <a:gd name="p0x15" fmla="*/ 53 w 540"/>
-              <a:gd name="p0y15" fmla="*/ 0 h 540"/>
-              <a:gd name="p0x16" fmla="*/ 120 w 540"/>
-              <a:gd name="p0y16" fmla="*/ 0 h 540"/>
-            </a:gdLst>
-            <a:pathLst>
-              <a:path w="0" h="0">
-                <a:moveTo>
-                  <a:pt x="0" y="0"/>
-                </a:moveTo>
-                <a:lnTo>
-                  <a:pt x="0" y="0"/>
-                </a:lnTo>
-                <a:cubicBezTo>
-                  <a:pt x="0" y="0"/>
-                  <a:pt x="0" y="0"/>
-                  <a:pt x="0" y="0"/>
-                </a:cubicBezTo>
-                <a:lnTo>
-                  <a:pt x="0" y="0"/>
-                </a:lnTo>
-                <a:cubicBezTo>
-                  <a:pt x="0" y="0"/>
-                  <a:pt x="0" y="0"/>
-                  <a:pt x="0" y="0"/>
-                </a:cubicBezTo>
-                <a:lnTo>
-                  <a:pt x="0" y="0"/>
-                </a:lnTo>
-                <a:cubicBezTo>
-                  <a:pt x="0" y="0"/>
-                  <a:pt x="0" y="0"/>
-                  <a:pt x="0" y="0"/>
-                </a:cubicBezTo>
-                <a:lnTo>
-                  <a:pt x="0" y="0"/>
-                </a:lnTo>
-                <a:cubicBezTo>
-                  <a:pt x="0" y="0"/>
-                  <a:pt x="0" y="0"/>
-                  <a:pt x="0" y="0"/>
-                </a:cubicBezTo>
-                <a:close/>
-              </a:path>
-            </a:pathLst>
-          </a:custGeom>
-          <a:solidFill xmlns:a="http://schemas.openxmlformats.org/drawingml/2006/main">
-            <a:schemeClr val="accent1">
-              <a:alpha val="16078"/>
-            </a:schemeClr>
-          </a:solidFill>
-          <a:ln xmlns:a="http://schemas.openxmlformats.org/drawingml/2006/main">
-            <a:noFill/>
-          </a:ln>
-        </p:spPr>
-        <p:style>
-          <a:lnRef xmlns:a="http://schemas.openxmlformats.org/drawingml/2006/main" idx="2">
-            <a:schemeClr val="accent1">
-              <a:lumMod val="75000"/>
-            </a:schemeClr>
-          </a:lnRef>
-          <a:fillRef xmlns:a="http://schemas.openxmlformats.org/drawingml/2006/main" idx="1">
-            <a:schemeClr val="accent1"/>
-          </a:fillRef>
-          <a:effectRef xmlns:a="http://schemas.openxmlformats.org/drawingml/2006/main" idx="0">
-            <a:srgbClr val="FFFFFF"/>
-          </a:effectRef>
-          <a:fontRef xmlns:a="http://schemas.openxmlformats.org/drawingml/2006/main" idx="minor">
-            <a:schemeClr val="lt1"/>
-          </a:fontRef>
-        </p:style>
-        <p:txBody>
-          <a:bodyPr xmlns:a="http://schemas.openxmlformats.org/drawingml/2006/main" anchor="ctr"/>
-          <a:lstStyle xmlns:a="http://schemas.openxmlformats.org/drawingml/2006/main"/>
-          <a:p xmlns:a="http://schemas.openxmlformats.org/drawingml/2006/main">
-            <a:pPr algn="ctr">
-              <a:buNone/>
-            </a:pPr>
-            <a:endParaRPr/>
-          </a:p>
-        </p:txBody>
-      </p:sp>
-      <p:sp>
-        <p:nvSpPr>
-          <p:cNvPr id="13" name="文本框 12">
-            <a:extLst xmlns:a="http://schemas.openxmlformats.org/drawingml/2006/main">
-              <a:ext uri="{FF2B5EF4-FFF2-40B4-BE49-F238E27FC236}">
-                <a16:creationId xmlns:a16="http://schemas.microsoft.com/office/drawing/2014/main" id="{21568BDD-9B54-4DBE-A923-C8BA6A0FB8D2}"/>
-              </a:ext>
-            </a:extLst>
-          </p:cNvPr>
-          <p:cNvSpPr>
-            <a:spLocks xmlns:a="http://schemas.openxmlformats.org/drawingml/2006/main" noGrp="1"/>
-          </p:cNvSpPr>
-          <p:nvPr/>
-        </p:nvSpPr>
-        <p:spPr>
-          <a:xfrm xmlns:a="http://schemas.openxmlformats.org/drawingml/2006/main">
-            <a:off x="812159" y="2967009"/>
-            <a:ext cx="471116" cy="239078"/>
-          </a:xfrm>
-          <a:prstGeom xmlns:a="http://schemas.openxmlformats.org/drawingml/2006/main" prst="rect">
-            <a:avLst/>
-          </a:prstGeom>
-          <a:noFill xmlns:a="http://schemas.openxmlformats.org/drawingml/2006/main"/>
-        </p:spPr>
-        <p:txBody>
-          <a:bodyPr xmlns:a="http://schemas.openxmlformats.org/drawingml/2006/main" wrap="square" lIns="0" tIns="0" rIns="0" bIns="0" anchor="t">
-            <a:noAutofit/>
-          </a:bodyPr>
-          <a:lstStyle xmlns:a="http://schemas.openxmlformats.org/drawingml/2006/main"/>
-          <a:p xmlns:a="http://schemas.openxmlformats.org/drawingml/2006/main">
-            <a:pPr algn="l">
-              <a:lnSpc>
-                <a:spcPct val="83000"/>
-              </a:lnSpc>
-              <a:buNone/>
-            </a:pPr>
-            <a:r>
-              <a:rPr sz="1650" b="1">
-                <a:solidFill>
-                  <a:srgbClr val="AF753D"/>
-                </a:solidFill>
-                <a:latin typeface="Microsoft YaHei"/>
-                <a:ea typeface="Microsoft YaHei"/>
-                <a:cs typeface="Microsoft YaHei"/>
-              </a:rPr>
-              <a:t>03</a:t>
-            </a:r>
-            <a:endParaRPr sz="1650" b="1">
-              <a:solidFill>
-                <a:srgbClr val="AF753D"/>
-              </a:solidFill>
-              <a:latin typeface="Microsoft YaHei"/>
-              <a:ea typeface="Microsoft YaHei"/>
-              <a:cs typeface="Microsoft YaHei"/>
-            </a:endParaRPr>
-          </a:p>
-        </p:txBody>
-      </p:sp>
-      <p:sp>
-        <p:nvSpPr>
-          <p:cNvPr id="14" name="文本框 13">
-            <a:extLst xmlns:a="http://schemas.openxmlformats.org/drawingml/2006/main">
-              <a:ext uri="{FF2B5EF4-FFF2-40B4-BE49-F238E27FC236}">
-                <a16:creationId xmlns:a16="http://schemas.microsoft.com/office/drawing/2014/main" id="{BF519AB1-A2E3-4944-9D7E-F7145AED02FE}"/>
-              </a:ext>
-            </a:extLst>
-          </p:cNvPr>
-          <p:cNvSpPr>
-            <a:spLocks xmlns:a="http://schemas.openxmlformats.org/drawingml/2006/main" noGrp="1"/>
-          </p:cNvSpPr>
-          <p:nvPr/>
-        </p:nvSpPr>
-        <p:spPr>
-          <a:xfrm xmlns:a="http://schemas.openxmlformats.org/drawingml/2006/main">
-            <a:off x="1228725" y="2955579"/>
-            <a:ext cx="2667000" cy="261938"/>
-          </a:xfrm>
-          <a:prstGeom xmlns:a="http://schemas.openxmlformats.org/drawingml/2006/main" prst="rect">
-            <a:avLst/>
-          </a:prstGeom>
-          <a:noFill xmlns:a="http://schemas.openxmlformats.org/drawingml/2006/main"/>
-        </p:spPr>
-        <p:txBody>
-          <a:bodyPr xmlns:a="http://schemas.openxmlformats.org/drawingml/2006/main" wrap="square" lIns="0" tIns="0" rIns="0" bIns="0" anchor="t">
-            <a:noAutofit/>
-          </a:bodyPr>
-          <a:lstStyle xmlns:a="http://schemas.openxmlformats.org/drawingml/2006/main"/>
-          <a:p xmlns:a="http://schemas.openxmlformats.org/drawingml/2006/main">
-            <a:pPr algn="l">
-              <a:lnSpc>
-                <a:spcPct val="104000"/>
-              </a:lnSpc>
-              <a:buNone/>
-            </a:pPr>
-            <a:r>
-              <a:rPr sz="1500" b="1">
-                <a:solidFill>
-                  <a:schemeClr val="tx2">
-                    <a:lumMod val="4356"/>
-                    <a:lumOff val="95644"/>
-                  </a:schemeClr>
-                </a:solidFill>
-                <a:latin typeface="Microsoft YaHei"/>
-                <a:ea typeface="Microsoft YaHei"/>
-                <a:cs typeface="Microsoft YaHei"/>
-              </a:rPr>
-              <a:t>相似外观不能证明同款</a:t>
-            </a:r>
-            <a:endParaRPr sz="1500" b="1">
-              <a:solidFill>
-                <a:schemeClr val="tx2">
-                  <a:lumMod val="4356"/>
-                  <a:lumOff val="95644"/>
-                </a:schemeClr>
-              </a:solidFill>
-              <a:latin typeface="Microsoft YaHei"/>
-              <a:ea typeface="Microsoft YaHei"/>
-              <a:cs typeface="Microsoft YaHei"/>
-            </a:endParaRPr>
-          </a:p>
-        </p:txBody>
-      </p:sp>
-      <p:sp>
-        <p:nvSpPr>
-          <p:cNvPr id="15" name="任意多边形 14">
-            <a:extLst xmlns:a="http://schemas.openxmlformats.org/drawingml/2006/main">
-              <a:ext uri="{FF2B5EF4-FFF2-40B4-BE49-F238E27FC236}">
-                <a16:creationId xmlns:a16="http://schemas.microsoft.com/office/drawing/2014/main" id="{0D7EEADE-68C9-4078-8746-55C131365D44}"/>
-              </a:ext>
-            </a:extLst>
-          </p:cNvPr>
-          <p:cNvSpPr>
-            <a:spLocks xmlns:a="http://schemas.openxmlformats.org/drawingml/2006/main" noGrp="1"/>
-          </p:cNvSpPr>
-          <p:nvPr/>
-        </p:nvSpPr>
-        <p:spPr>
-          <a:xfrm xmlns:a="http://schemas.openxmlformats.org/drawingml/2006/main">
-            <a:off x="771525" y="3457575"/>
-            <a:ext cx="342900" cy="342900"/>
-          </a:xfrm>
-          <a:custGeom xmlns:a="http://schemas.openxmlformats.org/drawingml/2006/main">
-            <a:gdLst>
-              <a:gd name="sw" fmla="*/ 1 w 540"/>
-              <a:gd name="sh" fmla="*/ 1 h 540"/>
-              <a:gd name="mins" fmla="min sw sh"/>
-              <a:gd name="dsw" fmla="+- 0 sw mins"/>
-              <a:gd name="dsh" fmla="+- 0 sh mins"/>
-              <a:gd name="p0x0" fmla="*/ 120 w 540"/>
-              <a:gd name="p0y0" fmla="*/ 0 h 540"/>
-              <a:gd name="p0x1" fmla="*/ 420 w 540"/>
-              <a:gd name="p0y1" fmla="*/ 0 h 540"/>
-              <a:gd name="p0x2" fmla="*/ 486 w 540"/>
-              <a:gd name="p0y2" fmla="*/ 0 h 540"/>
-              <a:gd name="p0x3" fmla="*/ 540 w 540"/>
-              <a:gd name="p0y3" fmla="*/ 53 h 540"/>
-              <a:gd name="p0x4" fmla="*/ 540 w 540"/>
-              <a:gd name="p0y4" fmla="*/ 120 h 540"/>
-              <a:gd name="p0x5" fmla="*/ 540 w 540"/>
-              <a:gd name="p0y5" fmla="*/ 420 h 540"/>
-              <a:gd name="p0x6" fmla="*/ 540 w 540"/>
-              <a:gd name="p0y6" fmla="*/ 486 h 540"/>
-              <a:gd name="p0x7" fmla="*/ 486 w 540"/>
-              <a:gd name="p0y7" fmla="*/ 540 h 540"/>
-              <a:gd name="p0x8" fmla="*/ 420 w 540"/>
-              <a:gd name="p0y8" fmla="*/ 540 h 540"/>
-              <a:gd name="p0x9" fmla="*/ 120 w 540"/>
-              <a:gd name="p0y9" fmla="*/ 540 h 540"/>
-              <a:gd name="p0x10" fmla="*/ 53 w 540"/>
-              <a:gd name="p0y10" fmla="*/ 540 h 540"/>
-              <a:gd name="p0x11" fmla="*/ 0 w 540"/>
-              <a:gd name="p0y11" fmla="*/ 486 h 540"/>
-              <a:gd name="p0x12" fmla="*/ 0 w 540"/>
-              <a:gd name="p0y12" fmla="*/ 420 h 540"/>
-              <a:gd name="p0x13" fmla="*/ 0 w 540"/>
-              <a:gd name="p0y13" fmla="*/ 120 h 540"/>
-              <a:gd name="p0x14" fmla="*/ 0 w 540"/>
-              <a:gd name="p0y14" fmla="*/ 53 h 540"/>
-              <a:gd name="p0x15" fmla="*/ 53 w 540"/>
-              <a:gd name="p0y15" fmla="*/ 0 h 540"/>
-              <a:gd name="p0x16" fmla="*/ 120 w 540"/>
-              <a:gd name="p0y16" fmla="*/ 0 h 540"/>
-            </a:gdLst>
-            <a:pathLst>
-              <a:path w="0" h="0">
-                <a:moveTo>
-                  <a:pt x="0" y="0"/>
-                </a:moveTo>
-                <a:lnTo>
-                  <a:pt x="0" y="0"/>
-                </a:lnTo>
-                <a:cubicBezTo>
-                  <a:pt x="0" y="0"/>
-                  <a:pt x="0" y="0"/>
-                  <a:pt x="0" y="0"/>
-                </a:cubicBezTo>
-                <a:lnTo>
-                  <a:pt x="0" y="0"/>
-                </a:lnTo>
-                <a:cubicBezTo>
-                  <a:pt x="0" y="0"/>
-                  <a:pt x="0" y="0"/>
-                  <a:pt x="0" y="0"/>
-                </a:cubicBezTo>
-                <a:lnTo>
-                  <a:pt x="0" y="0"/>
-                </a:lnTo>
-                <a:cubicBezTo>
-                  <a:pt x="0" y="0"/>
-                  <a:pt x="0" y="0"/>
-                  <a:pt x="0" y="0"/>
-                </a:cubicBezTo>
-                <a:lnTo>
-                  <a:pt x="0" y="0"/>
-                </a:lnTo>
-                <a:cubicBezTo>
-                  <a:pt x="0" y="0"/>
-                  <a:pt x="0" y="0"/>
-                  <a:pt x="0" y="0"/>
-                </a:cubicBezTo>
-                <a:close/>
-              </a:path>
-            </a:pathLst>
-          </a:custGeom>
-          <a:solidFill xmlns:a="http://schemas.openxmlformats.org/drawingml/2006/main">
-            <a:schemeClr val="accent1">
-              <a:alpha val="16078"/>
-            </a:schemeClr>
-          </a:solidFill>
-          <a:ln xmlns:a="http://schemas.openxmlformats.org/drawingml/2006/main">
-            <a:noFill/>
-          </a:ln>
-        </p:spPr>
-        <p:style>
-          <a:lnRef xmlns:a="http://schemas.openxmlformats.org/drawingml/2006/main" idx="2">
-            <a:schemeClr val="accent1">
-              <a:lumMod val="75000"/>
-            </a:schemeClr>
-          </a:lnRef>
-          <a:fillRef xmlns:a="http://schemas.openxmlformats.org/drawingml/2006/main" idx="1">
-            <a:schemeClr val="accent1"/>
-          </a:fillRef>
-          <a:effectRef xmlns:a="http://schemas.openxmlformats.org/drawingml/2006/main" idx="0">
-            <a:srgbClr val="FFFFFF"/>
-          </a:effectRef>
-          <a:fontRef xmlns:a="http://schemas.openxmlformats.org/drawingml/2006/main" idx="minor">
-            <a:schemeClr val="lt1"/>
-          </a:fontRef>
-        </p:style>
-        <p:txBody>
-          <a:bodyPr xmlns:a="http://schemas.openxmlformats.org/drawingml/2006/main" anchor="ctr"/>
-          <a:lstStyle xmlns:a="http://schemas.openxmlformats.org/drawingml/2006/main"/>
-          <a:p xmlns:a="http://schemas.openxmlformats.org/drawingml/2006/main">
-            <a:pPr algn="ctr">
-              <a:buNone/>
-            </a:pPr>
-            <a:endParaRPr/>
-          </a:p>
-        </p:txBody>
-      </p:sp>
-      <p:sp>
-        <p:nvSpPr>
-          <p:cNvPr id="16" name="文本框 15">
-            <a:extLst xmlns:a="http://schemas.openxmlformats.org/drawingml/2006/main">
-              <a:ext uri="{FF2B5EF4-FFF2-40B4-BE49-F238E27FC236}">
-                <a16:creationId xmlns:a16="http://schemas.microsoft.com/office/drawing/2014/main" id="{C2FB8420-960F-4194-B059-8EA87F0F104F}"/>
-              </a:ext>
-            </a:extLst>
-          </p:cNvPr>
-          <p:cNvSpPr>
-            <a:spLocks xmlns:a="http://schemas.openxmlformats.org/drawingml/2006/main" noGrp="1"/>
-          </p:cNvSpPr>
-          <p:nvPr/>
-        </p:nvSpPr>
-        <p:spPr>
-          <a:xfrm xmlns:a="http://schemas.openxmlformats.org/drawingml/2006/main">
-            <a:off x="812159" y="3507705"/>
-            <a:ext cx="471116" cy="239078"/>
-          </a:xfrm>
-          <a:prstGeom xmlns:a="http://schemas.openxmlformats.org/drawingml/2006/main" prst="rect">
-            <a:avLst/>
-          </a:prstGeom>
-          <a:noFill xmlns:a="http://schemas.openxmlformats.org/drawingml/2006/main"/>
-        </p:spPr>
-        <p:txBody>
-          <a:bodyPr xmlns:a="http://schemas.openxmlformats.org/drawingml/2006/main" wrap="square" lIns="0" tIns="0" rIns="0" bIns="0" anchor="t">
-            <a:noAutofit/>
-          </a:bodyPr>
-          <a:lstStyle xmlns:a="http://schemas.openxmlformats.org/drawingml/2006/main"/>
-          <a:p xmlns:a="http://schemas.openxmlformats.org/drawingml/2006/main">
-            <a:pPr algn="l">
-              <a:lnSpc>
-                <a:spcPct val="83000"/>
-              </a:lnSpc>
-              <a:buNone/>
-            </a:pPr>
-            <a:r>
-              <a:rPr sz="1650" b="1">
-                <a:solidFill>
-                  <a:srgbClr val="AF753D"/>
-                </a:solidFill>
-                <a:latin typeface="Microsoft YaHei"/>
-                <a:ea typeface="Microsoft YaHei"/>
-                <a:cs typeface="Microsoft YaHei"/>
-              </a:rPr>
-              <a:t>04</a:t>
-            </a:r>
-            <a:endParaRPr sz="1650" b="1">
-              <a:solidFill>
-                <a:srgbClr val="AF753D"/>
-              </a:solidFill>
-              <a:latin typeface="Microsoft YaHei"/>
-              <a:ea typeface="Microsoft YaHei"/>
-              <a:cs typeface="Microsoft YaHei"/>
-            </a:endParaRPr>
-          </a:p>
-        </p:txBody>
-      </p:sp>
-      <p:sp>
-        <p:nvSpPr>
-          <p:cNvPr id="17" name="文本框 16">
-            <a:extLst xmlns:a="http://schemas.openxmlformats.org/drawingml/2006/main">
-              <a:ext uri="{FF2B5EF4-FFF2-40B4-BE49-F238E27FC236}">
-                <a16:creationId xmlns:a16="http://schemas.microsoft.com/office/drawing/2014/main" id="{76520457-C4BE-4CA2-91EF-8C5930A74156}"/>
-              </a:ext>
-            </a:extLst>
-          </p:cNvPr>
-          <p:cNvSpPr>
-            <a:spLocks xmlns:a="http://schemas.openxmlformats.org/drawingml/2006/main" noGrp="1"/>
-          </p:cNvSpPr>
-          <p:nvPr/>
-        </p:nvSpPr>
-        <p:spPr>
-          <a:xfrm xmlns:a="http://schemas.openxmlformats.org/drawingml/2006/main">
-            <a:off x="1228725" y="3496275"/>
-            <a:ext cx="4572000" cy="261938"/>
-          </a:xfrm>
-          <a:prstGeom xmlns:a="http://schemas.openxmlformats.org/drawingml/2006/main" prst="rect">
-            <a:avLst/>
-          </a:prstGeom>
-          <a:noFill xmlns:a="http://schemas.openxmlformats.org/drawingml/2006/main"/>
-        </p:spPr>
-        <p:txBody>
-          <a:bodyPr xmlns:a="http://schemas.openxmlformats.org/drawingml/2006/main" wrap="square" lIns="0" tIns="0" rIns="0" bIns="0" anchor="t">
-            <a:noAutofit/>
-          </a:bodyPr>
-          <a:lstStyle xmlns:a="http://schemas.openxmlformats.org/drawingml/2006/main"/>
-          <a:p xmlns:a="http://schemas.openxmlformats.org/drawingml/2006/main">
-            <a:pPr algn="l">
-              <a:lnSpc>
-                <a:spcPct val="104000"/>
-              </a:lnSpc>
-              <a:buNone/>
-            </a:pPr>
-            <a:r>
-              <a:rPr sz="1500" b="1">
-                <a:solidFill>
-                  <a:schemeClr val="tx2">
-                    <a:lumMod val="4356"/>
-                    <a:lumOff val="95644"/>
-                  </a:schemeClr>
-                </a:solidFill>
-                <a:latin typeface="Microsoft YaHei"/>
-                <a:ea typeface="Microsoft YaHei"/>
-                <a:cs typeface="Microsoft YaHei"/>
-              </a:rPr>
-              <a:t>对象不一致，价格比较就没有意义</a:t>
-            </a:r>
-            <a:endParaRPr sz="1500" b="1">
-              <a:solidFill>
-                <a:schemeClr val="tx2">
-                  <a:lumMod val="4356"/>
-                  <a:lumOff val="95644"/>
-                </a:schemeClr>
-              </a:solidFill>
-              <a:latin typeface="Microsoft YaHei"/>
-              <a:ea typeface="Microsoft YaHei"/>
-              <a:cs typeface="Microsoft YaHei"/>
-            </a:endParaRPr>
-          </a:p>
-        </p:txBody>
-      </p:sp>
-      <p:sp>
-        <p:nvSpPr>
-          <p:cNvPr id="18" name="任意多边形 17">
-            <a:extLst xmlns:a="http://schemas.openxmlformats.org/drawingml/2006/main">
-              <a:ext uri="{FF2B5EF4-FFF2-40B4-BE49-F238E27FC236}">
-                <a16:creationId xmlns:a16="http://schemas.microsoft.com/office/drawing/2014/main" id="{6380A6DB-D7A2-4D94-8F56-2B856087A254}"/>
-              </a:ext>
-            </a:extLst>
-          </p:cNvPr>
-          <p:cNvSpPr>
-            <a:spLocks xmlns:a="http://schemas.openxmlformats.org/drawingml/2006/main" noGrp="1"/>
-          </p:cNvSpPr>
-          <p:nvPr/>
-        </p:nvSpPr>
-        <p:spPr>
-          <a:xfrm xmlns:a="http://schemas.openxmlformats.org/drawingml/2006/main">
-            <a:off x="771525" y="3998595"/>
-            <a:ext cx="342900" cy="342900"/>
-          </a:xfrm>
-          <a:custGeom xmlns:a="http://schemas.openxmlformats.org/drawingml/2006/main">
-            <a:gdLst>
-              <a:gd name="sw" fmla="*/ 1 w 540"/>
-              <a:gd name="sh" fmla="*/ 1 h 540"/>
-              <a:gd name="mins" fmla="min sw sh"/>
-              <a:gd name="dsw" fmla="+- 0 sw mins"/>
-              <a:gd name="dsh" fmla="+- 0 sh mins"/>
-              <a:gd name="p0x0" fmla="*/ 120 w 540"/>
-              <a:gd name="p0y0" fmla="*/ 0 h 540"/>
-              <a:gd name="p0x1" fmla="*/ 420 w 540"/>
-              <a:gd name="p0y1" fmla="*/ 0 h 540"/>
-              <a:gd name="p0x2" fmla="*/ 486 w 540"/>
-              <a:gd name="p0y2" fmla="*/ 0 h 540"/>
-              <a:gd name="p0x3" fmla="*/ 540 w 540"/>
-              <a:gd name="p0y3" fmla="*/ 53 h 540"/>
-              <a:gd name="p0x4" fmla="*/ 540 w 540"/>
-              <a:gd name="p0y4" fmla="*/ 120 h 540"/>
-              <a:gd name="p0x5" fmla="*/ 540 w 540"/>
-              <a:gd name="p0y5" fmla="*/ 420 h 540"/>
-              <a:gd name="p0x6" fmla="*/ 540 w 540"/>
-              <a:gd name="p0y6" fmla="*/ 486 h 540"/>
-              <a:gd name="p0x7" fmla="*/ 486 w 540"/>
-              <a:gd name="p0y7" fmla="*/ 540 h 540"/>
-              <a:gd name="p0x8" fmla="*/ 420 w 540"/>
-              <a:gd name="p0y8" fmla="*/ 540 h 540"/>
-              <a:gd name="p0x9" fmla="*/ 120 w 540"/>
-              <a:gd name="p0y9" fmla="*/ 540 h 540"/>
-              <a:gd name="p0x10" fmla="*/ 53 w 540"/>
-              <a:gd name="p0y10" fmla="*/ 540 h 540"/>
-              <a:gd name="p0x11" fmla="*/ 0 w 540"/>
-              <a:gd name="p0y11" fmla="*/ 486 h 540"/>
-              <a:gd name="p0x12" fmla="*/ 0 w 540"/>
-              <a:gd name="p0y12" fmla="*/ 420 h 540"/>
-              <a:gd name="p0x13" fmla="*/ 0 w 540"/>
-              <a:gd name="p0y13" fmla="*/ 120 h 540"/>
-              <a:gd name="p0x14" fmla="*/ 0 w 540"/>
-              <a:gd name="p0y14" fmla="*/ 53 h 540"/>
-              <a:gd name="p0x15" fmla="*/ 53 w 540"/>
-              <a:gd name="p0y15" fmla="*/ 0 h 540"/>
-              <a:gd name="p0x16" fmla="*/ 120 w 540"/>
-              <a:gd name="p0y16" fmla="*/ 0 h 540"/>
-            </a:gdLst>
-            <a:pathLst>
-              <a:path w="0" h="0">
-                <a:moveTo>
-                  <a:pt x="0" y="0"/>
-                </a:moveTo>
-                <a:lnTo>
-                  <a:pt x="0" y="0"/>
-                </a:lnTo>
-                <a:cubicBezTo>
-                  <a:pt x="0" y="0"/>
-                  <a:pt x="0" y="0"/>
-                  <a:pt x="0" y="0"/>
-                </a:cubicBezTo>
-                <a:lnTo>
-                  <a:pt x="0" y="0"/>
-                </a:lnTo>
-                <a:cubicBezTo>
-                  <a:pt x="0" y="0"/>
-                  <a:pt x="0" y="0"/>
-                  <a:pt x="0" y="0"/>
-                </a:cubicBezTo>
-                <a:lnTo>
-                  <a:pt x="0" y="0"/>
-                </a:lnTo>
-                <a:cubicBezTo>
-                  <a:pt x="0" y="0"/>
-                  <a:pt x="0" y="0"/>
-                  <a:pt x="0" y="0"/>
-                </a:cubicBezTo>
-                <a:lnTo>
-                  <a:pt x="0" y="0"/>
-                </a:lnTo>
-                <a:cubicBezTo>
-                  <a:pt x="0" y="0"/>
-                  <a:pt x="0" y="0"/>
-                  <a:pt x="0" y="0"/>
-                </a:cubicBezTo>
-                <a:close/>
-              </a:path>
-            </a:pathLst>
-          </a:custGeom>
-          <a:solidFill xmlns:a="http://schemas.openxmlformats.org/drawingml/2006/main">
-            <a:schemeClr val="accent1">
-              <a:alpha val="16078"/>
-            </a:schemeClr>
-          </a:solidFill>
-          <a:ln xmlns:a="http://schemas.openxmlformats.org/drawingml/2006/main">
-            <a:noFill/>
-          </a:ln>
-        </p:spPr>
-        <p:style>
-          <a:lnRef xmlns:a="http://schemas.openxmlformats.org/drawingml/2006/main" idx="2">
-            <a:schemeClr val="accent1">
-              <a:lumMod val="75000"/>
-            </a:schemeClr>
-          </a:lnRef>
-          <a:fillRef xmlns:a="http://schemas.openxmlformats.org/drawingml/2006/main" idx="1">
-            <a:schemeClr val="accent1"/>
-          </a:fillRef>
-          <a:effectRef xmlns:a="http://schemas.openxmlformats.org/drawingml/2006/main" idx="0">
-            <a:srgbClr val="FFFFFF"/>
-          </a:effectRef>
-          <a:fontRef xmlns:a="http://schemas.openxmlformats.org/drawingml/2006/main" idx="minor">
-            <a:schemeClr val="lt1"/>
-          </a:fontRef>
-        </p:style>
-        <p:txBody>
-          <a:bodyPr xmlns:a="http://schemas.openxmlformats.org/drawingml/2006/main" anchor="ctr"/>
-          <a:lstStyle xmlns:a="http://schemas.openxmlformats.org/drawingml/2006/main"/>
-          <a:p xmlns:a="http://schemas.openxmlformats.org/drawingml/2006/main">
-            <a:pPr algn="ctr">
-              <a:buNone/>
-            </a:pPr>
-            <a:endParaRPr/>
-          </a:p>
-        </p:txBody>
-      </p:sp>
-      <p:sp>
-        <p:nvSpPr>
-          <p:cNvPr id="19" name="文本框 18">
-            <a:extLst xmlns:a="http://schemas.openxmlformats.org/drawingml/2006/main">
-              <a:ext uri="{FF2B5EF4-FFF2-40B4-BE49-F238E27FC236}">
-                <a16:creationId xmlns:a16="http://schemas.microsoft.com/office/drawing/2014/main" id="{04203D71-4CFC-44DF-86A3-C94FFE35255A}"/>
-              </a:ext>
-            </a:extLst>
-          </p:cNvPr>
-          <p:cNvSpPr>
-            <a:spLocks xmlns:a="http://schemas.openxmlformats.org/drawingml/2006/main" noGrp="1"/>
-          </p:cNvSpPr>
-          <p:nvPr/>
-        </p:nvSpPr>
-        <p:spPr>
-          <a:xfrm xmlns:a="http://schemas.openxmlformats.org/drawingml/2006/main">
-            <a:off x="812159" y="4048392"/>
-            <a:ext cx="471116" cy="239078"/>
-          </a:xfrm>
-          <a:prstGeom xmlns:a="http://schemas.openxmlformats.org/drawingml/2006/main" prst="rect">
-            <a:avLst/>
-          </a:prstGeom>
-          <a:noFill xmlns:a="http://schemas.openxmlformats.org/drawingml/2006/main"/>
-        </p:spPr>
-        <p:txBody>
-          <a:bodyPr xmlns:a="http://schemas.openxmlformats.org/drawingml/2006/main" wrap="square" lIns="0" tIns="0" rIns="0" bIns="0" anchor="t">
-            <a:noAutofit/>
-          </a:bodyPr>
-          <a:lstStyle xmlns:a="http://schemas.openxmlformats.org/drawingml/2006/main"/>
-          <a:p xmlns:a="http://schemas.openxmlformats.org/drawingml/2006/main">
-            <a:pPr algn="l">
-              <a:lnSpc>
-                <a:spcPct val="83000"/>
-              </a:lnSpc>
-              <a:buNone/>
-            </a:pPr>
-            <a:r>
-              <a:rPr sz="1650" b="1">
-                <a:solidFill>
-                  <a:srgbClr val="AF753D"/>
-                </a:solidFill>
-                <a:latin typeface="Microsoft YaHei"/>
-                <a:ea typeface="Microsoft YaHei"/>
-                <a:cs typeface="Microsoft YaHei"/>
-              </a:rPr>
-              <a:t>05</a:t>
-            </a:r>
-            <a:endParaRPr sz="1650" b="1">
-              <a:solidFill>
-                <a:srgbClr val="AF753D"/>
-              </a:solidFill>
-              <a:latin typeface="Microsoft YaHei"/>
-              <a:ea typeface="Microsoft YaHei"/>
-              <a:cs typeface="Microsoft YaHei"/>
-            </a:endParaRPr>
-          </a:p>
-        </p:txBody>
-      </p:sp>
-      <p:sp>
-        <p:nvSpPr>
-          <p:cNvPr id="20" name="文本框 19">
-            <a:extLst xmlns:a="http://schemas.openxmlformats.org/drawingml/2006/main">
-              <a:ext uri="{FF2B5EF4-FFF2-40B4-BE49-F238E27FC236}">
-                <a16:creationId xmlns:a16="http://schemas.microsoft.com/office/drawing/2014/main" id="{229F6069-1012-48E7-B766-A7B8CCDAF6BC}"/>
-              </a:ext>
-            </a:extLst>
-          </p:cNvPr>
-          <p:cNvSpPr>
-            <a:spLocks xmlns:a="http://schemas.openxmlformats.org/drawingml/2006/main" noGrp="1"/>
-          </p:cNvSpPr>
-          <p:nvPr/>
-        </p:nvSpPr>
-        <p:spPr>
-          <a:xfrm xmlns:a="http://schemas.openxmlformats.org/drawingml/2006/main">
-            <a:off x="1228725" y="4036962"/>
-            <a:ext cx="2286000" cy="261938"/>
-          </a:xfrm>
-          <a:prstGeom xmlns:a="http://schemas.openxmlformats.org/drawingml/2006/main" prst="rect">
-            <a:avLst/>
-          </a:prstGeom>
-          <a:noFill xmlns:a="http://schemas.openxmlformats.org/drawingml/2006/main"/>
-        </p:spPr>
-        <p:txBody>
-          <a:bodyPr xmlns:a="http://schemas.openxmlformats.org/drawingml/2006/main" wrap="square" lIns="0" tIns="0" rIns="0" bIns="0" anchor="t">
-            <a:noAutofit/>
-          </a:bodyPr>
-          <a:lstStyle xmlns:a="http://schemas.openxmlformats.org/drawingml/2006/main"/>
-          <a:p xmlns:a="http://schemas.openxmlformats.org/drawingml/2006/main">
-            <a:pPr algn="l">
-              <a:lnSpc>
-                <a:spcPct val="104000"/>
-              </a:lnSpc>
-              <a:buNone/>
-            </a:pPr>
-            <a:r>
-              <a:rPr sz="1500" b="1">
-                <a:solidFill>
-                  <a:schemeClr val="tx2">
-                    <a:lumMod val="4356"/>
-                    <a:lumOff val="95644"/>
-                  </a:schemeClr>
-                </a:solidFill>
-                <a:latin typeface="Microsoft YaHei"/>
-                <a:ea typeface="Microsoft YaHei"/>
-                <a:cs typeface="Microsoft YaHei"/>
-              </a:rPr>
-              <a:t>低价可能来自不同 SKU</a:t>
-            </a:r>
-            <a:endParaRPr sz="1500" b="1">
-              <a:solidFill>
-                <a:schemeClr val="tx2">
-                  <a:lumMod val="4356"/>
-                  <a:lumOff val="95644"/>
-                </a:schemeClr>
-              </a:solidFill>
-              <a:latin typeface="Microsoft YaHei"/>
-              <a:ea typeface="Microsoft YaHei"/>
-              <a:cs typeface="Microsoft YaHei"/>
-            </a:endParaRPr>
-          </a:p>
-        </p:txBody>
-      </p:sp>
-      <p:sp>
-        <p:nvSpPr>
-          <p:cNvPr id="21" name="任意多边形 20">
-            <a:extLst xmlns:a="http://schemas.openxmlformats.org/drawingml/2006/main">
-              <a:ext uri="{FF2B5EF4-FFF2-40B4-BE49-F238E27FC236}">
-                <a16:creationId xmlns:a16="http://schemas.microsoft.com/office/drawing/2014/main" id="{E5E0320B-5C68-49D7-9D07-666D0C53A214}"/>
-              </a:ext>
-            </a:extLst>
-          </p:cNvPr>
-          <p:cNvSpPr>
-            <a:spLocks xmlns:a="http://schemas.openxmlformats.org/drawingml/2006/main" noGrp="1"/>
-          </p:cNvSpPr>
-          <p:nvPr/>
-        </p:nvSpPr>
-        <p:spPr>
-          <a:xfrm xmlns:a="http://schemas.openxmlformats.org/drawingml/2006/main">
-            <a:off x="771525" y="4538980"/>
-            <a:ext cx="342900" cy="342900"/>
-          </a:xfrm>
-          <a:custGeom xmlns:a="http://schemas.openxmlformats.org/drawingml/2006/main">
-            <a:gdLst>
-              <a:gd name="sw" fmla="*/ 1 w 540"/>
-              <a:gd name="sh" fmla="*/ 1 h 540"/>
-              <a:gd name="mins" fmla="min sw sh"/>
-              <a:gd name="dsw" fmla="+- 0 sw mins"/>
-              <a:gd name="dsh" fmla="+- 0 sh mins"/>
-              <a:gd name="p0x0" fmla="*/ 120 w 540"/>
-              <a:gd name="p0y0" fmla="*/ 0 h 540"/>
-              <a:gd name="p0x1" fmla="*/ 420 w 540"/>
-              <a:gd name="p0y1" fmla="*/ 0 h 540"/>
-              <a:gd name="p0x2" fmla="*/ 486 w 540"/>
-              <a:gd name="p0y2" fmla="*/ 0 h 540"/>
-              <a:gd name="p0x3" fmla="*/ 540 w 540"/>
-              <a:gd name="p0y3" fmla="*/ 53 h 540"/>
-              <a:gd name="p0x4" fmla="*/ 540 w 540"/>
-              <a:gd name="p0y4" fmla="*/ 120 h 540"/>
-              <a:gd name="p0x5" fmla="*/ 540 w 540"/>
-              <a:gd name="p0y5" fmla="*/ 420 h 540"/>
-              <a:gd name="p0x6" fmla="*/ 540 w 540"/>
-              <a:gd name="p0y6" fmla="*/ 486 h 540"/>
-              <a:gd name="p0x7" fmla="*/ 486 w 540"/>
-              <a:gd name="p0y7" fmla="*/ 540 h 540"/>
-              <a:gd name="p0x8" fmla="*/ 420 w 540"/>
-              <a:gd name="p0y8" fmla="*/ 540 h 540"/>
-              <a:gd name="p0x9" fmla="*/ 120 w 540"/>
-              <a:gd name="p0y9" fmla="*/ 540 h 540"/>
-              <a:gd name="p0x10" fmla="*/ 53 w 540"/>
-              <a:gd name="p0y10" fmla="*/ 540 h 540"/>
-              <a:gd name="p0x11" fmla="*/ 0 w 540"/>
-              <a:gd name="p0y11" fmla="*/ 486 h 540"/>
-              <a:gd name="p0x12" fmla="*/ 0 w 540"/>
-              <a:gd name="p0y12" fmla="*/ 420 h 540"/>
-              <a:gd name="p0x13" fmla="*/ 0 w 540"/>
-              <a:gd name="p0y13" fmla="*/ 120 h 540"/>
-              <a:gd name="p0x14" fmla="*/ 0 w 540"/>
-              <a:gd name="p0y14" fmla="*/ 53 h 540"/>
-              <a:gd name="p0x15" fmla="*/ 53 w 540"/>
-              <a:gd name="p0y15" fmla="*/ 0 h 540"/>
-              <a:gd name="p0x16" fmla="*/ 120 w 540"/>
-              <a:gd name="p0y16" fmla="*/ 0 h 540"/>
-            </a:gdLst>
-            <a:pathLst>
-              <a:path w="0" h="0">
-                <a:moveTo>
-                  <a:pt x="0" y="0"/>
-                </a:moveTo>
-                <a:lnTo>
-                  <a:pt x="0" y="0"/>
-                </a:lnTo>
-                <a:cubicBezTo>
-                  <a:pt x="0" y="0"/>
-                  <a:pt x="0" y="0"/>
-                  <a:pt x="0" y="0"/>
-                </a:cubicBezTo>
-                <a:lnTo>
-                  <a:pt x="0" y="0"/>
-                </a:lnTo>
-                <a:cubicBezTo>
-                  <a:pt x="0" y="0"/>
-                  <a:pt x="0" y="0"/>
-                  <a:pt x="0" y="0"/>
-                </a:cubicBezTo>
-                <a:lnTo>
-                  <a:pt x="0" y="0"/>
-                </a:lnTo>
-                <a:cubicBezTo>
-                  <a:pt x="0" y="0"/>
-                  <a:pt x="0" y="0"/>
-                  <a:pt x="0" y="0"/>
-                </a:cubicBezTo>
-                <a:lnTo>
-                  <a:pt x="0" y="0"/>
-                </a:lnTo>
-                <a:cubicBezTo>
-                  <a:pt x="0" y="0"/>
-                  <a:pt x="0" y="0"/>
-                  <a:pt x="0" y="0"/>
-                </a:cubicBezTo>
-                <a:close/>
-              </a:path>
-            </a:pathLst>
-          </a:custGeom>
-          <a:solidFill xmlns:a="http://schemas.openxmlformats.org/drawingml/2006/main">
-            <a:schemeClr val="accent1">
-              <a:alpha val="16078"/>
-            </a:schemeClr>
-          </a:solidFill>
-          <a:ln xmlns:a="http://schemas.openxmlformats.org/drawingml/2006/main">
-            <a:noFill/>
-          </a:ln>
-        </p:spPr>
-        <p:style>
-          <a:lnRef xmlns:a="http://schemas.openxmlformats.org/drawingml/2006/main" idx="2">
-            <a:schemeClr val="accent1">
-              <a:lumMod val="75000"/>
-            </a:schemeClr>
-          </a:lnRef>
-          <a:fillRef xmlns:a="http://schemas.openxmlformats.org/drawingml/2006/main" idx="1">
-            <a:schemeClr val="accent1"/>
-          </a:fillRef>
-          <a:effectRef xmlns:a="http://schemas.openxmlformats.org/drawingml/2006/main" idx="0">
-            <a:srgbClr val="FFFFFF"/>
-          </a:effectRef>
-          <a:fontRef xmlns:a="http://schemas.openxmlformats.org/drawingml/2006/main" idx="minor">
-            <a:schemeClr val="lt1"/>
-          </a:fontRef>
-        </p:style>
-        <p:txBody>
-          <a:bodyPr xmlns:a="http://schemas.openxmlformats.org/drawingml/2006/main" anchor="ctr"/>
-          <a:lstStyle xmlns:a="http://schemas.openxmlformats.org/drawingml/2006/main"/>
-          <a:p xmlns:a="http://schemas.openxmlformats.org/drawingml/2006/main">
-            <a:pPr algn="ctr">
-              <a:buNone/>
-            </a:pPr>
-            <a:endParaRPr/>
-          </a:p>
-        </p:txBody>
-      </p:sp>
-      <p:sp>
-        <p:nvSpPr>
-          <p:cNvPr id="22" name="文本框 21">
-            <a:extLst xmlns:a="http://schemas.openxmlformats.org/drawingml/2006/main">
-              <a:ext uri="{FF2B5EF4-FFF2-40B4-BE49-F238E27FC236}">
-                <a16:creationId xmlns:a16="http://schemas.microsoft.com/office/drawing/2014/main" id="{7EA51F42-7EF7-4019-B703-23280DE3CE81}"/>
-              </a:ext>
-            </a:extLst>
-          </p:cNvPr>
-          <p:cNvSpPr>
-            <a:spLocks xmlns:a="http://schemas.openxmlformats.org/drawingml/2006/main" noGrp="1"/>
-          </p:cNvSpPr>
-          <p:nvPr/>
-        </p:nvSpPr>
-        <p:spPr>
-          <a:xfrm xmlns:a="http://schemas.openxmlformats.org/drawingml/2006/main">
-            <a:off x="812159" y="4589088"/>
-            <a:ext cx="471116" cy="239078"/>
-          </a:xfrm>
-          <a:prstGeom xmlns:a="http://schemas.openxmlformats.org/drawingml/2006/main" prst="rect">
-            <a:avLst/>
-          </a:prstGeom>
-          <a:noFill xmlns:a="http://schemas.openxmlformats.org/drawingml/2006/main"/>
-        </p:spPr>
-        <p:txBody>
-          <a:bodyPr xmlns:a="http://schemas.openxmlformats.org/drawingml/2006/main" wrap="square" lIns="0" tIns="0" rIns="0" bIns="0" anchor="t">
-            <a:noAutofit/>
-          </a:bodyPr>
-          <a:lstStyle xmlns:a="http://schemas.openxmlformats.org/drawingml/2006/main"/>
-          <a:p xmlns:a="http://schemas.openxmlformats.org/drawingml/2006/main">
-            <a:pPr algn="l">
-              <a:lnSpc>
-                <a:spcPct val="83000"/>
-              </a:lnSpc>
-              <a:buNone/>
-            </a:pPr>
-            <a:r>
-              <a:rPr sz="1650" b="1">
-                <a:solidFill>
-                  <a:srgbClr val="AF753D"/>
-                </a:solidFill>
-                <a:latin typeface="Microsoft YaHei"/>
-                <a:ea typeface="Microsoft YaHei"/>
-                <a:cs typeface="Microsoft YaHei"/>
-              </a:rPr>
-              <a:t>06</a:t>
-            </a:r>
-            <a:endParaRPr sz="1650" b="1">
-              <a:solidFill>
-                <a:srgbClr val="AF753D"/>
-              </a:solidFill>
-              <a:latin typeface="Microsoft YaHei"/>
-              <a:ea typeface="Microsoft YaHei"/>
-              <a:cs typeface="Microsoft YaHei"/>
-            </a:endParaRPr>
-          </a:p>
-        </p:txBody>
-      </p:sp>
-      <p:sp>
-        <p:nvSpPr>
-          <p:cNvPr id="23" name="文本框 22">
-            <a:extLst xmlns:a="http://schemas.openxmlformats.org/drawingml/2006/main">
-              <a:ext uri="{FF2B5EF4-FFF2-40B4-BE49-F238E27FC236}">
-                <a16:creationId xmlns:a16="http://schemas.microsoft.com/office/drawing/2014/main" id="{D6B3F36E-1BCE-4DD3-97F0-04303910E6A8}"/>
-              </a:ext>
-            </a:extLst>
-          </p:cNvPr>
-          <p:cNvSpPr>
-            <a:spLocks xmlns:a="http://schemas.openxmlformats.org/drawingml/2006/main" noGrp="1"/>
-          </p:cNvSpPr>
-          <p:nvPr/>
-        </p:nvSpPr>
-        <p:spPr>
-          <a:xfrm xmlns:a="http://schemas.openxmlformats.org/drawingml/2006/main">
-            <a:off x="1228725" y="4577658"/>
-            <a:ext cx="2857500" cy="261938"/>
-          </a:xfrm>
-          <a:prstGeom xmlns:a="http://schemas.openxmlformats.org/drawingml/2006/main" prst="rect">
-            <a:avLst/>
-          </a:prstGeom>
-          <a:noFill xmlns:a="http://schemas.openxmlformats.org/drawingml/2006/main"/>
-        </p:spPr>
-        <p:txBody>
-          <a:bodyPr xmlns:a="http://schemas.openxmlformats.org/drawingml/2006/main" wrap="square" lIns="0" tIns="0" rIns="0" bIns="0" anchor="t">
-            <a:noAutofit/>
-          </a:bodyPr>
-          <a:lstStyle xmlns:a="http://schemas.openxmlformats.org/drawingml/2006/main"/>
-          <a:p xmlns:a="http://schemas.openxmlformats.org/drawingml/2006/main">
-            <a:pPr algn="l">
-              <a:lnSpc>
-                <a:spcPct val="104000"/>
-              </a:lnSpc>
-              <a:buNone/>
-            </a:pPr>
-            <a:r>
-              <a:rPr sz="1500" b="1">
-                <a:solidFill>
-                  <a:schemeClr val="tx2">
-                    <a:lumMod val="4356"/>
-                    <a:lumOff val="95644"/>
-                  </a:schemeClr>
-                </a:solidFill>
-                <a:latin typeface="Microsoft YaHei"/>
-                <a:ea typeface="Microsoft YaHei"/>
-                <a:cs typeface="Microsoft YaHei"/>
-              </a:rPr>
-              <a:t>推荐必须给出可核验依据</a:t>
-            </a:r>
-            <a:endParaRPr sz="1500" b="1">
-              <a:solidFill>
-                <a:schemeClr val="tx2">
-                  <a:lumMod val="4356"/>
-                  <a:lumOff val="95644"/>
-                </a:schemeClr>
-              </a:solidFill>
-              <a:latin typeface="Microsoft YaHei"/>
-              <a:ea typeface="Microsoft YaHei"/>
-              <a:cs typeface="Microsoft YaHei"/>
-            </a:endParaRPr>
-          </a:p>
-        </p:txBody>
-      </p:sp>
-      <p:sp>
-        <p:nvSpPr>
-          <p:cNvPr id="24" name="任意多边形 23">
-            <a:extLst xmlns:a="http://schemas.openxmlformats.org/drawingml/2006/main">
-              <a:ext uri="{FF2B5EF4-FFF2-40B4-BE49-F238E27FC236}">
-                <a16:creationId xmlns:a16="http://schemas.microsoft.com/office/drawing/2014/main" id="{9A790A62-E182-4022-BB32-82B501AF7E4C}"/>
-              </a:ext>
-            </a:extLst>
-          </p:cNvPr>
-          <p:cNvSpPr>
-            <a:spLocks xmlns:a="http://schemas.openxmlformats.org/drawingml/2006/main" noGrp="1"/>
-          </p:cNvSpPr>
-          <p:nvPr/>
-        </p:nvSpPr>
-        <p:spPr>
-          <a:xfrm xmlns:a="http://schemas.openxmlformats.org/drawingml/2006/main">
-            <a:off x="6214745" y="1109345"/>
-            <a:ext cx="5400675" cy="4090035"/>
-          </a:xfrm>
-          <a:custGeom xmlns:a="http://schemas.openxmlformats.org/drawingml/2006/main">
-            <a:gdLst>
-              <a:gd name="sw" fmla="*/ 1 w 8505"/>
-              <a:gd name="sh" fmla="*/ 1 h 6440"/>
-              <a:gd name="mins" fmla="min sw sh"/>
-              <a:gd name="dsw" fmla="+- 0 sw mins"/>
-              <a:gd name="dsh" fmla="+- 0 sh mins"/>
-              <a:gd name="p0x0" fmla="*/ 120 w 8505"/>
-              <a:gd name="p0y0" fmla="*/ 0 h 6440"/>
-              <a:gd name="p0x1" fmla="*/ 8385 w 8505"/>
-              <a:gd name="p0y1" fmla="*/ 0 h 6440"/>
-              <a:gd name="p0x2" fmla="*/ 8451 w 8505"/>
-              <a:gd name="p0y2" fmla="*/ 0 h 6440"/>
-              <a:gd name="p0x3" fmla="*/ 8505 w 8505"/>
-              <a:gd name="p0y3" fmla="*/ 53 h 6440"/>
-              <a:gd name="p0x4" fmla="*/ 8505 w 8505"/>
-              <a:gd name="p0y4" fmla="*/ 120 h 6440"/>
-              <a:gd name="p0x5" fmla="*/ 8505 w 8505"/>
-              <a:gd name="p0y5" fmla="*/ 6320 h 6440"/>
-              <a:gd name="p0x6" fmla="*/ 8505 w 8505"/>
-              <a:gd name="p0y6" fmla="*/ 6387 h 6440"/>
-              <a:gd name="p0x7" fmla="*/ 8451 w 8505"/>
-              <a:gd name="p0y7" fmla="*/ 6440 h 6440"/>
-              <a:gd name="p0x8" fmla="*/ 8385 w 8505"/>
-              <a:gd name="p0y8" fmla="*/ 6440 h 6440"/>
-              <a:gd name="p0x9" fmla="*/ 120 w 8505"/>
-              <a:gd name="p0y9" fmla="*/ 6440 h 6440"/>
-              <a:gd name="p0x10" fmla="*/ 53 w 8505"/>
-              <a:gd name="p0y10" fmla="*/ 6440 h 6440"/>
-              <a:gd name="p0x11" fmla="*/ 0 w 8505"/>
-              <a:gd name="p0y11" fmla="*/ 6387 h 6440"/>
-              <a:gd name="p0x12" fmla="*/ 0 w 8505"/>
-              <a:gd name="p0y12" fmla="*/ 6320 h 6440"/>
-              <a:gd name="p0x13" fmla="*/ 0 w 8505"/>
-              <a:gd name="p0y13" fmla="*/ 120 h 6440"/>
-              <a:gd name="p0x14" fmla="*/ 0 w 8505"/>
-              <a:gd name="p0y14" fmla="*/ 53 h 6440"/>
-              <a:gd name="p0x15" fmla="*/ 53 w 8505"/>
-              <a:gd name="p0y15" fmla="*/ 0 h 6440"/>
-              <a:gd name="p0x16" fmla="*/ 120 w 8505"/>
-              <a:gd name="p0y16" fmla="*/ 0 h 6440"/>
-            </a:gdLst>
-            <a:pathLst>
-              <a:path w="0" h="0">
-                <a:moveTo>
-                  <a:pt x="0" y="0"/>
-                </a:moveTo>
-                <a:lnTo>
-                  <a:pt x="0" y="0"/>
-                </a:lnTo>
-                <a:cubicBezTo>
-                  <a:pt x="0" y="0"/>
-                  <a:pt x="0" y="0"/>
-                  <a:pt x="0" y="0"/>
-                </a:cubicBezTo>
-                <a:lnTo>
-                  <a:pt x="0" y="0"/>
-                </a:lnTo>
-                <a:cubicBezTo>
-                  <a:pt x="0" y="0"/>
-                  <a:pt x="0" y="0"/>
-                  <a:pt x="0" y="0"/>
-                </a:cubicBezTo>
-                <a:lnTo>
-                  <a:pt x="0" y="0"/>
-                </a:lnTo>
-                <a:cubicBezTo>
-                  <a:pt x="0" y="0"/>
-                  <a:pt x="0" y="0"/>
-                  <a:pt x="0" y="0"/>
-                </a:cubicBezTo>
-                <a:lnTo>
-                  <a:pt x="0" y="0"/>
-                </a:lnTo>
-                <a:cubicBezTo>
-                  <a:pt x="0" y="0"/>
-                  <a:pt x="0" y="0"/>
-                  <a:pt x="0" y="0"/>
-                </a:cubicBezTo>
-                <a:close/>
-              </a:path>
-            </a:pathLst>
-          </a:custGeom>
-          <a:solidFill xmlns:a="http://schemas.openxmlformats.org/drawingml/2006/main">
-            <a:srgbClr val="FFFFFF">
-              <a:alpha val="10980"/>
-            </a:srgbClr>
-          </a:solidFill>
-          <a:ln xmlns:a="http://schemas.openxmlformats.org/drawingml/2006/main" w="9525" cmpd="sng">
-            <a:solidFill>
-              <a:srgbClr val="FFFFFF">
-                <a:alpha val="10980"/>
-              </a:srgbClr>
-            </a:solidFill>
-            <a:prstDash val="solid"/>
-          </a:ln>
-          <a:effectLst xmlns:a="http://schemas.openxmlformats.org/drawingml/2006/main">
-            <a:outerShdw blurRad="142875" algn="ctr" rotWithShape="0">
-              <a:schemeClr val="accent2">
-                <a:alpha val="12157"/>
-              </a:schemeClr>
-            </a:outerShdw>
-          </a:effectLst>
-        </p:spPr>
-        <p:style>
-          <a:lnRef xmlns:a="http://schemas.openxmlformats.org/drawingml/2006/main" idx="2">
-            <a:schemeClr val="accent1">
-              <a:lumMod val="75000"/>
-            </a:schemeClr>
-          </a:lnRef>
-          <a:fillRef xmlns:a="http://schemas.openxmlformats.org/drawingml/2006/main" idx="1">
-            <a:schemeClr val="accent1"/>
-          </a:fillRef>
-          <a:effectRef xmlns:a="http://schemas.openxmlformats.org/drawingml/2006/main" idx="0">
-            <a:srgbClr val="FFFFFF"/>
-          </a:effectRef>
-          <a:fontRef xmlns:a="http://schemas.openxmlformats.org/drawingml/2006/main" idx="minor">
-            <a:schemeClr val="lt1"/>
-          </a:fontRef>
-        </p:style>
-        <p:txBody>
-          <a:bodyPr xmlns:a="http://schemas.openxmlformats.org/drawingml/2006/main" anchor="ctr"/>
-          <a:lstStyle xmlns:a="http://schemas.openxmlformats.org/drawingml/2006/main"/>
-          <a:p xmlns:a="http://schemas.openxmlformats.org/drawingml/2006/main">
-            <a:pPr algn="ctr">
-              <a:buNone/>
-            </a:pPr>
-            <a:endParaRPr/>
-          </a:p>
-        </p:txBody>
-      </p:sp>
-      <p:sp>
-        <p:nvSpPr>
-          <p:cNvPr id="25" name="文本框 24">
-            <a:extLst xmlns:a="http://schemas.openxmlformats.org/drawingml/2006/main">
-              <a:ext uri="{FF2B5EF4-FFF2-40B4-BE49-F238E27FC236}">
-                <a16:creationId xmlns:a16="http://schemas.microsoft.com/office/drawing/2014/main" id="{459D5196-1B47-45DC-8B4D-4B19EE49C049}"/>
-              </a:ext>
-            </a:extLst>
-          </p:cNvPr>
-          <p:cNvSpPr>
-            <a:spLocks xmlns:a="http://schemas.openxmlformats.org/drawingml/2006/main" noGrp="1"/>
-          </p:cNvSpPr>
-          <p:nvPr/>
-        </p:nvSpPr>
-        <p:spPr>
-          <a:xfrm xmlns:a="http://schemas.openxmlformats.org/drawingml/2006/main">
-            <a:off x="6410325" y="1288732"/>
-            <a:ext cx="5010150" cy="365760"/>
-          </a:xfrm>
-          <a:prstGeom xmlns:a="http://schemas.openxmlformats.org/drawingml/2006/main" prst="rect">
-            <a:avLst/>
-          </a:prstGeom>
-          <a:noFill xmlns:a="http://schemas.openxmlformats.org/drawingml/2006/main"/>
-        </p:spPr>
-        <p:txBody>
-          <a:bodyPr xmlns:a="http://schemas.openxmlformats.org/drawingml/2006/main" wrap="square" lIns="0" tIns="0" rIns="0" bIns="0" anchor="t">
-            <a:noAutofit/>
-          </a:bodyPr>
-          <a:lstStyle xmlns:a="http://schemas.openxmlformats.org/drawingml/2006/main"/>
-          <a:p xmlns:a="http://schemas.openxmlformats.org/drawingml/2006/main">
-            <a:pPr algn="l">
-              <a:lnSpc>
-                <a:spcPct val="104000"/>
-              </a:lnSpc>
-              <a:buNone/>
-            </a:pPr>
-            <a:r>
-              <a:rPr sz="2100" b="1" spc="42">
-                <a:solidFill>
-                  <a:srgbClr val="F4F4F5"/>
-                </a:solidFill>
-                <a:latin typeface="Microsoft YaHei"/>
-                <a:ea typeface="Microsoft YaHei"/>
-                <a:cs typeface="Microsoft YaHei"/>
-              </a:rPr>
-              <a:t>四步锁定可比商品</a:t>
-            </a:r>
-            <a:endParaRPr sz="2100" b="1" spc="42">
-              <a:solidFill>
-                <a:srgbClr val="F4F4F5"/>
-              </a:solidFill>
-              <a:latin typeface="Microsoft YaHei"/>
-              <a:ea typeface="Microsoft YaHei"/>
-              <a:cs typeface="Microsoft YaHei"/>
-            </a:endParaRPr>
-          </a:p>
-        </p:txBody>
-      </p:sp>
-      <p:sp>
-        <p:nvSpPr>
-          <p:cNvPr id="26" name="文本框 25">
-            <a:extLst xmlns:a="http://schemas.openxmlformats.org/drawingml/2006/main">
-              <a:ext uri="{FF2B5EF4-FFF2-40B4-BE49-F238E27FC236}">
-                <a16:creationId xmlns:a16="http://schemas.microsoft.com/office/drawing/2014/main" id="{DF9C41FF-50A7-4AE2-AC43-8C06A66E0B6E}"/>
-              </a:ext>
-            </a:extLst>
-          </p:cNvPr>
-          <p:cNvSpPr>
-            <a:spLocks xmlns:a="http://schemas.openxmlformats.org/drawingml/2006/main" noGrp="1"/>
-          </p:cNvSpPr>
-          <p:nvPr/>
-        </p:nvSpPr>
-        <p:spPr>
-          <a:xfrm xmlns:a="http://schemas.openxmlformats.org/drawingml/2006/main">
-            <a:off x="8482232" y="1679258"/>
-            <a:ext cx="1399651" cy="651510"/>
-          </a:xfrm>
-          <a:prstGeom xmlns:a="http://schemas.openxmlformats.org/drawingml/2006/main" prst="rect">
-            <a:avLst/>
-          </a:prstGeom>
-          <a:noFill xmlns:a="http://schemas.openxmlformats.org/drawingml/2006/main"/>
-        </p:spPr>
-        <p:txBody>
-          <a:bodyPr xmlns:a="http://schemas.openxmlformats.org/drawingml/2006/main" wrap="square" lIns="0" tIns="0" rIns="0" bIns="0" anchor="t">
-            <a:noAutofit/>
-          </a:bodyPr>
-          <a:lstStyle xmlns:a="http://schemas.openxmlformats.org/drawingml/2006/main"/>
-          <a:p xmlns:a="http://schemas.openxmlformats.org/drawingml/2006/main">
-            <a:pPr algn="l">
-              <a:lnSpc>
-                <a:spcPct val="92000"/>
-              </a:lnSpc>
-              <a:buNone/>
-            </a:pPr>
-            <a:r>
-              <a:rPr sz="4200" b="1">
-                <a:solidFill>
-                  <a:srgbClr val="F06666"/>
-                </a:solidFill>
-                <a:latin typeface="Microsoft YaHei"/>
-                <a:ea typeface="Microsoft YaHei"/>
-                <a:cs typeface="Microsoft YaHei"/>
-              </a:rPr>
-              <a:t>4步</a:t>
-            </a:r>
-            <a:endParaRPr sz="2100" b="1">
-              <a:solidFill>
-                <a:srgbClr val="F06666"/>
-              </a:solidFill>
-              <a:latin typeface="Microsoft YaHei"/>
-              <a:ea typeface="Microsoft YaHei"/>
-              <a:cs typeface="Microsoft YaHei"/>
-            </a:endParaRPr>
-          </a:p>
-        </p:txBody>
-      </p:sp>
-      <p:sp>
-        <p:nvSpPr>
-          <p:cNvPr id="27" name="文本框 26">
-            <a:extLst xmlns:a="http://schemas.openxmlformats.org/drawingml/2006/main">
-              <a:ext uri="{FF2B5EF4-FFF2-40B4-BE49-F238E27FC236}">
-                <a16:creationId xmlns:a16="http://schemas.microsoft.com/office/drawing/2014/main" id="{DC2CB989-CD7C-4D55-BDD6-EEEB1AAE50A1}"/>
-              </a:ext>
-            </a:extLst>
-          </p:cNvPr>
-          <p:cNvSpPr>
-            <a:spLocks xmlns:a="http://schemas.openxmlformats.org/drawingml/2006/main" noGrp="1"/>
-          </p:cNvSpPr>
-          <p:nvPr/>
-        </p:nvSpPr>
-        <p:spPr>
-          <a:xfrm xmlns:a="http://schemas.openxmlformats.org/drawingml/2006/main">
-            <a:off x="8315249" y="2339283"/>
-            <a:ext cx="1371676" cy="228600"/>
-          </a:xfrm>
-          <a:prstGeom xmlns:a="http://schemas.openxmlformats.org/drawingml/2006/main" prst="rect">
-            <a:avLst/>
-          </a:prstGeom>
-          <a:noFill xmlns:a="http://schemas.openxmlformats.org/drawingml/2006/main"/>
-        </p:spPr>
-        <p:txBody>
-          <a:bodyPr xmlns:a="http://schemas.openxmlformats.org/drawingml/2006/main" wrap="square" lIns="0" tIns="0" rIns="0" bIns="0" anchor="t">
-            <a:noAutofit/>
-          </a:bodyPr>
-          <a:lstStyle xmlns:a="http://schemas.openxmlformats.org/drawingml/2006/main"/>
-          <a:p xmlns:a="http://schemas.openxmlformats.org/drawingml/2006/main">
-            <a:pPr algn="l">
-              <a:buNone/>
-            </a:pPr>
-            <a:r>
-              <a:rPr sz="1350">
-                <a:solidFill>
-                  <a:schemeClr val="tx2">
-                    <a:lumMod val="0"/>
-                    <a:lumOff val="100000"/>
-                    <a:alpha val="72157"/>
-                  </a:schemeClr>
-                </a:solidFill>
-                <a:latin typeface="Microsoft YaHei"/>
-                <a:ea typeface="Microsoft YaHei"/>
-                <a:cs typeface="Microsoft YaHei"/>
-              </a:rPr>
-              <a:t>识别 → 约束 → 检索 → 决策</a:t>
-            </a:r>
-            <a:endParaRPr sz="1350">
-              <a:solidFill>
-                <a:schemeClr val="tx2">
-                  <a:lumMod val="0"/>
-                  <a:lumOff val="100000"/>
-                  <a:alpha val="72157"/>
-                </a:schemeClr>
-              </a:solidFill>
-              <a:latin typeface="Microsoft YaHei"/>
-              <a:ea typeface="Microsoft YaHei"/>
-              <a:cs typeface="Microsoft YaHei"/>
-            </a:endParaRPr>
-          </a:p>
-        </p:txBody>
-      </p:sp>
-      <p:sp>
-        <p:nvSpPr>
-          <p:cNvPr id="28" name="任意多边形 27">
-            <a:extLst xmlns:a="http://schemas.openxmlformats.org/drawingml/2006/main">
-              <a:ext uri="{FF2B5EF4-FFF2-40B4-BE49-F238E27FC236}">
-                <a16:creationId xmlns:a16="http://schemas.microsoft.com/office/drawing/2014/main" id="{099EE417-C943-440B-BDB6-92DBBCD3968A}"/>
-              </a:ext>
-            </a:extLst>
-          </p:cNvPr>
-          <p:cNvSpPr>
-            <a:spLocks xmlns:a="http://schemas.openxmlformats.org/drawingml/2006/main" noGrp="1"/>
-          </p:cNvSpPr>
-          <p:nvPr/>
-        </p:nvSpPr>
-        <p:spPr>
-          <a:xfrm xmlns:a="http://schemas.openxmlformats.org/drawingml/2006/main">
-            <a:off x="6410325" y="2710180"/>
-            <a:ext cx="342900" cy="342900"/>
-          </a:xfrm>
-          <a:custGeom xmlns:a="http://schemas.openxmlformats.org/drawingml/2006/main">
-            <a:gdLst>
-              <a:gd name="sw" fmla="*/ 1 w 540"/>
-              <a:gd name="sh" fmla="*/ 1 h 540"/>
-              <a:gd name="mins" fmla="min sw sh"/>
-              <a:gd name="dsw" fmla="+- 0 sw mins"/>
-              <a:gd name="dsh" fmla="+- 0 sh mins"/>
-              <a:gd name="p0x0" fmla="*/ 120 w 540"/>
-              <a:gd name="p0y0" fmla="*/ 0 h 540"/>
-              <a:gd name="p0x1" fmla="*/ 420 w 540"/>
-              <a:gd name="p0y1" fmla="*/ 0 h 540"/>
-              <a:gd name="p0x2" fmla="*/ 486 w 540"/>
-              <a:gd name="p0y2" fmla="*/ 0 h 540"/>
-              <a:gd name="p0x3" fmla="*/ 540 w 540"/>
-              <a:gd name="p0y3" fmla="*/ 53 h 540"/>
-              <a:gd name="p0x4" fmla="*/ 540 w 540"/>
-              <a:gd name="p0y4" fmla="*/ 120 h 540"/>
-              <a:gd name="p0x5" fmla="*/ 540 w 540"/>
-              <a:gd name="p0y5" fmla="*/ 420 h 540"/>
-              <a:gd name="p0x6" fmla="*/ 540 w 540"/>
-              <a:gd name="p0y6" fmla="*/ 486 h 540"/>
-              <a:gd name="p0x7" fmla="*/ 486 w 540"/>
-              <a:gd name="p0y7" fmla="*/ 540 h 540"/>
-              <a:gd name="p0x8" fmla="*/ 420 w 540"/>
-              <a:gd name="p0y8" fmla="*/ 540 h 540"/>
-              <a:gd name="p0x9" fmla="*/ 120 w 540"/>
-              <a:gd name="p0y9" fmla="*/ 540 h 540"/>
-              <a:gd name="p0x10" fmla="*/ 53 w 540"/>
-              <a:gd name="p0y10" fmla="*/ 540 h 540"/>
-              <a:gd name="p0x11" fmla="*/ 0 w 540"/>
-              <a:gd name="p0y11" fmla="*/ 486 h 540"/>
-              <a:gd name="p0x12" fmla="*/ 0 w 540"/>
-              <a:gd name="p0y12" fmla="*/ 420 h 540"/>
-              <a:gd name="p0x13" fmla="*/ 0 w 540"/>
-              <a:gd name="p0y13" fmla="*/ 120 h 540"/>
-              <a:gd name="p0x14" fmla="*/ 0 w 540"/>
-              <a:gd name="p0y14" fmla="*/ 53 h 540"/>
-              <a:gd name="p0x15" fmla="*/ 53 w 540"/>
-              <a:gd name="p0y15" fmla="*/ 0 h 540"/>
-              <a:gd name="p0x16" fmla="*/ 120 w 540"/>
-              <a:gd name="p0y16" fmla="*/ 0 h 540"/>
-            </a:gdLst>
-            <a:pathLst>
-              <a:path w="0" h="0">
-                <a:moveTo>
-                  <a:pt x="0" y="0"/>
-                </a:moveTo>
-                <a:lnTo>
-                  <a:pt x="0" y="0"/>
-                </a:lnTo>
-                <a:cubicBezTo>
-                  <a:pt x="0" y="0"/>
-                  <a:pt x="0" y="0"/>
-                  <a:pt x="0" y="0"/>
-                </a:cubicBezTo>
-                <a:lnTo>
-                  <a:pt x="0" y="0"/>
-                </a:lnTo>
-                <a:cubicBezTo>
-                  <a:pt x="0" y="0"/>
-                  <a:pt x="0" y="0"/>
-                  <a:pt x="0" y="0"/>
-                </a:cubicBezTo>
-                <a:lnTo>
-                  <a:pt x="0" y="0"/>
-                </a:lnTo>
-                <a:cubicBezTo>
-                  <a:pt x="0" y="0"/>
-                  <a:pt x="0" y="0"/>
-                  <a:pt x="0" y="0"/>
-                </a:cubicBezTo>
-                <a:lnTo>
-                  <a:pt x="0" y="0"/>
-                </a:lnTo>
-                <a:cubicBezTo>
-                  <a:pt x="0" y="0"/>
-                  <a:pt x="0" y="0"/>
-                  <a:pt x="0" y="0"/>
-                </a:cubicBezTo>
-                <a:close/>
-              </a:path>
-            </a:pathLst>
-          </a:custGeom>
-          <a:solidFill xmlns:a="http://schemas.openxmlformats.org/drawingml/2006/main">
-            <a:schemeClr val="accent1">
-              <a:alpha val="16078"/>
-            </a:schemeClr>
-          </a:solidFill>
-          <a:ln xmlns:a="http://schemas.openxmlformats.org/drawingml/2006/main">
-            <a:noFill/>
-          </a:ln>
-        </p:spPr>
-        <p:style>
-          <a:lnRef xmlns:a="http://schemas.openxmlformats.org/drawingml/2006/main" idx="2">
-            <a:schemeClr val="accent1">
-              <a:lumMod val="75000"/>
-            </a:schemeClr>
-          </a:lnRef>
-          <a:fillRef xmlns:a="http://schemas.openxmlformats.org/drawingml/2006/main" idx="1">
-            <a:schemeClr val="accent1"/>
-          </a:fillRef>
-          <a:effectRef xmlns:a="http://schemas.openxmlformats.org/drawingml/2006/main" idx="0">
-            <a:srgbClr val="FFFFFF"/>
-          </a:effectRef>
-          <a:fontRef xmlns:a="http://schemas.openxmlformats.org/drawingml/2006/main" idx="minor">
-            <a:schemeClr val="lt1"/>
-          </a:fontRef>
-        </p:style>
-        <p:txBody>
-          <a:bodyPr xmlns:a="http://schemas.openxmlformats.org/drawingml/2006/main" anchor="ctr"/>
-          <a:lstStyle xmlns:a="http://schemas.openxmlformats.org/drawingml/2006/main"/>
-          <a:p xmlns:a="http://schemas.openxmlformats.org/drawingml/2006/main">
-            <a:pPr algn="ctr">
-              <a:buNone/>
-            </a:pPr>
-            <a:endParaRPr/>
-          </a:p>
-        </p:txBody>
-      </p:sp>
-      <p:sp>
-        <p:nvSpPr>
-          <p:cNvPr id="29" name="文本框 28">
-            <a:extLst xmlns:a="http://schemas.openxmlformats.org/drawingml/2006/main">
-              <a:ext uri="{FF2B5EF4-FFF2-40B4-BE49-F238E27FC236}">
-                <a16:creationId xmlns:a16="http://schemas.microsoft.com/office/drawing/2014/main" id="{816A3E7F-9FF0-4DBD-B987-29154B96C591}"/>
-              </a:ext>
-            </a:extLst>
-          </p:cNvPr>
-          <p:cNvSpPr>
-            <a:spLocks xmlns:a="http://schemas.openxmlformats.org/drawingml/2006/main" noGrp="1"/>
-          </p:cNvSpPr>
-          <p:nvPr/>
-        </p:nvSpPr>
-        <p:spPr>
-          <a:xfrm xmlns:a="http://schemas.openxmlformats.org/drawingml/2006/main">
-            <a:off x="6450959" y="2759916"/>
-            <a:ext cx="471116" cy="239078"/>
-          </a:xfrm>
-          <a:prstGeom xmlns:a="http://schemas.openxmlformats.org/drawingml/2006/main" prst="rect">
-            <a:avLst/>
-          </a:prstGeom>
-          <a:noFill xmlns:a="http://schemas.openxmlformats.org/drawingml/2006/main"/>
-        </p:spPr>
-        <p:txBody>
-          <a:bodyPr xmlns:a="http://schemas.openxmlformats.org/drawingml/2006/main" wrap="square" lIns="0" tIns="0" rIns="0" bIns="0" anchor="t">
-            <a:noAutofit/>
-          </a:bodyPr>
-          <a:lstStyle xmlns:a="http://schemas.openxmlformats.org/drawingml/2006/main"/>
-          <a:p xmlns:a="http://schemas.openxmlformats.org/drawingml/2006/main">
-            <a:pPr algn="l">
-              <a:lnSpc>
-                <a:spcPct val="83000"/>
-              </a:lnSpc>
-              <a:buNone/>
-            </a:pPr>
-            <a:r>
-              <a:rPr sz="1650" b="1">
-                <a:solidFill>
-                  <a:srgbClr val="AF753D"/>
-                </a:solidFill>
-                <a:latin typeface="Microsoft YaHei"/>
-                <a:ea typeface="Microsoft YaHei"/>
-                <a:cs typeface="Microsoft YaHei"/>
-              </a:rPr>
-              <a:t>01</a:t>
-            </a:r>
-            <a:endParaRPr sz="1650" b="1">
-              <a:solidFill>
-                <a:srgbClr val="AF753D"/>
-              </a:solidFill>
-              <a:latin typeface="Microsoft YaHei"/>
-              <a:ea typeface="Microsoft YaHei"/>
-              <a:cs typeface="Microsoft YaHei"/>
-            </a:endParaRPr>
-          </a:p>
-        </p:txBody>
-      </p:sp>
-      <p:sp>
-        <p:nvSpPr>
-          <p:cNvPr id="30" name="文本框 29">
-            <a:extLst xmlns:a="http://schemas.openxmlformats.org/drawingml/2006/main">
-              <a:ext uri="{FF2B5EF4-FFF2-40B4-BE49-F238E27FC236}">
-                <a16:creationId xmlns:a16="http://schemas.microsoft.com/office/drawing/2014/main" id="{E41C8AB4-7480-4309-B091-50705565B3DF}"/>
-              </a:ext>
-            </a:extLst>
-          </p:cNvPr>
-          <p:cNvSpPr>
-            <a:spLocks xmlns:a="http://schemas.openxmlformats.org/drawingml/2006/main" noGrp="1"/>
-          </p:cNvSpPr>
-          <p:nvPr/>
-        </p:nvSpPr>
-        <p:spPr>
-          <a:xfrm xmlns:a="http://schemas.openxmlformats.org/drawingml/2006/main">
-            <a:off x="6867525" y="2748486"/>
-            <a:ext cx="3238500" cy="261938"/>
-          </a:xfrm>
-          <a:prstGeom xmlns:a="http://schemas.openxmlformats.org/drawingml/2006/main" prst="rect">
-            <a:avLst/>
-          </a:prstGeom>
-          <a:noFill xmlns:a="http://schemas.openxmlformats.org/drawingml/2006/main"/>
-        </p:spPr>
-        <p:txBody>
-          <a:bodyPr xmlns:a="http://schemas.openxmlformats.org/drawingml/2006/main" wrap="square" lIns="0" tIns="0" rIns="0" bIns="0" anchor="t">
-            <a:noAutofit/>
-          </a:bodyPr>
-          <a:lstStyle xmlns:a="http://schemas.openxmlformats.org/drawingml/2006/main"/>
-          <a:p xmlns:a="http://schemas.openxmlformats.org/drawingml/2006/main">
-            <a:pPr algn="l">
-              <a:lnSpc>
-                <a:spcPct val="104000"/>
-              </a:lnSpc>
-              <a:buNone/>
-            </a:pPr>
-            <a:r>
-              <a:rPr sz="1500" b="1">
-                <a:solidFill>
-                  <a:schemeClr val="tx2">
-                    <a:lumMod val="4356"/>
-                    <a:lumOff val="95644"/>
-                  </a:schemeClr>
-                </a:solidFill>
-                <a:latin typeface="Microsoft YaHei"/>
-                <a:ea typeface="Microsoft YaHei"/>
-                <a:cs typeface="Microsoft YaHei"/>
-              </a:rPr>
-              <a:t>识别｜品类、品牌、型号、属性</a:t>
-            </a:r>
-            <a:endParaRPr sz="1500" b="1">
-              <a:solidFill>
-                <a:schemeClr val="tx2">
-                  <a:lumMod val="4356"/>
-                  <a:lumOff val="95644"/>
-                </a:schemeClr>
-              </a:solidFill>
-              <a:latin typeface="Microsoft YaHei"/>
-              <a:ea typeface="Microsoft YaHei"/>
-              <a:cs typeface="Microsoft YaHei"/>
-            </a:endParaRPr>
-          </a:p>
-        </p:txBody>
-      </p:sp>
-      <p:sp>
-        <p:nvSpPr>
-          <p:cNvPr id="31" name="任意多边形 30">
-            <a:extLst xmlns:a="http://schemas.openxmlformats.org/drawingml/2006/main">
-              <a:ext uri="{FF2B5EF4-FFF2-40B4-BE49-F238E27FC236}">
-                <a16:creationId xmlns:a16="http://schemas.microsoft.com/office/drawing/2014/main" id="{5508DF17-305C-44F6-A857-4357E2C8DE4D}"/>
-              </a:ext>
-            </a:extLst>
-          </p:cNvPr>
-          <p:cNvSpPr>
-            <a:spLocks xmlns:a="http://schemas.openxmlformats.org/drawingml/2006/main" noGrp="1"/>
-          </p:cNvSpPr>
-          <p:nvPr/>
-        </p:nvSpPr>
-        <p:spPr>
-          <a:xfrm xmlns:a="http://schemas.openxmlformats.org/drawingml/2006/main">
-            <a:off x="6410325" y="3157220"/>
-            <a:ext cx="342900" cy="342900"/>
-          </a:xfrm>
-          <a:custGeom xmlns:a="http://schemas.openxmlformats.org/drawingml/2006/main">
-            <a:gdLst>
-              <a:gd name="sw" fmla="*/ 1 w 540"/>
-              <a:gd name="sh" fmla="*/ 1 h 540"/>
-              <a:gd name="mins" fmla="min sw sh"/>
-              <a:gd name="dsw" fmla="+- 0 sw mins"/>
-              <a:gd name="dsh" fmla="+- 0 sh mins"/>
-              <a:gd name="p0x0" fmla="*/ 120 w 540"/>
-              <a:gd name="p0y0" fmla="*/ 0 h 540"/>
-              <a:gd name="p0x1" fmla="*/ 420 w 540"/>
-              <a:gd name="p0y1" fmla="*/ 0 h 540"/>
-              <a:gd name="p0x2" fmla="*/ 486 w 540"/>
-              <a:gd name="p0y2" fmla="*/ 0 h 540"/>
-              <a:gd name="p0x3" fmla="*/ 540 w 540"/>
-              <a:gd name="p0y3" fmla="*/ 53 h 540"/>
-              <a:gd name="p0x4" fmla="*/ 540 w 540"/>
-              <a:gd name="p0y4" fmla="*/ 120 h 540"/>
-              <a:gd name="p0x5" fmla="*/ 540 w 540"/>
-              <a:gd name="p0y5" fmla="*/ 420 h 540"/>
-              <a:gd name="p0x6" fmla="*/ 540 w 540"/>
-              <a:gd name="p0y6" fmla="*/ 486 h 540"/>
-              <a:gd name="p0x7" fmla="*/ 486 w 540"/>
-              <a:gd name="p0y7" fmla="*/ 540 h 540"/>
-              <a:gd name="p0x8" fmla="*/ 420 w 540"/>
-              <a:gd name="p0y8" fmla="*/ 540 h 540"/>
-              <a:gd name="p0x9" fmla="*/ 120 w 540"/>
-              <a:gd name="p0y9" fmla="*/ 540 h 540"/>
-              <a:gd name="p0x10" fmla="*/ 53 w 540"/>
-              <a:gd name="p0y10" fmla="*/ 540 h 540"/>
-              <a:gd name="p0x11" fmla="*/ 0 w 540"/>
-              <a:gd name="p0y11" fmla="*/ 486 h 540"/>
-              <a:gd name="p0x12" fmla="*/ 0 w 540"/>
-              <a:gd name="p0y12" fmla="*/ 420 h 540"/>
-              <a:gd name="p0x13" fmla="*/ 0 w 540"/>
-              <a:gd name="p0y13" fmla="*/ 120 h 540"/>
-              <a:gd name="p0x14" fmla="*/ 0 w 540"/>
-              <a:gd name="p0y14" fmla="*/ 53 h 540"/>
-              <a:gd name="p0x15" fmla="*/ 53 w 540"/>
-              <a:gd name="p0y15" fmla="*/ 0 h 540"/>
-              <a:gd name="p0x16" fmla="*/ 120 w 540"/>
-              <a:gd name="p0y16" fmla="*/ 0 h 540"/>
-            </a:gdLst>
-            <a:pathLst>
-              <a:path w="0" h="0">
-                <a:moveTo>
-                  <a:pt x="0" y="0"/>
-                </a:moveTo>
-                <a:lnTo>
-                  <a:pt x="0" y="0"/>
-                </a:lnTo>
-                <a:cubicBezTo>
-                  <a:pt x="0" y="0"/>
-                  <a:pt x="0" y="0"/>
-                  <a:pt x="0" y="0"/>
-                </a:cubicBezTo>
-                <a:lnTo>
-                  <a:pt x="0" y="0"/>
-                </a:lnTo>
-                <a:cubicBezTo>
-                  <a:pt x="0" y="0"/>
-                  <a:pt x="0" y="0"/>
-                  <a:pt x="0" y="0"/>
-                </a:cubicBezTo>
-                <a:lnTo>
-                  <a:pt x="0" y="0"/>
-                </a:lnTo>
-                <a:cubicBezTo>
-                  <a:pt x="0" y="0"/>
-                  <a:pt x="0" y="0"/>
-                  <a:pt x="0" y="0"/>
-                </a:cubicBezTo>
-                <a:lnTo>
-                  <a:pt x="0" y="0"/>
-                </a:lnTo>
-                <a:cubicBezTo>
-                  <a:pt x="0" y="0"/>
-                  <a:pt x="0" y="0"/>
-                  <a:pt x="0" y="0"/>
-                </a:cubicBezTo>
-                <a:close/>
-              </a:path>
-            </a:pathLst>
-          </a:custGeom>
-          <a:solidFill xmlns:a="http://schemas.openxmlformats.org/drawingml/2006/main">
-            <a:schemeClr val="accent1">
-              <a:alpha val="16078"/>
-            </a:schemeClr>
-          </a:solidFill>
-          <a:ln xmlns:a="http://schemas.openxmlformats.org/drawingml/2006/main">
-            <a:noFill/>
-          </a:ln>
-        </p:spPr>
-        <p:style>
-          <a:lnRef xmlns:a="http://schemas.openxmlformats.org/drawingml/2006/main" idx="2">
-            <a:schemeClr val="accent1">
-              <a:lumMod val="75000"/>
-            </a:schemeClr>
-          </a:lnRef>
-          <a:fillRef xmlns:a="http://schemas.openxmlformats.org/drawingml/2006/main" idx="1">
-            <a:schemeClr val="accent1"/>
-          </a:fillRef>
-          <a:effectRef xmlns:a="http://schemas.openxmlformats.org/drawingml/2006/main" idx="0">
-            <a:srgbClr val="FFFFFF"/>
-          </a:effectRef>
-          <a:fontRef xmlns:a="http://schemas.openxmlformats.org/drawingml/2006/main" idx="minor">
-            <a:schemeClr val="lt1"/>
-          </a:fontRef>
-        </p:style>
-        <p:txBody>
-          <a:bodyPr xmlns:a="http://schemas.openxmlformats.org/drawingml/2006/main" anchor="ctr"/>
-          <a:lstStyle xmlns:a="http://schemas.openxmlformats.org/drawingml/2006/main"/>
-          <a:p xmlns:a="http://schemas.openxmlformats.org/drawingml/2006/main">
-            <a:pPr algn="ctr">
-              <a:buNone/>
-            </a:pPr>
-            <a:endParaRPr/>
-          </a:p>
-        </p:txBody>
-      </p:sp>
-      <p:sp>
-        <p:nvSpPr>
-          <p:cNvPr id="32" name="文本框 31">
-            <a:extLst xmlns:a="http://schemas.openxmlformats.org/drawingml/2006/main">
-              <a:ext uri="{FF2B5EF4-FFF2-40B4-BE49-F238E27FC236}">
-                <a16:creationId xmlns:a16="http://schemas.microsoft.com/office/drawing/2014/main" id="{A7F923C1-6FAF-4CCA-86A1-E65A91DB0364}"/>
-              </a:ext>
-            </a:extLst>
-          </p:cNvPr>
-          <p:cNvSpPr>
-            <a:spLocks xmlns:a="http://schemas.openxmlformats.org/drawingml/2006/main" noGrp="1"/>
-          </p:cNvSpPr>
-          <p:nvPr/>
-        </p:nvSpPr>
-        <p:spPr>
-          <a:xfrm xmlns:a="http://schemas.openxmlformats.org/drawingml/2006/main">
-            <a:off x="6450959" y="3207220"/>
-            <a:ext cx="471116" cy="239078"/>
-          </a:xfrm>
-          <a:prstGeom xmlns:a="http://schemas.openxmlformats.org/drawingml/2006/main" prst="rect">
-            <a:avLst/>
-          </a:prstGeom>
-          <a:noFill xmlns:a="http://schemas.openxmlformats.org/drawingml/2006/main"/>
-        </p:spPr>
-        <p:txBody>
-          <a:bodyPr xmlns:a="http://schemas.openxmlformats.org/drawingml/2006/main" wrap="square" lIns="0" tIns="0" rIns="0" bIns="0" anchor="t">
-            <a:noAutofit/>
-          </a:bodyPr>
-          <a:lstStyle xmlns:a="http://schemas.openxmlformats.org/drawingml/2006/main"/>
-          <a:p xmlns:a="http://schemas.openxmlformats.org/drawingml/2006/main">
-            <a:pPr algn="l">
-              <a:lnSpc>
-                <a:spcPct val="83000"/>
-              </a:lnSpc>
-              <a:buNone/>
-            </a:pPr>
-            <a:r>
-              <a:rPr sz="1650" b="1">
-                <a:solidFill>
-                  <a:srgbClr val="AF753D"/>
-                </a:solidFill>
-                <a:latin typeface="Microsoft YaHei"/>
-                <a:ea typeface="Microsoft YaHei"/>
-                <a:cs typeface="Microsoft YaHei"/>
-              </a:rPr>
-              <a:t>02</a:t>
-            </a:r>
-            <a:endParaRPr sz="1650" b="1">
-              <a:solidFill>
-                <a:srgbClr val="AF753D"/>
-              </a:solidFill>
-              <a:latin typeface="Microsoft YaHei"/>
-              <a:ea typeface="Microsoft YaHei"/>
-              <a:cs typeface="Microsoft YaHei"/>
-            </a:endParaRPr>
-          </a:p>
-        </p:txBody>
-      </p:sp>
-      <p:sp>
-        <p:nvSpPr>
-          <p:cNvPr id="33" name="文本框 32">
-            <a:extLst xmlns:a="http://schemas.openxmlformats.org/drawingml/2006/main">
-              <a:ext uri="{FF2B5EF4-FFF2-40B4-BE49-F238E27FC236}">
-                <a16:creationId xmlns:a16="http://schemas.microsoft.com/office/drawing/2014/main" id="{1ADB846A-AD60-4C11-A2D4-F3A012B91590}"/>
-              </a:ext>
-            </a:extLst>
-          </p:cNvPr>
-          <p:cNvSpPr>
-            <a:spLocks xmlns:a="http://schemas.openxmlformats.org/drawingml/2006/main" noGrp="1"/>
-          </p:cNvSpPr>
-          <p:nvPr/>
-        </p:nvSpPr>
-        <p:spPr>
-          <a:xfrm xmlns:a="http://schemas.openxmlformats.org/drawingml/2006/main">
-            <a:off x="6867525" y="3195790"/>
-            <a:ext cx="3671735" cy="261938"/>
-          </a:xfrm>
-          <a:prstGeom xmlns:a="http://schemas.openxmlformats.org/drawingml/2006/main" prst="rect">
-            <a:avLst/>
-          </a:prstGeom>
-          <a:noFill xmlns:a="http://schemas.openxmlformats.org/drawingml/2006/main"/>
-        </p:spPr>
-        <p:txBody>
-          <a:bodyPr xmlns:a="http://schemas.openxmlformats.org/drawingml/2006/main" wrap="square" lIns="0" tIns="0" rIns="0" bIns="0" anchor="t">
-            <a:noAutofit/>
-          </a:bodyPr>
-          <a:lstStyle xmlns:a="http://schemas.openxmlformats.org/drawingml/2006/main"/>
-          <a:p xmlns:a="http://schemas.openxmlformats.org/drawingml/2006/main">
-            <a:pPr algn="l">
-              <a:lnSpc>
-                <a:spcPct val="104000"/>
-              </a:lnSpc>
-              <a:buNone/>
-            </a:pPr>
-            <a:r>
-              <a:rPr sz="1500" b="1">
-                <a:solidFill>
-                  <a:schemeClr val="tx2">
-                    <a:lumMod val="4356"/>
-                    <a:lumOff val="95644"/>
-                  </a:schemeClr>
-                </a:solidFill>
-                <a:latin typeface="Microsoft YaHei"/>
-                <a:ea typeface="Microsoft YaHei"/>
-                <a:cs typeface="Microsoft YaHei"/>
-              </a:rPr>
-              <a:t>约束｜合并预算、平台、颜色等条件</a:t>
-            </a:r>
-            <a:endParaRPr sz="1500" b="1">
-              <a:solidFill>
-                <a:schemeClr val="tx2">
-                  <a:lumMod val="4356"/>
-                  <a:lumOff val="95644"/>
-                </a:schemeClr>
-              </a:solidFill>
-              <a:latin typeface="Microsoft YaHei"/>
-              <a:ea typeface="Microsoft YaHei"/>
-              <a:cs typeface="Microsoft YaHei"/>
-            </a:endParaRPr>
-          </a:p>
-        </p:txBody>
-      </p:sp>
-      <p:sp>
-        <p:nvSpPr>
-          <p:cNvPr id="34" name="任意多边形 33">
-            <a:extLst xmlns:a="http://schemas.openxmlformats.org/drawingml/2006/main">
-              <a:ext uri="{FF2B5EF4-FFF2-40B4-BE49-F238E27FC236}">
-                <a16:creationId xmlns:a16="http://schemas.microsoft.com/office/drawing/2014/main" id="{43B2D0CE-E8DB-472C-A9E7-3CAE8C8AAC29}"/>
-              </a:ext>
-            </a:extLst>
-          </p:cNvPr>
-          <p:cNvSpPr>
-            <a:spLocks xmlns:a="http://schemas.openxmlformats.org/drawingml/2006/main" noGrp="1"/>
-          </p:cNvSpPr>
-          <p:nvPr/>
-        </p:nvSpPr>
-        <p:spPr>
-          <a:xfrm xmlns:a="http://schemas.openxmlformats.org/drawingml/2006/main">
-            <a:off x="6410325" y="3604895"/>
-            <a:ext cx="342900" cy="342900"/>
-          </a:xfrm>
-          <a:custGeom xmlns:a="http://schemas.openxmlformats.org/drawingml/2006/main">
-            <a:gdLst>
-              <a:gd name="sw" fmla="*/ 1 w 540"/>
-              <a:gd name="sh" fmla="*/ 1 h 540"/>
-              <a:gd name="mins" fmla="min sw sh"/>
-              <a:gd name="dsw" fmla="+- 0 sw mins"/>
-              <a:gd name="dsh" fmla="+- 0 sh mins"/>
-              <a:gd name="p0x0" fmla="*/ 120 w 540"/>
-              <a:gd name="p0y0" fmla="*/ 0 h 540"/>
-              <a:gd name="p0x1" fmla="*/ 420 w 540"/>
-              <a:gd name="p0y1" fmla="*/ 0 h 540"/>
-              <a:gd name="p0x2" fmla="*/ 486 w 540"/>
-              <a:gd name="p0y2" fmla="*/ 0 h 540"/>
-              <a:gd name="p0x3" fmla="*/ 540 w 540"/>
-              <a:gd name="p0y3" fmla="*/ 53 h 540"/>
-              <a:gd name="p0x4" fmla="*/ 540 w 540"/>
-              <a:gd name="p0y4" fmla="*/ 120 h 540"/>
-              <a:gd name="p0x5" fmla="*/ 540 w 540"/>
-              <a:gd name="p0y5" fmla="*/ 420 h 540"/>
-              <a:gd name="p0x6" fmla="*/ 540 w 540"/>
-              <a:gd name="p0y6" fmla="*/ 486 h 540"/>
-              <a:gd name="p0x7" fmla="*/ 486 w 540"/>
-              <a:gd name="p0y7" fmla="*/ 540 h 540"/>
-              <a:gd name="p0x8" fmla="*/ 420 w 540"/>
-              <a:gd name="p0y8" fmla="*/ 540 h 540"/>
-              <a:gd name="p0x9" fmla="*/ 120 w 540"/>
-              <a:gd name="p0y9" fmla="*/ 540 h 540"/>
-              <a:gd name="p0x10" fmla="*/ 53 w 540"/>
-              <a:gd name="p0y10" fmla="*/ 540 h 540"/>
-              <a:gd name="p0x11" fmla="*/ 0 w 540"/>
-              <a:gd name="p0y11" fmla="*/ 486 h 540"/>
-              <a:gd name="p0x12" fmla="*/ 0 w 540"/>
-              <a:gd name="p0y12" fmla="*/ 420 h 540"/>
-              <a:gd name="p0x13" fmla="*/ 0 w 540"/>
-              <a:gd name="p0y13" fmla="*/ 120 h 540"/>
-              <a:gd name="p0x14" fmla="*/ 0 w 540"/>
-              <a:gd name="p0y14" fmla="*/ 53 h 540"/>
-              <a:gd name="p0x15" fmla="*/ 53 w 540"/>
-              <a:gd name="p0y15" fmla="*/ 0 h 540"/>
-              <a:gd name="p0x16" fmla="*/ 120 w 540"/>
-              <a:gd name="p0y16" fmla="*/ 0 h 540"/>
-            </a:gdLst>
-            <a:pathLst>
-              <a:path w="0" h="0">
-                <a:moveTo>
-                  <a:pt x="0" y="0"/>
-                </a:moveTo>
-                <a:lnTo>
-                  <a:pt x="0" y="0"/>
-                </a:lnTo>
-                <a:cubicBezTo>
-                  <a:pt x="0" y="0"/>
-                  <a:pt x="0" y="0"/>
-                  <a:pt x="0" y="0"/>
-                </a:cubicBezTo>
-                <a:lnTo>
-                  <a:pt x="0" y="0"/>
-                </a:lnTo>
-                <a:cubicBezTo>
-                  <a:pt x="0" y="0"/>
-                  <a:pt x="0" y="0"/>
-                  <a:pt x="0" y="0"/>
-                </a:cubicBezTo>
-                <a:lnTo>
-                  <a:pt x="0" y="0"/>
-                </a:lnTo>
-                <a:cubicBezTo>
-                  <a:pt x="0" y="0"/>
-                  <a:pt x="0" y="0"/>
-                  <a:pt x="0" y="0"/>
-                </a:cubicBezTo>
-                <a:lnTo>
-                  <a:pt x="0" y="0"/>
-                </a:lnTo>
-                <a:cubicBezTo>
-                  <a:pt x="0" y="0"/>
-                  <a:pt x="0" y="0"/>
-                  <a:pt x="0" y="0"/>
-                </a:cubicBezTo>
-                <a:close/>
-              </a:path>
-            </a:pathLst>
-          </a:custGeom>
-          <a:solidFill xmlns:a="http://schemas.openxmlformats.org/drawingml/2006/main">
-            <a:schemeClr val="accent1">
-              <a:alpha val="16078"/>
-            </a:schemeClr>
-          </a:solidFill>
-          <a:ln xmlns:a="http://schemas.openxmlformats.org/drawingml/2006/main">
-            <a:noFill/>
-          </a:ln>
-        </p:spPr>
-        <p:style>
-          <a:lnRef xmlns:a="http://schemas.openxmlformats.org/drawingml/2006/main" idx="2">
-            <a:schemeClr val="accent1">
-              <a:lumMod val="75000"/>
-            </a:schemeClr>
-          </a:lnRef>
-          <a:fillRef xmlns:a="http://schemas.openxmlformats.org/drawingml/2006/main" idx="1">
-            <a:schemeClr val="accent1"/>
-          </a:fillRef>
-          <a:effectRef xmlns:a="http://schemas.openxmlformats.org/drawingml/2006/main" idx="0">
-            <a:srgbClr val="FFFFFF"/>
-          </a:effectRef>
-          <a:fontRef xmlns:a="http://schemas.openxmlformats.org/drawingml/2006/main" idx="minor">
-            <a:schemeClr val="lt1"/>
-          </a:fontRef>
-        </p:style>
-        <p:txBody>
-          <a:bodyPr xmlns:a="http://schemas.openxmlformats.org/drawingml/2006/main" anchor="ctr"/>
-          <a:lstStyle xmlns:a="http://schemas.openxmlformats.org/drawingml/2006/main"/>
-          <a:p xmlns:a="http://schemas.openxmlformats.org/drawingml/2006/main">
-            <a:pPr algn="ctr">
-              <a:buNone/>
-            </a:pPr>
-            <a:endParaRPr/>
-          </a:p>
-        </p:txBody>
-      </p:sp>
-      <p:sp>
-        <p:nvSpPr>
-          <p:cNvPr id="35" name="文本框 34">
-            <a:extLst xmlns:a="http://schemas.openxmlformats.org/drawingml/2006/main">
-              <a:ext uri="{FF2B5EF4-FFF2-40B4-BE49-F238E27FC236}">
-                <a16:creationId xmlns:a16="http://schemas.microsoft.com/office/drawing/2014/main" id="{B88B57AA-3D06-425D-8BDA-626CE3FF8565}"/>
-              </a:ext>
-            </a:extLst>
-          </p:cNvPr>
-          <p:cNvSpPr>
-            <a:spLocks xmlns:a="http://schemas.openxmlformats.org/drawingml/2006/main" noGrp="1"/>
-          </p:cNvSpPr>
-          <p:nvPr/>
-        </p:nvSpPr>
-        <p:spPr>
-          <a:xfrm xmlns:a="http://schemas.openxmlformats.org/drawingml/2006/main">
-            <a:off x="6450959" y="3654523"/>
-            <a:ext cx="471116" cy="239078"/>
-          </a:xfrm>
-          <a:prstGeom xmlns:a="http://schemas.openxmlformats.org/drawingml/2006/main" prst="rect">
-            <a:avLst/>
-          </a:prstGeom>
-          <a:noFill xmlns:a="http://schemas.openxmlformats.org/drawingml/2006/main"/>
-        </p:spPr>
-        <p:txBody>
-          <a:bodyPr xmlns:a="http://schemas.openxmlformats.org/drawingml/2006/main" wrap="square" lIns="0" tIns="0" rIns="0" bIns="0" anchor="t">
-            <a:noAutofit/>
-          </a:bodyPr>
-          <a:lstStyle xmlns:a="http://schemas.openxmlformats.org/drawingml/2006/main"/>
-          <a:p xmlns:a="http://schemas.openxmlformats.org/drawingml/2006/main">
-            <a:pPr algn="l">
-              <a:lnSpc>
-                <a:spcPct val="83000"/>
-              </a:lnSpc>
-              <a:buNone/>
-            </a:pPr>
-            <a:r>
-              <a:rPr sz="1650" b="1">
-                <a:solidFill>
-                  <a:srgbClr val="AF753D"/>
-                </a:solidFill>
-                <a:latin typeface="Microsoft YaHei"/>
-                <a:ea typeface="Microsoft YaHei"/>
-                <a:cs typeface="Microsoft YaHei"/>
-              </a:rPr>
-              <a:t>03</a:t>
-            </a:r>
-            <a:endParaRPr sz="1650" b="1">
-              <a:solidFill>
-                <a:srgbClr val="AF753D"/>
-              </a:solidFill>
-              <a:latin typeface="Microsoft YaHei"/>
-              <a:ea typeface="Microsoft YaHei"/>
-              <a:cs typeface="Microsoft YaHei"/>
-            </a:endParaRPr>
-          </a:p>
-        </p:txBody>
-      </p:sp>
-      <p:sp>
-        <p:nvSpPr>
-          <p:cNvPr id="36" name="文本框 35">
-            <a:extLst xmlns:a="http://schemas.openxmlformats.org/drawingml/2006/main">
-              <a:ext uri="{FF2B5EF4-FFF2-40B4-BE49-F238E27FC236}">
-                <a16:creationId xmlns:a16="http://schemas.microsoft.com/office/drawing/2014/main" id="{31B87B5F-0FAD-4423-9F9F-C907CFAF5C65}"/>
-              </a:ext>
-            </a:extLst>
-          </p:cNvPr>
-          <p:cNvSpPr>
-            <a:spLocks xmlns:a="http://schemas.openxmlformats.org/drawingml/2006/main" noGrp="1"/>
-          </p:cNvSpPr>
-          <p:nvPr/>
-        </p:nvSpPr>
-        <p:spPr>
-          <a:xfrm xmlns:a="http://schemas.openxmlformats.org/drawingml/2006/main">
-            <a:off x="6867525" y="3643094"/>
-            <a:ext cx="3438744" cy="261938"/>
-          </a:xfrm>
-          <a:prstGeom xmlns:a="http://schemas.openxmlformats.org/drawingml/2006/main" prst="rect">
-            <a:avLst/>
-          </a:prstGeom>
-          <a:noFill xmlns:a="http://schemas.openxmlformats.org/drawingml/2006/main"/>
-        </p:spPr>
-        <p:txBody>
-          <a:bodyPr xmlns:a="http://schemas.openxmlformats.org/drawingml/2006/main" wrap="square" lIns="0" tIns="0" rIns="0" bIns="0" anchor="t">
-            <a:noAutofit/>
-          </a:bodyPr>
-          <a:lstStyle xmlns:a="http://schemas.openxmlformats.org/drawingml/2006/main"/>
-          <a:p xmlns:a="http://schemas.openxmlformats.org/drawingml/2006/main">
-            <a:pPr algn="l">
-              <a:lnSpc>
-                <a:spcPct val="104000"/>
-              </a:lnSpc>
-              <a:buNone/>
-            </a:pPr>
-            <a:r>
-              <a:rPr sz="1500" b="1">
-                <a:solidFill>
-                  <a:schemeClr val="tx2">
-                    <a:lumMod val="4356"/>
-                    <a:lumOff val="95644"/>
-                  </a:schemeClr>
-                </a:solidFill>
-                <a:latin typeface="Microsoft YaHei"/>
-                <a:ea typeface="Microsoft YaHei"/>
-                <a:cs typeface="Microsoft YaHei"/>
-              </a:rPr>
-              <a:t>检索｜混合召回、同款判定、SKU 拆分</a:t>
-            </a:r>
-            <a:endParaRPr sz="1500" b="1">
-              <a:solidFill>
-                <a:schemeClr val="tx2">
-                  <a:lumMod val="4356"/>
-                  <a:lumOff val="95644"/>
-                </a:schemeClr>
-              </a:solidFill>
-              <a:latin typeface="Microsoft YaHei"/>
-              <a:ea typeface="Microsoft YaHei"/>
-              <a:cs typeface="Microsoft YaHei"/>
-            </a:endParaRPr>
-          </a:p>
-        </p:txBody>
-      </p:sp>
-      <p:sp>
-        <p:nvSpPr>
-          <p:cNvPr id="37" name="任意多边形 36">
-            <a:extLst xmlns:a="http://schemas.openxmlformats.org/drawingml/2006/main">
-              <a:ext uri="{FF2B5EF4-FFF2-40B4-BE49-F238E27FC236}">
-                <a16:creationId xmlns:a16="http://schemas.microsoft.com/office/drawing/2014/main" id="{766C214A-E0EC-4E65-BEF9-3923D5323C45}"/>
-              </a:ext>
-            </a:extLst>
-          </p:cNvPr>
-          <p:cNvSpPr>
-            <a:spLocks xmlns:a="http://schemas.openxmlformats.org/drawingml/2006/main" noGrp="1"/>
-          </p:cNvSpPr>
-          <p:nvPr/>
-        </p:nvSpPr>
-        <p:spPr>
-          <a:xfrm xmlns:a="http://schemas.openxmlformats.org/drawingml/2006/main">
-            <a:off x="6410325" y="4051935"/>
-            <a:ext cx="342900" cy="342900"/>
-          </a:xfrm>
-          <a:custGeom xmlns:a="http://schemas.openxmlformats.org/drawingml/2006/main">
-            <a:gdLst>
-              <a:gd name="sw" fmla="*/ 1 w 540"/>
-              <a:gd name="sh" fmla="*/ 1 h 540"/>
-              <a:gd name="mins" fmla="min sw sh"/>
-              <a:gd name="dsw" fmla="+- 0 sw mins"/>
-              <a:gd name="dsh" fmla="+- 0 sh mins"/>
-              <a:gd name="p0x0" fmla="*/ 120 w 540"/>
-              <a:gd name="p0y0" fmla="*/ 0 h 540"/>
-              <a:gd name="p0x1" fmla="*/ 420 w 540"/>
-              <a:gd name="p0y1" fmla="*/ 0 h 540"/>
-              <a:gd name="p0x2" fmla="*/ 486 w 540"/>
-              <a:gd name="p0y2" fmla="*/ 0 h 540"/>
-              <a:gd name="p0x3" fmla="*/ 540 w 540"/>
-              <a:gd name="p0y3" fmla="*/ 53 h 540"/>
-              <a:gd name="p0x4" fmla="*/ 540 w 540"/>
-              <a:gd name="p0y4" fmla="*/ 120 h 540"/>
-              <a:gd name="p0x5" fmla="*/ 540 w 540"/>
-              <a:gd name="p0y5" fmla="*/ 420 h 540"/>
-              <a:gd name="p0x6" fmla="*/ 540 w 540"/>
-              <a:gd name="p0y6" fmla="*/ 486 h 540"/>
-              <a:gd name="p0x7" fmla="*/ 486 w 540"/>
-              <a:gd name="p0y7" fmla="*/ 540 h 540"/>
-              <a:gd name="p0x8" fmla="*/ 420 w 540"/>
-              <a:gd name="p0y8" fmla="*/ 540 h 540"/>
-              <a:gd name="p0x9" fmla="*/ 120 w 540"/>
-              <a:gd name="p0y9" fmla="*/ 540 h 540"/>
-              <a:gd name="p0x10" fmla="*/ 53 w 540"/>
-              <a:gd name="p0y10" fmla="*/ 540 h 540"/>
-              <a:gd name="p0x11" fmla="*/ 0 w 540"/>
-              <a:gd name="p0y11" fmla="*/ 486 h 540"/>
-              <a:gd name="p0x12" fmla="*/ 0 w 540"/>
-              <a:gd name="p0y12" fmla="*/ 420 h 540"/>
-              <a:gd name="p0x13" fmla="*/ 0 w 540"/>
-              <a:gd name="p0y13" fmla="*/ 120 h 540"/>
-              <a:gd name="p0x14" fmla="*/ 0 w 540"/>
-              <a:gd name="p0y14" fmla="*/ 53 h 540"/>
-              <a:gd name="p0x15" fmla="*/ 53 w 540"/>
-              <a:gd name="p0y15" fmla="*/ 0 h 540"/>
-              <a:gd name="p0x16" fmla="*/ 120 w 540"/>
-              <a:gd name="p0y16" fmla="*/ 0 h 540"/>
-            </a:gdLst>
-            <a:pathLst>
-              <a:path w="0" h="0">
-                <a:moveTo>
-                  <a:pt x="0" y="0"/>
-                </a:moveTo>
-                <a:lnTo>
-                  <a:pt x="0" y="0"/>
-                </a:lnTo>
-                <a:cubicBezTo>
-                  <a:pt x="0" y="0"/>
-                  <a:pt x="0" y="0"/>
-                  <a:pt x="0" y="0"/>
-                </a:cubicBezTo>
-                <a:lnTo>
-                  <a:pt x="0" y="0"/>
-                </a:lnTo>
-                <a:cubicBezTo>
-                  <a:pt x="0" y="0"/>
-                  <a:pt x="0" y="0"/>
-                  <a:pt x="0" y="0"/>
-                </a:cubicBezTo>
-                <a:lnTo>
-                  <a:pt x="0" y="0"/>
-                </a:lnTo>
-                <a:cubicBezTo>
-                  <a:pt x="0" y="0"/>
-                  <a:pt x="0" y="0"/>
-                  <a:pt x="0" y="0"/>
-                </a:cubicBezTo>
-                <a:lnTo>
-                  <a:pt x="0" y="0"/>
-                </a:lnTo>
-                <a:cubicBezTo>
-                  <a:pt x="0" y="0"/>
-                  <a:pt x="0" y="0"/>
-                  <a:pt x="0" y="0"/>
-                </a:cubicBezTo>
-                <a:close/>
-              </a:path>
-            </a:pathLst>
-          </a:custGeom>
-          <a:solidFill xmlns:a="http://schemas.openxmlformats.org/drawingml/2006/main">
-            <a:schemeClr val="accent1">
-              <a:alpha val="16078"/>
-            </a:schemeClr>
-          </a:solidFill>
-          <a:ln xmlns:a="http://schemas.openxmlformats.org/drawingml/2006/main">
-            <a:noFill/>
-          </a:ln>
-        </p:spPr>
-        <p:style>
-          <a:lnRef xmlns:a="http://schemas.openxmlformats.org/drawingml/2006/main" idx="2">
-            <a:schemeClr val="accent1">
-              <a:lumMod val="75000"/>
-            </a:schemeClr>
-          </a:lnRef>
-          <a:fillRef xmlns:a="http://schemas.openxmlformats.org/drawingml/2006/main" idx="1">
-            <a:schemeClr val="accent1"/>
-          </a:fillRef>
-          <a:effectRef xmlns:a="http://schemas.openxmlformats.org/drawingml/2006/main" idx="0">
-            <a:srgbClr val="FFFFFF"/>
-          </a:effectRef>
-          <a:fontRef xmlns:a="http://schemas.openxmlformats.org/drawingml/2006/main" idx="minor">
-            <a:schemeClr val="lt1"/>
-          </a:fontRef>
-        </p:style>
-        <p:txBody>
-          <a:bodyPr xmlns:a="http://schemas.openxmlformats.org/drawingml/2006/main" anchor="ctr"/>
-          <a:lstStyle xmlns:a="http://schemas.openxmlformats.org/drawingml/2006/main"/>
-          <a:p xmlns:a="http://schemas.openxmlformats.org/drawingml/2006/main">
-            <a:pPr algn="ctr">
-              <a:buNone/>
-            </a:pPr>
-            <a:endParaRPr/>
-          </a:p>
-        </p:txBody>
-      </p:sp>
-      <p:sp>
-        <p:nvSpPr>
-          <p:cNvPr id="38" name="文本框 37">
-            <a:extLst xmlns:a="http://schemas.openxmlformats.org/drawingml/2006/main">
-              <a:ext uri="{FF2B5EF4-FFF2-40B4-BE49-F238E27FC236}">
-                <a16:creationId xmlns:a16="http://schemas.microsoft.com/office/drawing/2014/main" id="{3ACDFD96-E404-4854-BC75-F7F255CEB905}"/>
-              </a:ext>
-            </a:extLst>
-          </p:cNvPr>
-          <p:cNvSpPr>
-            <a:spLocks xmlns:a="http://schemas.openxmlformats.org/drawingml/2006/main" noGrp="1"/>
-          </p:cNvSpPr>
-          <p:nvPr/>
-        </p:nvSpPr>
-        <p:spPr>
-          <a:xfrm xmlns:a="http://schemas.openxmlformats.org/drawingml/2006/main">
-            <a:off x="6450959" y="4101827"/>
-            <a:ext cx="471116" cy="239078"/>
-          </a:xfrm>
-          <a:prstGeom xmlns:a="http://schemas.openxmlformats.org/drawingml/2006/main" prst="rect">
-            <a:avLst/>
-          </a:prstGeom>
-          <a:noFill xmlns:a="http://schemas.openxmlformats.org/drawingml/2006/main"/>
-        </p:spPr>
-        <p:txBody>
-          <a:bodyPr xmlns:a="http://schemas.openxmlformats.org/drawingml/2006/main" wrap="square" lIns="0" tIns="0" rIns="0" bIns="0" anchor="t">
-            <a:noAutofit/>
-          </a:bodyPr>
-          <a:lstStyle xmlns:a="http://schemas.openxmlformats.org/drawingml/2006/main"/>
-          <a:p xmlns:a="http://schemas.openxmlformats.org/drawingml/2006/main">
-            <a:pPr algn="l">
-              <a:lnSpc>
-                <a:spcPct val="83000"/>
-              </a:lnSpc>
-              <a:buNone/>
-            </a:pPr>
-            <a:r>
-              <a:rPr sz="1650" b="1">
-                <a:solidFill>
-                  <a:srgbClr val="AF753D"/>
-                </a:solidFill>
-                <a:latin typeface="Microsoft YaHei"/>
-                <a:ea typeface="Microsoft YaHei"/>
-                <a:cs typeface="Microsoft YaHei"/>
-              </a:rPr>
-              <a:t>04</a:t>
-            </a:r>
-            <a:endParaRPr sz="1650" b="1">
-              <a:solidFill>
-                <a:srgbClr val="AF753D"/>
-              </a:solidFill>
-              <a:latin typeface="Microsoft YaHei"/>
-              <a:ea typeface="Microsoft YaHei"/>
-              <a:cs typeface="Microsoft YaHei"/>
-            </a:endParaRPr>
-          </a:p>
-        </p:txBody>
-      </p:sp>
-      <p:sp>
-        <p:nvSpPr>
-          <p:cNvPr id="39" name="文本框 38">
-            <a:extLst xmlns:a="http://schemas.openxmlformats.org/drawingml/2006/main">
-              <a:ext uri="{FF2B5EF4-FFF2-40B4-BE49-F238E27FC236}">
-                <a16:creationId xmlns:a16="http://schemas.microsoft.com/office/drawing/2014/main" id="{CB5F29E2-4D6C-481D-822D-A2DEF0D699E8}"/>
-              </a:ext>
-            </a:extLst>
-          </p:cNvPr>
-          <p:cNvSpPr>
-            <a:spLocks xmlns:a="http://schemas.openxmlformats.org/drawingml/2006/main" noGrp="1"/>
-          </p:cNvSpPr>
-          <p:nvPr/>
-        </p:nvSpPr>
-        <p:spPr>
-          <a:xfrm xmlns:a="http://schemas.openxmlformats.org/drawingml/2006/main">
-            <a:off x="6867525" y="4090397"/>
-            <a:ext cx="4752232" cy="261938"/>
-          </a:xfrm>
-          <a:prstGeom xmlns:a="http://schemas.openxmlformats.org/drawingml/2006/main" prst="rect">
-            <a:avLst/>
-          </a:prstGeom>
-          <a:noFill xmlns:a="http://schemas.openxmlformats.org/drawingml/2006/main"/>
-        </p:spPr>
-        <p:txBody>
-          <a:bodyPr xmlns:a="http://schemas.openxmlformats.org/drawingml/2006/main" wrap="square" lIns="0" tIns="0" rIns="0" bIns="0" anchor="t">
-            <a:noAutofit/>
-          </a:bodyPr>
-          <a:lstStyle xmlns:a="http://schemas.openxmlformats.org/drawingml/2006/main"/>
-          <a:p xmlns:a="http://schemas.openxmlformats.org/drawingml/2006/main">
-            <a:pPr algn="l">
-              <a:lnSpc>
-                <a:spcPct val="104000"/>
-              </a:lnSpc>
-              <a:buNone/>
-            </a:pPr>
-            <a:r>
-              <a:rPr sz="1500" b="1">
-                <a:solidFill>
-                  <a:schemeClr val="tx2">
-                    <a:lumMod val="4356"/>
-                    <a:lumOff val="95644"/>
-                  </a:schemeClr>
-                </a:solidFill>
-                <a:latin typeface="Microsoft YaHei"/>
-                <a:ea typeface="Microsoft YaHei"/>
-                <a:cs typeface="Microsoft YaHei"/>
-              </a:rPr>
-              <a:t>决策｜只在同一 SKU 内比价，并输出证据</a:t>
-            </a:r>
-            <a:endParaRPr sz="1500" b="1">
-              <a:solidFill>
-                <a:schemeClr val="tx2">
-                  <a:lumMod val="4356"/>
-                  <a:lumOff val="95644"/>
-                </a:schemeClr>
-              </a:solidFill>
-              <a:latin typeface="Microsoft YaHei"/>
-              <a:ea typeface="Microsoft YaHei"/>
-              <a:cs typeface="Microsoft YaHei"/>
-            </a:endParaRPr>
-          </a:p>
-        </p:txBody>
-      </p:sp>
-      <p:sp>
-        <p:nvSpPr>
-          <p:cNvPr id="43" name="任意多边形 42">
-            <a:extLst xmlns:a="http://schemas.openxmlformats.org/drawingml/2006/main">
-              <a:ext uri="{FF2B5EF4-FFF2-40B4-BE49-F238E27FC236}">
-                <a16:creationId xmlns:a16="http://schemas.microsoft.com/office/drawing/2014/main" id="{DB33CBCD-20E4-42C6-B272-B809C76CA4F3}"/>
-              </a:ext>
-            </a:extLst>
-          </p:cNvPr>
-          <p:cNvSpPr>
-            <a:spLocks xmlns:a="http://schemas.openxmlformats.org/drawingml/2006/main" noGrp="1"/>
-          </p:cNvSpPr>
-          <p:nvPr/>
-        </p:nvSpPr>
-        <p:spPr>
-          <a:xfrm xmlns:a="http://schemas.openxmlformats.org/drawingml/2006/main">
-            <a:off x="571500" y="5621020"/>
-            <a:ext cx="11049000" cy="666750"/>
-          </a:xfrm>
-          <a:custGeom xmlns:a="http://schemas.openxmlformats.org/drawingml/2006/main">
-            <a:gdLst>
-              <a:gd name="sw" fmla="*/ 1 w 17400"/>
-              <a:gd name="sh" fmla="*/ 1 h 1050"/>
-              <a:gd name="mins" fmla="min sw sh"/>
-              <a:gd name="dsw" fmla="+- 0 sw mins"/>
-              <a:gd name="dsh" fmla="+- 0 sh mins"/>
-              <a:gd name="p0x0" fmla="*/ 120 w 17400"/>
-              <a:gd name="p0y0" fmla="*/ 0 h 1050"/>
-              <a:gd name="p0x1" fmla="*/ 17280 w 17400"/>
-              <a:gd name="p0y1" fmla="*/ 0 h 1050"/>
-              <a:gd name="p0x2" fmla="*/ 17346 w 17400"/>
-              <a:gd name="p0y2" fmla="*/ 0 h 1050"/>
-              <a:gd name="p0x3" fmla="*/ 17400 w 17400"/>
-              <a:gd name="p0y3" fmla="*/ 53 h 1050"/>
-              <a:gd name="p0x4" fmla="*/ 17400 w 17400"/>
-              <a:gd name="p0y4" fmla="*/ 120 h 1050"/>
-              <a:gd name="p0x5" fmla="*/ 17400 w 17400"/>
-              <a:gd name="p0y5" fmla="*/ 930 h 1050"/>
-              <a:gd name="p0x6" fmla="*/ 17400 w 17400"/>
-              <a:gd name="p0y6" fmla="*/ 996 h 1050"/>
-              <a:gd name="p0x7" fmla="*/ 17346 w 17400"/>
-              <a:gd name="p0y7" fmla="*/ 1050 h 1050"/>
-              <a:gd name="p0x8" fmla="*/ 17280 w 17400"/>
-              <a:gd name="p0y8" fmla="*/ 1050 h 1050"/>
-              <a:gd name="p0x9" fmla="*/ 120 w 17400"/>
-              <a:gd name="p0y9" fmla="*/ 1050 h 1050"/>
-              <a:gd name="p0x10" fmla="*/ 53 w 17400"/>
-              <a:gd name="p0y10" fmla="*/ 1050 h 1050"/>
-              <a:gd name="p0x11" fmla="*/ 0 w 17400"/>
-              <a:gd name="p0y11" fmla="*/ 996 h 1050"/>
-              <a:gd name="p0x12" fmla="*/ 0 w 17400"/>
-              <a:gd name="p0y12" fmla="*/ 930 h 1050"/>
-              <a:gd name="p0x13" fmla="*/ 0 w 17400"/>
-              <a:gd name="p0y13" fmla="*/ 120 h 1050"/>
-              <a:gd name="p0x14" fmla="*/ 0 w 17400"/>
-              <a:gd name="p0y14" fmla="*/ 53 h 1050"/>
-              <a:gd name="p0x15" fmla="*/ 53 w 17400"/>
-              <a:gd name="p0y15" fmla="*/ 0 h 1050"/>
-              <a:gd name="p0x16" fmla="*/ 120 w 17400"/>
-              <a:gd name="p0y16" fmla="*/ 0 h 1050"/>
-            </a:gdLst>
-            <a:pathLst>
-              <a:path w="0" h="0">
-                <a:moveTo>
-                  <a:pt x="0" y="0"/>
-                </a:moveTo>
-                <a:lnTo>
-                  <a:pt x="0" y="0"/>
-                </a:lnTo>
-                <a:cubicBezTo>
-                  <a:pt x="0" y="0"/>
-                  <a:pt x="0" y="0"/>
-                  <a:pt x="0" y="0"/>
-                </a:cubicBezTo>
-                <a:lnTo>
-                  <a:pt x="0" y="0"/>
-                </a:lnTo>
-                <a:cubicBezTo>
-                  <a:pt x="0" y="0"/>
-                  <a:pt x="0" y="0"/>
-                  <a:pt x="0" y="0"/>
-                </a:cubicBezTo>
-                <a:lnTo>
-                  <a:pt x="0" y="0"/>
-                </a:lnTo>
-                <a:cubicBezTo>
-                  <a:pt x="0" y="0"/>
-                  <a:pt x="0" y="0"/>
-                  <a:pt x="0" y="0"/>
-                </a:cubicBezTo>
-                <a:lnTo>
-                  <a:pt x="0" y="0"/>
-                </a:lnTo>
-                <a:cubicBezTo>
-                  <a:pt x="0" y="0"/>
-                  <a:pt x="0" y="0"/>
-                  <a:pt x="0" y="0"/>
-                </a:cubicBezTo>
-                <a:close/>
-              </a:path>
-            </a:pathLst>
-          </a:custGeom>
-          <a:solidFill xmlns:a="http://schemas.openxmlformats.org/drawingml/2006/main">
-            <a:schemeClr val="accent1">
-              <a:lumMod val="69069"/>
-            </a:schemeClr>
-          </a:solidFill>
-          <a:ln xmlns:a="http://schemas.openxmlformats.org/drawingml/2006/main">
-            <a:noFill/>
-          </a:ln>
-          <a:effectLst xmlns:a="http://schemas.openxmlformats.org/drawingml/2006/main">
-            <a:outerShdw blurRad="142875" algn="ctr" rotWithShape="0">
-              <a:schemeClr val="accent2">
-                <a:alpha val="12157"/>
-              </a:schemeClr>
-            </a:outerShdw>
-          </a:effectLst>
-        </p:spPr>
-        <p:style>
-          <a:lnRef xmlns:a="http://schemas.openxmlformats.org/drawingml/2006/main" idx="2">
-            <a:schemeClr val="accent1">
-              <a:lumMod val="75000"/>
-            </a:schemeClr>
-          </a:lnRef>
-          <a:fillRef xmlns:a="http://schemas.openxmlformats.org/drawingml/2006/main" idx="1">
-            <a:schemeClr val="accent1"/>
-          </a:fillRef>
-          <a:effectRef xmlns:a="http://schemas.openxmlformats.org/drawingml/2006/main" idx="0">
-            <a:srgbClr val="FFFFFF"/>
-          </a:effectRef>
-          <a:fontRef xmlns:a="http://schemas.openxmlformats.org/drawingml/2006/main" idx="minor">
-            <a:schemeClr val="lt1"/>
-          </a:fontRef>
-        </p:style>
-        <p:txBody>
-          <a:bodyPr xmlns:a="http://schemas.openxmlformats.org/drawingml/2006/main" anchor="ctr"/>
-          <a:lstStyle xmlns:a="http://schemas.openxmlformats.org/drawingml/2006/main"/>
-          <a:p xmlns:a="http://schemas.openxmlformats.org/drawingml/2006/main">
-            <a:pPr algn="ctr">
-              <a:buNone/>
-            </a:pPr>
-            <a:endParaRPr/>
-          </a:p>
-        </p:txBody>
-      </p:sp>
-      <p:sp>
-        <p:nvSpPr>
-          <p:cNvPr id="44" name="文本框 43">
-            <a:extLst xmlns:a="http://schemas.openxmlformats.org/drawingml/2006/main">
-              <a:ext uri="{FF2B5EF4-FFF2-40B4-BE49-F238E27FC236}">
-                <a16:creationId xmlns:a16="http://schemas.microsoft.com/office/drawing/2014/main" id="{A788C6D1-B698-4EB4-A2E9-9A4526EB64C9}"/>
-              </a:ext>
-            </a:extLst>
-          </p:cNvPr>
-          <p:cNvSpPr>
-            <a:spLocks xmlns:a="http://schemas.openxmlformats.org/drawingml/2006/main" noGrp="1"/>
-          </p:cNvSpPr>
-          <p:nvPr/>
-        </p:nvSpPr>
-        <p:spPr>
-          <a:xfrm xmlns:a="http://schemas.openxmlformats.org/drawingml/2006/main">
-            <a:off x="762000" y="5796867"/>
-            <a:ext cx="3657829" cy="311468"/>
-          </a:xfrm>
-          <a:prstGeom xmlns:a="http://schemas.openxmlformats.org/drawingml/2006/main" prst="rect">
-            <a:avLst/>
-          </a:prstGeom>
-          <a:noFill xmlns:a="http://schemas.openxmlformats.org/drawingml/2006/main"/>
-        </p:spPr>
-        <p:txBody>
-          <a:bodyPr xmlns:a="http://schemas.openxmlformats.org/drawingml/2006/main" wrap="square" lIns="0" tIns="0" rIns="0" bIns="0" anchor="t">
-            <a:noAutofit/>
-          </a:bodyPr>
-          <a:lstStyle xmlns:a="http://schemas.openxmlformats.org/drawingml/2006/main"/>
-          <a:p xmlns:a="http://schemas.openxmlformats.org/drawingml/2006/main">
-            <a:pPr algn="l">
-              <a:lnSpc>
-                <a:spcPct val="104000"/>
-              </a:lnSpc>
-              <a:buNone/>
-            </a:pPr>
-            <a:r>
-              <a:rPr b="1">
-                <a:solidFill>
-                  <a:srgbClr val="FFFFFF"/>
-                </a:solidFill>
-                <a:latin typeface="Microsoft YaHei"/>
-                <a:ea typeface="Microsoft YaHei"/>
-                <a:cs typeface="Microsoft YaHei"/>
-              </a:rPr>
-              <a:t>先确定“同款”，再比较价格</a:t>
-            </a:r>
-            <a:endParaRPr b="1">
-              <a:solidFill>
-                <a:srgbClr val="FFFFFF"/>
-              </a:solidFill>
-              <a:latin typeface="Microsoft YaHei"/>
-              <a:ea typeface="Microsoft YaHei"/>
-              <a:cs typeface="Microsoft YaHei"/>
-            </a:endParaRPr>
-          </a:p>
-        </p:txBody>
-      </p:sp>
-    </p:spTree>
-    <p:extLst>
-      <p:ext uri="{BB962C8B-B14F-4D97-AF65-F5344CB8AC3E}">
-        <p14:creationId xmlns:p14="http://schemas.microsoft.com/office/powerpoint/2010/main" val="28428897"/>
-      </p:ext>
-    </p:extLst>
-  </p:cSld>
-</p:sld>
-</file>
-
 <file path=ppt/theme/theme1.xml><?xml version="1.0" encoding="utf-8"?>
 <a:theme xmlns:a="http://schemas.openxmlformats.org/drawingml/2006/main" name="商务风黑金色通用模板">
   <a:themeElements>

--- a/识价镜_Agent_技术面试演示_黑金模板版.pptx
+++ b/识价镜_Agent_技术面试演示_黑金模板版.pptx
@@ -2,14 +2,16 @@
 <file path=ppt/presentation.xml><?xml version="1.0" encoding="utf-8"?>
 <p:presentation xmlns:p="http://schemas.openxmlformats.org/presentationml/2006/main">
   <p:sldMasterIdLst>
-    <p:sldMasterId xmlns:r="http://schemas.openxmlformats.org/officeDocument/2006/relationships" id="2147483648" r:id="R3900f8e8f1964f2b"/>
+    <p:sldMasterId xmlns:r="http://schemas.openxmlformats.org/officeDocument/2006/relationships" id="2147483648" r:id="R040039073d544808"/>
   </p:sldMasterIdLst>
   <p:notesMasterIdLst>
-    <p:notesMasterId xmlns:r="http://schemas.openxmlformats.org/officeDocument/2006/relationships" r:id="R8aa2f9b7068b403c"/>
+    <p:notesMasterId xmlns:r="http://schemas.openxmlformats.org/officeDocument/2006/relationships" r:id="R7f5ea349fdfb47c2"/>
   </p:notesMasterIdLst>
   <p:sldIdLst>
-    <p:sldId xmlns:r="http://schemas.openxmlformats.org/officeDocument/2006/relationships" id="256" r:id="R4d9c06456d194175"/>
-    <p:sldId xmlns:r="http://schemas.openxmlformats.org/officeDocument/2006/relationships" id="257" r:id="R0fd6e79c5a0342b8"/>
+    <p:sldId xmlns:r="http://schemas.openxmlformats.org/officeDocument/2006/relationships" id="256" r:id="Rf9726ced1e4d4f96"/>
+    <p:sldId xmlns:r="http://schemas.openxmlformats.org/officeDocument/2006/relationships" id="257" r:id="R46cce67526d24fb8"/>
+    <p:sldId xmlns:r="http://schemas.openxmlformats.org/officeDocument/2006/relationships" id="258" r:id="Rb12121e16fee4057"/>
+    <p:sldId xmlns:r="http://schemas.openxmlformats.org/officeDocument/2006/relationships" id="259" r:id="R20d8666570294237"/>
   </p:sldIdLst>
   <p:sldSz cx="12192000" cy="6858000"/>
   <p:notesSz cx="6858000" cy="9144000"/>
@@ -529,6 +531,201 @@
 </p:notes>
 </file>
 
+<file path=ppt/notesSlides/notesSlide3.xml><?xml version="1.0" encoding="utf-8"?>
+<p:notes xmlns:p="http://schemas.openxmlformats.org/presentationml/2006/main">
+  <p:cSld>
+    <p:spTree>
+      <p:nvGrpSpPr>
+        <p:cNvPr id="1" name=""/>
+        <p:cNvGrpSpPr/>
+        <p:nvPr/>
+      </p:nvGrpSpPr>
+      <p:grpSpPr>
+        <a:xfrm xmlns:a="http://schemas.openxmlformats.org/drawingml/2006/main"/>
+      </p:grpSpPr>
+      <p:sp>
+        <p:nvSpPr>
+          <p:cNvPr id="2" name="Slide Image Placeholder 1"/>
+          <p:cNvSpPr>
+            <a:spLocks xmlns:a="http://schemas.openxmlformats.org/drawingml/2006/main" noGrp="1"/>
+          </p:cNvSpPr>
+          <p:nvPr>
+            <p:ph type="sldImg" idx="0"/>
+          </p:nvPr>
+        </p:nvSpPr>
+        <p:spPr/>
+      </p:sp>
+      <p:sp>
+        <p:nvSpPr>
+          <p:cNvPr id="3" name="Notes Placeholder 2"/>
+          <p:cNvSpPr>
+            <a:spLocks xmlns:a="http://schemas.openxmlformats.org/drawingml/2006/main" noGrp="1"/>
+          </p:cNvSpPr>
+          <p:nvPr>
+            <p:ph type="body" idx="1"/>
+          </p:nvPr>
+        </p:nvSpPr>
+        <p:spPr/>
+        <p:txBody>
+          <a:bodyPr xmlns:a="http://schemas.openxmlformats.org/drawingml/2006/main"/>
+          <a:lstStyle xmlns:a="http://schemas.openxmlformats.org/drawingml/2006/main"/>
+          <a:p xmlns:a="http://schemas.openxmlformats.org/drawingml/2006/main">
+            <a:r>
+              <a:t>原始方案以共享 AgentState 的专业子图进行编排。</a:t>
+            </a:r>
+          </a:p>
+          <a:p xmlns:a="http://schemas.openxmlformats.org/drawingml/2006/main">
+            <a:r>
+              <a:t/>
+            </a:r>
+          </a:p>
+          <a:p xmlns:a="http://schemas.openxmlformats.org/drawingml/2006/main">
+            <a:r>
+              <a:t>[Sources]</a:t>
+            </a:r>
+          </a:p>
+          <a:p xmlns:a="http://schemas.openxmlformats.org/drawingml/2006/main">
+            <a:r>
+              <a:t>- D:\E.C.26-B\docs\plans\multi_agent_upgrade_plan.md</a:t>
+            </a:r>
+          </a:p>
+          <a:p xmlns:a="http://schemas.openxmlformats.org/drawingml/2006/main">
+            <a:r>
+              <a:t>- D:\E.C.26-B\docs\multi_agent.md</a:t>
+            </a:r>
+          </a:p>
+          <a:p xmlns:a="http://schemas.openxmlformats.org/drawingml/2006/main">
+            <a:r>
+              <a:t>[/Sources]</a:t>
+            </a:r>
+          </a:p>
+        </p:txBody>
+      </p:sp>
+      <p:sp>
+        <p:nvSpPr>
+          <p:cNvPr id="4" name="Slide Number Placeholder 3"/>
+          <p:cNvSpPr>
+            <a:spLocks xmlns:a="http://schemas.openxmlformats.org/drawingml/2006/main" noGrp="1"/>
+          </p:cNvSpPr>
+          <p:nvPr>
+            <p:ph type="sldNum" idx="5"/>
+          </p:nvPr>
+        </p:nvSpPr>
+        <p:spPr/>
+        <p:txBody>
+          <a:bodyPr xmlns:a="http://schemas.openxmlformats.org/drawingml/2006/main"/>
+          <a:lstStyle xmlns:a="http://schemas.openxmlformats.org/drawingml/2006/main"/>
+          <a:p xmlns:a="http://schemas.openxmlformats.org/drawingml/2006/main"/>
+        </p:txBody>
+      </p:sp>
+    </p:spTree>
+  </p:cSld>
+  <p:clrMapOvr>
+    <a:masterClrMapping xmlns:a="http://schemas.openxmlformats.org/drawingml/2006/main"/>
+  </p:clrMapOvr>
+</p:notes>
+</file>
+
+<file path=ppt/notesSlides/notesSlide4.xml><?xml version="1.0" encoding="utf-8"?>
+<p:notes xmlns:p="http://schemas.openxmlformats.org/presentationml/2006/main">
+  <p:cSld>
+    <p:spTree>
+      <p:nvGrpSpPr>
+        <p:cNvPr id="1" name=""/>
+        <p:cNvGrpSpPr/>
+        <p:nvPr/>
+      </p:nvGrpSpPr>
+      <p:grpSpPr>
+        <a:xfrm xmlns:a="http://schemas.openxmlformats.org/drawingml/2006/main"/>
+      </p:grpSpPr>
+      <p:sp>
+        <p:nvSpPr>
+          <p:cNvPr id="2" name="Slide Image Placeholder 1"/>
+          <p:cNvSpPr>
+            <a:spLocks xmlns:a="http://schemas.openxmlformats.org/drawingml/2006/main" noGrp="1"/>
+          </p:cNvSpPr>
+          <p:nvPr>
+            <p:ph type="sldImg" idx="0"/>
+          </p:nvPr>
+        </p:nvSpPr>
+        <p:spPr/>
+      </p:sp>
+      <p:sp>
+        <p:nvSpPr>
+          <p:cNvPr id="3" name="Notes Placeholder 2"/>
+          <p:cNvSpPr>
+            <a:spLocks xmlns:a="http://schemas.openxmlformats.org/drawingml/2006/main" noGrp="1"/>
+          </p:cNvSpPr>
+          <p:nvPr>
+            <p:ph type="body" idx="1"/>
+          </p:nvPr>
+        </p:nvSpPr>
+        <p:spPr/>
+        <p:txBody>
+          <a:bodyPr xmlns:a="http://schemas.openxmlformats.org/drawingml/2006/main"/>
+          <a:lstStyle xmlns:a="http://schemas.openxmlformats.org/drawingml/2006/main"/>
+          <a:p xmlns:a="http://schemas.openxmlformats.org/drawingml/2006/main">
+            <a:r>
+              <a:t>受控层级式 Multi-Agent 使用 Supervisor、严格任务协议和五类私有 Specialist。</a:t>
+            </a:r>
+          </a:p>
+          <a:p xmlns:a="http://schemas.openxmlformats.org/drawingml/2006/main">
+            <a:r>
+              <a:t/>
+            </a:r>
+          </a:p>
+          <a:p xmlns:a="http://schemas.openxmlformats.org/drawingml/2006/main">
+            <a:r>
+              <a:t>[Sources]</a:t>
+            </a:r>
+          </a:p>
+          <a:p xmlns:a="http://schemas.openxmlformats.org/drawingml/2006/main">
+            <a:r>
+              <a:t>- D:\E.C.26-B\docs\multi_agent.md</a:t>
+            </a:r>
+          </a:p>
+          <a:p xmlns:a="http://schemas.openxmlformats.org/drawingml/2006/main">
+            <a:r>
+              <a:t>- D:\E.C.26-B\docs\architecture.md</a:t>
+            </a:r>
+          </a:p>
+          <a:p xmlns:a="http://schemas.openxmlformats.org/drawingml/2006/main">
+            <a:r>
+              <a:t>- D:\E.C.26-B\docs\workflow.md</a:t>
+            </a:r>
+          </a:p>
+          <a:p xmlns:a="http://schemas.openxmlformats.org/drawingml/2006/main">
+            <a:r>
+              <a:t>[/Sources]</a:t>
+            </a:r>
+          </a:p>
+        </p:txBody>
+      </p:sp>
+      <p:sp>
+        <p:nvSpPr>
+          <p:cNvPr id="4" name="Slide Number Placeholder 3"/>
+          <p:cNvSpPr>
+            <a:spLocks xmlns:a="http://schemas.openxmlformats.org/drawingml/2006/main" noGrp="1"/>
+          </p:cNvSpPr>
+          <p:nvPr>
+            <p:ph type="sldNum" idx="5"/>
+          </p:nvPr>
+        </p:nvSpPr>
+        <p:spPr/>
+        <p:txBody>
+          <a:bodyPr xmlns:a="http://schemas.openxmlformats.org/drawingml/2006/main"/>
+          <a:lstStyle xmlns:a="http://schemas.openxmlformats.org/drawingml/2006/main"/>
+          <a:p xmlns:a="http://schemas.openxmlformats.org/drawingml/2006/main"/>
+        </p:txBody>
+      </p:sp>
+    </p:spTree>
+  </p:cSld>
+  <p:clrMapOvr>
+    <a:masterClrMapping xmlns:a="http://schemas.openxmlformats.org/drawingml/2006/main"/>
+  </p:clrMapOvr>
+</p:notes>
+</file>
+
 <file path=ppt/slideLayouts/slideLayout1.xml><?xml version="1.0" encoding="utf-8"?>
 <p:sldLayout xmlns:p="http://schemas.openxmlformats.org/presentationml/2006/main" type="obj" preserve="1">
   <p:cSld name="标题和内容">
@@ -546,7 +743,7 @@
           <p:cNvPr id="2" name="标题 1">
             <a:extLst xmlns:a="http://schemas.openxmlformats.org/drawingml/2006/main">
               <a:ext uri="{FF2B5EF4-FFF2-40B4-BE49-F238E27FC236}">
-                <a16:creationId xmlns:a16="http://schemas.microsoft.com/office/drawing/2014/main" id="{B4409EF6-F7BE-4C6C-838A-1EFD0FDDA992}"/>
+                <a16:creationId xmlns:a16="http://schemas.microsoft.com/office/drawing/2014/main" id="{75AB7CB8-8743-482D-A61F-6DA3337C90A6}"/>
               </a:ext>
             </a:extLst>
           </p:cNvPr>
@@ -576,7 +773,7 @@
           <p:cNvPr id="3" name="内容占位符 2">
             <a:extLst xmlns:a="http://schemas.openxmlformats.org/drawingml/2006/main">
               <a:ext uri="{FF2B5EF4-FFF2-40B4-BE49-F238E27FC236}">
-                <a16:creationId xmlns:a16="http://schemas.microsoft.com/office/drawing/2014/main" id="{22F59B74-CAAF-4B13-A806-D4AC86C599D7}"/>
+                <a16:creationId xmlns:a16="http://schemas.microsoft.com/office/drawing/2014/main" id="{49C75EBA-EC5D-4297-8B4A-F5F851AF04F7}"/>
               </a:ext>
             </a:extLst>
           </p:cNvPr>
@@ -654,7 +851,7 @@
           <p:cNvPr id="4" name="日期占位符 3">
             <a:extLst xmlns:a="http://schemas.openxmlformats.org/drawingml/2006/main">
               <a:ext uri="{FF2B5EF4-FFF2-40B4-BE49-F238E27FC236}">
-                <a16:creationId xmlns:a16="http://schemas.microsoft.com/office/drawing/2014/main" id="{B43E851C-8EF0-4DB3-BBFC-12BBB3F8BFA2}"/>
+                <a16:creationId xmlns:a16="http://schemas.microsoft.com/office/drawing/2014/main" id="{BDCB88FD-84CB-46CC-A78C-66F467FE6540}"/>
               </a:ext>
             </a:extLst>
           </p:cNvPr>
@@ -681,7 +878,7 @@
           <p:cNvPr id="5" name="页脚占位符 4">
             <a:extLst xmlns:a="http://schemas.openxmlformats.org/drawingml/2006/main">
               <a:ext uri="{FF2B5EF4-FFF2-40B4-BE49-F238E27FC236}">
-                <a16:creationId xmlns:a16="http://schemas.microsoft.com/office/drawing/2014/main" id="{344806A9-A3D1-4B04-B09F-7714B6D4ADEA}"/>
+                <a16:creationId xmlns:a16="http://schemas.microsoft.com/office/drawing/2014/main" id="{F2CACDC7-2516-4A11-B8DE-71A381D46FD1}"/>
               </a:ext>
             </a:extLst>
           </p:cNvPr>
@@ -706,7 +903,7 @@
           <p:cNvPr id="6" name="灯片编号占位符 5">
             <a:extLst xmlns:a="http://schemas.openxmlformats.org/drawingml/2006/main">
               <a:ext uri="{FF2B5EF4-FFF2-40B4-BE49-F238E27FC236}">
-                <a16:creationId xmlns:a16="http://schemas.microsoft.com/office/drawing/2014/main" id="{2A0AACE6-0A4E-4127-B4FF-E0B335678175}"/>
+                <a16:creationId xmlns:a16="http://schemas.microsoft.com/office/drawing/2014/main" id="{0D6AD8BA-F47C-4841-A97F-BFE7B3051308}"/>
               </a:ext>
             </a:extLst>
           </p:cNvPr>
@@ -754,7 +951,7 @@
           <p:nvPr/>
         </p:nvPicPr>
         <p:blipFill>
-          <a:blip xmlns:r="http://schemas.openxmlformats.org/officeDocument/2006/relationships" xmlns:a="http://schemas.openxmlformats.org/drawingml/2006/main" r:embed="Rd69bf00caa8747d5"/>
+          <a:blip xmlns:r="http://schemas.openxmlformats.org/officeDocument/2006/relationships" xmlns:a="http://schemas.openxmlformats.org/drawingml/2006/main" r:embed="Rc2ebc581f99241c7"/>
           <a:srcRect xmlns:a="http://schemas.openxmlformats.org/drawingml/2006/main" l="0" t="0" r="39" b="0"/>
           <a:stretch xmlns:a="http://schemas.openxmlformats.org/drawingml/2006/main">
             <a:fillRect l="0" t="0" r="0" b="0"/>
@@ -772,7 +969,7 @@
           <p:cNvPr id="9" name="任意多边形: 形状 8">
             <a:extLst xmlns:a="http://schemas.openxmlformats.org/drawingml/2006/main">
               <a:ext uri="{FF2B5EF4-FFF2-40B4-BE49-F238E27FC236}">
-                <a16:creationId xmlns:a16="http://schemas.microsoft.com/office/drawing/2014/main" id="{1510B366-893C-4B37-847E-3BA3385F6738}"/>
+                <a16:creationId xmlns:a16="http://schemas.microsoft.com/office/drawing/2014/main" id="{197BFD17-133C-4AAD-A7F8-C875513F1EED}"/>
               </a:ext>
             </a:extLst>
           </p:cNvPr>
@@ -864,7 +1061,7 @@
           <p:cNvPr id="10" name="任意多边形: 形状 9">
             <a:extLst xmlns:a="http://schemas.openxmlformats.org/drawingml/2006/main">
               <a:ext uri="{FF2B5EF4-FFF2-40B4-BE49-F238E27FC236}">
-                <a16:creationId xmlns:a16="http://schemas.microsoft.com/office/drawing/2014/main" id="{109691CE-97F7-48A9-9527-C161EBB55824}"/>
+                <a16:creationId xmlns:a16="http://schemas.microsoft.com/office/drawing/2014/main" id="{15F5C46D-B77F-4A85-A78F-904A585CCCF7}"/>
               </a:ext>
             </a:extLst>
           </p:cNvPr>
@@ -1040,7 +1237,7 @@
           <p:cNvPr id="12" name="日期占位符 4">
             <a:extLst xmlns:a="http://schemas.openxmlformats.org/drawingml/2006/main">
               <a:ext uri="{FF2B5EF4-FFF2-40B4-BE49-F238E27FC236}">
-                <a16:creationId xmlns:a16="http://schemas.microsoft.com/office/drawing/2014/main" id="{3ADB5846-1E00-4189-89F2-6382AF104882}"/>
+                <a16:creationId xmlns:a16="http://schemas.microsoft.com/office/drawing/2014/main" id="{FA620628-15D9-4237-9782-A8C17FAC56CF}"/>
               </a:ext>
             </a:extLst>
           </p:cNvPr>
@@ -1067,7 +1264,7 @@
           <p:cNvPr id="13" name="页脚占位符 5">
             <a:extLst xmlns:a="http://schemas.openxmlformats.org/drawingml/2006/main">
               <a:ext uri="{FF2B5EF4-FFF2-40B4-BE49-F238E27FC236}">
-                <a16:creationId xmlns:a16="http://schemas.microsoft.com/office/drawing/2014/main" id="{79F2D441-8F26-4B66-951A-C21FB2B111D3}"/>
+                <a16:creationId xmlns:a16="http://schemas.microsoft.com/office/drawing/2014/main" id="{6C8A8CF0-A843-463B-868A-D910BBF6FC21}"/>
               </a:ext>
             </a:extLst>
           </p:cNvPr>
@@ -1092,7 +1289,7 @@
           <p:cNvPr id="14" name="灯片编号占位符 6">
             <a:extLst xmlns:a="http://schemas.openxmlformats.org/drawingml/2006/main">
               <a:ext uri="{FF2B5EF4-FFF2-40B4-BE49-F238E27FC236}">
-                <a16:creationId xmlns:a16="http://schemas.microsoft.com/office/drawing/2014/main" id="{608FE3D9-9DD6-424B-9E19-D7A09086E4E1}"/>
+                <a16:creationId xmlns:a16="http://schemas.microsoft.com/office/drawing/2014/main" id="{DA961413-5BDD-475C-8BCC-EF5802927400}"/>
               </a:ext>
             </a:extLst>
           </p:cNvPr>
@@ -1119,7 +1316,7 @@
           <p:cNvPr id="6" name="标题 1">
             <a:extLst xmlns:a="http://schemas.openxmlformats.org/drawingml/2006/main">
               <a:ext uri="{FF2B5EF4-FFF2-40B4-BE49-F238E27FC236}">
-                <a16:creationId xmlns:a16="http://schemas.microsoft.com/office/drawing/2014/main" id="{3C5D7D5C-5E5D-4CB5-9DCC-6A07775BE137}"/>
+                <a16:creationId xmlns:a16="http://schemas.microsoft.com/office/drawing/2014/main" id="{E5916B6A-60F0-4CB9-B9A1-E8957D80DC0F}"/>
               </a:ext>
             </a:extLst>
           </p:cNvPr>
@@ -1172,7 +1369,7 @@
           <p:cNvPr id="11" name="节编号 3">
             <a:extLst xmlns:a="http://schemas.openxmlformats.org/drawingml/2006/main">
               <a:ext uri="{FF2B5EF4-FFF2-40B4-BE49-F238E27FC236}">
-                <a16:creationId xmlns:a16="http://schemas.microsoft.com/office/drawing/2014/main" id="{7DA75A0A-164F-44B8-B171-F5601E42804A}"/>
+                <a16:creationId xmlns:a16="http://schemas.microsoft.com/office/drawing/2014/main" id="{FA366FD4-BE76-4078-BB2E-644C5A4E8C2B}"/>
               </a:ext>
             </a:extLst>
           </p:cNvPr>
@@ -1260,7 +1457,7 @@
           <p:nvPr/>
         </p:nvPicPr>
         <p:blipFill>
-          <a:blip xmlns:r="http://schemas.openxmlformats.org/officeDocument/2006/relationships" xmlns:a="http://schemas.openxmlformats.org/drawingml/2006/main" r:embed="Rd566d0ffcb29459a"/>
+          <a:blip xmlns:r="http://schemas.openxmlformats.org/officeDocument/2006/relationships" xmlns:a="http://schemas.openxmlformats.org/drawingml/2006/main" r:embed="Rd494c721b1084ccd"/>
           <a:srcRect xmlns:a="http://schemas.openxmlformats.org/drawingml/2006/main" l="0" t="0" r="39" b="0"/>
           <a:stretch xmlns:a="http://schemas.openxmlformats.org/drawingml/2006/main">
             <a:fillRect l="0" t="0" r="0" b="0"/>
@@ -1278,7 +1475,7 @@
           <p:cNvPr id="8" name="任意多边形: 形状 7">
             <a:extLst xmlns:a="http://schemas.openxmlformats.org/drawingml/2006/main">
               <a:ext uri="{FF2B5EF4-FFF2-40B4-BE49-F238E27FC236}">
-                <a16:creationId xmlns:a16="http://schemas.microsoft.com/office/drawing/2014/main" id="{BA8D807B-1235-4EE3-B8EA-E41F8469432D}"/>
+                <a16:creationId xmlns:a16="http://schemas.microsoft.com/office/drawing/2014/main" id="{5D209AA9-FBCD-4007-AFB5-6CE5EB46C6AD}"/>
               </a:ext>
             </a:extLst>
           </p:cNvPr>
@@ -1370,7 +1567,7 @@
           <p:cNvPr id="9" name="任意多边形: 形状 8">
             <a:extLst xmlns:a="http://schemas.openxmlformats.org/drawingml/2006/main">
               <a:ext uri="{FF2B5EF4-FFF2-40B4-BE49-F238E27FC236}">
-                <a16:creationId xmlns:a16="http://schemas.microsoft.com/office/drawing/2014/main" id="{C5CE161A-E4A8-4F0E-AB8F-DCD7237FB351}"/>
+                <a16:creationId xmlns:a16="http://schemas.microsoft.com/office/drawing/2014/main" id="{23F2A01A-26F3-4BBB-B5CC-A57007EA346A}"/>
               </a:ext>
             </a:extLst>
           </p:cNvPr>
@@ -1546,7 +1743,7 @@
           <p:cNvPr id="11" name="日期占位符 3">
             <a:extLst xmlns:a="http://schemas.openxmlformats.org/drawingml/2006/main">
               <a:ext uri="{FF2B5EF4-FFF2-40B4-BE49-F238E27FC236}">
-                <a16:creationId xmlns:a16="http://schemas.microsoft.com/office/drawing/2014/main" id="{B90297B3-A89B-4E12-B2AD-E4B7EDC124F1}"/>
+                <a16:creationId xmlns:a16="http://schemas.microsoft.com/office/drawing/2014/main" id="{FD51877C-FC13-4B3F-B495-C22A2C74F449}"/>
               </a:ext>
             </a:extLst>
           </p:cNvPr>
@@ -1573,7 +1770,7 @@
           <p:cNvPr id="12" name="页脚占位符 4">
             <a:extLst xmlns:a="http://schemas.openxmlformats.org/drawingml/2006/main">
               <a:ext uri="{FF2B5EF4-FFF2-40B4-BE49-F238E27FC236}">
-                <a16:creationId xmlns:a16="http://schemas.microsoft.com/office/drawing/2014/main" id="{BDC0C98B-6B8A-4E41-8DB1-7EBA812AD407}"/>
+                <a16:creationId xmlns:a16="http://schemas.microsoft.com/office/drawing/2014/main" id="{2670B961-7145-4272-B3DB-9A2663190119}"/>
               </a:ext>
             </a:extLst>
           </p:cNvPr>
@@ -1598,7 +1795,7 @@
           <p:cNvPr id="13" name="灯片编号占位符 5">
             <a:extLst xmlns:a="http://schemas.openxmlformats.org/drawingml/2006/main">
               <a:ext uri="{FF2B5EF4-FFF2-40B4-BE49-F238E27FC236}">
-                <a16:creationId xmlns:a16="http://schemas.microsoft.com/office/drawing/2014/main" id="{D5F605C4-5F0E-4C93-A065-8F01598981C9}"/>
+                <a16:creationId xmlns:a16="http://schemas.microsoft.com/office/drawing/2014/main" id="{A3605834-A861-4A04-9D85-B39172339F31}"/>
               </a:ext>
             </a:extLst>
           </p:cNvPr>
@@ -1630,7 +1827,7 @@
           <p:cNvPr id="10" name="副标题 2">
             <a:extLst xmlns:a="http://schemas.openxmlformats.org/drawingml/2006/main">
               <a:ext uri="{FF2B5EF4-FFF2-40B4-BE49-F238E27FC236}">
-                <a16:creationId xmlns:a16="http://schemas.microsoft.com/office/drawing/2014/main" id="{B9FFB4C6-1061-40E8-A53C-8191B8A43DCC}"/>
+                <a16:creationId xmlns:a16="http://schemas.microsoft.com/office/drawing/2014/main" id="{A52889BB-976E-4FD8-A06A-FDDD20D57F4D}"/>
               </a:ext>
             </a:extLst>
           </p:cNvPr>
@@ -1715,7 +1912,7 @@
           <p:cNvPr id="6" name="标题 1">
             <a:extLst xmlns:a="http://schemas.openxmlformats.org/drawingml/2006/main">
               <a:ext uri="{FF2B5EF4-FFF2-40B4-BE49-F238E27FC236}">
-                <a16:creationId xmlns:a16="http://schemas.microsoft.com/office/drawing/2014/main" id="{C668B3A3-1713-4722-80BD-2CB4D0D8A415}"/>
+                <a16:creationId xmlns:a16="http://schemas.microsoft.com/office/drawing/2014/main" id="{C988E0F6-D44D-4E6E-88AA-582F2D10A383}"/>
               </a:ext>
             </a:extLst>
           </p:cNvPr>
@@ -1796,7 +1993,7 @@
           <p:cNvPr id="8" name="日期占位符 3">
             <a:extLst xmlns:a="http://schemas.openxmlformats.org/drawingml/2006/main">
               <a:ext uri="{FF2B5EF4-FFF2-40B4-BE49-F238E27FC236}">
-                <a16:creationId xmlns:a16="http://schemas.microsoft.com/office/drawing/2014/main" id="{F0AF5519-2046-470D-B4EE-23B6162A2BBD}"/>
+                <a16:creationId xmlns:a16="http://schemas.microsoft.com/office/drawing/2014/main" id="{20E6B409-316E-4EB0-ABC3-0DBCD3A35603}"/>
               </a:ext>
             </a:extLst>
           </p:cNvPr>
@@ -1823,7 +2020,7 @@
           <p:cNvPr id="9" name="页脚占位符 4">
             <a:extLst xmlns:a="http://schemas.openxmlformats.org/drawingml/2006/main">
               <a:ext uri="{FF2B5EF4-FFF2-40B4-BE49-F238E27FC236}">
-                <a16:creationId xmlns:a16="http://schemas.microsoft.com/office/drawing/2014/main" id="{233C156F-57C2-4EDA-BE6C-DFEBD9F81CF0}"/>
+                <a16:creationId xmlns:a16="http://schemas.microsoft.com/office/drawing/2014/main" id="{832EB54F-2143-403F-83C7-48B1DF50C285}"/>
               </a:ext>
             </a:extLst>
           </p:cNvPr>
@@ -1848,7 +2045,7 @@
           <p:cNvPr id="10" name="灯片编号占位符 5">
             <a:extLst xmlns:a="http://schemas.openxmlformats.org/drawingml/2006/main">
               <a:ext uri="{FF2B5EF4-FFF2-40B4-BE49-F238E27FC236}">
-                <a16:creationId xmlns:a16="http://schemas.microsoft.com/office/drawing/2014/main" id="{DD85B663-F775-493C-98A5-57DB65D6B954}"/>
+                <a16:creationId xmlns:a16="http://schemas.microsoft.com/office/drawing/2014/main" id="{950F843B-06E4-49DB-A651-927B7907FE43}"/>
               </a:ext>
             </a:extLst>
           </p:cNvPr>
@@ -1875,7 +2072,7 @@
           <p:cNvPr id="11" name="Subtitle 10">
             <a:extLst xmlns:a="http://schemas.openxmlformats.org/drawingml/2006/main">
               <a:ext uri="{FF2B5EF4-FFF2-40B4-BE49-F238E27FC236}">
-                <a16:creationId xmlns:a16="http://schemas.microsoft.com/office/drawing/2014/main" id="{742E7A9D-B2B8-4B12-BA19-DE7AE8852195}"/>
+                <a16:creationId xmlns:a16="http://schemas.microsoft.com/office/drawing/2014/main" id="{52859DA5-125E-428C-9C46-38EE55B531D3}"/>
               </a:ext>
             </a:extLst>
           </p:cNvPr>
@@ -1964,7 +2161,7 @@
           <p:cNvPr id="12" name="Title 11">
             <a:extLst xmlns:a="http://schemas.openxmlformats.org/drawingml/2006/main">
               <a:ext uri="{FF2B5EF4-FFF2-40B4-BE49-F238E27FC236}">
-                <a16:creationId xmlns:a16="http://schemas.microsoft.com/office/drawing/2014/main" id="{C14FAAD5-B18F-4969-BA84-3C81BE920C4D}"/>
+                <a16:creationId xmlns:a16="http://schemas.microsoft.com/office/drawing/2014/main" id="{87101B69-1948-4DF0-B1AA-1589769D67F3}"/>
               </a:ext>
             </a:extLst>
           </p:cNvPr>
@@ -2021,7 +2218,7 @@
           <p:cNvPr id="13" name="Text Placeholder 12">
             <a:extLst xmlns:a="http://schemas.openxmlformats.org/drawingml/2006/main">
               <a:ext uri="{FF2B5EF4-FFF2-40B4-BE49-F238E27FC236}">
-                <a16:creationId xmlns:a16="http://schemas.microsoft.com/office/drawing/2014/main" id="{2649E11F-04DF-400F-BC6E-E9584AEB0128}"/>
+                <a16:creationId xmlns:a16="http://schemas.microsoft.com/office/drawing/2014/main" id="{3F1391B3-B794-4710-87DB-11ED7710AE38}"/>
               </a:ext>
             </a:extLst>
           </p:cNvPr>
@@ -2081,7 +2278,7 @@
           <p:cNvPr id="14" name="装饰  3">
             <a:extLst xmlns:a="http://schemas.openxmlformats.org/drawingml/2006/main">
               <a:ext uri="{FF2B5EF4-FFF2-40B4-BE49-F238E27FC236}">
-                <a16:creationId xmlns:a16="http://schemas.microsoft.com/office/drawing/2014/main" id="{08B25FC4-F02E-40C8-96CA-170EF24041A3}"/>
+                <a16:creationId xmlns:a16="http://schemas.microsoft.com/office/drawing/2014/main" id="{90DD77A6-C9C4-45DA-BCC9-AE58094D04EF}"/>
               </a:ext>
             </a:extLst>
           </p:cNvPr>
@@ -2215,7 +2412,7 @@
           <p:cNvPr id="15" name="Text Placeholder 14">
             <a:extLst xmlns:a="http://schemas.openxmlformats.org/drawingml/2006/main">
               <a:ext uri="{FF2B5EF4-FFF2-40B4-BE49-F238E27FC236}">
-                <a16:creationId xmlns:a16="http://schemas.microsoft.com/office/drawing/2014/main" id="{F91895E1-6F8E-44B1-8756-A726EFF9DF6E}"/>
+                <a16:creationId xmlns:a16="http://schemas.microsoft.com/office/drawing/2014/main" id="{F65E9DBD-F259-4590-939F-DEF0379BEE14}"/>
               </a:ext>
             </a:extLst>
           </p:cNvPr>
@@ -2275,7 +2472,7 @@
           <p:cNvPr id="16" name="Text Placeholder 15">
             <a:extLst xmlns:a="http://schemas.openxmlformats.org/drawingml/2006/main">
               <a:ext uri="{FF2B5EF4-FFF2-40B4-BE49-F238E27FC236}">
-                <a16:creationId xmlns:a16="http://schemas.microsoft.com/office/drawing/2014/main" id="{34EAC592-9F24-4188-907D-C82994EC295F}"/>
+                <a16:creationId xmlns:a16="http://schemas.microsoft.com/office/drawing/2014/main" id="{59CBB0DD-0F9D-4E2B-8F93-98B645FAC509}"/>
               </a:ext>
             </a:extLst>
           </p:cNvPr>
@@ -2335,7 +2532,7 @@
           <p:cNvPr id="17" name="装饰  6">
             <a:extLst xmlns:a="http://schemas.openxmlformats.org/drawingml/2006/main">
               <a:ext uri="{FF2B5EF4-FFF2-40B4-BE49-F238E27FC236}">
-                <a16:creationId xmlns:a16="http://schemas.microsoft.com/office/drawing/2014/main" id="{2A85465A-AFE9-4B0F-82ED-A151CD631BB1}"/>
+                <a16:creationId xmlns:a16="http://schemas.microsoft.com/office/drawing/2014/main" id="{7AADB508-D170-482A-99A2-25E1209D696A}"/>
               </a:ext>
             </a:extLst>
           </p:cNvPr>
@@ -2469,7 +2666,7 @@
           <p:cNvPr id="18" name="Text Placeholder 17">
             <a:extLst xmlns:a="http://schemas.openxmlformats.org/drawingml/2006/main">
               <a:ext uri="{FF2B5EF4-FFF2-40B4-BE49-F238E27FC236}">
-                <a16:creationId xmlns:a16="http://schemas.microsoft.com/office/drawing/2014/main" id="{673B2C54-7A89-43DF-9678-65EB8FD0EBFB}"/>
+                <a16:creationId xmlns:a16="http://schemas.microsoft.com/office/drawing/2014/main" id="{4C5A40BE-1D77-4C2E-A92B-784F936380F2}"/>
               </a:ext>
             </a:extLst>
           </p:cNvPr>
@@ -2529,7 +2726,7 @@
           <p:cNvPr id="19" name="Text Placeholder 18">
             <a:extLst xmlns:a="http://schemas.openxmlformats.org/drawingml/2006/main">
               <a:ext uri="{FF2B5EF4-FFF2-40B4-BE49-F238E27FC236}">
-                <a16:creationId xmlns:a16="http://schemas.microsoft.com/office/drawing/2014/main" id="{13830BEB-E173-417A-97B1-F772E1FCE0EE}"/>
+                <a16:creationId xmlns:a16="http://schemas.microsoft.com/office/drawing/2014/main" id="{7195FE78-5BE2-4C07-8A0B-9496DF4E0EED}"/>
               </a:ext>
             </a:extLst>
           </p:cNvPr>
@@ -2589,7 +2786,7 @@
           <p:cNvPr id="20" name="装饰  9">
             <a:extLst xmlns:a="http://schemas.openxmlformats.org/drawingml/2006/main">
               <a:ext uri="{FF2B5EF4-FFF2-40B4-BE49-F238E27FC236}">
-                <a16:creationId xmlns:a16="http://schemas.microsoft.com/office/drawing/2014/main" id="{48388FB3-C4F8-4D8E-B5A8-DD87A9BEC0FA}"/>
+                <a16:creationId xmlns:a16="http://schemas.microsoft.com/office/drawing/2014/main" id="{159EE5C3-DF32-4EAE-93F2-57FF02500F9C}"/>
               </a:ext>
             </a:extLst>
           </p:cNvPr>
@@ -2723,7 +2920,7 @@
           <p:cNvPr id="21" name="Text Placeholder 20">
             <a:extLst xmlns:a="http://schemas.openxmlformats.org/drawingml/2006/main">
               <a:ext uri="{FF2B5EF4-FFF2-40B4-BE49-F238E27FC236}">
-                <a16:creationId xmlns:a16="http://schemas.microsoft.com/office/drawing/2014/main" id="{76F58FDC-2D2E-4522-855C-CCC9AD329613}"/>
+                <a16:creationId xmlns:a16="http://schemas.microsoft.com/office/drawing/2014/main" id="{A39F8104-C89E-4BF0-A115-D1D5C1AC448F}"/>
               </a:ext>
             </a:extLst>
           </p:cNvPr>
@@ -2783,7 +2980,7 @@
           <p:cNvPr id="22" name="Text Placeholder 21">
             <a:extLst xmlns:a="http://schemas.openxmlformats.org/drawingml/2006/main">
               <a:ext uri="{FF2B5EF4-FFF2-40B4-BE49-F238E27FC236}">
-                <a16:creationId xmlns:a16="http://schemas.microsoft.com/office/drawing/2014/main" id="{0754071F-84BF-4337-8444-BB532836EE70}"/>
+                <a16:creationId xmlns:a16="http://schemas.microsoft.com/office/drawing/2014/main" id="{0E113576-8198-4F97-8636-F1984DD4F1DA}"/>
               </a:ext>
             </a:extLst>
           </p:cNvPr>
@@ -2843,7 +3040,7 @@
           <p:cNvPr id="23" name="装饰  2">
             <a:extLst xmlns:a="http://schemas.openxmlformats.org/drawingml/2006/main">
               <a:ext uri="{FF2B5EF4-FFF2-40B4-BE49-F238E27FC236}">
-                <a16:creationId xmlns:a16="http://schemas.microsoft.com/office/drawing/2014/main" id="{DD28B074-544E-413B-A2BF-7181761CE15C}"/>
+                <a16:creationId xmlns:a16="http://schemas.microsoft.com/office/drawing/2014/main" id="{C02537D4-A632-4793-B8EF-0C81AC10E897}"/>
               </a:ext>
             </a:extLst>
           </p:cNvPr>
@@ -2977,7 +3174,7 @@
           <p:cNvPr id="24" name="Text Placeholder 23">
             <a:extLst xmlns:a="http://schemas.openxmlformats.org/drawingml/2006/main">
               <a:ext uri="{FF2B5EF4-FFF2-40B4-BE49-F238E27FC236}">
-                <a16:creationId xmlns:a16="http://schemas.microsoft.com/office/drawing/2014/main" id="{48473CC4-0061-4EEA-8D5B-AEF340C60CA4}"/>
+                <a16:creationId xmlns:a16="http://schemas.microsoft.com/office/drawing/2014/main" id="{3F4482C2-1146-4D62-9B31-6E27D582E371}"/>
               </a:ext>
             </a:extLst>
           </p:cNvPr>
@@ -3054,7 +3251,7 @@
           <p:cNvPr id="2" name="标题 1">
             <a:extLst xmlns:a="http://schemas.openxmlformats.org/drawingml/2006/main">
               <a:ext uri="{FF2B5EF4-FFF2-40B4-BE49-F238E27FC236}">
-                <a16:creationId xmlns:a16="http://schemas.microsoft.com/office/drawing/2014/main" id="{D3BC591A-3366-4637-B638-1C249F6CC432}"/>
+                <a16:creationId xmlns:a16="http://schemas.microsoft.com/office/drawing/2014/main" id="{BDA586AF-4D46-4A67-BE2D-0923B1A29748}"/>
               </a:ext>
             </a:extLst>
           </p:cNvPr>
@@ -3109,7 +3306,7 @@
           <p:cNvPr id="7" name="日期占位符 3">
             <a:extLst xmlns:a="http://schemas.openxmlformats.org/drawingml/2006/main">
               <a:ext uri="{FF2B5EF4-FFF2-40B4-BE49-F238E27FC236}">
-                <a16:creationId xmlns:a16="http://schemas.microsoft.com/office/drawing/2014/main" id="{4AD09DAB-CA1E-4C18-B63A-4823D8A12D8C}"/>
+                <a16:creationId xmlns:a16="http://schemas.microsoft.com/office/drawing/2014/main" id="{1CB2E93F-0454-4AE9-BA76-237B20C252C6}"/>
               </a:ext>
             </a:extLst>
           </p:cNvPr>
@@ -3136,7 +3333,7 @@
           <p:cNvPr id="8" name="页脚占位符 4">
             <a:extLst xmlns:a="http://schemas.openxmlformats.org/drawingml/2006/main">
               <a:ext uri="{FF2B5EF4-FFF2-40B4-BE49-F238E27FC236}">
-                <a16:creationId xmlns:a16="http://schemas.microsoft.com/office/drawing/2014/main" id="{95B06876-15C3-4B79-873F-1FE6B1AED2E4}"/>
+                <a16:creationId xmlns:a16="http://schemas.microsoft.com/office/drawing/2014/main" id="{5251B717-58A9-49C1-AB66-D51105EA3939}"/>
               </a:ext>
             </a:extLst>
           </p:cNvPr>
@@ -3161,7 +3358,7 @@
           <p:cNvPr id="9" name="灯片编号占位符 5">
             <a:extLst xmlns:a="http://schemas.openxmlformats.org/drawingml/2006/main">
               <a:ext uri="{FF2B5EF4-FFF2-40B4-BE49-F238E27FC236}">
-                <a16:creationId xmlns:a16="http://schemas.microsoft.com/office/drawing/2014/main" id="{AF5CB76A-B265-492F-B7A3-3CB4DAA50B54}"/>
+                <a16:creationId xmlns:a16="http://schemas.microsoft.com/office/drawing/2014/main" id="{DD2B3D5F-C061-4B31-8105-DC0E9593E223}"/>
               </a:ext>
             </a:extLst>
           </p:cNvPr>
@@ -3205,7 +3402,7 @@
           <p:cNvPr id="2" name="标题 1">
             <a:extLst xmlns:a="http://schemas.openxmlformats.org/drawingml/2006/main">
               <a:ext uri="{FF2B5EF4-FFF2-40B4-BE49-F238E27FC236}">
-                <a16:creationId xmlns:a16="http://schemas.microsoft.com/office/drawing/2014/main" id="{B42E3F75-1EDA-4C4C-9382-3FBB8FCA6F96}"/>
+                <a16:creationId xmlns:a16="http://schemas.microsoft.com/office/drawing/2014/main" id="{8CCF6877-A946-4CC5-8A4E-308D671530CC}"/>
               </a:ext>
             </a:extLst>
           </p:cNvPr>
@@ -3243,7 +3440,7 @@
           <p:cNvPr id="3" name="内容占位符 2">
             <a:extLst xmlns:a="http://schemas.openxmlformats.org/drawingml/2006/main">
               <a:ext uri="{FF2B5EF4-FFF2-40B4-BE49-F238E27FC236}">
-                <a16:creationId xmlns:a16="http://schemas.microsoft.com/office/drawing/2014/main" id="{D600EE82-F988-4C4C-825D-8132BA002C7E}"/>
+                <a16:creationId xmlns:a16="http://schemas.microsoft.com/office/drawing/2014/main" id="{33FC46C4-6822-48A3-BFB2-2475B7CC705F}"/>
               </a:ext>
             </a:extLst>
           </p:cNvPr>
@@ -3329,7 +3526,7 @@
           <p:cNvPr id="4" name="内容占位符 3">
             <a:extLst xmlns:a="http://schemas.openxmlformats.org/drawingml/2006/main">
               <a:ext uri="{FF2B5EF4-FFF2-40B4-BE49-F238E27FC236}">
-                <a16:creationId xmlns:a16="http://schemas.microsoft.com/office/drawing/2014/main" id="{5FEA87A7-B662-4F25-BFFF-760526158ED1}"/>
+                <a16:creationId xmlns:a16="http://schemas.microsoft.com/office/drawing/2014/main" id="{D2A4E850-AB8C-441C-8C6E-D221CF131E68}"/>
               </a:ext>
             </a:extLst>
           </p:cNvPr>
@@ -3415,7 +3612,7 @@
           <p:cNvPr id="5" name="日期占位符 4">
             <a:extLst xmlns:a="http://schemas.openxmlformats.org/drawingml/2006/main">
               <a:ext uri="{FF2B5EF4-FFF2-40B4-BE49-F238E27FC236}">
-                <a16:creationId xmlns:a16="http://schemas.microsoft.com/office/drawing/2014/main" id="{75BEFF41-0342-489D-A5D6-6B498C3418A9}"/>
+                <a16:creationId xmlns:a16="http://schemas.microsoft.com/office/drawing/2014/main" id="{AD38635F-96A5-4EEB-9783-46CA8C036363}"/>
               </a:ext>
             </a:extLst>
           </p:cNvPr>
@@ -3442,7 +3639,7 @@
           <p:cNvPr id="6" name="页脚占位符 5">
             <a:extLst xmlns:a="http://schemas.openxmlformats.org/drawingml/2006/main">
               <a:ext uri="{FF2B5EF4-FFF2-40B4-BE49-F238E27FC236}">
-                <a16:creationId xmlns:a16="http://schemas.microsoft.com/office/drawing/2014/main" id="{1CA707B4-0878-47E3-AE67-39023B9C3EE1}"/>
+                <a16:creationId xmlns:a16="http://schemas.microsoft.com/office/drawing/2014/main" id="{6E763A6C-732F-4CC8-9431-5D7868124FE9}"/>
               </a:ext>
             </a:extLst>
           </p:cNvPr>
@@ -3467,7 +3664,7 @@
           <p:cNvPr id="7" name="灯片编号占位符 6">
             <a:extLst xmlns:a="http://schemas.openxmlformats.org/drawingml/2006/main">
               <a:ext uri="{FF2B5EF4-FFF2-40B4-BE49-F238E27FC236}">
-                <a16:creationId xmlns:a16="http://schemas.microsoft.com/office/drawing/2014/main" id="{3A207FA8-EE79-4553-B7A9-2361EA884662}"/>
+                <a16:creationId xmlns:a16="http://schemas.microsoft.com/office/drawing/2014/main" id="{0FED4248-DD03-4942-8E54-4E7A8A0350B8}"/>
               </a:ext>
             </a:extLst>
           </p:cNvPr>
@@ -3511,7 +3708,7 @@
           <p:cNvPr id="3" name="文本占位符 2">
             <a:extLst xmlns:a="http://schemas.openxmlformats.org/drawingml/2006/main">
               <a:ext uri="{FF2B5EF4-FFF2-40B4-BE49-F238E27FC236}">
-                <a16:creationId xmlns:a16="http://schemas.microsoft.com/office/drawing/2014/main" id="{9D84B567-DC1A-41A2-9E52-23B3AB623DBD}"/>
+                <a16:creationId xmlns:a16="http://schemas.microsoft.com/office/drawing/2014/main" id="{95EA8FBE-2EDA-4F5C-96E7-128407F86B7A}"/>
               </a:ext>
             </a:extLst>
           </p:cNvPr>
@@ -3586,7 +3783,7 @@
           <p:cNvPr id="4" name="内容占位符 3">
             <a:extLst xmlns:a="http://schemas.openxmlformats.org/drawingml/2006/main">
               <a:ext uri="{FF2B5EF4-FFF2-40B4-BE49-F238E27FC236}">
-                <a16:creationId xmlns:a16="http://schemas.microsoft.com/office/drawing/2014/main" id="{26D65B7E-B11A-4184-B291-C9E46DBFE9AC}"/>
+                <a16:creationId xmlns:a16="http://schemas.microsoft.com/office/drawing/2014/main" id="{E8FC66EF-63FE-4045-A3E8-83FF0DD5462E}"/>
               </a:ext>
             </a:extLst>
           </p:cNvPr>
@@ -3677,7 +3874,7 @@
           <p:cNvPr id="5" name="文本占位符 4">
             <a:extLst xmlns:a="http://schemas.openxmlformats.org/drawingml/2006/main">
               <a:ext uri="{FF2B5EF4-FFF2-40B4-BE49-F238E27FC236}">
-                <a16:creationId xmlns:a16="http://schemas.microsoft.com/office/drawing/2014/main" id="{04667BA0-5061-42C8-ABF2-A2DB7BB49E8E}"/>
+                <a16:creationId xmlns:a16="http://schemas.microsoft.com/office/drawing/2014/main" id="{C894BBE7-3A2A-4C88-8F5B-FBAEEDFBA816}"/>
               </a:ext>
             </a:extLst>
           </p:cNvPr>
@@ -3752,7 +3949,7 @@
           <p:cNvPr id="6" name="内容占位符 5">
             <a:extLst xmlns:a="http://schemas.openxmlformats.org/drawingml/2006/main">
               <a:ext uri="{FF2B5EF4-FFF2-40B4-BE49-F238E27FC236}">
-                <a16:creationId xmlns:a16="http://schemas.microsoft.com/office/drawing/2014/main" id="{5B41DA47-7CE0-43FD-9D6E-B5B9918B09D7}"/>
+                <a16:creationId xmlns:a16="http://schemas.microsoft.com/office/drawing/2014/main" id="{A49DEF8A-92F4-494A-8CB3-7A99870A20A4}"/>
               </a:ext>
             </a:extLst>
           </p:cNvPr>
@@ -3843,7 +4040,7 @@
           <p:cNvPr id="7" name="日期占位符 6">
             <a:extLst xmlns:a="http://schemas.openxmlformats.org/drawingml/2006/main">
               <a:ext uri="{FF2B5EF4-FFF2-40B4-BE49-F238E27FC236}">
-                <a16:creationId xmlns:a16="http://schemas.microsoft.com/office/drawing/2014/main" id="{B120EC37-9697-4DDD-9EF6-89E433B5CA83}"/>
+                <a16:creationId xmlns:a16="http://schemas.microsoft.com/office/drawing/2014/main" id="{DA4FC9BE-2C92-4CC4-ABD4-B0533CA80BD1}"/>
               </a:ext>
             </a:extLst>
           </p:cNvPr>
@@ -3870,7 +4067,7 @@
           <p:cNvPr id="8" name="页脚占位符 7">
             <a:extLst xmlns:a="http://schemas.openxmlformats.org/drawingml/2006/main">
               <a:ext uri="{FF2B5EF4-FFF2-40B4-BE49-F238E27FC236}">
-                <a16:creationId xmlns:a16="http://schemas.microsoft.com/office/drawing/2014/main" id="{1D0006A5-D5E4-4AE1-8352-A9ED6FF9D084}"/>
+                <a16:creationId xmlns:a16="http://schemas.microsoft.com/office/drawing/2014/main" id="{861DC1AA-0B48-43FF-BF84-75E79C340FD5}"/>
               </a:ext>
             </a:extLst>
           </p:cNvPr>
@@ -3895,7 +4092,7 @@
           <p:cNvPr id="9" name="灯片编号占位符 8">
             <a:extLst xmlns:a="http://schemas.openxmlformats.org/drawingml/2006/main">
               <a:ext uri="{FF2B5EF4-FFF2-40B4-BE49-F238E27FC236}">
-                <a16:creationId xmlns:a16="http://schemas.microsoft.com/office/drawing/2014/main" id="{8872FDA6-A446-402E-9EEB-D96950B2EC3D}"/>
+                <a16:creationId xmlns:a16="http://schemas.microsoft.com/office/drawing/2014/main" id="{8F1674F2-F3C4-4B05-9AF7-87E736B303B5}"/>
               </a:ext>
             </a:extLst>
           </p:cNvPr>
@@ -3922,7 +4119,7 @@
           <p:cNvPr id="10" name="标题 9">
             <a:extLst xmlns:a="http://schemas.openxmlformats.org/drawingml/2006/main">
               <a:ext uri="{FF2B5EF4-FFF2-40B4-BE49-F238E27FC236}">
-                <a16:creationId xmlns:a16="http://schemas.microsoft.com/office/drawing/2014/main" id="{F1BF5988-AA55-4F68-9BF4-984F8B383618}"/>
+                <a16:creationId xmlns:a16="http://schemas.microsoft.com/office/drawing/2014/main" id="{9BBE9012-D7F6-486E-A050-A46A8DC347A2}"/>
               </a:ext>
             </a:extLst>
           </p:cNvPr>
@@ -3967,7 +4164,7 @@
           <p:cNvPr id="2" name="标题 1">
             <a:extLst xmlns:a="http://schemas.openxmlformats.org/drawingml/2006/main">
               <a:ext uri="{FF2B5EF4-FFF2-40B4-BE49-F238E27FC236}">
-                <a16:creationId xmlns:a16="http://schemas.microsoft.com/office/drawing/2014/main" id="{1D1DC25D-7F84-4DBA-94E7-43E4EBD0AD72}"/>
+                <a16:creationId xmlns:a16="http://schemas.microsoft.com/office/drawing/2014/main" id="{0681F089-6ACD-4FC3-B3BD-D3E17396B5EB}"/>
               </a:ext>
             </a:extLst>
           </p:cNvPr>
@@ -3997,7 +4194,7 @@
           <p:cNvPr id="3" name="日期占位符 2">
             <a:extLst xmlns:a="http://schemas.openxmlformats.org/drawingml/2006/main">
               <a:ext uri="{FF2B5EF4-FFF2-40B4-BE49-F238E27FC236}">
-                <a16:creationId xmlns:a16="http://schemas.microsoft.com/office/drawing/2014/main" id="{CB981076-CC0C-40D9-AF01-6A11E5F098AD}"/>
+                <a16:creationId xmlns:a16="http://schemas.microsoft.com/office/drawing/2014/main" id="{23E5494A-7362-421C-9030-622A37303B60}"/>
               </a:ext>
             </a:extLst>
           </p:cNvPr>
@@ -4024,7 +4221,7 @@
           <p:cNvPr id="4" name="页脚占位符 3">
             <a:extLst xmlns:a="http://schemas.openxmlformats.org/drawingml/2006/main">
               <a:ext uri="{FF2B5EF4-FFF2-40B4-BE49-F238E27FC236}">
-                <a16:creationId xmlns:a16="http://schemas.microsoft.com/office/drawing/2014/main" id="{88FBE1F4-3422-448B-A3F9-CEB7826F3E87}"/>
+                <a16:creationId xmlns:a16="http://schemas.microsoft.com/office/drawing/2014/main" id="{5DD4CDD4-AE33-4F4F-9D17-C73B28C87C92}"/>
               </a:ext>
             </a:extLst>
           </p:cNvPr>
@@ -4049,7 +4246,7 @@
           <p:cNvPr id="5" name="灯片编号占位符 4">
             <a:extLst xmlns:a="http://schemas.openxmlformats.org/drawingml/2006/main">
               <a:ext uri="{FF2B5EF4-FFF2-40B4-BE49-F238E27FC236}">
-                <a16:creationId xmlns:a16="http://schemas.microsoft.com/office/drawing/2014/main" id="{9E36F83D-BAC4-4A5A-81F7-DE562983A220}"/>
+                <a16:creationId xmlns:a16="http://schemas.microsoft.com/office/drawing/2014/main" id="{EA03F926-58A2-4D74-A705-3B22A91C5CB8}"/>
               </a:ext>
             </a:extLst>
           </p:cNvPr>
@@ -4093,7 +4290,7 @@
           <p:cNvPr id="2" name="日期占位符 1">
             <a:extLst xmlns:a="http://schemas.openxmlformats.org/drawingml/2006/main">
               <a:ext uri="{FF2B5EF4-FFF2-40B4-BE49-F238E27FC236}">
-                <a16:creationId xmlns:a16="http://schemas.microsoft.com/office/drawing/2014/main" id="{BE956731-9B86-48D7-92A1-407BD637D4D1}"/>
+                <a16:creationId xmlns:a16="http://schemas.microsoft.com/office/drawing/2014/main" id="{D559ABE7-932D-4200-B858-C145DB79C062}"/>
               </a:ext>
             </a:extLst>
           </p:cNvPr>
@@ -4120,7 +4317,7 @@
           <p:cNvPr id="3" name="页脚占位符 2">
             <a:extLst xmlns:a="http://schemas.openxmlformats.org/drawingml/2006/main">
               <a:ext uri="{FF2B5EF4-FFF2-40B4-BE49-F238E27FC236}">
-                <a16:creationId xmlns:a16="http://schemas.microsoft.com/office/drawing/2014/main" id="{11B9A90E-64BF-4B91-88B8-646FA334C8E4}"/>
+                <a16:creationId xmlns:a16="http://schemas.microsoft.com/office/drawing/2014/main" id="{BE653515-8FA7-4D31-B461-2E22A8AD167D}"/>
               </a:ext>
             </a:extLst>
           </p:cNvPr>
@@ -4145,7 +4342,7 @@
           <p:cNvPr id="4" name="灯片编号占位符 3">
             <a:extLst xmlns:a="http://schemas.openxmlformats.org/drawingml/2006/main">
               <a:ext uri="{FF2B5EF4-FFF2-40B4-BE49-F238E27FC236}">
-                <a16:creationId xmlns:a16="http://schemas.microsoft.com/office/drawing/2014/main" id="{AB5D35D1-9C89-43C8-BE46-F1D490AEBCC1}"/>
+                <a16:creationId xmlns:a16="http://schemas.microsoft.com/office/drawing/2014/main" id="{D875ECF5-787B-4E48-BB4D-88E1CEC0A97C}"/>
               </a:ext>
             </a:extLst>
           </p:cNvPr>
@@ -4189,7 +4386,7 @@
           <p:cNvPr id="3" name="内容占位符 1">
             <a:extLst xmlns:a="http://schemas.openxmlformats.org/drawingml/2006/main">
               <a:ext uri="{FF2B5EF4-FFF2-40B4-BE49-F238E27FC236}">
-                <a16:creationId xmlns:a16="http://schemas.microsoft.com/office/drawing/2014/main" id="{68AFB526-2A1F-4BAF-A559-B2CDD9D635ED}"/>
+                <a16:creationId xmlns:a16="http://schemas.microsoft.com/office/drawing/2014/main" id="{36D50F8A-D240-4971-AC48-24811404517A}"/>
               </a:ext>
             </a:extLst>
           </p:cNvPr>
@@ -4275,7 +4472,7 @@
           <p:cNvPr id="4" name="日期占位符 2">
             <a:extLst xmlns:a="http://schemas.openxmlformats.org/drawingml/2006/main">
               <a:ext uri="{FF2B5EF4-FFF2-40B4-BE49-F238E27FC236}">
-                <a16:creationId xmlns:a16="http://schemas.microsoft.com/office/drawing/2014/main" id="{FBE04D09-5E26-4D52-BB31-6BAC2F68C5BB}"/>
+                <a16:creationId xmlns:a16="http://schemas.microsoft.com/office/drawing/2014/main" id="{32466200-9993-481E-BB78-7DC53FD9A085}"/>
               </a:ext>
             </a:extLst>
           </p:cNvPr>
@@ -4302,7 +4499,7 @@
           <p:cNvPr id="5" name="页脚占位符 3">
             <a:extLst xmlns:a="http://schemas.openxmlformats.org/drawingml/2006/main">
               <a:ext uri="{FF2B5EF4-FFF2-40B4-BE49-F238E27FC236}">
-                <a16:creationId xmlns:a16="http://schemas.microsoft.com/office/drawing/2014/main" id="{41EC5234-0D7E-4FC7-80A0-649B16A79EEB}"/>
+                <a16:creationId xmlns:a16="http://schemas.microsoft.com/office/drawing/2014/main" id="{DEF5D776-CA4C-4C9E-9252-72DC58F440F8}"/>
               </a:ext>
             </a:extLst>
           </p:cNvPr>
@@ -4327,7 +4524,7 @@
           <p:cNvPr id="6" name="灯片编号占位符 4">
             <a:extLst xmlns:a="http://schemas.openxmlformats.org/drawingml/2006/main">
               <a:ext uri="{FF2B5EF4-FFF2-40B4-BE49-F238E27FC236}">
-                <a16:creationId xmlns:a16="http://schemas.microsoft.com/office/drawing/2014/main" id="{54B29146-BA01-4E05-B162-40F53543F275}"/>
+                <a16:creationId xmlns:a16="http://schemas.microsoft.com/office/drawing/2014/main" id="{A7933349-BA33-4CD6-A681-5CD3B9525177}"/>
               </a:ext>
             </a:extLst>
           </p:cNvPr>
@@ -4371,7 +4568,7 @@
           <p:cNvPr id="3" name="文本占位符 2">
             <a:extLst xmlns:a="http://schemas.openxmlformats.org/drawingml/2006/main">
               <a:ext uri="{FF2B5EF4-FFF2-40B4-BE49-F238E27FC236}">
-                <a16:creationId xmlns:a16="http://schemas.microsoft.com/office/drawing/2014/main" id="{F93EB6DF-97B2-43EF-817B-35B81DDF6FC5}"/>
+                <a16:creationId xmlns:a16="http://schemas.microsoft.com/office/drawing/2014/main" id="{461CBA4A-32FE-4A70-A6C4-CB1E7BA3169C}"/>
               </a:ext>
             </a:extLst>
           </p:cNvPr>
@@ -4443,7 +4640,7 @@
           <p:cNvPr id="7" name="日期占位符 3">
             <a:extLst xmlns:a="http://schemas.openxmlformats.org/drawingml/2006/main">
               <a:ext uri="{FF2B5EF4-FFF2-40B4-BE49-F238E27FC236}">
-                <a16:creationId xmlns:a16="http://schemas.microsoft.com/office/drawing/2014/main" id="{AA1E6351-ECD1-472D-932A-92AFB45C8E32}"/>
+                <a16:creationId xmlns:a16="http://schemas.microsoft.com/office/drawing/2014/main" id="{8C29C6FF-B6D5-45B8-A064-17E494E8ABAA}"/>
               </a:ext>
             </a:extLst>
           </p:cNvPr>
@@ -4470,7 +4667,7 @@
           <p:cNvPr id="8" name="页脚占位符 4">
             <a:extLst xmlns:a="http://schemas.openxmlformats.org/drawingml/2006/main">
               <a:ext uri="{FF2B5EF4-FFF2-40B4-BE49-F238E27FC236}">
-                <a16:creationId xmlns:a16="http://schemas.microsoft.com/office/drawing/2014/main" id="{3ACCF4BF-1341-4040-94D0-0259920C39EF}"/>
+                <a16:creationId xmlns:a16="http://schemas.microsoft.com/office/drawing/2014/main" id="{66523886-2F4F-4AF8-B91F-2BB93EA8BB56}"/>
               </a:ext>
             </a:extLst>
           </p:cNvPr>
@@ -4495,7 +4692,7 @@
           <p:cNvPr id="9" name="灯片编号占位符 5">
             <a:extLst xmlns:a="http://schemas.openxmlformats.org/drawingml/2006/main">
               <a:ext uri="{FF2B5EF4-FFF2-40B4-BE49-F238E27FC236}">
-                <a16:creationId xmlns:a16="http://schemas.microsoft.com/office/drawing/2014/main" id="{50F43FBC-D0DE-4531-9365-ECE035D36587}"/>
+                <a16:creationId xmlns:a16="http://schemas.microsoft.com/office/drawing/2014/main" id="{C902DF2E-767C-4E79-B3C0-A9B7F54184B5}"/>
               </a:ext>
             </a:extLst>
           </p:cNvPr>
@@ -4522,7 +4719,7 @@
           <p:cNvPr id="4" name="标题 3">
             <a:extLst xmlns:a="http://schemas.openxmlformats.org/drawingml/2006/main">
               <a:ext uri="{FF2B5EF4-FFF2-40B4-BE49-F238E27FC236}">
-                <a16:creationId xmlns:a16="http://schemas.microsoft.com/office/drawing/2014/main" id="{8E66146A-EE38-487F-87A7-D1CCDB0EBD3E}"/>
+                <a16:creationId xmlns:a16="http://schemas.microsoft.com/office/drawing/2014/main" id="{00DA3DBF-3E0F-4223-8BB4-7D6A3F195AB2}"/>
               </a:ext>
             </a:extLst>
           </p:cNvPr>
@@ -4571,7 +4768,7 @@
           <p:nvPr/>
         </p:nvPicPr>
         <p:blipFill>
-          <a:blip xmlns:r="http://schemas.openxmlformats.org/officeDocument/2006/relationships" xmlns:a="http://schemas.openxmlformats.org/drawingml/2006/main" r:embed="R94b5a03229434850"/>
+          <a:blip xmlns:r="http://schemas.openxmlformats.org/officeDocument/2006/relationships" xmlns:a="http://schemas.openxmlformats.org/drawingml/2006/main" r:embed="Rc1114a7137ab4d94"/>
           <a:srcRect xmlns:a="http://schemas.openxmlformats.org/drawingml/2006/main" l="0" t="0" r="39" b="0"/>
           <a:stretch xmlns:a="http://schemas.openxmlformats.org/drawingml/2006/main">
             <a:fillRect l="0" t="0" r="0" b="0"/>
@@ -4589,7 +4786,7 @@
           <p:cNvPr id="33" name="任意多边形: 形状 32">
             <a:extLst xmlns:a="http://schemas.openxmlformats.org/drawingml/2006/main">
               <a:ext uri="{FF2B5EF4-FFF2-40B4-BE49-F238E27FC236}">
-                <a16:creationId xmlns:a16="http://schemas.microsoft.com/office/drawing/2014/main" id="{AA29673F-514B-40B7-8B34-E8F3C1F9E67C}"/>
+                <a16:creationId xmlns:a16="http://schemas.microsoft.com/office/drawing/2014/main" id="{FA524405-3756-4ACF-9352-869B4DC36B0B}"/>
               </a:ext>
             </a:extLst>
           </p:cNvPr>
@@ -4681,7 +4878,7 @@
           <p:cNvPr id="35" name="任意多边形: 形状 34">
             <a:extLst xmlns:a="http://schemas.openxmlformats.org/drawingml/2006/main">
               <a:ext uri="{FF2B5EF4-FFF2-40B4-BE49-F238E27FC236}">
-                <a16:creationId xmlns:a16="http://schemas.microsoft.com/office/drawing/2014/main" id="{9E3875D6-91CA-4FE4-AA53-97AB812A47E7}"/>
+                <a16:creationId xmlns:a16="http://schemas.microsoft.com/office/drawing/2014/main" id="{1B3542EB-6FEC-4D88-AB8B-0F3211C6901E}"/>
               </a:ext>
             </a:extLst>
           </p:cNvPr>
@@ -4857,7 +5054,7 @@
           <p:cNvPr id="8" name="日期占位符 3">
             <a:extLst xmlns:a="http://schemas.openxmlformats.org/drawingml/2006/main">
               <a:ext uri="{FF2B5EF4-FFF2-40B4-BE49-F238E27FC236}">
-                <a16:creationId xmlns:a16="http://schemas.microsoft.com/office/drawing/2014/main" id="{968E164B-5926-40B8-B373-8A894738EBF5}"/>
+                <a16:creationId xmlns:a16="http://schemas.microsoft.com/office/drawing/2014/main" id="{34D0693E-548D-4255-A81A-773BCB422564}"/>
               </a:ext>
             </a:extLst>
           </p:cNvPr>
@@ -4884,7 +5081,7 @@
           <p:cNvPr id="9" name="页脚占位符 4">
             <a:extLst xmlns:a="http://schemas.openxmlformats.org/drawingml/2006/main">
               <a:ext uri="{FF2B5EF4-FFF2-40B4-BE49-F238E27FC236}">
-                <a16:creationId xmlns:a16="http://schemas.microsoft.com/office/drawing/2014/main" id="{9CC1F0E0-649A-41A7-A97F-927C44F763D5}"/>
+                <a16:creationId xmlns:a16="http://schemas.microsoft.com/office/drawing/2014/main" id="{C5CAF2DA-0419-42D9-84B8-03FBFCEB3601}"/>
               </a:ext>
             </a:extLst>
           </p:cNvPr>
@@ -4911,7 +5108,7 @@
           <p:cNvPr id="10" name="灯片编号占位符 5">
             <a:extLst xmlns:a="http://schemas.openxmlformats.org/drawingml/2006/main">
               <a:ext uri="{FF2B5EF4-FFF2-40B4-BE49-F238E27FC236}">
-                <a16:creationId xmlns:a16="http://schemas.microsoft.com/office/drawing/2014/main" id="{793FE3DA-DB07-49EF-96BA-A1BB3ADD9FF9}"/>
+                <a16:creationId xmlns:a16="http://schemas.microsoft.com/office/drawing/2014/main" id="{56ED4476-E01A-42B1-A559-D8CED1A39A57}"/>
               </a:ext>
             </a:extLst>
           </p:cNvPr>
@@ -4943,7 +5140,7 @@
           <p:cNvPr id="12" name="Text Placeholder 11">
             <a:extLst xmlns:a="http://schemas.openxmlformats.org/drawingml/2006/main">
               <a:ext uri="{FF2B5EF4-FFF2-40B4-BE49-F238E27FC236}">
-                <a16:creationId xmlns:a16="http://schemas.microsoft.com/office/drawing/2014/main" id="{F66E1B58-1668-4CF8-BBA0-C05D90A73B37}"/>
+                <a16:creationId xmlns:a16="http://schemas.microsoft.com/office/drawing/2014/main" id="{26C4C14F-C746-41B5-B81D-DD1BA3D61039}"/>
               </a:ext>
             </a:extLst>
           </p:cNvPr>
@@ -5003,7 +5200,7 @@
           <p:cNvPr id="6" name="标题 1">
             <a:extLst xmlns:a="http://schemas.openxmlformats.org/drawingml/2006/main">
               <a:ext uri="{FF2B5EF4-FFF2-40B4-BE49-F238E27FC236}">
-                <a16:creationId xmlns:a16="http://schemas.microsoft.com/office/drawing/2014/main" id="{597389D0-7CF9-4AAF-9CBB-F03026349716}"/>
+                <a16:creationId xmlns:a16="http://schemas.microsoft.com/office/drawing/2014/main" id="{3247B335-B314-4F11-9E70-305E87C56793}"/>
               </a:ext>
             </a:extLst>
           </p:cNvPr>
@@ -5067,7 +5264,7 @@
           <p:cNvPr id="24" name="署名占位符 10">
             <a:extLst xmlns:a="http://schemas.openxmlformats.org/drawingml/2006/main">
               <a:ext uri="{FF2B5EF4-FFF2-40B4-BE49-F238E27FC236}">
-                <a16:creationId xmlns:a16="http://schemas.microsoft.com/office/drawing/2014/main" id="{9B293643-C71D-4A4A-8041-86656A1C5C7D}"/>
+                <a16:creationId xmlns:a16="http://schemas.microsoft.com/office/drawing/2014/main" id="{B6EAE8FD-7B3A-4436-B4A5-8D17B5CA6057}"/>
               </a:ext>
             </a:extLst>
           </p:cNvPr>
@@ -5149,7 +5346,7 @@
           <p:nvPr/>
         </p:nvPicPr>
         <p:blipFill>
-          <a:blip xmlns:r="http://schemas.openxmlformats.org/officeDocument/2006/relationships" xmlns:a="http://schemas.openxmlformats.org/drawingml/2006/main" r:embed="R6537900708134468"/>
+          <a:blip xmlns:r="http://schemas.openxmlformats.org/officeDocument/2006/relationships" xmlns:a="http://schemas.openxmlformats.org/drawingml/2006/main" r:embed="Rdc8d2b7ee1bd4315"/>
           <a:srcRect xmlns:a="http://schemas.openxmlformats.org/drawingml/2006/main" l="0" t="0" r="39" b="0"/>
           <a:stretch xmlns:a="http://schemas.openxmlformats.org/drawingml/2006/main">
             <a:fillRect l="0" t="0" r="0" b="0"/>
@@ -5167,7 +5364,7 @@
           <p:cNvPr id="33" name="任意多边形: 形状 32">
             <a:extLst xmlns:a="http://schemas.openxmlformats.org/drawingml/2006/main">
               <a:ext uri="{FF2B5EF4-FFF2-40B4-BE49-F238E27FC236}">
-                <a16:creationId xmlns:a16="http://schemas.microsoft.com/office/drawing/2014/main" id="{A14A175B-2553-4089-AB2A-793EA4E8854A}"/>
+                <a16:creationId xmlns:a16="http://schemas.microsoft.com/office/drawing/2014/main" id="{0813DAE9-F549-46FB-95A7-56A6C301E7E4}"/>
               </a:ext>
             </a:extLst>
           </p:cNvPr>
@@ -5259,7 +5456,7 @@
           <p:cNvPr id="35" name="任意多边形: 形状 34">
             <a:extLst xmlns:a="http://schemas.openxmlformats.org/drawingml/2006/main">
               <a:ext uri="{FF2B5EF4-FFF2-40B4-BE49-F238E27FC236}">
-                <a16:creationId xmlns:a16="http://schemas.microsoft.com/office/drawing/2014/main" id="{7982F2C9-5FC2-4E9C-9334-E1A34F487340}"/>
+                <a16:creationId xmlns:a16="http://schemas.microsoft.com/office/drawing/2014/main" id="{04E17D30-EFA4-4829-A3F3-303424F31AAF}"/>
               </a:ext>
             </a:extLst>
           </p:cNvPr>
@@ -5435,7 +5632,7 @@
           <p:cNvPr id="7" name="矩形 6">
             <a:extLst xmlns:a="http://schemas.openxmlformats.org/drawingml/2006/main">
               <a:ext uri="{FF2B5EF4-FFF2-40B4-BE49-F238E27FC236}">
-                <a16:creationId xmlns:a16="http://schemas.microsoft.com/office/drawing/2014/main" id="{BADA9A54-7781-4C2A-B249-3E1A51E56390}"/>
+                <a16:creationId xmlns:a16="http://schemas.microsoft.com/office/drawing/2014/main" id="{8097D4E2-A685-4C90-B9D3-84F55A4C80AE}"/>
               </a:ext>
             </a:extLst>
           </p:cNvPr>
@@ -5494,7 +5691,7 @@
           <p:cNvPr id="2" name="标题占位符 1">
             <a:extLst xmlns:a="http://schemas.openxmlformats.org/drawingml/2006/main">
               <a:ext uri="{FF2B5EF4-FFF2-40B4-BE49-F238E27FC236}">
-                <a16:creationId xmlns:a16="http://schemas.microsoft.com/office/drawing/2014/main" id="{209EA69D-71D2-48BD-9D77-44EC41A09F0E}"/>
+                <a16:creationId xmlns:a16="http://schemas.microsoft.com/office/drawing/2014/main" id="{8898AFC8-B20A-4D52-AE4D-E3D1DE7E6BD9}"/>
               </a:ext>
             </a:extLst>
           </p:cNvPr>
@@ -5532,7 +5729,7 @@
           <p:cNvPr id="3" name="文本占位符 2">
             <a:extLst xmlns:a="http://schemas.openxmlformats.org/drawingml/2006/main">
               <a:ext uri="{FF2B5EF4-FFF2-40B4-BE49-F238E27FC236}">
-                <a16:creationId xmlns:a16="http://schemas.microsoft.com/office/drawing/2014/main" id="{BB4FAE3A-7F91-4234-A8B6-332FEB4ACAB8}"/>
+                <a16:creationId xmlns:a16="http://schemas.microsoft.com/office/drawing/2014/main" id="{A08DB5BD-F3A1-455B-A4C0-7E80C217023B}"/>
               </a:ext>
             </a:extLst>
           </p:cNvPr>
@@ -5618,7 +5815,7 @@
           <p:cNvPr id="4" name="日期占位符 3">
             <a:extLst xmlns:a="http://schemas.openxmlformats.org/drawingml/2006/main">
               <a:ext uri="{FF2B5EF4-FFF2-40B4-BE49-F238E27FC236}">
-                <a16:creationId xmlns:a16="http://schemas.microsoft.com/office/drawing/2014/main" id="{CFF3C2E4-7B2B-4A8D-B1B1-C5C34772A9D9}"/>
+                <a16:creationId xmlns:a16="http://schemas.microsoft.com/office/drawing/2014/main" id="{BFD81136-BBF0-4430-954C-0C02575C1A80}"/>
               </a:ext>
             </a:extLst>
           </p:cNvPr>
@@ -5664,7 +5861,7 @@
           <p:cNvPr id="5" name="页脚占位符 4">
             <a:extLst xmlns:a="http://schemas.openxmlformats.org/drawingml/2006/main">
               <a:ext uri="{FF2B5EF4-FFF2-40B4-BE49-F238E27FC236}">
-                <a16:creationId xmlns:a16="http://schemas.microsoft.com/office/drawing/2014/main" id="{DD9C7C3F-FA4E-4C81-BD4A-FD898E2C2AF0}"/>
+                <a16:creationId xmlns:a16="http://schemas.microsoft.com/office/drawing/2014/main" id="{4247DE61-AC3F-438F-B656-BD638DD7FB94}"/>
               </a:ext>
             </a:extLst>
           </p:cNvPr>
@@ -5710,7 +5907,7 @@
           <p:cNvPr id="6" name="灯片编号占位符 5">
             <a:extLst xmlns:a="http://schemas.openxmlformats.org/drawingml/2006/main">
               <a:ext uri="{FF2B5EF4-FFF2-40B4-BE49-F238E27FC236}">
-                <a16:creationId xmlns:a16="http://schemas.microsoft.com/office/drawing/2014/main" id="{3ED9D73C-3E38-49DA-B420-C6B6CC0ACCC4}"/>
+                <a16:creationId xmlns:a16="http://schemas.microsoft.com/office/drawing/2014/main" id="{272E395E-4714-487A-85D8-5709F13F83AB}"/>
               </a:ext>
             </a:extLst>
           </p:cNvPr>
@@ -5756,7 +5953,7 @@
           <p:cNvPr id="9" name="KSO_TEMPLATE" hidden="1">
             <a:extLst xmlns:a="http://schemas.openxmlformats.org/drawingml/2006/main">
               <a:ext uri="{FF2B5EF4-FFF2-40B4-BE49-F238E27FC236}">
-                <a16:creationId xmlns:a16="http://schemas.microsoft.com/office/drawing/2014/main" id="{5258A5EB-EC53-4563-AC8D-49638D910A0F}"/>
+                <a16:creationId xmlns:a16="http://schemas.microsoft.com/office/drawing/2014/main" id="{11C75990-63B4-431B-80F0-69C9D2CC36C5}"/>
               </a:ext>
             </a:extLst>
           </p:cNvPr>
@@ -5805,18 +6002,18 @@
   </p:cSld>
   <p:clrMap bg1="dk1" tx1="lt1" bg2="dk2" tx2="lt2" accent1="accent1" accent2="accent2" accent3="accent3" accent4="accent4" accent5="accent5" accent6="accent6" hlink="hlink" folHlink="folHlink"/>
   <p:sldLayoutIdLst>
-    <p:sldLayoutId xmlns:r="http://schemas.openxmlformats.org/officeDocument/2006/relationships" id="2147483649" r:id="R6a232b08e344448d"/>
-    <p:sldLayoutId xmlns:r="http://schemas.openxmlformats.org/officeDocument/2006/relationships" id="2147483650" r:id="Rbdbfb65af35e40ce"/>
-    <p:sldLayoutId xmlns:r="http://schemas.openxmlformats.org/officeDocument/2006/relationships" id="2147483651" r:id="R8086fe0a2b414f4b"/>
-    <p:sldLayoutId xmlns:r="http://schemas.openxmlformats.org/officeDocument/2006/relationships" id="2147483652" r:id="R6ad8b82ba8894ab0"/>
-    <p:sldLayoutId xmlns:r="http://schemas.openxmlformats.org/officeDocument/2006/relationships" id="2147483653" r:id="R9b35321b8551423a"/>
-    <p:sldLayoutId xmlns:r="http://schemas.openxmlformats.org/officeDocument/2006/relationships" id="2147483654" r:id="R7fbf79bd9faf42c0"/>
-    <p:sldLayoutId xmlns:r="http://schemas.openxmlformats.org/officeDocument/2006/relationships" id="2147483655" r:id="R004cdba36c834db1"/>
-    <p:sldLayoutId xmlns:r="http://schemas.openxmlformats.org/officeDocument/2006/relationships" id="2147483656" r:id="R2c69bb9d6def45fa"/>
-    <p:sldLayoutId xmlns:r="http://schemas.openxmlformats.org/officeDocument/2006/relationships" id="2147483657" r:id="Ra8fd9ff9b56044dc"/>
-    <p:sldLayoutId xmlns:r="http://schemas.openxmlformats.org/officeDocument/2006/relationships" id="2147483658" r:id="R357337961a3a40ef"/>
-    <p:sldLayoutId xmlns:r="http://schemas.openxmlformats.org/officeDocument/2006/relationships" id="2147483659" r:id="R3f13b2a8d9634786"/>
-    <p:sldLayoutId xmlns:r="http://schemas.openxmlformats.org/officeDocument/2006/relationships" id="2147483660" r:id="R404e404bd4e44e4e"/>
+    <p:sldLayoutId xmlns:r="http://schemas.openxmlformats.org/officeDocument/2006/relationships" id="2147483649" r:id="R662e6dd1b31a4abd"/>
+    <p:sldLayoutId xmlns:r="http://schemas.openxmlformats.org/officeDocument/2006/relationships" id="2147483650" r:id="Re3bc4f0098f04aca"/>
+    <p:sldLayoutId xmlns:r="http://schemas.openxmlformats.org/officeDocument/2006/relationships" id="2147483651" r:id="R77f7a3b519424641"/>
+    <p:sldLayoutId xmlns:r="http://schemas.openxmlformats.org/officeDocument/2006/relationships" id="2147483652" r:id="Rdaea97d3c617419c"/>
+    <p:sldLayoutId xmlns:r="http://schemas.openxmlformats.org/officeDocument/2006/relationships" id="2147483653" r:id="Rad0b9628890c413e"/>
+    <p:sldLayoutId xmlns:r="http://schemas.openxmlformats.org/officeDocument/2006/relationships" id="2147483654" r:id="R71379b158ce14d99"/>
+    <p:sldLayoutId xmlns:r="http://schemas.openxmlformats.org/officeDocument/2006/relationships" id="2147483655" r:id="R5a779aef14c44c65"/>
+    <p:sldLayoutId xmlns:r="http://schemas.openxmlformats.org/officeDocument/2006/relationships" id="2147483656" r:id="R5c47721a7b984ae5"/>
+    <p:sldLayoutId xmlns:r="http://schemas.openxmlformats.org/officeDocument/2006/relationships" id="2147483657" r:id="R5940ae96ca5f468a"/>
+    <p:sldLayoutId xmlns:r="http://schemas.openxmlformats.org/officeDocument/2006/relationships" id="2147483658" r:id="R5557a66940cc4ae9"/>
+    <p:sldLayoutId xmlns:r="http://schemas.openxmlformats.org/officeDocument/2006/relationships" id="2147483659" r:id="R7f799fbbce644d92"/>
+    <p:sldLayoutId xmlns:r="http://schemas.openxmlformats.org/officeDocument/2006/relationships" id="2147483660" r:id="Rd8b23c30c85e415f"/>
   </p:sldLayoutIdLst>
   <p:txStyles>
     <p:titleStyle>
@@ -6338,7 +6535,7 @@
           <p:cNvPr id="2" name="Text Placeholder 1">
             <a:extLst xmlns:a="http://schemas.openxmlformats.org/drawingml/2006/main">
               <a:ext uri="{FF2B5EF4-FFF2-40B4-BE49-F238E27FC236}">
-                <a16:creationId xmlns:a16="http://schemas.microsoft.com/office/drawing/2014/main" id="{6371D0F0-E9A9-4DE8-AC66-33F5F6B066B2}"/>
+                <a16:creationId xmlns:a16="http://schemas.microsoft.com/office/drawing/2014/main" id="{CF97A5AD-C74D-4138-958F-3DBDA21BB1AF}"/>
               </a:ext>
             </a:extLst>
           </p:cNvPr>
@@ -6368,7 +6565,7 @@
           <p:cNvPr id="3" name="标题 1">
             <a:extLst xmlns:a="http://schemas.openxmlformats.org/drawingml/2006/main">
               <a:ext uri="{FF2B5EF4-FFF2-40B4-BE49-F238E27FC236}">
-                <a16:creationId xmlns:a16="http://schemas.microsoft.com/office/drawing/2014/main" id="{013D9F50-7783-46C9-857C-48ED75084099}"/>
+                <a16:creationId xmlns:a16="http://schemas.microsoft.com/office/drawing/2014/main" id="{7F012C4C-1665-4AD6-9ADC-23B11133BE64}"/>
               </a:ext>
             </a:extLst>
           </p:cNvPr>
@@ -6399,7 +6596,7 @@
           <p:cNvPr id="4" name="署名占位符 10">
             <a:extLst xmlns:a="http://schemas.openxmlformats.org/drawingml/2006/main">
               <a:ext uri="{FF2B5EF4-FFF2-40B4-BE49-F238E27FC236}">
-                <a16:creationId xmlns:a16="http://schemas.microsoft.com/office/drawing/2014/main" id="{0CDD09E1-7730-4867-A3B7-A10897977885}"/>
+                <a16:creationId xmlns:a16="http://schemas.microsoft.com/office/drawing/2014/main" id="{3C6EAC5E-60A1-4B08-B6B8-78EF17E1F7FE}"/>
               </a:ext>
             </a:extLst>
           </p:cNvPr>
@@ -6427,7 +6624,7 @@
     </p:spTree>
     <p:extLst>
       <p:ext uri="{BB962C8B-B14F-4D97-AF65-F5344CB8AC3E}">
-        <p14:creationId xmlns:p14="http://schemas.microsoft.com/office/powerpoint/2010/main" val="154519428"/>
+        <p14:creationId xmlns:p14="http://schemas.microsoft.com/office/powerpoint/2010/main" val="766086768"/>
       </p:ext>
     </p:extLst>
   </p:cSld>
@@ -6451,7 +6648,7 @@
           <p:cNvPr id="3" name="文本框 2">
             <a:extLst xmlns:a="http://schemas.openxmlformats.org/drawingml/2006/main">
               <a:ext uri="{FF2B5EF4-FFF2-40B4-BE49-F238E27FC236}">
-                <a16:creationId xmlns:a16="http://schemas.microsoft.com/office/drawing/2014/main" id="{3DBD65DC-8EB6-4DC0-A82C-7224F5DD05D4}"/>
+                <a16:creationId xmlns:a16="http://schemas.microsoft.com/office/drawing/2014/main" id="{D4499263-DB80-4F19-97B2-0BD33C1CD39C}"/>
               </a:ext>
             </a:extLst>
           </p:cNvPr>
@@ -6509,7 +6706,7 @@
           <p:cNvPr id="4" name="矩形 3">
             <a:extLst xmlns:a="http://schemas.openxmlformats.org/drawingml/2006/main">
               <a:ext uri="{FF2B5EF4-FFF2-40B4-BE49-F238E27FC236}">
-                <a16:creationId xmlns:a16="http://schemas.microsoft.com/office/drawing/2014/main" id="{4AC28106-80D5-48EF-855B-B3425289026E}"/>
+                <a16:creationId xmlns:a16="http://schemas.microsoft.com/office/drawing/2014/main" id="{708372AD-EC0C-4337-AD23-EE8D216A5AC3}"/>
               </a:ext>
             </a:extLst>
           </p:cNvPr>
@@ -6565,7 +6762,7 @@
           <p:cNvPr id="5" name="任意多边形 4">
             <a:extLst xmlns:a="http://schemas.openxmlformats.org/drawingml/2006/main">
               <a:ext uri="{FF2B5EF4-FFF2-40B4-BE49-F238E27FC236}">
-                <a16:creationId xmlns:a16="http://schemas.microsoft.com/office/drawing/2014/main" id="{7BEC9203-AA6F-4A16-985D-554232E79134}"/>
+                <a16:creationId xmlns:a16="http://schemas.microsoft.com/office/drawing/2014/main" id="{B69CB185-40D5-4698-80C8-109AE76992C7}"/>
               </a:ext>
             </a:extLst>
           </p:cNvPr>
@@ -6715,7 +6912,7 @@
           <p:cNvPr id="6" name="文本框 5">
             <a:extLst xmlns:a="http://schemas.openxmlformats.org/drawingml/2006/main">
               <a:ext uri="{FF2B5EF4-FFF2-40B4-BE49-F238E27FC236}">
-                <a16:creationId xmlns:a16="http://schemas.microsoft.com/office/drawing/2014/main" id="{398C70F8-7CAE-42D3-99A5-6D022359720F}"/>
+                <a16:creationId xmlns:a16="http://schemas.microsoft.com/office/drawing/2014/main" id="{3384BB0F-21E6-419F-92A1-19A8353799C3}"/>
               </a:ext>
             </a:extLst>
           </p:cNvPr>
@@ -6773,7 +6970,7 @@
           <p:cNvPr id="7" name="矩形 6">
             <a:extLst xmlns:a="http://schemas.openxmlformats.org/drawingml/2006/main">
               <a:ext uri="{FF2B5EF4-FFF2-40B4-BE49-F238E27FC236}">
-                <a16:creationId xmlns:a16="http://schemas.microsoft.com/office/drawing/2014/main" id="{81AEF14C-C5DA-482A-B17D-0671BD88C5DE}"/>
+                <a16:creationId xmlns:a16="http://schemas.microsoft.com/office/drawing/2014/main" id="{A73431E9-44A0-43DC-B395-68790DBBC1DB}"/>
               </a:ext>
             </a:extLst>
           </p:cNvPr>
@@ -6831,7 +7028,7 @@
           <p:cNvPr id="8" name="文本框 7">
             <a:extLst xmlns:a="http://schemas.openxmlformats.org/drawingml/2006/main">
               <a:ext uri="{FF2B5EF4-FFF2-40B4-BE49-F238E27FC236}">
-                <a16:creationId xmlns:a16="http://schemas.microsoft.com/office/drawing/2014/main" id="{BE81B75B-C175-4372-A625-8055BCF1628F}"/>
+                <a16:creationId xmlns:a16="http://schemas.microsoft.com/office/drawing/2014/main" id="{2B4DBBBF-E8A8-495C-98F8-DAFE4A84E50B}"/>
               </a:ext>
             </a:extLst>
           </p:cNvPr>
@@ -6889,7 +7086,7 @@
           <p:cNvPr id="9" name="文本框 8">
             <a:extLst xmlns:a="http://schemas.openxmlformats.org/drawingml/2006/main">
               <a:ext uri="{FF2B5EF4-FFF2-40B4-BE49-F238E27FC236}">
-                <a16:creationId xmlns:a16="http://schemas.microsoft.com/office/drawing/2014/main" id="{E95777B8-0E5C-4BAB-A060-1BAA1DEEC9B4}"/>
+                <a16:creationId xmlns:a16="http://schemas.microsoft.com/office/drawing/2014/main" id="{FEBCB053-7C2A-4A67-99F3-C22027E3CC65}"/>
               </a:ext>
             </a:extLst>
           </p:cNvPr>
@@ -6952,7 +7149,7 @@
           <p:cNvPr id="11" name="任意多边形 10">
             <a:extLst xmlns:a="http://schemas.openxmlformats.org/drawingml/2006/main">
               <a:ext uri="{FF2B5EF4-FFF2-40B4-BE49-F238E27FC236}">
-                <a16:creationId xmlns:a16="http://schemas.microsoft.com/office/drawing/2014/main" id="{5B9E09D7-5EDE-4C15-BB7F-A18DAD69591E}"/>
+                <a16:creationId xmlns:a16="http://schemas.microsoft.com/office/drawing/2014/main" id="{2B29ABB3-39D2-4429-BEB3-6D27978DB62C}"/>
               </a:ext>
             </a:extLst>
           </p:cNvPr>
@@ -7102,7 +7299,7 @@
           <p:cNvPr id="12" name="文本框 11">
             <a:extLst xmlns:a="http://schemas.openxmlformats.org/drawingml/2006/main">
               <a:ext uri="{FF2B5EF4-FFF2-40B4-BE49-F238E27FC236}">
-                <a16:creationId xmlns:a16="http://schemas.microsoft.com/office/drawing/2014/main" id="{E38F3B82-0C30-4E14-90E4-6D8563A17166}"/>
+                <a16:creationId xmlns:a16="http://schemas.microsoft.com/office/drawing/2014/main" id="{8CF5F160-07FE-41BC-BD5C-C97279B83918}"/>
               </a:ext>
             </a:extLst>
           </p:cNvPr>
@@ -7160,7 +7357,7 @@
           <p:cNvPr id="13" name="矩形 12">
             <a:extLst xmlns:a="http://schemas.openxmlformats.org/drawingml/2006/main">
               <a:ext uri="{FF2B5EF4-FFF2-40B4-BE49-F238E27FC236}">
-                <a16:creationId xmlns:a16="http://schemas.microsoft.com/office/drawing/2014/main" id="{5626CF00-8F6E-4433-A6D3-EEB30AD1F661}"/>
+                <a16:creationId xmlns:a16="http://schemas.microsoft.com/office/drawing/2014/main" id="{03AB434F-AAEE-45C0-9944-218A3BC5A05E}"/>
               </a:ext>
             </a:extLst>
           </p:cNvPr>
@@ -7218,7 +7415,7 @@
           <p:cNvPr id="14" name="文本框 13">
             <a:extLst xmlns:a="http://schemas.openxmlformats.org/drawingml/2006/main">
               <a:ext uri="{FF2B5EF4-FFF2-40B4-BE49-F238E27FC236}">
-                <a16:creationId xmlns:a16="http://schemas.microsoft.com/office/drawing/2014/main" id="{F897F18E-6335-488D-B8D7-BF34AB27EF79}"/>
+                <a16:creationId xmlns:a16="http://schemas.microsoft.com/office/drawing/2014/main" id="{66983578-7494-4103-B9D8-620296D52BF4}"/>
               </a:ext>
             </a:extLst>
           </p:cNvPr>
@@ -7276,7 +7473,7 @@
           <p:cNvPr id="15" name="文本框 14">
             <a:extLst xmlns:a="http://schemas.openxmlformats.org/drawingml/2006/main">
               <a:ext uri="{FF2B5EF4-FFF2-40B4-BE49-F238E27FC236}">
-                <a16:creationId xmlns:a16="http://schemas.microsoft.com/office/drawing/2014/main" id="{BC6CCDFC-72AF-44D6-AD9B-542E24159267}"/>
+                <a16:creationId xmlns:a16="http://schemas.microsoft.com/office/drawing/2014/main" id="{0BE67FA0-B1FF-4E63-9EDC-355E7F755BF7}"/>
               </a:ext>
             </a:extLst>
           </p:cNvPr>
@@ -7339,7 +7536,7 @@
           <p:cNvPr id="17" name="任意多边形 16">
             <a:extLst xmlns:a="http://schemas.openxmlformats.org/drawingml/2006/main">
               <a:ext uri="{FF2B5EF4-FFF2-40B4-BE49-F238E27FC236}">
-                <a16:creationId xmlns:a16="http://schemas.microsoft.com/office/drawing/2014/main" id="{B2A1DC24-40D8-4D8A-A2BD-02A167F7D275}"/>
+                <a16:creationId xmlns:a16="http://schemas.microsoft.com/office/drawing/2014/main" id="{09038108-A0ED-42E9-91C2-EF76F36A62CC}"/>
               </a:ext>
             </a:extLst>
           </p:cNvPr>
@@ -7489,7 +7686,7 @@
           <p:cNvPr id="18" name="文本框 17">
             <a:extLst xmlns:a="http://schemas.openxmlformats.org/drawingml/2006/main">
               <a:ext uri="{FF2B5EF4-FFF2-40B4-BE49-F238E27FC236}">
-                <a16:creationId xmlns:a16="http://schemas.microsoft.com/office/drawing/2014/main" id="{996C33A6-B2EE-4D79-851B-9BEA2F8EF137}"/>
+                <a16:creationId xmlns:a16="http://schemas.microsoft.com/office/drawing/2014/main" id="{14C160E2-56A4-4E32-8AAD-325DF8EAABEA}"/>
               </a:ext>
             </a:extLst>
           </p:cNvPr>
@@ -7547,7 +7744,7 @@
           <p:cNvPr id="19" name="矩形 18">
             <a:extLst xmlns:a="http://schemas.openxmlformats.org/drawingml/2006/main">
               <a:ext uri="{FF2B5EF4-FFF2-40B4-BE49-F238E27FC236}">
-                <a16:creationId xmlns:a16="http://schemas.microsoft.com/office/drawing/2014/main" id="{79ECACDB-ABAE-47C1-92D3-EDD322A1595E}"/>
+                <a16:creationId xmlns:a16="http://schemas.microsoft.com/office/drawing/2014/main" id="{AA0F990F-50C1-4ACF-B4AE-057B2EA4F17D}"/>
               </a:ext>
             </a:extLst>
           </p:cNvPr>
@@ -7605,7 +7802,7 @@
           <p:cNvPr id="20" name="文本框 19">
             <a:extLst xmlns:a="http://schemas.openxmlformats.org/drawingml/2006/main">
               <a:ext uri="{FF2B5EF4-FFF2-40B4-BE49-F238E27FC236}">
-                <a16:creationId xmlns:a16="http://schemas.microsoft.com/office/drawing/2014/main" id="{B7E8FF95-BB34-479B-B3FE-E1EF2C19F482}"/>
+                <a16:creationId xmlns:a16="http://schemas.microsoft.com/office/drawing/2014/main" id="{20BC20F4-D4B5-47FD-9037-5D1534F8339D}"/>
               </a:ext>
             </a:extLst>
           </p:cNvPr>
@@ -7663,7 +7860,7 @@
           <p:cNvPr id="21" name="文本框 20">
             <a:extLst xmlns:a="http://schemas.openxmlformats.org/drawingml/2006/main">
               <a:ext uri="{FF2B5EF4-FFF2-40B4-BE49-F238E27FC236}">
-                <a16:creationId xmlns:a16="http://schemas.microsoft.com/office/drawing/2014/main" id="{9A3E39FA-84A3-42E7-AC94-4C28DED77B91}"/>
+                <a16:creationId xmlns:a16="http://schemas.microsoft.com/office/drawing/2014/main" id="{9586EDDB-3D61-4528-9ECE-F18BEE7036DC}"/>
               </a:ext>
             </a:extLst>
           </p:cNvPr>
@@ -7726,7 +7923,7 @@
           <p:cNvPr id="23" name="任意多边形 22">
             <a:extLst xmlns:a="http://schemas.openxmlformats.org/drawingml/2006/main">
               <a:ext uri="{FF2B5EF4-FFF2-40B4-BE49-F238E27FC236}">
-                <a16:creationId xmlns:a16="http://schemas.microsoft.com/office/drawing/2014/main" id="{91780004-7BF1-4B81-8D9D-5EF7171ABABE}"/>
+                <a16:creationId xmlns:a16="http://schemas.microsoft.com/office/drawing/2014/main" id="{62F97EC1-738D-430B-926E-C23579335DCE}"/>
               </a:ext>
             </a:extLst>
           </p:cNvPr>
@@ -7876,7 +8073,7 @@
           <p:cNvPr id="24" name="文本框 23">
             <a:extLst xmlns:a="http://schemas.openxmlformats.org/drawingml/2006/main">
               <a:ext uri="{FF2B5EF4-FFF2-40B4-BE49-F238E27FC236}">
-                <a16:creationId xmlns:a16="http://schemas.microsoft.com/office/drawing/2014/main" id="{94B773B7-913D-4238-B836-F681067441C1}"/>
+                <a16:creationId xmlns:a16="http://schemas.microsoft.com/office/drawing/2014/main" id="{DF8ECDD9-0D75-4E4F-B610-4027869749C9}"/>
               </a:ext>
             </a:extLst>
           </p:cNvPr>
@@ -7934,7 +8131,7 @@
           <p:cNvPr id="25" name="矩形 24">
             <a:extLst xmlns:a="http://schemas.openxmlformats.org/drawingml/2006/main">
               <a:ext uri="{FF2B5EF4-FFF2-40B4-BE49-F238E27FC236}">
-                <a16:creationId xmlns:a16="http://schemas.microsoft.com/office/drawing/2014/main" id="{3E66F034-33FD-4103-8756-C3645C20F82B}"/>
+                <a16:creationId xmlns:a16="http://schemas.microsoft.com/office/drawing/2014/main" id="{E385F7BF-3AC9-49DF-9DD6-D91F831B8DD3}"/>
               </a:ext>
             </a:extLst>
           </p:cNvPr>
@@ -7992,7 +8189,7 @@
           <p:cNvPr id="26" name="文本框 25">
             <a:extLst xmlns:a="http://schemas.openxmlformats.org/drawingml/2006/main">
               <a:ext uri="{FF2B5EF4-FFF2-40B4-BE49-F238E27FC236}">
-                <a16:creationId xmlns:a16="http://schemas.microsoft.com/office/drawing/2014/main" id="{D7A763EE-974A-4930-A055-9ABB257CD331}"/>
+                <a16:creationId xmlns:a16="http://schemas.microsoft.com/office/drawing/2014/main" id="{EAF17ECC-F768-4117-9FF5-923077389DCB}"/>
               </a:ext>
             </a:extLst>
           </p:cNvPr>
@@ -8050,7 +8247,7 @@
           <p:cNvPr id="27" name="文本框 26">
             <a:extLst xmlns:a="http://schemas.openxmlformats.org/drawingml/2006/main">
               <a:ext uri="{FF2B5EF4-FFF2-40B4-BE49-F238E27FC236}">
-                <a16:creationId xmlns:a16="http://schemas.microsoft.com/office/drawing/2014/main" id="{6AC207BC-9E1B-4260-84A5-49280B29DB34}"/>
+                <a16:creationId xmlns:a16="http://schemas.microsoft.com/office/drawing/2014/main" id="{F1722B35-6794-4E9C-ABD4-FA7D2593EDA5}"/>
               </a:ext>
             </a:extLst>
           </p:cNvPr>
@@ -8111,7 +8308,5736 @@
     </p:spTree>
     <p:extLst>
       <p:ext uri="{BB962C8B-B14F-4D97-AF65-F5344CB8AC3E}">
-        <p14:creationId xmlns:p14="http://schemas.microsoft.com/office/powerpoint/2010/main" val="1326605691"/>
+        <p14:creationId xmlns:p14="http://schemas.microsoft.com/office/powerpoint/2010/main" val="1694466547"/>
+      </p:ext>
+    </p:extLst>
+  </p:cSld>
+</p:sld>
+</file>
+
+<file path=ppt/slides/slide3.xml><?xml version="1.0" encoding="utf-8"?>
+<p:sld xmlns:p="http://schemas.openxmlformats.org/presentationml/2006/main">
+  <p:cSld>
+    <p:spTree>
+      <p:nvGrpSpPr>
+        <p:cNvPr id="1" name=""/>
+        <p:cNvGrpSpPr/>
+        <p:nvPr/>
+      </p:nvGrpSpPr>
+      <p:grpSpPr>
+        <a:xfrm xmlns:a="http://schemas.openxmlformats.org/drawingml/2006/main"/>
+      </p:grpSpPr>
+      <p:sp>
+        <p:nvSpPr>
+          <p:cNvPr id="3" name="文本框 2">
+            <a:extLst xmlns:a="http://schemas.openxmlformats.org/drawingml/2006/main">
+              <a:ext uri="{FF2B5EF4-FFF2-40B4-BE49-F238E27FC236}">
+                <a16:creationId xmlns:a16="http://schemas.microsoft.com/office/drawing/2014/main" id="{8A950C83-037D-4AB7-9161-D25AD5D1BC30}"/>
+              </a:ext>
+            </a:extLst>
+          </p:cNvPr>
+          <p:cNvSpPr>
+            <a:spLocks xmlns:a="http://schemas.openxmlformats.org/drawingml/2006/main" noGrp="1"/>
+          </p:cNvSpPr>
+          <p:nvPr/>
+        </p:nvSpPr>
+        <p:spPr>
+          <a:xfrm xmlns:a="http://schemas.openxmlformats.org/drawingml/2006/main">
+            <a:off x="533400" y="357188"/>
+            <a:ext cx="11125200" cy="500063"/>
+          </a:xfrm>
+          <a:prstGeom xmlns:a="http://schemas.openxmlformats.org/drawingml/2006/main" prst="rect">
+            <a:avLst/>
+          </a:prstGeom>
+          <a:noFill xmlns:a="http://schemas.openxmlformats.org/drawingml/2006/main"/>
+        </p:spPr>
+        <p:txBody>
+          <a:bodyPr xmlns:a="http://schemas.openxmlformats.org/drawingml/2006/main" wrap="square" lIns="0" tIns="0" rIns="0" bIns="0" anchor="t">
+            <a:noAutofit/>
+          </a:bodyPr>
+          <a:lstStyle xmlns:a="http://schemas.openxmlformats.org/drawingml/2006/main"/>
+          <a:p xmlns:a="http://schemas.openxmlformats.org/drawingml/2006/main">
+            <a:pPr algn="l">
+              <a:lnSpc>
+                <a:spcPct val="100000"/>
+              </a:lnSpc>
+              <a:buNone/>
+            </a:pPr>
+            <a:r>
+              <a:rPr sz="3000" b="1">
+                <a:solidFill>
+                  <a:srgbClr val="F4F4F5"/>
+                </a:solidFill>
+                <a:latin typeface="Microsoft YaHei"/>
+                <a:ea typeface="Microsoft YaHei"/>
+                <a:cs typeface="Microsoft YaHei"/>
+              </a:rPr>
+              <a:t>原来的做法：专业子图共享主状态</a:t>
+            </a:r>
+            <a:endParaRPr sz="3000" b="1">
+              <a:solidFill>
+                <a:srgbClr val="F4F4F5"/>
+              </a:solidFill>
+              <a:latin typeface="Microsoft YaHei"/>
+              <a:ea typeface="Microsoft YaHei"/>
+              <a:cs typeface="Microsoft YaHei"/>
+            </a:endParaRPr>
+          </a:p>
+        </p:txBody>
+      </p:sp>
+      <p:sp>
+        <p:nvSpPr>
+          <p:cNvPr id="4" name="任意多边形 3">
+            <a:extLst xmlns:a="http://schemas.openxmlformats.org/drawingml/2006/main">
+              <a:ext uri="{FF2B5EF4-FFF2-40B4-BE49-F238E27FC236}">
+                <a16:creationId xmlns:a16="http://schemas.microsoft.com/office/drawing/2014/main" id="{E5C44648-269C-46B2-9BB9-B2757AA4C9DA}"/>
+              </a:ext>
+            </a:extLst>
+          </p:cNvPr>
+          <p:cNvSpPr>
+            <a:spLocks xmlns:a="http://schemas.openxmlformats.org/drawingml/2006/main" noGrp="1"/>
+          </p:cNvSpPr>
+          <p:nvPr/>
+        </p:nvSpPr>
+        <p:spPr>
+          <a:xfrm xmlns:a="http://schemas.openxmlformats.org/drawingml/2006/main">
+            <a:off x="575945" y="1109345"/>
+            <a:ext cx="11039475" cy="742950"/>
+          </a:xfrm>
+          <a:custGeom xmlns:a="http://schemas.openxmlformats.org/drawingml/2006/main">
+            <a:gdLst>
+              <a:gd name="sw" fmla="*/ 1 w 17385"/>
+              <a:gd name="sh" fmla="*/ 1 h 1170"/>
+              <a:gd name="mins" fmla="min sw sh"/>
+              <a:gd name="dsw" fmla="+- 0 sw mins"/>
+              <a:gd name="dsh" fmla="+- 0 sh mins"/>
+              <a:gd name="p0x0" fmla="*/ 120 w 17385"/>
+              <a:gd name="p0y0" fmla="*/ 0 h 1170"/>
+              <a:gd name="p0x1" fmla="*/ 17265 w 17385"/>
+              <a:gd name="p0y1" fmla="*/ 0 h 1170"/>
+              <a:gd name="p0x2" fmla="*/ 17331 w 17385"/>
+              <a:gd name="p0y2" fmla="*/ 0 h 1170"/>
+              <a:gd name="p0x3" fmla="*/ 17385 w 17385"/>
+              <a:gd name="p0y3" fmla="*/ 53 h 1170"/>
+              <a:gd name="p0x4" fmla="*/ 17385 w 17385"/>
+              <a:gd name="p0y4" fmla="*/ 120 h 1170"/>
+              <a:gd name="p0x5" fmla="*/ 17385 w 17385"/>
+              <a:gd name="p0y5" fmla="*/ 1050 h 1170"/>
+              <a:gd name="p0x6" fmla="*/ 17385 w 17385"/>
+              <a:gd name="p0y6" fmla="*/ 1116 h 1170"/>
+              <a:gd name="p0x7" fmla="*/ 17331 w 17385"/>
+              <a:gd name="p0y7" fmla="*/ 1170 h 1170"/>
+              <a:gd name="p0x8" fmla="*/ 17265 w 17385"/>
+              <a:gd name="p0y8" fmla="*/ 1170 h 1170"/>
+              <a:gd name="p0x9" fmla="*/ 120 w 17385"/>
+              <a:gd name="p0y9" fmla="*/ 1170 h 1170"/>
+              <a:gd name="p0x10" fmla="*/ 53 w 17385"/>
+              <a:gd name="p0y10" fmla="*/ 1170 h 1170"/>
+              <a:gd name="p0x11" fmla="*/ 0 w 17385"/>
+              <a:gd name="p0y11" fmla="*/ 1116 h 1170"/>
+              <a:gd name="p0x12" fmla="*/ 0 w 17385"/>
+              <a:gd name="p0y12" fmla="*/ 1050 h 1170"/>
+              <a:gd name="p0x13" fmla="*/ 0 w 17385"/>
+              <a:gd name="p0y13" fmla="*/ 120 h 1170"/>
+              <a:gd name="p0x14" fmla="*/ 0 w 17385"/>
+              <a:gd name="p0y14" fmla="*/ 53 h 1170"/>
+              <a:gd name="p0x15" fmla="*/ 53 w 17385"/>
+              <a:gd name="p0y15" fmla="*/ 0 h 1170"/>
+              <a:gd name="p0x16" fmla="*/ 120 w 17385"/>
+              <a:gd name="p0y16" fmla="*/ 0 h 1170"/>
+            </a:gdLst>
+            <a:pathLst>
+              <a:path w="0" h="0">
+                <a:moveTo>
+                  <a:pt x="0" y="0"/>
+                </a:moveTo>
+                <a:lnTo>
+                  <a:pt x="0" y="0"/>
+                </a:lnTo>
+                <a:cubicBezTo>
+                  <a:pt x="0" y="0"/>
+                  <a:pt x="0" y="0"/>
+                  <a:pt x="0" y="0"/>
+                </a:cubicBezTo>
+                <a:lnTo>
+                  <a:pt x="0" y="0"/>
+                </a:lnTo>
+                <a:cubicBezTo>
+                  <a:pt x="0" y="0"/>
+                  <a:pt x="0" y="0"/>
+                  <a:pt x="0" y="0"/>
+                </a:cubicBezTo>
+                <a:lnTo>
+                  <a:pt x="0" y="0"/>
+                </a:lnTo>
+                <a:cubicBezTo>
+                  <a:pt x="0" y="0"/>
+                  <a:pt x="0" y="0"/>
+                  <a:pt x="0" y="0"/>
+                </a:cubicBezTo>
+                <a:lnTo>
+                  <a:pt x="0" y="0"/>
+                </a:lnTo>
+                <a:cubicBezTo>
+                  <a:pt x="0" y="0"/>
+                  <a:pt x="0" y="0"/>
+                  <a:pt x="0" y="0"/>
+                </a:cubicBezTo>
+                <a:close/>
+              </a:path>
+            </a:pathLst>
+          </a:custGeom>
+          <a:solidFill xmlns:a="http://schemas.openxmlformats.org/drawingml/2006/main">
+            <a:srgbClr val="FFFFFF">
+              <a:alpha val="10980"/>
+            </a:srgbClr>
+          </a:solidFill>
+          <a:ln xmlns:a="http://schemas.openxmlformats.org/drawingml/2006/main" w="9525" cmpd="sng">
+            <a:solidFill>
+              <a:srgbClr val="FFFFFF">
+                <a:alpha val="10980"/>
+              </a:srgbClr>
+            </a:solidFill>
+            <a:prstDash val="solid"/>
+          </a:ln>
+          <a:effectLst xmlns:a="http://schemas.openxmlformats.org/drawingml/2006/main">
+            <a:outerShdw blurRad="142875" algn="ctr" rotWithShape="0">
+              <a:schemeClr val="accent2">
+                <a:alpha val="12157"/>
+              </a:schemeClr>
+            </a:outerShdw>
+          </a:effectLst>
+        </p:spPr>
+        <p:style>
+          <a:lnRef xmlns:a="http://schemas.openxmlformats.org/drawingml/2006/main" idx="2">
+            <a:schemeClr val="accent1">
+              <a:lumMod val="75000"/>
+            </a:schemeClr>
+          </a:lnRef>
+          <a:fillRef xmlns:a="http://schemas.openxmlformats.org/drawingml/2006/main" idx="1">
+            <a:schemeClr val="accent1"/>
+          </a:fillRef>
+          <a:effectRef xmlns:a="http://schemas.openxmlformats.org/drawingml/2006/main" idx="0">
+            <a:srgbClr val="FFFFFF"/>
+          </a:effectRef>
+          <a:fontRef xmlns:a="http://schemas.openxmlformats.org/drawingml/2006/main" idx="minor">
+            <a:schemeClr val="lt1"/>
+          </a:fontRef>
+        </p:style>
+        <p:txBody>
+          <a:bodyPr xmlns:a="http://schemas.openxmlformats.org/drawingml/2006/main" anchor="ctr"/>
+          <a:lstStyle xmlns:a="http://schemas.openxmlformats.org/drawingml/2006/main"/>
+          <a:p xmlns:a="http://schemas.openxmlformats.org/drawingml/2006/main">
+            <a:pPr algn="ctr">
+              <a:buNone/>
+            </a:pPr>
+            <a:endParaRPr/>
+          </a:p>
+        </p:txBody>
+      </p:sp>
+      <p:sp>
+        <p:nvSpPr>
+          <p:cNvPr id="5" name="文本框 4">
+            <a:extLst xmlns:a="http://schemas.openxmlformats.org/drawingml/2006/main">
+              <a:ext uri="{FF2B5EF4-FFF2-40B4-BE49-F238E27FC236}">
+                <a16:creationId xmlns:a16="http://schemas.microsoft.com/office/drawing/2014/main" id="{5FE3E1ED-8E36-41A3-A5C8-88A11D3C7CC2}"/>
+              </a:ext>
+            </a:extLst>
+          </p:cNvPr>
+          <p:cNvSpPr>
+            <a:spLocks xmlns:a="http://schemas.openxmlformats.org/drawingml/2006/main" noGrp="1"/>
+          </p:cNvSpPr>
+          <p:nvPr/>
+        </p:nvSpPr>
+        <p:spPr>
+          <a:xfrm xmlns:a="http://schemas.openxmlformats.org/drawingml/2006/main">
+            <a:off x="3983679" y="1304925"/>
+            <a:ext cx="4224556" cy="352425"/>
+          </a:xfrm>
+          <a:prstGeom xmlns:a="http://schemas.openxmlformats.org/drawingml/2006/main" prst="rect">
+            <a:avLst/>
+          </a:prstGeom>
+          <a:noFill xmlns:a="http://schemas.openxmlformats.org/drawingml/2006/main"/>
+        </p:spPr>
+        <p:txBody>
+          <a:bodyPr xmlns:a="http://schemas.openxmlformats.org/drawingml/2006/main" wrap="square" lIns="0" tIns="0" rIns="0" bIns="0" anchor="t">
+            <a:noAutofit/>
+          </a:bodyPr>
+          <a:lstStyle xmlns:a="http://schemas.openxmlformats.org/drawingml/2006/main"/>
+          <a:p xmlns:a="http://schemas.openxmlformats.org/drawingml/2006/main">
+            <a:pPr algn="ctr">
+              <a:buNone/>
+            </a:pPr>
+            <a:r>
+              <a:rPr sz="2100" b="1" spc="126">
+                <a:solidFill>
+                  <a:schemeClr val="tx2">
+                    <a:lumMod val="4356"/>
+                    <a:lumOff val="95644"/>
+                  </a:schemeClr>
+                </a:solidFill>
+                <a:latin typeface="Microsoft YaHei"/>
+                <a:ea typeface="Microsoft YaHei"/>
+                <a:cs typeface="Microsoft YaHei"/>
+              </a:rPr>
+              <a:t>职责拆开，状态仍然共享</a:t>
+            </a:r>
+            <a:endParaRPr sz="2100" b="1" spc="126">
+              <a:solidFill>
+                <a:schemeClr val="tx2">
+                  <a:lumMod val="4356"/>
+                  <a:lumOff val="95644"/>
+                </a:schemeClr>
+              </a:solidFill>
+              <a:latin typeface="Microsoft YaHei"/>
+              <a:ea typeface="Microsoft YaHei"/>
+              <a:cs typeface="Microsoft YaHei"/>
+            </a:endParaRPr>
+          </a:p>
+        </p:txBody>
+      </p:sp>
+      <p:sp>
+        <p:nvSpPr>
+          <p:cNvPr id="6" name="任意多边形 5">
+            <a:extLst xmlns:a="http://schemas.openxmlformats.org/drawingml/2006/main">
+              <a:ext uri="{FF2B5EF4-FFF2-40B4-BE49-F238E27FC236}">
+                <a16:creationId xmlns:a16="http://schemas.microsoft.com/office/drawing/2014/main" id="{1A2CEBC9-5694-4C40-9690-E4E9F4678866}"/>
+              </a:ext>
+            </a:extLst>
+          </p:cNvPr>
+          <p:cNvSpPr>
+            <a:spLocks xmlns:a="http://schemas.openxmlformats.org/drawingml/2006/main" noGrp="1"/>
+          </p:cNvSpPr>
+          <p:nvPr/>
+        </p:nvSpPr>
+        <p:spPr>
+          <a:xfrm xmlns:a="http://schemas.openxmlformats.org/drawingml/2006/main">
+            <a:off x="575945" y="1976120"/>
+            <a:ext cx="11039475" cy="4495800"/>
+          </a:xfrm>
+          <a:custGeom xmlns:a="http://schemas.openxmlformats.org/drawingml/2006/main">
+            <a:gdLst>
+              <a:gd name="sw" fmla="*/ 1 w 17385"/>
+              <a:gd name="sh" fmla="*/ 1 h 7080"/>
+              <a:gd name="mins" fmla="min sw sh"/>
+              <a:gd name="dsw" fmla="+- 0 sw mins"/>
+              <a:gd name="dsh" fmla="+- 0 sh mins"/>
+              <a:gd name="p0x0" fmla="*/ 120 w 17385"/>
+              <a:gd name="p0y0" fmla="*/ 0 h 7080"/>
+              <a:gd name="p0x1" fmla="*/ 17265 w 17385"/>
+              <a:gd name="p0y1" fmla="*/ 0 h 7080"/>
+              <a:gd name="p0x2" fmla="*/ 17331 w 17385"/>
+              <a:gd name="p0y2" fmla="*/ 0 h 7080"/>
+              <a:gd name="p0x3" fmla="*/ 17385 w 17385"/>
+              <a:gd name="p0y3" fmla="*/ 53 h 7080"/>
+              <a:gd name="p0x4" fmla="*/ 17385 w 17385"/>
+              <a:gd name="p0y4" fmla="*/ 120 h 7080"/>
+              <a:gd name="p0x5" fmla="*/ 17385 w 17385"/>
+              <a:gd name="p0y5" fmla="*/ 6960 h 7080"/>
+              <a:gd name="p0x6" fmla="*/ 17385 w 17385"/>
+              <a:gd name="p0y6" fmla="*/ 7026 h 7080"/>
+              <a:gd name="p0x7" fmla="*/ 17331 w 17385"/>
+              <a:gd name="p0y7" fmla="*/ 7080 h 7080"/>
+              <a:gd name="p0x8" fmla="*/ 17265 w 17385"/>
+              <a:gd name="p0y8" fmla="*/ 7080 h 7080"/>
+              <a:gd name="p0x9" fmla="*/ 120 w 17385"/>
+              <a:gd name="p0y9" fmla="*/ 7080 h 7080"/>
+              <a:gd name="p0x10" fmla="*/ 53 w 17385"/>
+              <a:gd name="p0y10" fmla="*/ 7080 h 7080"/>
+              <a:gd name="p0x11" fmla="*/ 0 w 17385"/>
+              <a:gd name="p0y11" fmla="*/ 7026 h 7080"/>
+              <a:gd name="p0x12" fmla="*/ 0 w 17385"/>
+              <a:gd name="p0y12" fmla="*/ 6960 h 7080"/>
+              <a:gd name="p0x13" fmla="*/ 0 w 17385"/>
+              <a:gd name="p0y13" fmla="*/ 120 h 7080"/>
+              <a:gd name="p0x14" fmla="*/ 0 w 17385"/>
+              <a:gd name="p0y14" fmla="*/ 53 h 7080"/>
+              <a:gd name="p0x15" fmla="*/ 53 w 17385"/>
+              <a:gd name="p0y15" fmla="*/ 0 h 7080"/>
+              <a:gd name="p0x16" fmla="*/ 120 w 17385"/>
+              <a:gd name="p0y16" fmla="*/ 0 h 7080"/>
+            </a:gdLst>
+            <a:pathLst>
+              <a:path w="0" h="0">
+                <a:moveTo>
+                  <a:pt x="0" y="0"/>
+                </a:moveTo>
+                <a:lnTo>
+                  <a:pt x="0" y="0"/>
+                </a:lnTo>
+                <a:cubicBezTo>
+                  <a:pt x="0" y="0"/>
+                  <a:pt x="0" y="0"/>
+                  <a:pt x="0" y="0"/>
+                </a:cubicBezTo>
+                <a:lnTo>
+                  <a:pt x="0" y="0"/>
+                </a:lnTo>
+                <a:cubicBezTo>
+                  <a:pt x="0" y="0"/>
+                  <a:pt x="0" y="0"/>
+                  <a:pt x="0" y="0"/>
+                </a:cubicBezTo>
+                <a:lnTo>
+                  <a:pt x="0" y="0"/>
+                </a:lnTo>
+                <a:cubicBezTo>
+                  <a:pt x="0" y="0"/>
+                  <a:pt x="0" y="0"/>
+                  <a:pt x="0" y="0"/>
+                </a:cubicBezTo>
+                <a:lnTo>
+                  <a:pt x="0" y="0"/>
+                </a:lnTo>
+                <a:cubicBezTo>
+                  <a:pt x="0" y="0"/>
+                  <a:pt x="0" y="0"/>
+                  <a:pt x="0" y="0"/>
+                </a:cubicBezTo>
+                <a:close/>
+              </a:path>
+            </a:pathLst>
+          </a:custGeom>
+          <a:solidFill xmlns:a="http://schemas.openxmlformats.org/drawingml/2006/main">
+            <a:srgbClr val="FFFFFF">
+              <a:alpha val="10980"/>
+            </a:srgbClr>
+          </a:solidFill>
+          <a:ln xmlns:a="http://schemas.openxmlformats.org/drawingml/2006/main" w="9525" cmpd="sng">
+            <a:solidFill>
+              <a:srgbClr val="FFFFFF">
+                <a:alpha val="10980"/>
+              </a:srgbClr>
+            </a:solidFill>
+            <a:prstDash val="solid"/>
+          </a:ln>
+          <a:effectLst xmlns:a="http://schemas.openxmlformats.org/drawingml/2006/main">
+            <a:outerShdw blurRad="142875" algn="ctr" rotWithShape="0">
+              <a:schemeClr val="accent2">
+                <a:alpha val="12157"/>
+              </a:schemeClr>
+            </a:outerShdw>
+          </a:effectLst>
+        </p:spPr>
+        <p:style>
+          <a:lnRef xmlns:a="http://schemas.openxmlformats.org/drawingml/2006/main" idx="2">
+            <a:schemeClr val="accent1">
+              <a:lumMod val="75000"/>
+            </a:schemeClr>
+          </a:lnRef>
+          <a:fillRef xmlns:a="http://schemas.openxmlformats.org/drawingml/2006/main" idx="1">
+            <a:schemeClr val="accent1"/>
+          </a:fillRef>
+          <a:effectRef xmlns:a="http://schemas.openxmlformats.org/drawingml/2006/main" idx="0">
+            <a:srgbClr val="FFFFFF"/>
+          </a:effectRef>
+          <a:fontRef xmlns:a="http://schemas.openxmlformats.org/drawingml/2006/main" idx="minor">
+            <a:schemeClr val="lt1"/>
+          </a:fontRef>
+        </p:style>
+        <p:txBody>
+          <a:bodyPr xmlns:a="http://schemas.openxmlformats.org/drawingml/2006/main" anchor="ctr"/>
+          <a:lstStyle xmlns:a="http://schemas.openxmlformats.org/drawingml/2006/main"/>
+          <a:p xmlns:a="http://schemas.openxmlformats.org/drawingml/2006/main">
+            <a:pPr algn="ctr">
+              <a:buNone/>
+            </a:pPr>
+            <a:endParaRPr/>
+          </a:p>
+        </p:txBody>
+      </p:sp>
+      <p:sp>
+        <p:nvSpPr>
+          <p:cNvPr id="7" name="任意多边形 6">
+            <a:extLst xmlns:a="http://schemas.openxmlformats.org/drawingml/2006/main">
+              <a:ext uri="{FF2B5EF4-FFF2-40B4-BE49-F238E27FC236}">
+                <a16:creationId xmlns:a16="http://schemas.microsoft.com/office/drawing/2014/main" id="{0B020289-9EFA-4BF4-8FDB-BA395A2EF550}"/>
+              </a:ext>
+            </a:extLst>
+          </p:cNvPr>
+          <p:cNvSpPr>
+            <a:spLocks xmlns:a="http://schemas.openxmlformats.org/drawingml/2006/main" noGrp="1"/>
+          </p:cNvSpPr>
+          <p:nvPr/>
+        </p:nvSpPr>
+        <p:spPr>
+          <a:xfrm xmlns:a="http://schemas.openxmlformats.org/drawingml/2006/main">
+            <a:off x="2078990" y="2776220"/>
+            <a:ext cx="609600" cy="609600"/>
+          </a:xfrm>
+          <a:custGeom xmlns:a="http://schemas.openxmlformats.org/drawingml/2006/main">
+            <a:gdLst>
+              <a:gd name="sw" fmla="*/ 1 w 960"/>
+              <a:gd name="sh" fmla="*/ 1 h 960"/>
+              <a:gd name="mins" fmla="min sw sh"/>
+              <a:gd name="dsw" fmla="+- 0 sw mins"/>
+              <a:gd name="dsh" fmla="+- 0 sh mins"/>
+              <a:gd name="p0x0" fmla="*/ 480 w 960"/>
+              <a:gd name="p0y0" fmla="*/ 0 h 960"/>
+              <a:gd name="p0x1" fmla="*/ 745 w 960"/>
+              <a:gd name="p0y1" fmla="*/ 0 h 960"/>
+              <a:gd name="p0x2" fmla="*/ 960 w 960"/>
+              <a:gd name="p0y2" fmla="*/ 214 h 960"/>
+              <a:gd name="p0x3" fmla="*/ 960 w 960"/>
+              <a:gd name="p0y3" fmla="*/ 480 h 960"/>
+              <a:gd name="p0x4" fmla="*/ 960 w 960"/>
+              <a:gd name="p0y4" fmla="*/ 745 h 960"/>
+              <a:gd name="p0x5" fmla="*/ 745 w 960"/>
+              <a:gd name="p0y5" fmla="*/ 960 h 960"/>
+              <a:gd name="p0x6" fmla="*/ 480 w 960"/>
+              <a:gd name="p0y6" fmla="*/ 960 h 960"/>
+              <a:gd name="p0x7" fmla="*/ 214 w 960"/>
+              <a:gd name="p0y7" fmla="*/ 960 h 960"/>
+              <a:gd name="p0x8" fmla="*/ 0 w 960"/>
+              <a:gd name="p0y8" fmla="*/ 745 h 960"/>
+              <a:gd name="p0x9" fmla="*/ 0 w 960"/>
+              <a:gd name="p0y9" fmla="*/ 480 h 960"/>
+              <a:gd name="p0x10" fmla="*/ 0 w 960"/>
+              <a:gd name="p0y10" fmla="*/ 214 h 960"/>
+              <a:gd name="p0x11" fmla="*/ 214 w 960"/>
+              <a:gd name="p0y11" fmla="*/ 0 h 960"/>
+              <a:gd name="p0x12" fmla="*/ 480 w 960"/>
+              <a:gd name="p0y12" fmla="*/ 0 h 960"/>
+            </a:gdLst>
+            <a:pathLst>
+              <a:path w="0" h="0">
+                <a:moveTo>
+                  <a:pt x="0" y="0"/>
+                </a:moveTo>
+                <a:cubicBezTo>
+                  <a:pt x="0" y="0"/>
+                  <a:pt x="0" y="0"/>
+                  <a:pt x="0" y="0"/>
+                </a:cubicBezTo>
+                <a:cubicBezTo>
+                  <a:pt x="0" y="0"/>
+                  <a:pt x="0" y="0"/>
+                  <a:pt x="0" y="0"/>
+                </a:cubicBezTo>
+                <a:cubicBezTo>
+                  <a:pt x="0" y="0"/>
+                  <a:pt x="0" y="0"/>
+                  <a:pt x="0" y="0"/>
+                </a:cubicBezTo>
+                <a:cubicBezTo>
+                  <a:pt x="0" y="0"/>
+                  <a:pt x="0" y="0"/>
+                  <a:pt x="0" y="0"/>
+                </a:cubicBezTo>
+                <a:close/>
+              </a:path>
+            </a:pathLst>
+          </a:custGeom>
+          <a:solidFill xmlns:a="http://schemas.openxmlformats.org/drawingml/2006/main">
+            <a:schemeClr val="accent1"/>
+          </a:solidFill>
+          <a:ln xmlns:a="http://schemas.openxmlformats.org/drawingml/2006/main">
+            <a:noFill/>
+          </a:ln>
+        </p:spPr>
+        <p:style>
+          <a:lnRef xmlns:a="http://schemas.openxmlformats.org/drawingml/2006/main" idx="2">
+            <a:schemeClr val="accent1">
+              <a:lumMod val="75000"/>
+            </a:schemeClr>
+          </a:lnRef>
+          <a:fillRef xmlns:a="http://schemas.openxmlformats.org/drawingml/2006/main" idx="1">
+            <a:schemeClr val="accent1"/>
+          </a:fillRef>
+          <a:effectRef xmlns:a="http://schemas.openxmlformats.org/drawingml/2006/main" idx="0">
+            <a:srgbClr val="FFFFFF"/>
+          </a:effectRef>
+          <a:fontRef xmlns:a="http://schemas.openxmlformats.org/drawingml/2006/main" idx="minor">
+            <a:schemeClr val="lt1"/>
+          </a:fontRef>
+        </p:style>
+        <p:txBody>
+          <a:bodyPr xmlns:a="http://schemas.openxmlformats.org/drawingml/2006/main" anchor="ctr"/>
+          <a:lstStyle xmlns:a="http://schemas.openxmlformats.org/drawingml/2006/main"/>
+          <a:p xmlns:a="http://schemas.openxmlformats.org/drawingml/2006/main">
+            <a:pPr algn="ctr">
+              <a:buNone/>
+            </a:pPr>
+            <a:endParaRPr/>
+          </a:p>
+        </p:txBody>
+      </p:sp>
+      <p:sp>
+        <p:nvSpPr>
+          <p:cNvPr id="8" name="文本框 7">
+            <a:extLst xmlns:a="http://schemas.openxmlformats.org/drawingml/2006/main">
+              <a:ext uri="{FF2B5EF4-FFF2-40B4-BE49-F238E27FC236}">
+                <a16:creationId xmlns:a16="http://schemas.microsoft.com/office/drawing/2014/main" id="{C07E73AF-435C-4331-A6D9-AF5509B49F45}"/>
+              </a:ext>
+            </a:extLst>
+          </p:cNvPr>
+          <p:cNvSpPr>
+            <a:spLocks xmlns:a="http://schemas.openxmlformats.org/drawingml/2006/main" noGrp="1"/>
+          </p:cNvSpPr>
+          <p:nvPr/>
+        </p:nvSpPr>
+        <p:spPr>
+          <a:xfrm xmlns:a="http://schemas.openxmlformats.org/drawingml/2006/main">
+            <a:off x="2217906" y="2905125"/>
+            <a:ext cx="599551" cy="352425"/>
+          </a:xfrm>
+          <a:prstGeom xmlns:a="http://schemas.openxmlformats.org/drawingml/2006/main" prst="rect">
+            <a:avLst/>
+          </a:prstGeom>
+          <a:noFill xmlns:a="http://schemas.openxmlformats.org/drawingml/2006/main"/>
+        </p:spPr>
+        <p:txBody>
+          <a:bodyPr xmlns:a="http://schemas.openxmlformats.org/drawingml/2006/main" wrap="square" lIns="0" tIns="0" rIns="0" bIns="0" anchor="t">
+            <a:noAutofit/>
+          </a:bodyPr>
+          <a:lstStyle xmlns:a="http://schemas.openxmlformats.org/drawingml/2006/main"/>
+          <a:p xmlns:a="http://schemas.openxmlformats.org/drawingml/2006/main">
+            <a:pPr algn="l">
+              <a:buNone/>
+            </a:pPr>
+            <a:r>
+              <a:rPr sz="2100" b="1">
+                <a:solidFill>
+                  <a:srgbClr val="AF753D"/>
+                </a:solidFill>
+                <a:latin typeface="Microsoft YaHei"/>
+                <a:ea typeface="Microsoft YaHei"/>
+                <a:cs typeface="Microsoft YaHei"/>
+              </a:rPr>
+              <a:t>01</a:t>
+            </a:r>
+            <a:endParaRPr sz="2100" b="1">
+              <a:solidFill>
+                <a:srgbClr val="AF753D"/>
+              </a:solidFill>
+              <a:latin typeface="Microsoft YaHei"/>
+              <a:ea typeface="Microsoft YaHei"/>
+              <a:cs typeface="Microsoft YaHei"/>
+            </a:endParaRPr>
+          </a:p>
+        </p:txBody>
+      </p:sp>
+      <p:sp>
+        <p:nvSpPr>
+          <p:cNvPr id="9" name="文本框 8">
+            <a:extLst xmlns:a="http://schemas.openxmlformats.org/drawingml/2006/main">
+              <a:ext uri="{FF2B5EF4-FFF2-40B4-BE49-F238E27FC236}">
+                <a16:creationId xmlns:a16="http://schemas.microsoft.com/office/drawing/2014/main" id="{97A8EFFB-E7BB-4BBE-BAD2-B197754952B3}"/>
+              </a:ext>
+            </a:extLst>
+          </p:cNvPr>
+          <p:cNvSpPr>
+            <a:spLocks xmlns:a="http://schemas.openxmlformats.org/drawingml/2006/main" noGrp="1"/>
+          </p:cNvSpPr>
+          <p:nvPr/>
+        </p:nvSpPr>
+        <p:spPr>
+          <a:xfrm xmlns:a="http://schemas.openxmlformats.org/drawingml/2006/main">
+            <a:off x="1298896" y="3484245"/>
+            <a:ext cx="2170957" cy="365760"/>
+          </a:xfrm>
+          <a:prstGeom xmlns:a="http://schemas.openxmlformats.org/drawingml/2006/main" prst="rect">
+            <a:avLst/>
+          </a:prstGeom>
+          <a:noFill xmlns:a="http://schemas.openxmlformats.org/drawingml/2006/main"/>
+        </p:spPr>
+        <p:txBody>
+          <a:bodyPr xmlns:a="http://schemas.openxmlformats.org/drawingml/2006/main" wrap="square" lIns="0" tIns="0" rIns="0" bIns="0" anchor="t">
+            <a:noAutofit/>
+          </a:bodyPr>
+          <a:lstStyle xmlns:a="http://schemas.openxmlformats.org/drawingml/2006/main"/>
+          <a:p xmlns:a="http://schemas.openxmlformats.org/drawingml/2006/main">
+            <a:pPr algn="ctr">
+              <a:lnSpc>
+                <a:spcPct val="104000"/>
+              </a:lnSpc>
+              <a:buNone/>
+            </a:pPr>
+            <a:r>
+              <a:rPr sz="2100" b="1" spc="42">
+                <a:solidFill>
+                  <a:srgbClr val="F4F4F5"/>
+                </a:solidFill>
+                <a:latin typeface="Microsoft YaHei"/>
+                <a:ea typeface="Microsoft YaHei"/>
+                <a:cs typeface="Microsoft YaHei"/>
+              </a:rPr>
+              <a:t>共享状态</a:t>
+            </a:r>
+            <a:endParaRPr sz="2100" b="1" spc="42">
+              <a:solidFill>
+                <a:srgbClr val="F4F4F5"/>
+              </a:solidFill>
+              <a:latin typeface="Microsoft YaHei"/>
+              <a:ea typeface="Microsoft YaHei"/>
+              <a:cs typeface="Microsoft YaHei"/>
+            </a:endParaRPr>
+          </a:p>
+        </p:txBody>
+      </p:sp>
+      <p:sp>
+        <p:nvSpPr>
+          <p:cNvPr id="10" name="任意多边形 9">
+            <a:extLst xmlns:a="http://schemas.openxmlformats.org/drawingml/2006/main">
+              <a:ext uri="{FF2B5EF4-FFF2-40B4-BE49-F238E27FC236}">
+                <a16:creationId xmlns:a16="http://schemas.microsoft.com/office/drawing/2014/main" id="{1FFB935A-0755-40C0-81A5-2314EF21A0FF}"/>
+              </a:ext>
+            </a:extLst>
+          </p:cNvPr>
+          <p:cNvSpPr>
+            <a:spLocks xmlns:a="http://schemas.openxmlformats.org/drawingml/2006/main" noGrp="1"/>
+          </p:cNvSpPr>
+          <p:nvPr/>
+        </p:nvSpPr>
+        <p:spPr>
+          <a:xfrm xmlns:a="http://schemas.openxmlformats.org/drawingml/2006/main">
+            <a:off x="771525" y="4043045"/>
+            <a:ext cx="57150" cy="57150"/>
+          </a:xfrm>
+          <a:custGeom xmlns:a="http://schemas.openxmlformats.org/drawingml/2006/main">
+            <a:gdLst>
+              <a:gd name="sw" fmla="*/ 1 w 90"/>
+              <a:gd name="sh" fmla="*/ 1 h 90"/>
+              <a:gd name="mins" fmla="min sw sh"/>
+              <a:gd name="dsw" fmla="+- 0 sw mins"/>
+              <a:gd name="dsh" fmla="+- 0 sh mins"/>
+              <a:gd name="p0x0" fmla="*/ 45 w 90"/>
+              <a:gd name="p0y0" fmla="*/ 0 h 90"/>
+              <a:gd name="p0x1" fmla="*/ 69 w 90"/>
+              <a:gd name="p0y1" fmla="*/ 0 h 90"/>
+              <a:gd name="p0x2" fmla="*/ 90 w 90"/>
+              <a:gd name="p0y2" fmla="*/ 20 h 90"/>
+              <a:gd name="p0x3" fmla="*/ 90 w 90"/>
+              <a:gd name="p0y3" fmla="*/ 45 h 90"/>
+              <a:gd name="p0x4" fmla="*/ 90 w 90"/>
+              <a:gd name="p0y4" fmla="*/ 69 h 90"/>
+              <a:gd name="p0x5" fmla="*/ 69 w 90"/>
+              <a:gd name="p0y5" fmla="*/ 90 h 90"/>
+              <a:gd name="p0x6" fmla="*/ 45 w 90"/>
+              <a:gd name="p0y6" fmla="*/ 90 h 90"/>
+              <a:gd name="p0x7" fmla="*/ 20 w 90"/>
+              <a:gd name="p0y7" fmla="*/ 90 h 90"/>
+              <a:gd name="p0x8" fmla="*/ 0 w 90"/>
+              <a:gd name="p0y8" fmla="*/ 69 h 90"/>
+              <a:gd name="p0x9" fmla="*/ 0 w 90"/>
+              <a:gd name="p0y9" fmla="*/ 45 h 90"/>
+              <a:gd name="p0x10" fmla="*/ 0 w 90"/>
+              <a:gd name="p0y10" fmla="*/ 20 h 90"/>
+              <a:gd name="p0x11" fmla="*/ 20 w 90"/>
+              <a:gd name="p0y11" fmla="*/ 0 h 90"/>
+              <a:gd name="p0x12" fmla="*/ 45 w 90"/>
+              <a:gd name="p0y12" fmla="*/ 0 h 90"/>
+            </a:gdLst>
+            <a:pathLst>
+              <a:path w="0" h="0">
+                <a:moveTo>
+                  <a:pt x="0" y="0"/>
+                </a:moveTo>
+                <a:cubicBezTo>
+                  <a:pt x="0" y="0"/>
+                  <a:pt x="0" y="0"/>
+                  <a:pt x="0" y="0"/>
+                </a:cubicBezTo>
+                <a:cubicBezTo>
+                  <a:pt x="0" y="0"/>
+                  <a:pt x="0" y="0"/>
+                  <a:pt x="0" y="0"/>
+                </a:cubicBezTo>
+                <a:cubicBezTo>
+                  <a:pt x="0" y="0"/>
+                  <a:pt x="0" y="0"/>
+                  <a:pt x="0" y="0"/>
+                </a:cubicBezTo>
+                <a:cubicBezTo>
+                  <a:pt x="0" y="0"/>
+                  <a:pt x="0" y="0"/>
+                  <a:pt x="0" y="0"/>
+                </a:cubicBezTo>
+                <a:close/>
+              </a:path>
+            </a:pathLst>
+          </a:custGeom>
+          <a:solidFill xmlns:a="http://schemas.openxmlformats.org/drawingml/2006/main">
+            <a:schemeClr val="tx2">
+              <a:lumMod val="0"/>
+              <a:lumOff val="100000"/>
+              <a:alpha val="72157"/>
+            </a:schemeClr>
+          </a:solidFill>
+          <a:ln xmlns:a="http://schemas.openxmlformats.org/drawingml/2006/main">
+            <a:noFill/>
+          </a:ln>
+        </p:spPr>
+        <p:style>
+          <a:lnRef xmlns:a="http://schemas.openxmlformats.org/drawingml/2006/main" idx="2">
+            <a:schemeClr val="accent1">
+              <a:lumMod val="75000"/>
+            </a:schemeClr>
+          </a:lnRef>
+          <a:fillRef xmlns:a="http://schemas.openxmlformats.org/drawingml/2006/main" idx="1">
+            <a:schemeClr val="accent1"/>
+          </a:fillRef>
+          <a:effectRef xmlns:a="http://schemas.openxmlformats.org/drawingml/2006/main" idx="0">
+            <a:srgbClr val="FFFFFF"/>
+          </a:effectRef>
+          <a:fontRef xmlns:a="http://schemas.openxmlformats.org/drawingml/2006/main" idx="minor">
+            <a:schemeClr val="lt1"/>
+          </a:fontRef>
+        </p:style>
+        <p:txBody>
+          <a:bodyPr xmlns:a="http://schemas.openxmlformats.org/drawingml/2006/main" anchor="ctr"/>
+          <a:lstStyle xmlns:a="http://schemas.openxmlformats.org/drawingml/2006/main"/>
+          <a:p xmlns:a="http://schemas.openxmlformats.org/drawingml/2006/main">
+            <a:pPr algn="ctr">
+              <a:buNone/>
+            </a:pPr>
+            <a:endParaRPr/>
+          </a:p>
+        </p:txBody>
+      </p:sp>
+      <p:sp>
+        <p:nvSpPr>
+          <p:cNvPr id="11" name="文本框 10">
+            <a:extLst xmlns:a="http://schemas.openxmlformats.org/drawingml/2006/main">
+              <a:ext uri="{FF2B5EF4-FFF2-40B4-BE49-F238E27FC236}">
+                <a16:creationId xmlns:a16="http://schemas.microsoft.com/office/drawing/2014/main" id="{415BC5DE-F296-4A2B-8CB1-56EB3CC9A583}"/>
+              </a:ext>
+            </a:extLst>
+          </p:cNvPr>
+          <p:cNvSpPr>
+            <a:spLocks xmlns:a="http://schemas.openxmlformats.org/drawingml/2006/main" noGrp="1"/>
+          </p:cNvSpPr>
+          <p:nvPr/>
+        </p:nvSpPr>
+        <p:spPr>
+          <a:xfrm xmlns:a="http://schemas.openxmlformats.org/drawingml/2006/main">
+            <a:off x="866775" y="3932872"/>
+            <a:ext cx="2743429" cy="297180"/>
+          </a:xfrm>
+          <a:prstGeom xmlns:a="http://schemas.openxmlformats.org/drawingml/2006/main" prst="rect">
+            <a:avLst/>
+          </a:prstGeom>
+          <a:noFill xmlns:a="http://schemas.openxmlformats.org/drawingml/2006/main"/>
+        </p:spPr>
+        <p:txBody>
+          <a:bodyPr xmlns:a="http://schemas.openxmlformats.org/drawingml/2006/main" wrap="square" lIns="0" tIns="0" rIns="0" bIns="0" anchor="t">
+            <a:noAutofit/>
+          </a:bodyPr>
+          <a:lstStyle xmlns:a="http://schemas.openxmlformats.org/drawingml/2006/main"/>
+          <a:p xmlns:a="http://schemas.openxmlformats.org/drawingml/2006/main">
+            <a:pPr algn="l">
+              <a:lnSpc>
+                <a:spcPct val="133000"/>
+              </a:lnSpc>
+              <a:buNone/>
+            </a:pPr>
+            <a:r>
+              <a:rPr sz="1350" b="1">
+                <a:solidFill>
+                  <a:schemeClr val="tx2">
+                    <a:lumMod val="4356"/>
+                    <a:lumOff val="95644"/>
+                  </a:schemeClr>
+                </a:solidFill>
+                <a:latin typeface="Microsoft YaHei"/>
+                <a:ea typeface="Microsoft YaHei"/>
+                <a:cs typeface="Microsoft YaHei"/>
+              </a:rPr>
+              <a:t>共享 AgentState 入子图</a:t>
+            </a:r>
+            <a:endParaRPr sz="1350" b="1">
+              <a:solidFill>
+                <a:schemeClr val="tx2">
+                  <a:lumMod val="4356"/>
+                  <a:lumOff val="95644"/>
+                </a:schemeClr>
+              </a:solidFill>
+              <a:latin typeface="Microsoft YaHei"/>
+              <a:ea typeface="Microsoft YaHei"/>
+              <a:cs typeface="Microsoft YaHei"/>
+            </a:endParaRPr>
+          </a:p>
+        </p:txBody>
+      </p:sp>
+      <p:sp>
+        <p:nvSpPr>
+          <p:cNvPr id="12" name="任意多边形 11">
+            <a:extLst xmlns:a="http://schemas.openxmlformats.org/drawingml/2006/main">
+              <a:ext uri="{FF2B5EF4-FFF2-40B4-BE49-F238E27FC236}">
+                <a16:creationId xmlns:a16="http://schemas.microsoft.com/office/drawing/2014/main" id="{F24DD61E-2276-4714-BE35-56CBF203606A}"/>
+              </a:ext>
+            </a:extLst>
+          </p:cNvPr>
+          <p:cNvSpPr>
+            <a:spLocks xmlns:a="http://schemas.openxmlformats.org/drawingml/2006/main" noGrp="1"/>
+          </p:cNvSpPr>
+          <p:nvPr/>
+        </p:nvSpPr>
+        <p:spPr>
+          <a:xfrm xmlns:a="http://schemas.openxmlformats.org/drawingml/2006/main">
+            <a:off x="771525" y="4355465"/>
+            <a:ext cx="57150" cy="57150"/>
+          </a:xfrm>
+          <a:custGeom xmlns:a="http://schemas.openxmlformats.org/drawingml/2006/main">
+            <a:gdLst>
+              <a:gd name="sw" fmla="*/ 1 w 90"/>
+              <a:gd name="sh" fmla="*/ 1 h 90"/>
+              <a:gd name="mins" fmla="min sw sh"/>
+              <a:gd name="dsw" fmla="+- 0 sw mins"/>
+              <a:gd name="dsh" fmla="+- 0 sh mins"/>
+              <a:gd name="p0x0" fmla="*/ 45 w 90"/>
+              <a:gd name="p0y0" fmla="*/ 0 h 90"/>
+              <a:gd name="p0x1" fmla="*/ 69 w 90"/>
+              <a:gd name="p0y1" fmla="*/ 0 h 90"/>
+              <a:gd name="p0x2" fmla="*/ 90 w 90"/>
+              <a:gd name="p0y2" fmla="*/ 20 h 90"/>
+              <a:gd name="p0x3" fmla="*/ 90 w 90"/>
+              <a:gd name="p0y3" fmla="*/ 45 h 90"/>
+              <a:gd name="p0x4" fmla="*/ 90 w 90"/>
+              <a:gd name="p0y4" fmla="*/ 69 h 90"/>
+              <a:gd name="p0x5" fmla="*/ 69 w 90"/>
+              <a:gd name="p0y5" fmla="*/ 90 h 90"/>
+              <a:gd name="p0x6" fmla="*/ 45 w 90"/>
+              <a:gd name="p0y6" fmla="*/ 90 h 90"/>
+              <a:gd name="p0x7" fmla="*/ 20 w 90"/>
+              <a:gd name="p0y7" fmla="*/ 90 h 90"/>
+              <a:gd name="p0x8" fmla="*/ 0 w 90"/>
+              <a:gd name="p0y8" fmla="*/ 69 h 90"/>
+              <a:gd name="p0x9" fmla="*/ 0 w 90"/>
+              <a:gd name="p0y9" fmla="*/ 45 h 90"/>
+              <a:gd name="p0x10" fmla="*/ 0 w 90"/>
+              <a:gd name="p0y10" fmla="*/ 20 h 90"/>
+              <a:gd name="p0x11" fmla="*/ 20 w 90"/>
+              <a:gd name="p0y11" fmla="*/ 0 h 90"/>
+              <a:gd name="p0x12" fmla="*/ 45 w 90"/>
+              <a:gd name="p0y12" fmla="*/ 0 h 90"/>
+            </a:gdLst>
+            <a:pathLst>
+              <a:path w="0" h="0">
+                <a:moveTo>
+                  <a:pt x="0" y="0"/>
+                </a:moveTo>
+                <a:cubicBezTo>
+                  <a:pt x="0" y="0"/>
+                  <a:pt x="0" y="0"/>
+                  <a:pt x="0" y="0"/>
+                </a:cubicBezTo>
+                <a:cubicBezTo>
+                  <a:pt x="0" y="0"/>
+                  <a:pt x="0" y="0"/>
+                  <a:pt x="0" y="0"/>
+                </a:cubicBezTo>
+                <a:cubicBezTo>
+                  <a:pt x="0" y="0"/>
+                  <a:pt x="0" y="0"/>
+                  <a:pt x="0" y="0"/>
+                </a:cubicBezTo>
+                <a:cubicBezTo>
+                  <a:pt x="0" y="0"/>
+                  <a:pt x="0" y="0"/>
+                  <a:pt x="0" y="0"/>
+                </a:cubicBezTo>
+                <a:close/>
+              </a:path>
+            </a:pathLst>
+          </a:custGeom>
+          <a:solidFill xmlns:a="http://schemas.openxmlformats.org/drawingml/2006/main">
+            <a:schemeClr val="tx2">
+              <a:lumMod val="0"/>
+              <a:lumOff val="100000"/>
+              <a:alpha val="72157"/>
+            </a:schemeClr>
+          </a:solidFill>
+          <a:ln xmlns:a="http://schemas.openxmlformats.org/drawingml/2006/main">
+            <a:noFill/>
+          </a:ln>
+        </p:spPr>
+        <p:style>
+          <a:lnRef xmlns:a="http://schemas.openxmlformats.org/drawingml/2006/main" idx="2">
+            <a:schemeClr val="accent1">
+              <a:lumMod val="75000"/>
+            </a:schemeClr>
+          </a:lnRef>
+          <a:fillRef xmlns:a="http://schemas.openxmlformats.org/drawingml/2006/main" idx="1">
+            <a:schemeClr val="accent1"/>
+          </a:fillRef>
+          <a:effectRef xmlns:a="http://schemas.openxmlformats.org/drawingml/2006/main" idx="0">
+            <a:srgbClr val="FFFFFF"/>
+          </a:effectRef>
+          <a:fontRef xmlns:a="http://schemas.openxmlformats.org/drawingml/2006/main" idx="minor">
+            <a:schemeClr val="lt1"/>
+          </a:fontRef>
+        </p:style>
+        <p:txBody>
+          <a:bodyPr xmlns:a="http://schemas.openxmlformats.org/drawingml/2006/main" anchor="ctr"/>
+          <a:lstStyle xmlns:a="http://schemas.openxmlformats.org/drawingml/2006/main"/>
+          <a:p xmlns:a="http://schemas.openxmlformats.org/drawingml/2006/main">
+            <a:pPr algn="ctr">
+              <a:buNone/>
+            </a:pPr>
+            <a:endParaRPr/>
+          </a:p>
+        </p:txBody>
+      </p:sp>
+      <p:sp>
+        <p:nvSpPr>
+          <p:cNvPr id="13" name="文本框 12">
+            <a:extLst xmlns:a="http://schemas.openxmlformats.org/drawingml/2006/main">
+              <a:ext uri="{FF2B5EF4-FFF2-40B4-BE49-F238E27FC236}">
+                <a16:creationId xmlns:a16="http://schemas.microsoft.com/office/drawing/2014/main" id="{DEA8B1A4-BFA0-4EFF-BA56-F9504614E4DE}"/>
+              </a:ext>
+            </a:extLst>
+          </p:cNvPr>
+          <p:cNvSpPr>
+            <a:spLocks xmlns:a="http://schemas.openxmlformats.org/drawingml/2006/main" noGrp="1"/>
+          </p:cNvSpPr>
+          <p:nvPr/>
+        </p:nvSpPr>
+        <p:spPr>
+          <a:xfrm xmlns:a="http://schemas.openxmlformats.org/drawingml/2006/main">
+            <a:off x="866775" y="4245264"/>
+            <a:ext cx="2914802" cy="571472"/>
+          </a:xfrm>
+          <a:prstGeom xmlns:a="http://schemas.openxmlformats.org/drawingml/2006/main" prst="rect">
+            <a:avLst/>
+          </a:prstGeom>
+          <a:noFill xmlns:a="http://schemas.openxmlformats.org/drawingml/2006/main"/>
+        </p:spPr>
+        <p:txBody>
+          <a:bodyPr xmlns:a="http://schemas.openxmlformats.org/drawingml/2006/main" wrap="square" lIns="0" tIns="0" rIns="0" bIns="0" anchor="t">
+            <a:noAutofit/>
+          </a:bodyPr>
+          <a:lstStyle xmlns:a="http://schemas.openxmlformats.org/drawingml/2006/main"/>
+          <a:p xmlns:a="http://schemas.openxmlformats.org/drawingml/2006/main">
+            <a:pPr algn="l">
+              <a:lnSpc>
+                <a:spcPct val="133000"/>
+              </a:lnSpc>
+              <a:buNone/>
+            </a:pPr>
+            <a:r>
+              <a:rPr sz="1350">
+                <a:solidFill>
+                  <a:schemeClr val="tx2">
+                    <a:lumMod val="0"/>
+                    <a:lumOff val="100000"/>
+                    <a:alpha val="72157"/>
+                  </a:schemeClr>
+                </a:solidFill>
+                <a:latin typeface="Microsoft YaHei"/>
+                <a:ea typeface="Microsoft YaHei"/>
+                <a:cs typeface="Microsoft YaHei"/>
+              </a:rPr>
+              <a:t>Recognition、Intent
+读取同一上下文</a:t>
+            </a:r>
+            <a:endParaRPr sz="1350" b="1">
+              <a:solidFill>
+                <a:schemeClr val="tx2">
+                  <a:lumMod val="4356"/>
+                  <a:lumOff val="95644"/>
+                </a:schemeClr>
+              </a:solidFill>
+              <a:latin typeface="Microsoft YaHei"/>
+              <a:ea typeface="Microsoft YaHei"/>
+              <a:cs typeface="Microsoft YaHei"/>
+            </a:endParaRPr>
+          </a:p>
+        </p:txBody>
+      </p:sp>
+      <p:sp>
+        <p:nvSpPr>
+          <p:cNvPr id="14" name="任意多边形 13">
+            <a:extLst xmlns:a="http://schemas.openxmlformats.org/drawingml/2006/main">
+              <a:ext uri="{FF2B5EF4-FFF2-40B4-BE49-F238E27FC236}">
+                <a16:creationId xmlns:a16="http://schemas.microsoft.com/office/drawing/2014/main" id="{AA376B60-E3C6-44E6-B983-9A8D2E2B0FB8}"/>
+              </a:ext>
+            </a:extLst>
+          </p:cNvPr>
+          <p:cNvSpPr>
+            <a:spLocks xmlns:a="http://schemas.openxmlformats.org/drawingml/2006/main" noGrp="1"/>
+          </p:cNvSpPr>
+          <p:nvPr/>
+        </p:nvSpPr>
+        <p:spPr>
+          <a:xfrm xmlns:a="http://schemas.openxmlformats.org/drawingml/2006/main">
+            <a:off x="771525" y="4942205"/>
+            <a:ext cx="57150" cy="57150"/>
+          </a:xfrm>
+          <a:custGeom xmlns:a="http://schemas.openxmlformats.org/drawingml/2006/main">
+            <a:gdLst>
+              <a:gd name="sw" fmla="*/ 1 w 90"/>
+              <a:gd name="sh" fmla="*/ 1 h 90"/>
+              <a:gd name="mins" fmla="min sw sh"/>
+              <a:gd name="dsw" fmla="+- 0 sw mins"/>
+              <a:gd name="dsh" fmla="+- 0 sh mins"/>
+              <a:gd name="p0x0" fmla="*/ 45 w 90"/>
+              <a:gd name="p0y0" fmla="*/ 0 h 90"/>
+              <a:gd name="p0x1" fmla="*/ 69 w 90"/>
+              <a:gd name="p0y1" fmla="*/ 0 h 90"/>
+              <a:gd name="p0x2" fmla="*/ 90 w 90"/>
+              <a:gd name="p0y2" fmla="*/ 20 h 90"/>
+              <a:gd name="p0x3" fmla="*/ 90 w 90"/>
+              <a:gd name="p0y3" fmla="*/ 45 h 90"/>
+              <a:gd name="p0x4" fmla="*/ 90 w 90"/>
+              <a:gd name="p0y4" fmla="*/ 69 h 90"/>
+              <a:gd name="p0x5" fmla="*/ 69 w 90"/>
+              <a:gd name="p0y5" fmla="*/ 90 h 90"/>
+              <a:gd name="p0x6" fmla="*/ 45 w 90"/>
+              <a:gd name="p0y6" fmla="*/ 90 h 90"/>
+              <a:gd name="p0x7" fmla="*/ 20 w 90"/>
+              <a:gd name="p0y7" fmla="*/ 90 h 90"/>
+              <a:gd name="p0x8" fmla="*/ 0 w 90"/>
+              <a:gd name="p0y8" fmla="*/ 69 h 90"/>
+              <a:gd name="p0x9" fmla="*/ 0 w 90"/>
+              <a:gd name="p0y9" fmla="*/ 45 h 90"/>
+              <a:gd name="p0x10" fmla="*/ 0 w 90"/>
+              <a:gd name="p0y10" fmla="*/ 20 h 90"/>
+              <a:gd name="p0x11" fmla="*/ 20 w 90"/>
+              <a:gd name="p0y11" fmla="*/ 0 h 90"/>
+              <a:gd name="p0x12" fmla="*/ 45 w 90"/>
+              <a:gd name="p0y12" fmla="*/ 0 h 90"/>
+            </a:gdLst>
+            <a:pathLst>
+              <a:path w="0" h="0">
+                <a:moveTo>
+                  <a:pt x="0" y="0"/>
+                </a:moveTo>
+                <a:cubicBezTo>
+                  <a:pt x="0" y="0"/>
+                  <a:pt x="0" y="0"/>
+                  <a:pt x="0" y="0"/>
+                </a:cubicBezTo>
+                <a:cubicBezTo>
+                  <a:pt x="0" y="0"/>
+                  <a:pt x="0" y="0"/>
+                  <a:pt x="0" y="0"/>
+                </a:cubicBezTo>
+                <a:cubicBezTo>
+                  <a:pt x="0" y="0"/>
+                  <a:pt x="0" y="0"/>
+                  <a:pt x="0" y="0"/>
+                </a:cubicBezTo>
+                <a:cubicBezTo>
+                  <a:pt x="0" y="0"/>
+                  <a:pt x="0" y="0"/>
+                  <a:pt x="0" y="0"/>
+                </a:cubicBezTo>
+                <a:close/>
+              </a:path>
+            </a:pathLst>
+          </a:custGeom>
+          <a:solidFill xmlns:a="http://schemas.openxmlformats.org/drawingml/2006/main">
+            <a:schemeClr val="tx2">
+              <a:lumMod val="0"/>
+              <a:lumOff val="100000"/>
+              <a:alpha val="72157"/>
+            </a:schemeClr>
+          </a:solidFill>
+          <a:ln xmlns:a="http://schemas.openxmlformats.org/drawingml/2006/main">
+            <a:noFill/>
+          </a:ln>
+        </p:spPr>
+        <p:style>
+          <a:lnRef xmlns:a="http://schemas.openxmlformats.org/drawingml/2006/main" idx="2">
+            <a:schemeClr val="accent1">
+              <a:lumMod val="75000"/>
+            </a:schemeClr>
+          </a:lnRef>
+          <a:fillRef xmlns:a="http://schemas.openxmlformats.org/drawingml/2006/main" idx="1">
+            <a:schemeClr val="accent1"/>
+          </a:fillRef>
+          <a:effectRef xmlns:a="http://schemas.openxmlformats.org/drawingml/2006/main" idx="0">
+            <a:srgbClr val="FFFFFF"/>
+          </a:effectRef>
+          <a:fontRef xmlns:a="http://schemas.openxmlformats.org/drawingml/2006/main" idx="minor">
+            <a:schemeClr val="lt1"/>
+          </a:fontRef>
+        </p:style>
+        <p:txBody>
+          <a:bodyPr xmlns:a="http://schemas.openxmlformats.org/drawingml/2006/main" anchor="ctr"/>
+          <a:lstStyle xmlns:a="http://schemas.openxmlformats.org/drawingml/2006/main"/>
+          <a:p xmlns:a="http://schemas.openxmlformats.org/drawingml/2006/main">
+            <a:pPr algn="ctr">
+              <a:buNone/>
+            </a:pPr>
+            <a:endParaRPr/>
+          </a:p>
+        </p:txBody>
+      </p:sp>
+      <p:sp>
+        <p:nvSpPr>
+          <p:cNvPr id="15" name="文本框 14">
+            <a:extLst xmlns:a="http://schemas.openxmlformats.org/drawingml/2006/main">
+              <a:ext uri="{FF2B5EF4-FFF2-40B4-BE49-F238E27FC236}">
+                <a16:creationId xmlns:a16="http://schemas.microsoft.com/office/drawing/2014/main" id="{AEF96621-8540-4EB1-B80C-8B989C2CD3DF}"/>
+              </a:ext>
+            </a:extLst>
+          </p:cNvPr>
+          <p:cNvSpPr>
+            <a:spLocks xmlns:a="http://schemas.openxmlformats.org/drawingml/2006/main" noGrp="1"/>
+          </p:cNvSpPr>
+          <p:nvPr/>
+        </p:nvSpPr>
+        <p:spPr>
+          <a:xfrm xmlns:a="http://schemas.openxmlformats.org/drawingml/2006/main">
+            <a:off x="866775" y="4831947"/>
+            <a:ext cx="3235823" cy="297180"/>
+          </a:xfrm>
+          <a:prstGeom xmlns:a="http://schemas.openxmlformats.org/drawingml/2006/main" prst="rect">
+            <a:avLst/>
+          </a:prstGeom>
+          <a:noFill xmlns:a="http://schemas.openxmlformats.org/drawingml/2006/main"/>
+        </p:spPr>
+        <p:txBody>
+          <a:bodyPr xmlns:a="http://schemas.openxmlformats.org/drawingml/2006/main" wrap="square" lIns="0" tIns="0" rIns="0" bIns="0" anchor="t">
+            <a:noAutofit/>
+          </a:bodyPr>
+          <a:lstStyle xmlns:a="http://schemas.openxmlformats.org/drawingml/2006/main"/>
+          <a:p xmlns:a="http://schemas.openxmlformats.org/drawingml/2006/main">
+            <a:pPr algn="l">
+              <a:lnSpc>
+                <a:spcPct val="133000"/>
+              </a:lnSpc>
+              <a:buNone/>
+            </a:pPr>
+            <a:r>
+              <a:rPr sz="1350">
+                <a:solidFill>
+                  <a:schemeClr val="tx2">
+                    <a:lumMod val="0"/>
+                    <a:lumOff val="100000"/>
+                    <a:alpha val="72157"/>
+                  </a:schemeClr>
+                </a:solidFill>
+                <a:latin typeface="Microsoft YaHei"/>
+                <a:ea typeface="Microsoft YaHei"/>
+                <a:cs typeface="Microsoft YaHei"/>
+              </a:rPr>
+              <a:t>靠字段约定隔离</a:t>
+            </a:r>
+            <a:endParaRPr sz="1350">
+              <a:solidFill>
+                <a:schemeClr val="tx2">
+                  <a:lumMod val="0"/>
+                  <a:lumOff val="100000"/>
+                  <a:alpha val="72157"/>
+                </a:schemeClr>
+              </a:solidFill>
+              <a:latin typeface="Microsoft YaHei"/>
+              <a:ea typeface="Microsoft YaHei"/>
+              <a:cs typeface="Microsoft YaHei"/>
+            </a:endParaRPr>
+          </a:p>
+        </p:txBody>
+      </p:sp>
+      <p:pic>
+        <p:nvPicPr>
+          <p:cNvPr id="53" name="图片 15"/>
+          <p:cNvPicPr>
+            <a:picLocks xmlns:a="http://schemas.openxmlformats.org/drawingml/2006/main" noChangeAspect="1"/>
+          </p:cNvPicPr>
+          <p:nvPr/>
+        </p:nvPicPr>
+        <p:blipFill>
+          <a:blip xmlns:r="http://schemas.openxmlformats.org/officeDocument/2006/relationships" xmlns:a="http://schemas.openxmlformats.org/drawingml/2006/main" r:embed="Rb2249969c66f4997">
+            <a:extLst>
+              <a:ext uri="{96DAC541-7B7A-43D3-8B79-37D633B846F1}">
+                <asvg:svgBlip xmlns:asvg="http://schemas.microsoft.com/office/drawing/2016/SVG/main" r:embed="R6c9c3c771e624ef3"/>
+              </a:ext>
+            </a:extLst>
+          </a:blip>
+          <a:srcRect xmlns:a="http://schemas.openxmlformats.org/drawingml/2006/main" l="0" t="-16667" r="0" b="-16667"/>
+          <a:stretch xmlns:a="http://schemas.openxmlformats.org/drawingml/2006/main">
+            <a:fillRect l="0" t="0" r="0" b="0"/>
+          </a:stretch>
+        </p:blipFill>
+        <p:spPr>
+          <a:xfrm xmlns:a="http://schemas.openxmlformats.org/drawingml/2006/main">
+            <a:off x="4106545" y="3533775"/>
+            <a:ext cx="266700" cy="266700"/>
+          </a:xfrm>
+          <a:prstGeom xmlns:a="http://schemas.openxmlformats.org/drawingml/2006/main" prst="rect">
+            <a:avLst/>
+          </a:prstGeom>
+        </p:spPr>
+      </p:pic>
+      <p:sp>
+        <p:nvSpPr>
+          <p:cNvPr id="17" name="任意多边形 16">
+            <a:extLst xmlns:a="http://schemas.openxmlformats.org/drawingml/2006/main">
+              <a:ext uri="{FF2B5EF4-FFF2-40B4-BE49-F238E27FC236}">
+                <a16:creationId xmlns:a16="http://schemas.microsoft.com/office/drawing/2014/main" id="{6A230A9B-B1E3-44DC-A03C-58211C9C7B2D}"/>
+              </a:ext>
+            </a:extLst>
+          </p:cNvPr>
+          <p:cNvSpPr>
+            <a:spLocks xmlns:a="http://schemas.openxmlformats.org/drawingml/2006/main" noGrp="1"/>
+          </p:cNvSpPr>
+          <p:nvPr/>
+        </p:nvSpPr>
+        <p:spPr>
+          <a:xfrm xmlns:a="http://schemas.openxmlformats.org/drawingml/2006/main">
+            <a:off x="5790565" y="2776220"/>
+            <a:ext cx="609600" cy="609600"/>
+          </a:xfrm>
+          <a:custGeom xmlns:a="http://schemas.openxmlformats.org/drawingml/2006/main">
+            <a:gdLst>
+              <a:gd name="sw" fmla="*/ 1 w 960"/>
+              <a:gd name="sh" fmla="*/ 1 h 960"/>
+              <a:gd name="mins" fmla="min sw sh"/>
+              <a:gd name="dsw" fmla="+- 0 sw mins"/>
+              <a:gd name="dsh" fmla="+- 0 sh mins"/>
+              <a:gd name="p0x0" fmla="*/ 480 w 960"/>
+              <a:gd name="p0y0" fmla="*/ 0 h 960"/>
+              <a:gd name="p0x1" fmla="*/ 745 w 960"/>
+              <a:gd name="p0y1" fmla="*/ 0 h 960"/>
+              <a:gd name="p0x2" fmla="*/ 960 w 960"/>
+              <a:gd name="p0y2" fmla="*/ 214 h 960"/>
+              <a:gd name="p0x3" fmla="*/ 960 w 960"/>
+              <a:gd name="p0y3" fmla="*/ 480 h 960"/>
+              <a:gd name="p0x4" fmla="*/ 960 w 960"/>
+              <a:gd name="p0y4" fmla="*/ 745 h 960"/>
+              <a:gd name="p0x5" fmla="*/ 745 w 960"/>
+              <a:gd name="p0y5" fmla="*/ 960 h 960"/>
+              <a:gd name="p0x6" fmla="*/ 480 w 960"/>
+              <a:gd name="p0y6" fmla="*/ 960 h 960"/>
+              <a:gd name="p0x7" fmla="*/ 214 w 960"/>
+              <a:gd name="p0y7" fmla="*/ 960 h 960"/>
+              <a:gd name="p0x8" fmla="*/ 0 w 960"/>
+              <a:gd name="p0y8" fmla="*/ 745 h 960"/>
+              <a:gd name="p0x9" fmla="*/ 0 w 960"/>
+              <a:gd name="p0y9" fmla="*/ 480 h 960"/>
+              <a:gd name="p0x10" fmla="*/ 0 w 960"/>
+              <a:gd name="p0y10" fmla="*/ 214 h 960"/>
+              <a:gd name="p0x11" fmla="*/ 214 w 960"/>
+              <a:gd name="p0y11" fmla="*/ 0 h 960"/>
+              <a:gd name="p0x12" fmla="*/ 480 w 960"/>
+              <a:gd name="p0y12" fmla="*/ 0 h 960"/>
+            </a:gdLst>
+            <a:pathLst>
+              <a:path w="0" h="0">
+                <a:moveTo>
+                  <a:pt x="0" y="0"/>
+                </a:moveTo>
+                <a:cubicBezTo>
+                  <a:pt x="0" y="0"/>
+                  <a:pt x="0" y="0"/>
+                  <a:pt x="0" y="0"/>
+                </a:cubicBezTo>
+                <a:cubicBezTo>
+                  <a:pt x="0" y="0"/>
+                  <a:pt x="0" y="0"/>
+                  <a:pt x="0" y="0"/>
+                </a:cubicBezTo>
+                <a:cubicBezTo>
+                  <a:pt x="0" y="0"/>
+                  <a:pt x="0" y="0"/>
+                  <a:pt x="0" y="0"/>
+                </a:cubicBezTo>
+                <a:cubicBezTo>
+                  <a:pt x="0" y="0"/>
+                  <a:pt x="0" y="0"/>
+                  <a:pt x="0" y="0"/>
+                </a:cubicBezTo>
+                <a:close/>
+              </a:path>
+            </a:pathLst>
+          </a:custGeom>
+          <a:solidFill xmlns:a="http://schemas.openxmlformats.org/drawingml/2006/main">
+            <a:schemeClr val="accent1"/>
+          </a:solidFill>
+          <a:ln xmlns:a="http://schemas.openxmlformats.org/drawingml/2006/main">
+            <a:noFill/>
+          </a:ln>
+        </p:spPr>
+        <p:style>
+          <a:lnRef xmlns:a="http://schemas.openxmlformats.org/drawingml/2006/main" idx="2">
+            <a:schemeClr val="accent1">
+              <a:lumMod val="75000"/>
+            </a:schemeClr>
+          </a:lnRef>
+          <a:fillRef xmlns:a="http://schemas.openxmlformats.org/drawingml/2006/main" idx="1">
+            <a:schemeClr val="accent1"/>
+          </a:fillRef>
+          <a:effectRef xmlns:a="http://schemas.openxmlformats.org/drawingml/2006/main" idx="0">
+            <a:srgbClr val="FFFFFF"/>
+          </a:effectRef>
+          <a:fontRef xmlns:a="http://schemas.openxmlformats.org/drawingml/2006/main" idx="minor">
+            <a:schemeClr val="lt1"/>
+          </a:fontRef>
+        </p:style>
+        <p:txBody>
+          <a:bodyPr xmlns:a="http://schemas.openxmlformats.org/drawingml/2006/main" anchor="ctr"/>
+          <a:lstStyle xmlns:a="http://schemas.openxmlformats.org/drawingml/2006/main"/>
+          <a:p xmlns:a="http://schemas.openxmlformats.org/drawingml/2006/main">
+            <a:pPr algn="ctr">
+              <a:buNone/>
+            </a:pPr>
+            <a:endParaRPr/>
+          </a:p>
+        </p:txBody>
+      </p:sp>
+      <p:sp>
+        <p:nvSpPr>
+          <p:cNvPr id="18" name="文本框 17">
+            <a:extLst xmlns:a="http://schemas.openxmlformats.org/drawingml/2006/main">
+              <a:ext uri="{FF2B5EF4-FFF2-40B4-BE49-F238E27FC236}">
+                <a16:creationId xmlns:a16="http://schemas.microsoft.com/office/drawing/2014/main" id="{B6F9845C-A0DC-4779-BDE7-3D7AEA80F606}"/>
+              </a:ext>
+            </a:extLst>
+          </p:cNvPr>
+          <p:cNvSpPr>
+            <a:spLocks xmlns:a="http://schemas.openxmlformats.org/drawingml/2006/main" noGrp="1"/>
+          </p:cNvSpPr>
+          <p:nvPr/>
+        </p:nvSpPr>
+        <p:spPr>
+          <a:xfrm xmlns:a="http://schemas.openxmlformats.org/drawingml/2006/main">
+            <a:off x="5929456" y="2905125"/>
+            <a:ext cx="599551" cy="352425"/>
+          </a:xfrm>
+          <a:prstGeom xmlns:a="http://schemas.openxmlformats.org/drawingml/2006/main" prst="rect">
+            <a:avLst/>
+          </a:prstGeom>
+          <a:noFill xmlns:a="http://schemas.openxmlformats.org/drawingml/2006/main"/>
+        </p:spPr>
+        <p:txBody>
+          <a:bodyPr xmlns:a="http://schemas.openxmlformats.org/drawingml/2006/main" wrap="square" lIns="0" tIns="0" rIns="0" bIns="0" anchor="t">
+            <a:noAutofit/>
+          </a:bodyPr>
+          <a:lstStyle xmlns:a="http://schemas.openxmlformats.org/drawingml/2006/main"/>
+          <a:p xmlns:a="http://schemas.openxmlformats.org/drawingml/2006/main">
+            <a:pPr algn="l">
+              <a:buNone/>
+            </a:pPr>
+            <a:r>
+              <a:rPr sz="2100" b="1">
+                <a:solidFill>
+                  <a:srgbClr val="AF753D"/>
+                </a:solidFill>
+                <a:latin typeface="Microsoft YaHei"/>
+                <a:ea typeface="Microsoft YaHei"/>
+                <a:cs typeface="Microsoft YaHei"/>
+              </a:rPr>
+              <a:t>02</a:t>
+            </a:r>
+            <a:endParaRPr sz="2100" b="1">
+              <a:solidFill>
+                <a:srgbClr val="AF753D"/>
+              </a:solidFill>
+              <a:latin typeface="Microsoft YaHei"/>
+              <a:ea typeface="Microsoft YaHei"/>
+              <a:cs typeface="Microsoft YaHei"/>
+            </a:endParaRPr>
+          </a:p>
+        </p:txBody>
+      </p:sp>
+      <p:sp>
+        <p:nvSpPr>
+          <p:cNvPr id="19" name="文本框 18">
+            <a:extLst xmlns:a="http://schemas.openxmlformats.org/drawingml/2006/main">
+              <a:ext uri="{FF2B5EF4-FFF2-40B4-BE49-F238E27FC236}">
+                <a16:creationId xmlns:a16="http://schemas.microsoft.com/office/drawing/2014/main" id="{F94AA453-FB4B-4BBC-8B30-1A9D36F98AA2}"/>
+              </a:ext>
+            </a:extLst>
+          </p:cNvPr>
+          <p:cNvSpPr>
+            <a:spLocks xmlns:a="http://schemas.openxmlformats.org/drawingml/2006/main" noGrp="1"/>
+          </p:cNvSpPr>
+          <p:nvPr/>
+        </p:nvSpPr>
+        <p:spPr>
+          <a:xfrm xmlns:a="http://schemas.openxmlformats.org/drawingml/2006/main">
+            <a:off x="4738392" y="3484245"/>
+            <a:ext cx="2715073" cy="365760"/>
+          </a:xfrm>
+          <a:prstGeom xmlns:a="http://schemas.openxmlformats.org/drawingml/2006/main" prst="rect">
+            <a:avLst/>
+          </a:prstGeom>
+          <a:noFill xmlns:a="http://schemas.openxmlformats.org/drawingml/2006/main"/>
+        </p:spPr>
+        <p:txBody>
+          <a:bodyPr xmlns:a="http://schemas.openxmlformats.org/drawingml/2006/main" wrap="square" lIns="0" tIns="0" rIns="0" bIns="0" anchor="t">
+            <a:noAutofit/>
+          </a:bodyPr>
+          <a:lstStyle xmlns:a="http://schemas.openxmlformats.org/drawingml/2006/main"/>
+          <a:p xmlns:a="http://schemas.openxmlformats.org/drawingml/2006/main">
+            <a:pPr algn="ctr">
+              <a:lnSpc>
+                <a:spcPct val="104000"/>
+              </a:lnSpc>
+              <a:buNone/>
+            </a:pPr>
+            <a:r>
+              <a:rPr sz="2100" b="1" spc="42">
+                <a:solidFill>
+                  <a:srgbClr val="F4F4F5"/>
+                </a:solidFill>
+                <a:latin typeface="Microsoft YaHei"/>
+                <a:ea typeface="Microsoft YaHei"/>
+                <a:cs typeface="Microsoft YaHei"/>
+              </a:rPr>
+              <a:t>局部执行</a:t>
+            </a:r>
+            <a:endParaRPr sz="2100" b="1" spc="42">
+              <a:solidFill>
+                <a:srgbClr val="F4F4F5"/>
+              </a:solidFill>
+              <a:latin typeface="Microsoft YaHei"/>
+              <a:ea typeface="Microsoft YaHei"/>
+              <a:cs typeface="Microsoft YaHei"/>
+            </a:endParaRPr>
+          </a:p>
+        </p:txBody>
+      </p:sp>
+      <p:sp>
+        <p:nvSpPr>
+          <p:cNvPr id="20" name="任意多边形 19">
+            <a:extLst xmlns:a="http://schemas.openxmlformats.org/drawingml/2006/main">
+              <a:ext uri="{FF2B5EF4-FFF2-40B4-BE49-F238E27FC236}">
+                <a16:creationId xmlns:a16="http://schemas.microsoft.com/office/drawing/2014/main" id="{9E2C428F-77A7-4CC8-9127-D7BE5D71F5C5}"/>
+              </a:ext>
+            </a:extLst>
+          </p:cNvPr>
+          <p:cNvSpPr>
+            <a:spLocks xmlns:a="http://schemas.openxmlformats.org/drawingml/2006/main" noGrp="1"/>
+          </p:cNvSpPr>
+          <p:nvPr/>
+        </p:nvSpPr>
+        <p:spPr>
+          <a:xfrm xmlns:a="http://schemas.openxmlformats.org/drawingml/2006/main">
+            <a:off x="4482465" y="4043045"/>
+            <a:ext cx="57150" cy="57150"/>
+          </a:xfrm>
+          <a:custGeom xmlns:a="http://schemas.openxmlformats.org/drawingml/2006/main">
+            <a:gdLst>
+              <a:gd name="sw" fmla="*/ 1 w 90"/>
+              <a:gd name="sh" fmla="*/ 1 h 90"/>
+              <a:gd name="mins" fmla="min sw sh"/>
+              <a:gd name="dsw" fmla="+- 0 sw mins"/>
+              <a:gd name="dsh" fmla="+- 0 sh mins"/>
+              <a:gd name="p0x0" fmla="*/ 45 w 90"/>
+              <a:gd name="p0y0" fmla="*/ 0 h 90"/>
+              <a:gd name="p0x1" fmla="*/ 69 w 90"/>
+              <a:gd name="p0y1" fmla="*/ 0 h 90"/>
+              <a:gd name="p0x2" fmla="*/ 90 w 90"/>
+              <a:gd name="p0y2" fmla="*/ 20 h 90"/>
+              <a:gd name="p0x3" fmla="*/ 90 w 90"/>
+              <a:gd name="p0y3" fmla="*/ 45 h 90"/>
+              <a:gd name="p0x4" fmla="*/ 90 w 90"/>
+              <a:gd name="p0y4" fmla="*/ 69 h 90"/>
+              <a:gd name="p0x5" fmla="*/ 69 w 90"/>
+              <a:gd name="p0y5" fmla="*/ 90 h 90"/>
+              <a:gd name="p0x6" fmla="*/ 45 w 90"/>
+              <a:gd name="p0y6" fmla="*/ 90 h 90"/>
+              <a:gd name="p0x7" fmla="*/ 20 w 90"/>
+              <a:gd name="p0y7" fmla="*/ 90 h 90"/>
+              <a:gd name="p0x8" fmla="*/ 0 w 90"/>
+              <a:gd name="p0y8" fmla="*/ 69 h 90"/>
+              <a:gd name="p0x9" fmla="*/ 0 w 90"/>
+              <a:gd name="p0y9" fmla="*/ 45 h 90"/>
+              <a:gd name="p0x10" fmla="*/ 0 w 90"/>
+              <a:gd name="p0y10" fmla="*/ 20 h 90"/>
+              <a:gd name="p0x11" fmla="*/ 20 w 90"/>
+              <a:gd name="p0y11" fmla="*/ 0 h 90"/>
+              <a:gd name="p0x12" fmla="*/ 45 w 90"/>
+              <a:gd name="p0y12" fmla="*/ 0 h 90"/>
+            </a:gdLst>
+            <a:pathLst>
+              <a:path w="0" h="0">
+                <a:moveTo>
+                  <a:pt x="0" y="0"/>
+                </a:moveTo>
+                <a:cubicBezTo>
+                  <a:pt x="0" y="0"/>
+                  <a:pt x="0" y="0"/>
+                  <a:pt x="0" y="0"/>
+                </a:cubicBezTo>
+                <a:cubicBezTo>
+                  <a:pt x="0" y="0"/>
+                  <a:pt x="0" y="0"/>
+                  <a:pt x="0" y="0"/>
+                </a:cubicBezTo>
+                <a:cubicBezTo>
+                  <a:pt x="0" y="0"/>
+                  <a:pt x="0" y="0"/>
+                  <a:pt x="0" y="0"/>
+                </a:cubicBezTo>
+                <a:cubicBezTo>
+                  <a:pt x="0" y="0"/>
+                  <a:pt x="0" y="0"/>
+                  <a:pt x="0" y="0"/>
+                </a:cubicBezTo>
+                <a:close/>
+              </a:path>
+            </a:pathLst>
+          </a:custGeom>
+          <a:solidFill xmlns:a="http://schemas.openxmlformats.org/drawingml/2006/main">
+            <a:schemeClr val="tx2">
+              <a:lumMod val="0"/>
+              <a:lumOff val="100000"/>
+              <a:alpha val="72157"/>
+            </a:schemeClr>
+          </a:solidFill>
+          <a:ln xmlns:a="http://schemas.openxmlformats.org/drawingml/2006/main">
+            <a:noFill/>
+          </a:ln>
+        </p:spPr>
+        <p:style>
+          <a:lnRef xmlns:a="http://schemas.openxmlformats.org/drawingml/2006/main" idx="2">
+            <a:schemeClr val="accent1">
+              <a:lumMod val="75000"/>
+            </a:schemeClr>
+          </a:lnRef>
+          <a:fillRef xmlns:a="http://schemas.openxmlformats.org/drawingml/2006/main" idx="1">
+            <a:schemeClr val="accent1"/>
+          </a:fillRef>
+          <a:effectRef xmlns:a="http://schemas.openxmlformats.org/drawingml/2006/main" idx="0">
+            <a:srgbClr val="FFFFFF"/>
+          </a:effectRef>
+          <a:fontRef xmlns:a="http://schemas.openxmlformats.org/drawingml/2006/main" idx="minor">
+            <a:schemeClr val="lt1"/>
+          </a:fontRef>
+        </p:style>
+        <p:txBody>
+          <a:bodyPr xmlns:a="http://schemas.openxmlformats.org/drawingml/2006/main" anchor="ctr"/>
+          <a:lstStyle xmlns:a="http://schemas.openxmlformats.org/drawingml/2006/main"/>
+          <a:p xmlns:a="http://schemas.openxmlformats.org/drawingml/2006/main">
+            <a:pPr algn="ctr">
+              <a:buNone/>
+            </a:pPr>
+            <a:endParaRPr/>
+          </a:p>
+        </p:txBody>
+      </p:sp>
+      <p:sp>
+        <p:nvSpPr>
+          <p:cNvPr id="21" name="文本框 20">
+            <a:extLst xmlns:a="http://schemas.openxmlformats.org/drawingml/2006/main">
+              <a:ext uri="{FF2B5EF4-FFF2-40B4-BE49-F238E27FC236}">
+                <a16:creationId xmlns:a16="http://schemas.microsoft.com/office/drawing/2014/main" id="{10AC3C2A-8BB6-4AC9-9059-93253B28378F}"/>
+              </a:ext>
+            </a:extLst>
+          </p:cNvPr>
+          <p:cNvSpPr>
+            <a:spLocks xmlns:a="http://schemas.openxmlformats.org/drawingml/2006/main" noGrp="1"/>
+          </p:cNvSpPr>
+          <p:nvPr/>
+        </p:nvSpPr>
+        <p:spPr>
+          <a:xfrm xmlns:a="http://schemas.openxmlformats.org/drawingml/2006/main">
+            <a:off x="4578324" y="3932872"/>
+            <a:ext cx="3130525" cy="571472"/>
+          </a:xfrm>
+          <a:prstGeom xmlns:a="http://schemas.openxmlformats.org/drawingml/2006/main" prst="rect">
+            <a:avLst/>
+          </a:prstGeom>
+          <a:noFill xmlns:a="http://schemas.openxmlformats.org/drawingml/2006/main"/>
+        </p:spPr>
+        <p:txBody>
+          <a:bodyPr xmlns:a="http://schemas.openxmlformats.org/drawingml/2006/main" wrap="square" lIns="0" tIns="0" rIns="0" bIns="0" anchor="t">
+            <a:noAutofit/>
+          </a:bodyPr>
+          <a:lstStyle xmlns:a="http://schemas.openxmlformats.org/drawingml/2006/main"/>
+          <a:p xmlns:a="http://schemas.openxmlformats.org/drawingml/2006/main">
+            <a:pPr algn="l">
+              <a:lnSpc>
+                <a:spcPct val="133000"/>
+              </a:lnSpc>
+              <a:buNone/>
+            </a:pPr>
+            <a:r>
+              <a:rPr sz="1350">
+                <a:solidFill>
+                  <a:schemeClr val="tx2">
+                    <a:lumMod val="0"/>
+                    <a:lumOff val="100000"/>
+                    <a:alpha val="72157"/>
+                  </a:schemeClr>
+                </a:solidFill>
+                <a:latin typeface="Microsoft YaHei"/>
+                <a:ea typeface="Microsoft YaHei"/>
+                <a:cs typeface="Microsoft YaHei"/>
+              </a:rPr>
+              <a:t>执行模型 / 领域逻辑</a:t>
+            </a:r>
+            <a:endParaRPr sz="1350">
+              <a:solidFill>
+                <a:schemeClr val="tx2">
+                  <a:lumMod val="0"/>
+                  <a:lumOff val="100000"/>
+                  <a:alpha val="72157"/>
+                </a:schemeClr>
+              </a:solidFill>
+              <a:latin typeface="Microsoft YaHei"/>
+              <a:ea typeface="Microsoft YaHei"/>
+              <a:cs typeface="Microsoft YaHei"/>
+            </a:endParaRPr>
+          </a:p>
+        </p:txBody>
+      </p:sp>
+      <p:sp>
+        <p:nvSpPr>
+          <p:cNvPr id="22" name="任意多边形 21">
+            <a:extLst xmlns:a="http://schemas.openxmlformats.org/drawingml/2006/main">
+              <a:ext uri="{FF2B5EF4-FFF2-40B4-BE49-F238E27FC236}">
+                <a16:creationId xmlns:a16="http://schemas.microsoft.com/office/drawing/2014/main" id="{B8368BDF-84D6-4765-93D4-A82F6DF37906}"/>
+              </a:ext>
+            </a:extLst>
+          </p:cNvPr>
+          <p:cNvSpPr>
+            <a:spLocks xmlns:a="http://schemas.openxmlformats.org/drawingml/2006/main" noGrp="1"/>
+          </p:cNvSpPr>
+          <p:nvPr/>
+        </p:nvSpPr>
+        <p:spPr>
+          <a:xfrm xmlns:a="http://schemas.openxmlformats.org/drawingml/2006/main">
+            <a:off x="4482465" y="4629785"/>
+            <a:ext cx="57150" cy="57150"/>
+          </a:xfrm>
+          <a:custGeom xmlns:a="http://schemas.openxmlformats.org/drawingml/2006/main">
+            <a:gdLst>
+              <a:gd name="sw" fmla="*/ 1 w 90"/>
+              <a:gd name="sh" fmla="*/ 1 h 90"/>
+              <a:gd name="mins" fmla="min sw sh"/>
+              <a:gd name="dsw" fmla="+- 0 sw mins"/>
+              <a:gd name="dsh" fmla="+- 0 sh mins"/>
+              <a:gd name="p0x0" fmla="*/ 45 w 90"/>
+              <a:gd name="p0y0" fmla="*/ 0 h 90"/>
+              <a:gd name="p0x1" fmla="*/ 69 w 90"/>
+              <a:gd name="p0y1" fmla="*/ 0 h 90"/>
+              <a:gd name="p0x2" fmla="*/ 90 w 90"/>
+              <a:gd name="p0y2" fmla="*/ 20 h 90"/>
+              <a:gd name="p0x3" fmla="*/ 90 w 90"/>
+              <a:gd name="p0y3" fmla="*/ 45 h 90"/>
+              <a:gd name="p0x4" fmla="*/ 90 w 90"/>
+              <a:gd name="p0y4" fmla="*/ 69 h 90"/>
+              <a:gd name="p0x5" fmla="*/ 69 w 90"/>
+              <a:gd name="p0y5" fmla="*/ 90 h 90"/>
+              <a:gd name="p0x6" fmla="*/ 45 w 90"/>
+              <a:gd name="p0y6" fmla="*/ 90 h 90"/>
+              <a:gd name="p0x7" fmla="*/ 20 w 90"/>
+              <a:gd name="p0y7" fmla="*/ 90 h 90"/>
+              <a:gd name="p0x8" fmla="*/ 0 w 90"/>
+              <a:gd name="p0y8" fmla="*/ 69 h 90"/>
+              <a:gd name="p0x9" fmla="*/ 0 w 90"/>
+              <a:gd name="p0y9" fmla="*/ 45 h 90"/>
+              <a:gd name="p0x10" fmla="*/ 0 w 90"/>
+              <a:gd name="p0y10" fmla="*/ 20 h 90"/>
+              <a:gd name="p0x11" fmla="*/ 20 w 90"/>
+              <a:gd name="p0y11" fmla="*/ 0 h 90"/>
+              <a:gd name="p0x12" fmla="*/ 45 w 90"/>
+              <a:gd name="p0y12" fmla="*/ 0 h 90"/>
+            </a:gdLst>
+            <a:pathLst>
+              <a:path w="0" h="0">
+                <a:moveTo>
+                  <a:pt x="0" y="0"/>
+                </a:moveTo>
+                <a:cubicBezTo>
+                  <a:pt x="0" y="0"/>
+                  <a:pt x="0" y="0"/>
+                  <a:pt x="0" y="0"/>
+                </a:cubicBezTo>
+                <a:cubicBezTo>
+                  <a:pt x="0" y="0"/>
+                  <a:pt x="0" y="0"/>
+                  <a:pt x="0" y="0"/>
+                </a:cubicBezTo>
+                <a:cubicBezTo>
+                  <a:pt x="0" y="0"/>
+                  <a:pt x="0" y="0"/>
+                  <a:pt x="0" y="0"/>
+                </a:cubicBezTo>
+                <a:cubicBezTo>
+                  <a:pt x="0" y="0"/>
+                  <a:pt x="0" y="0"/>
+                  <a:pt x="0" y="0"/>
+                </a:cubicBezTo>
+                <a:close/>
+              </a:path>
+            </a:pathLst>
+          </a:custGeom>
+          <a:solidFill xmlns:a="http://schemas.openxmlformats.org/drawingml/2006/main">
+            <a:schemeClr val="tx2">
+              <a:lumMod val="0"/>
+              <a:lumOff val="100000"/>
+              <a:alpha val="72157"/>
+            </a:schemeClr>
+          </a:solidFill>
+          <a:ln xmlns:a="http://schemas.openxmlformats.org/drawingml/2006/main">
+            <a:noFill/>
+          </a:ln>
+        </p:spPr>
+        <p:style>
+          <a:lnRef xmlns:a="http://schemas.openxmlformats.org/drawingml/2006/main" idx="2">
+            <a:schemeClr val="accent1">
+              <a:lumMod val="75000"/>
+            </a:schemeClr>
+          </a:lnRef>
+          <a:fillRef xmlns:a="http://schemas.openxmlformats.org/drawingml/2006/main" idx="1">
+            <a:schemeClr val="accent1"/>
+          </a:fillRef>
+          <a:effectRef xmlns:a="http://schemas.openxmlformats.org/drawingml/2006/main" idx="0">
+            <a:srgbClr val="FFFFFF"/>
+          </a:effectRef>
+          <a:fontRef xmlns:a="http://schemas.openxmlformats.org/drawingml/2006/main" idx="minor">
+            <a:schemeClr val="lt1"/>
+          </a:fontRef>
+        </p:style>
+        <p:txBody>
+          <a:bodyPr xmlns:a="http://schemas.openxmlformats.org/drawingml/2006/main" anchor="ctr"/>
+          <a:lstStyle xmlns:a="http://schemas.openxmlformats.org/drawingml/2006/main"/>
+          <a:p xmlns:a="http://schemas.openxmlformats.org/drawingml/2006/main">
+            <a:pPr algn="ctr">
+              <a:buNone/>
+            </a:pPr>
+            <a:endParaRPr/>
+          </a:p>
+        </p:txBody>
+      </p:sp>
+      <p:sp>
+        <p:nvSpPr>
+          <p:cNvPr id="23" name="文本框 22">
+            <a:extLst xmlns:a="http://schemas.openxmlformats.org/drawingml/2006/main">
+              <a:ext uri="{FF2B5EF4-FFF2-40B4-BE49-F238E27FC236}">
+                <a16:creationId xmlns:a16="http://schemas.microsoft.com/office/drawing/2014/main" id="{37291669-AFC8-41BD-B0BA-E91D6CD93F85}"/>
+              </a:ext>
+            </a:extLst>
+          </p:cNvPr>
+          <p:cNvSpPr>
+            <a:spLocks xmlns:a="http://schemas.openxmlformats.org/drawingml/2006/main" noGrp="1"/>
+          </p:cNvSpPr>
+          <p:nvPr/>
+        </p:nvSpPr>
+        <p:spPr>
+          <a:xfrm xmlns:a="http://schemas.openxmlformats.org/drawingml/2006/main">
+            <a:off x="4578324" y="4519556"/>
+            <a:ext cx="3130525" cy="571471"/>
+          </a:xfrm>
+          <a:prstGeom xmlns:a="http://schemas.openxmlformats.org/drawingml/2006/main" prst="rect">
+            <a:avLst/>
+          </a:prstGeom>
+          <a:noFill xmlns:a="http://schemas.openxmlformats.org/drawingml/2006/main"/>
+        </p:spPr>
+        <p:txBody>
+          <a:bodyPr xmlns:a="http://schemas.openxmlformats.org/drawingml/2006/main" wrap="square" lIns="0" tIns="0" rIns="0" bIns="0" anchor="t">
+            <a:noAutofit/>
+          </a:bodyPr>
+          <a:lstStyle xmlns:a="http://schemas.openxmlformats.org/drawingml/2006/main"/>
+          <a:p xmlns:a="http://schemas.openxmlformats.org/drawingml/2006/main">
+            <a:pPr algn="l">
+              <a:lnSpc>
+                <a:spcPct val="133000"/>
+              </a:lnSpc>
+              <a:buNone/>
+            </a:pPr>
+            <a:r>
+              <a:rPr sz="1350" b="1">
+                <a:solidFill>
+                  <a:schemeClr val="tx2">
+                    <a:lumMod val="4356"/>
+                    <a:lumOff val="95644"/>
+                  </a:schemeClr>
+                </a:solidFill>
+                <a:latin typeface="Microsoft YaHei"/>
+                <a:ea typeface="Microsoft YaHei"/>
+                <a:cs typeface="Microsoft YaHei"/>
+              </a:rPr>
+              <a:t>返回局部字段更新</a:t>
+            </a:r>
+            <a:endParaRPr sz="1350">
+              <a:solidFill>
+                <a:schemeClr val="tx2">
+                  <a:lumMod val="0"/>
+                  <a:lumOff val="100000"/>
+                  <a:alpha val="72157"/>
+                </a:schemeClr>
+              </a:solidFill>
+              <a:latin typeface="Microsoft YaHei"/>
+              <a:ea typeface="Microsoft YaHei"/>
+              <a:cs typeface="Microsoft YaHei"/>
+            </a:endParaRPr>
+          </a:p>
+        </p:txBody>
+      </p:sp>
+      <p:sp>
+        <p:nvSpPr>
+          <p:cNvPr id="24" name="任意多边形 23">
+            <a:extLst xmlns:a="http://schemas.openxmlformats.org/drawingml/2006/main">
+              <a:ext uri="{FF2B5EF4-FFF2-40B4-BE49-F238E27FC236}">
+                <a16:creationId xmlns:a16="http://schemas.microsoft.com/office/drawing/2014/main" id="{D897DBB6-F686-4D70-821E-A13F029A5433}"/>
+              </a:ext>
+            </a:extLst>
+          </p:cNvPr>
+          <p:cNvSpPr>
+            <a:spLocks xmlns:a="http://schemas.openxmlformats.org/drawingml/2006/main" noGrp="1"/>
+          </p:cNvSpPr>
+          <p:nvPr/>
+        </p:nvSpPr>
+        <p:spPr>
+          <a:xfrm xmlns:a="http://schemas.openxmlformats.org/drawingml/2006/main">
+            <a:off x="4482465" y="5216525"/>
+            <a:ext cx="57150" cy="57150"/>
+          </a:xfrm>
+          <a:custGeom xmlns:a="http://schemas.openxmlformats.org/drawingml/2006/main">
+            <a:gdLst>
+              <a:gd name="sw" fmla="*/ 1 w 90"/>
+              <a:gd name="sh" fmla="*/ 1 h 90"/>
+              <a:gd name="mins" fmla="min sw sh"/>
+              <a:gd name="dsw" fmla="+- 0 sw mins"/>
+              <a:gd name="dsh" fmla="+- 0 sh mins"/>
+              <a:gd name="p0x0" fmla="*/ 45 w 90"/>
+              <a:gd name="p0y0" fmla="*/ 0 h 90"/>
+              <a:gd name="p0x1" fmla="*/ 69 w 90"/>
+              <a:gd name="p0y1" fmla="*/ 0 h 90"/>
+              <a:gd name="p0x2" fmla="*/ 90 w 90"/>
+              <a:gd name="p0y2" fmla="*/ 20 h 90"/>
+              <a:gd name="p0x3" fmla="*/ 90 w 90"/>
+              <a:gd name="p0y3" fmla="*/ 45 h 90"/>
+              <a:gd name="p0x4" fmla="*/ 90 w 90"/>
+              <a:gd name="p0y4" fmla="*/ 69 h 90"/>
+              <a:gd name="p0x5" fmla="*/ 69 w 90"/>
+              <a:gd name="p0y5" fmla="*/ 90 h 90"/>
+              <a:gd name="p0x6" fmla="*/ 45 w 90"/>
+              <a:gd name="p0y6" fmla="*/ 90 h 90"/>
+              <a:gd name="p0x7" fmla="*/ 20 w 90"/>
+              <a:gd name="p0y7" fmla="*/ 90 h 90"/>
+              <a:gd name="p0x8" fmla="*/ 0 w 90"/>
+              <a:gd name="p0y8" fmla="*/ 69 h 90"/>
+              <a:gd name="p0x9" fmla="*/ 0 w 90"/>
+              <a:gd name="p0y9" fmla="*/ 45 h 90"/>
+              <a:gd name="p0x10" fmla="*/ 0 w 90"/>
+              <a:gd name="p0y10" fmla="*/ 20 h 90"/>
+              <a:gd name="p0x11" fmla="*/ 20 w 90"/>
+              <a:gd name="p0y11" fmla="*/ 0 h 90"/>
+              <a:gd name="p0x12" fmla="*/ 45 w 90"/>
+              <a:gd name="p0y12" fmla="*/ 0 h 90"/>
+            </a:gdLst>
+            <a:pathLst>
+              <a:path w="0" h="0">
+                <a:moveTo>
+                  <a:pt x="0" y="0"/>
+                </a:moveTo>
+                <a:cubicBezTo>
+                  <a:pt x="0" y="0"/>
+                  <a:pt x="0" y="0"/>
+                  <a:pt x="0" y="0"/>
+                </a:cubicBezTo>
+                <a:cubicBezTo>
+                  <a:pt x="0" y="0"/>
+                  <a:pt x="0" y="0"/>
+                  <a:pt x="0" y="0"/>
+                </a:cubicBezTo>
+                <a:cubicBezTo>
+                  <a:pt x="0" y="0"/>
+                  <a:pt x="0" y="0"/>
+                  <a:pt x="0" y="0"/>
+                </a:cubicBezTo>
+                <a:cubicBezTo>
+                  <a:pt x="0" y="0"/>
+                  <a:pt x="0" y="0"/>
+                  <a:pt x="0" y="0"/>
+                </a:cubicBezTo>
+                <a:close/>
+              </a:path>
+            </a:pathLst>
+          </a:custGeom>
+          <a:solidFill xmlns:a="http://schemas.openxmlformats.org/drawingml/2006/main">
+            <a:schemeClr val="tx2">
+              <a:lumMod val="0"/>
+              <a:lumOff val="100000"/>
+              <a:alpha val="72157"/>
+            </a:schemeClr>
+          </a:solidFill>
+          <a:ln xmlns:a="http://schemas.openxmlformats.org/drawingml/2006/main">
+            <a:noFill/>
+          </a:ln>
+        </p:spPr>
+        <p:style>
+          <a:lnRef xmlns:a="http://schemas.openxmlformats.org/drawingml/2006/main" idx="2">
+            <a:schemeClr val="accent1">
+              <a:lumMod val="75000"/>
+            </a:schemeClr>
+          </a:lnRef>
+          <a:fillRef xmlns:a="http://schemas.openxmlformats.org/drawingml/2006/main" idx="1">
+            <a:schemeClr val="accent1"/>
+          </a:fillRef>
+          <a:effectRef xmlns:a="http://schemas.openxmlformats.org/drawingml/2006/main" idx="0">
+            <a:srgbClr val="FFFFFF"/>
+          </a:effectRef>
+          <a:fontRef xmlns:a="http://schemas.openxmlformats.org/drawingml/2006/main" idx="minor">
+            <a:schemeClr val="lt1"/>
+          </a:fontRef>
+        </p:style>
+        <p:txBody>
+          <a:bodyPr xmlns:a="http://schemas.openxmlformats.org/drawingml/2006/main" anchor="ctr"/>
+          <a:lstStyle xmlns:a="http://schemas.openxmlformats.org/drawingml/2006/main"/>
+          <a:p xmlns:a="http://schemas.openxmlformats.org/drawingml/2006/main">
+            <a:pPr algn="ctr">
+              <a:buNone/>
+            </a:pPr>
+            <a:endParaRPr/>
+          </a:p>
+        </p:txBody>
+      </p:sp>
+      <p:sp>
+        <p:nvSpPr>
+          <p:cNvPr id="25" name="文本框 24">
+            <a:extLst xmlns:a="http://schemas.openxmlformats.org/drawingml/2006/main">
+              <a:ext uri="{FF2B5EF4-FFF2-40B4-BE49-F238E27FC236}">
+                <a16:creationId xmlns:a16="http://schemas.microsoft.com/office/drawing/2014/main" id="{EA81881F-0637-411D-836A-39A33387D0C6}"/>
+              </a:ext>
+            </a:extLst>
+          </p:cNvPr>
+          <p:cNvSpPr>
+            <a:spLocks xmlns:a="http://schemas.openxmlformats.org/drawingml/2006/main" noGrp="1"/>
+          </p:cNvSpPr>
+          <p:nvPr/>
+        </p:nvSpPr>
+        <p:spPr>
+          <a:xfrm xmlns:a="http://schemas.openxmlformats.org/drawingml/2006/main">
+            <a:off x="4578324" y="5106238"/>
+            <a:ext cx="3130525" cy="571471"/>
+          </a:xfrm>
+          <a:prstGeom xmlns:a="http://schemas.openxmlformats.org/drawingml/2006/main" prst="rect">
+            <a:avLst/>
+          </a:prstGeom>
+          <a:noFill xmlns:a="http://schemas.openxmlformats.org/drawingml/2006/main"/>
+        </p:spPr>
+        <p:txBody>
+          <a:bodyPr xmlns:a="http://schemas.openxmlformats.org/drawingml/2006/main" wrap="square" lIns="0" tIns="0" rIns="0" bIns="0" anchor="t">
+            <a:noAutofit/>
+          </a:bodyPr>
+          <a:lstStyle xmlns:a="http://schemas.openxmlformats.org/drawingml/2006/main"/>
+          <a:p xmlns:a="http://schemas.openxmlformats.org/drawingml/2006/main">
+            <a:pPr algn="l">
+              <a:lnSpc>
+                <a:spcPct val="133000"/>
+              </a:lnSpc>
+              <a:buNone/>
+            </a:pPr>
+            <a:r>
+              <a:rPr sz="1350" b="1">
+                <a:solidFill>
+                  <a:schemeClr val="tx2">
+                    <a:lumMod val="4356"/>
+                    <a:lumOff val="95644"/>
+                  </a:schemeClr>
+                </a:solidFill>
+                <a:latin typeface="Microsoft YaHei"/>
+                <a:ea typeface="Microsoft YaHei"/>
+                <a:cs typeface="Microsoft YaHei"/>
+              </a:rPr>
+              <a:t>无统一 Task / Result</a:t>
+            </a:r>
+            <a:endParaRPr sz="1350">
+              <a:solidFill>
+                <a:schemeClr val="tx2">
+                  <a:lumMod val="0"/>
+                  <a:lumOff val="100000"/>
+                  <a:alpha val="72157"/>
+                </a:schemeClr>
+              </a:solidFill>
+              <a:latin typeface="Microsoft YaHei"/>
+              <a:ea typeface="Microsoft YaHei"/>
+              <a:cs typeface="Microsoft YaHei"/>
+            </a:endParaRPr>
+          </a:p>
+        </p:txBody>
+      </p:sp>
+      <p:pic>
+        <p:nvPicPr>
+          <p:cNvPr id="63" name="图片 25"/>
+          <p:cNvPicPr>
+            <a:picLocks xmlns:a="http://schemas.openxmlformats.org/drawingml/2006/main" noChangeAspect="1"/>
+          </p:cNvPicPr>
+          <p:nvPr/>
+        </p:nvPicPr>
+        <p:blipFill>
+          <a:blip xmlns:r="http://schemas.openxmlformats.org/officeDocument/2006/relationships" xmlns:a="http://schemas.openxmlformats.org/drawingml/2006/main" r:embed="Rb2249969c66f4997">
+            <a:extLst>
+              <a:ext uri="{96DAC541-7B7A-43D3-8B79-37D633B846F1}">
+                <asvg:svgBlip xmlns:asvg="http://schemas.microsoft.com/office/drawing/2016/SVG/main" r:embed="R6c9c3c771e624ef3"/>
+              </a:ext>
+            </a:extLst>
+          </a:blip>
+          <a:srcRect xmlns:a="http://schemas.openxmlformats.org/drawingml/2006/main" l="0" t="-16667" r="0" b="-16667"/>
+          <a:stretch xmlns:a="http://schemas.openxmlformats.org/drawingml/2006/main">
+            <a:fillRect l="0" t="0" r="0" b="0"/>
+          </a:stretch>
+        </p:blipFill>
+        <p:spPr>
+          <a:xfrm xmlns:a="http://schemas.openxmlformats.org/drawingml/2006/main">
+            <a:off x="7818120" y="3533775"/>
+            <a:ext cx="266700" cy="266700"/>
+          </a:xfrm>
+          <a:prstGeom xmlns:a="http://schemas.openxmlformats.org/drawingml/2006/main" prst="rect">
+            <a:avLst/>
+          </a:prstGeom>
+        </p:spPr>
+      </p:pic>
+      <p:sp>
+        <p:nvSpPr>
+          <p:cNvPr id="27" name="任意多边形 26">
+            <a:extLst xmlns:a="http://schemas.openxmlformats.org/drawingml/2006/main">
+              <a:ext uri="{FF2B5EF4-FFF2-40B4-BE49-F238E27FC236}">
+                <a16:creationId xmlns:a16="http://schemas.microsoft.com/office/drawing/2014/main" id="{02DE4B18-25C5-4E05-920C-7E096A3F8891}"/>
+              </a:ext>
+            </a:extLst>
+          </p:cNvPr>
+          <p:cNvSpPr>
+            <a:spLocks xmlns:a="http://schemas.openxmlformats.org/drawingml/2006/main" noGrp="1"/>
+          </p:cNvSpPr>
+          <p:nvPr/>
+        </p:nvSpPr>
+        <p:spPr>
+          <a:xfrm xmlns:a="http://schemas.openxmlformats.org/drawingml/2006/main">
+            <a:off x="9502140" y="2776220"/>
+            <a:ext cx="609600" cy="609600"/>
+          </a:xfrm>
+          <a:custGeom xmlns:a="http://schemas.openxmlformats.org/drawingml/2006/main">
+            <a:gdLst>
+              <a:gd name="sw" fmla="*/ 1 w 960"/>
+              <a:gd name="sh" fmla="*/ 1 h 960"/>
+              <a:gd name="mins" fmla="min sw sh"/>
+              <a:gd name="dsw" fmla="+- 0 sw mins"/>
+              <a:gd name="dsh" fmla="+- 0 sh mins"/>
+              <a:gd name="p0x0" fmla="*/ 480 w 960"/>
+              <a:gd name="p0y0" fmla="*/ 0 h 960"/>
+              <a:gd name="p0x1" fmla="*/ 745 w 960"/>
+              <a:gd name="p0y1" fmla="*/ 0 h 960"/>
+              <a:gd name="p0x2" fmla="*/ 960 w 960"/>
+              <a:gd name="p0y2" fmla="*/ 214 h 960"/>
+              <a:gd name="p0x3" fmla="*/ 960 w 960"/>
+              <a:gd name="p0y3" fmla="*/ 480 h 960"/>
+              <a:gd name="p0x4" fmla="*/ 960 w 960"/>
+              <a:gd name="p0y4" fmla="*/ 745 h 960"/>
+              <a:gd name="p0x5" fmla="*/ 745 w 960"/>
+              <a:gd name="p0y5" fmla="*/ 960 h 960"/>
+              <a:gd name="p0x6" fmla="*/ 480 w 960"/>
+              <a:gd name="p0y6" fmla="*/ 960 h 960"/>
+              <a:gd name="p0x7" fmla="*/ 214 w 960"/>
+              <a:gd name="p0y7" fmla="*/ 960 h 960"/>
+              <a:gd name="p0x8" fmla="*/ 0 w 960"/>
+              <a:gd name="p0y8" fmla="*/ 745 h 960"/>
+              <a:gd name="p0x9" fmla="*/ 0 w 960"/>
+              <a:gd name="p0y9" fmla="*/ 480 h 960"/>
+              <a:gd name="p0x10" fmla="*/ 0 w 960"/>
+              <a:gd name="p0y10" fmla="*/ 214 h 960"/>
+              <a:gd name="p0x11" fmla="*/ 214 w 960"/>
+              <a:gd name="p0y11" fmla="*/ 0 h 960"/>
+              <a:gd name="p0x12" fmla="*/ 480 w 960"/>
+              <a:gd name="p0y12" fmla="*/ 0 h 960"/>
+            </a:gdLst>
+            <a:pathLst>
+              <a:path w="0" h="0">
+                <a:moveTo>
+                  <a:pt x="0" y="0"/>
+                </a:moveTo>
+                <a:cubicBezTo>
+                  <a:pt x="0" y="0"/>
+                  <a:pt x="0" y="0"/>
+                  <a:pt x="0" y="0"/>
+                </a:cubicBezTo>
+                <a:cubicBezTo>
+                  <a:pt x="0" y="0"/>
+                  <a:pt x="0" y="0"/>
+                  <a:pt x="0" y="0"/>
+                </a:cubicBezTo>
+                <a:cubicBezTo>
+                  <a:pt x="0" y="0"/>
+                  <a:pt x="0" y="0"/>
+                  <a:pt x="0" y="0"/>
+                </a:cubicBezTo>
+                <a:cubicBezTo>
+                  <a:pt x="0" y="0"/>
+                  <a:pt x="0" y="0"/>
+                  <a:pt x="0" y="0"/>
+                </a:cubicBezTo>
+                <a:close/>
+              </a:path>
+            </a:pathLst>
+          </a:custGeom>
+          <a:solidFill xmlns:a="http://schemas.openxmlformats.org/drawingml/2006/main">
+            <a:schemeClr val="accent1"/>
+          </a:solidFill>
+          <a:ln xmlns:a="http://schemas.openxmlformats.org/drawingml/2006/main">
+            <a:noFill/>
+          </a:ln>
+        </p:spPr>
+        <p:style>
+          <a:lnRef xmlns:a="http://schemas.openxmlformats.org/drawingml/2006/main" idx="2">
+            <a:schemeClr val="accent1">
+              <a:lumMod val="75000"/>
+            </a:schemeClr>
+          </a:lnRef>
+          <a:fillRef xmlns:a="http://schemas.openxmlformats.org/drawingml/2006/main" idx="1">
+            <a:schemeClr val="accent1"/>
+          </a:fillRef>
+          <a:effectRef xmlns:a="http://schemas.openxmlformats.org/drawingml/2006/main" idx="0">
+            <a:srgbClr val="FFFFFF"/>
+          </a:effectRef>
+          <a:fontRef xmlns:a="http://schemas.openxmlformats.org/drawingml/2006/main" idx="minor">
+            <a:schemeClr val="lt1"/>
+          </a:fontRef>
+        </p:style>
+        <p:txBody>
+          <a:bodyPr xmlns:a="http://schemas.openxmlformats.org/drawingml/2006/main" anchor="ctr"/>
+          <a:lstStyle xmlns:a="http://schemas.openxmlformats.org/drawingml/2006/main"/>
+          <a:p xmlns:a="http://schemas.openxmlformats.org/drawingml/2006/main">
+            <a:pPr algn="ctr">
+              <a:buNone/>
+            </a:pPr>
+            <a:endParaRPr/>
+          </a:p>
+        </p:txBody>
+      </p:sp>
+      <p:sp>
+        <p:nvSpPr>
+          <p:cNvPr id="28" name="文本框 27">
+            <a:extLst xmlns:a="http://schemas.openxmlformats.org/drawingml/2006/main">
+              <a:ext uri="{FF2B5EF4-FFF2-40B4-BE49-F238E27FC236}">
+                <a16:creationId xmlns:a16="http://schemas.microsoft.com/office/drawing/2014/main" id="{0DC71FB6-ADED-4744-8AA6-FAF085F19DBD}"/>
+              </a:ext>
+            </a:extLst>
+          </p:cNvPr>
+          <p:cNvSpPr>
+            <a:spLocks xmlns:a="http://schemas.openxmlformats.org/drawingml/2006/main" noGrp="1"/>
+          </p:cNvSpPr>
+          <p:nvPr/>
+        </p:nvSpPr>
+        <p:spPr>
+          <a:xfrm xmlns:a="http://schemas.openxmlformats.org/drawingml/2006/main">
+            <a:off x="9641005" y="2905125"/>
+            <a:ext cx="599551" cy="352425"/>
+          </a:xfrm>
+          <a:prstGeom xmlns:a="http://schemas.openxmlformats.org/drawingml/2006/main" prst="rect">
+            <a:avLst/>
+          </a:prstGeom>
+          <a:noFill xmlns:a="http://schemas.openxmlformats.org/drawingml/2006/main"/>
+        </p:spPr>
+        <p:txBody>
+          <a:bodyPr xmlns:a="http://schemas.openxmlformats.org/drawingml/2006/main" wrap="square" lIns="0" tIns="0" rIns="0" bIns="0" anchor="t">
+            <a:noAutofit/>
+          </a:bodyPr>
+          <a:lstStyle xmlns:a="http://schemas.openxmlformats.org/drawingml/2006/main"/>
+          <a:p xmlns:a="http://schemas.openxmlformats.org/drawingml/2006/main">
+            <a:pPr algn="l">
+              <a:buNone/>
+            </a:pPr>
+            <a:r>
+              <a:rPr sz="2100" b="1">
+                <a:solidFill>
+                  <a:srgbClr val="AF753D"/>
+                </a:solidFill>
+                <a:latin typeface="Microsoft YaHei"/>
+                <a:ea typeface="Microsoft YaHei"/>
+                <a:cs typeface="Microsoft YaHei"/>
+              </a:rPr>
+              <a:t>03</a:t>
+            </a:r>
+            <a:endParaRPr sz="2100" b="1">
+              <a:solidFill>
+                <a:srgbClr val="AF753D"/>
+              </a:solidFill>
+              <a:latin typeface="Microsoft YaHei"/>
+              <a:ea typeface="Microsoft YaHei"/>
+              <a:cs typeface="Microsoft YaHei"/>
+            </a:endParaRPr>
+          </a:p>
+        </p:txBody>
+      </p:sp>
+      <p:sp>
+        <p:nvSpPr>
+          <p:cNvPr id="29" name="文本框 28">
+            <a:extLst xmlns:a="http://schemas.openxmlformats.org/drawingml/2006/main">
+              <a:ext uri="{FF2B5EF4-FFF2-40B4-BE49-F238E27FC236}">
+                <a16:creationId xmlns:a16="http://schemas.microsoft.com/office/drawing/2014/main" id="{1D2D703B-C894-4729-BB8B-3323389580A1}"/>
+              </a:ext>
+            </a:extLst>
+          </p:cNvPr>
+          <p:cNvSpPr>
+            <a:spLocks xmlns:a="http://schemas.openxmlformats.org/drawingml/2006/main" noGrp="1"/>
+          </p:cNvSpPr>
+          <p:nvPr/>
+        </p:nvSpPr>
+        <p:spPr>
+          <a:xfrm xmlns:a="http://schemas.openxmlformats.org/drawingml/2006/main">
+            <a:off x="8449932" y="3484245"/>
+            <a:ext cx="2715073" cy="365760"/>
+          </a:xfrm>
+          <a:prstGeom xmlns:a="http://schemas.openxmlformats.org/drawingml/2006/main" prst="rect">
+            <a:avLst/>
+          </a:prstGeom>
+          <a:noFill xmlns:a="http://schemas.openxmlformats.org/drawingml/2006/main"/>
+        </p:spPr>
+        <p:txBody>
+          <a:bodyPr xmlns:a="http://schemas.openxmlformats.org/drawingml/2006/main" wrap="square" lIns="0" tIns="0" rIns="0" bIns="0" anchor="t">
+            <a:noAutofit/>
+          </a:bodyPr>
+          <a:lstStyle xmlns:a="http://schemas.openxmlformats.org/drawingml/2006/main"/>
+          <a:p xmlns:a="http://schemas.openxmlformats.org/drawingml/2006/main">
+            <a:pPr algn="ctr">
+              <a:lnSpc>
+                <a:spcPct val="104000"/>
+              </a:lnSpc>
+              <a:buNone/>
+            </a:pPr>
+            <a:r>
+              <a:rPr sz="2100" b="1" spc="42">
+                <a:solidFill>
+                  <a:srgbClr val="F4F4F5"/>
+                </a:solidFill>
+                <a:latin typeface="Microsoft YaHei"/>
+                <a:ea typeface="Microsoft YaHei"/>
+                <a:cs typeface="Microsoft YaHei"/>
+              </a:rPr>
+              <a:t>根图汇总</a:t>
+            </a:r>
+            <a:endParaRPr sz="2100" b="1" spc="42">
+              <a:solidFill>
+                <a:srgbClr val="F4F4F5"/>
+              </a:solidFill>
+              <a:latin typeface="Microsoft YaHei"/>
+              <a:ea typeface="Microsoft YaHei"/>
+              <a:cs typeface="Microsoft YaHei"/>
+            </a:endParaRPr>
+          </a:p>
+        </p:txBody>
+      </p:sp>
+      <p:sp>
+        <p:nvSpPr>
+          <p:cNvPr id="30" name="任意多边形 29">
+            <a:extLst xmlns:a="http://schemas.openxmlformats.org/drawingml/2006/main">
+              <a:ext uri="{FF2B5EF4-FFF2-40B4-BE49-F238E27FC236}">
+                <a16:creationId xmlns:a16="http://schemas.microsoft.com/office/drawing/2014/main" id="{4B98FD74-E585-4C18-9F49-E6753574376B}"/>
+              </a:ext>
+            </a:extLst>
+          </p:cNvPr>
+          <p:cNvSpPr>
+            <a:spLocks xmlns:a="http://schemas.openxmlformats.org/drawingml/2006/main" noGrp="1"/>
+          </p:cNvSpPr>
+          <p:nvPr/>
+        </p:nvSpPr>
+        <p:spPr>
+          <a:xfrm xmlns:a="http://schemas.openxmlformats.org/drawingml/2006/main">
+            <a:off x="8216265" y="4043045"/>
+            <a:ext cx="57150" cy="57150"/>
+          </a:xfrm>
+          <a:custGeom xmlns:a="http://schemas.openxmlformats.org/drawingml/2006/main">
+            <a:gdLst>
+              <a:gd name="sw" fmla="*/ 1 w 90"/>
+              <a:gd name="sh" fmla="*/ 1 h 90"/>
+              <a:gd name="mins" fmla="min sw sh"/>
+              <a:gd name="dsw" fmla="+- 0 sw mins"/>
+              <a:gd name="dsh" fmla="+- 0 sh mins"/>
+              <a:gd name="p0x0" fmla="*/ 45 w 90"/>
+              <a:gd name="p0y0" fmla="*/ 0 h 90"/>
+              <a:gd name="p0x1" fmla="*/ 69 w 90"/>
+              <a:gd name="p0y1" fmla="*/ 0 h 90"/>
+              <a:gd name="p0x2" fmla="*/ 90 w 90"/>
+              <a:gd name="p0y2" fmla="*/ 20 h 90"/>
+              <a:gd name="p0x3" fmla="*/ 90 w 90"/>
+              <a:gd name="p0y3" fmla="*/ 45 h 90"/>
+              <a:gd name="p0x4" fmla="*/ 90 w 90"/>
+              <a:gd name="p0y4" fmla="*/ 69 h 90"/>
+              <a:gd name="p0x5" fmla="*/ 69 w 90"/>
+              <a:gd name="p0y5" fmla="*/ 90 h 90"/>
+              <a:gd name="p0x6" fmla="*/ 45 w 90"/>
+              <a:gd name="p0y6" fmla="*/ 90 h 90"/>
+              <a:gd name="p0x7" fmla="*/ 20 w 90"/>
+              <a:gd name="p0y7" fmla="*/ 90 h 90"/>
+              <a:gd name="p0x8" fmla="*/ 0 w 90"/>
+              <a:gd name="p0y8" fmla="*/ 69 h 90"/>
+              <a:gd name="p0x9" fmla="*/ 0 w 90"/>
+              <a:gd name="p0y9" fmla="*/ 45 h 90"/>
+              <a:gd name="p0x10" fmla="*/ 0 w 90"/>
+              <a:gd name="p0y10" fmla="*/ 20 h 90"/>
+              <a:gd name="p0x11" fmla="*/ 20 w 90"/>
+              <a:gd name="p0y11" fmla="*/ 0 h 90"/>
+              <a:gd name="p0x12" fmla="*/ 45 w 90"/>
+              <a:gd name="p0y12" fmla="*/ 0 h 90"/>
+            </a:gdLst>
+            <a:pathLst>
+              <a:path w="0" h="0">
+                <a:moveTo>
+                  <a:pt x="0" y="0"/>
+                </a:moveTo>
+                <a:cubicBezTo>
+                  <a:pt x="0" y="0"/>
+                  <a:pt x="0" y="0"/>
+                  <a:pt x="0" y="0"/>
+                </a:cubicBezTo>
+                <a:cubicBezTo>
+                  <a:pt x="0" y="0"/>
+                  <a:pt x="0" y="0"/>
+                  <a:pt x="0" y="0"/>
+                </a:cubicBezTo>
+                <a:cubicBezTo>
+                  <a:pt x="0" y="0"/>
+                  <a:pt x="0" y="0"/>
+                  <a:pt x="0" y="0"/>
+                </a:cubicBezTo>
+                <a:cubicBezTo>
+                  <a:pt x="0" y="0"/>
+                  <a:pt x="0" y="0"/>
+                  <a:pt x="0" y="0"/>
+                </a:cubicBezTo>
+                <a:close/>
+              </a:path>
+            </a:pathLst>
+          </a:custGeom>
+          <a:solidFill xmlns:a="http://schemas.openxmlformats.org/drawingml/2006/main">
+            <a:schemeClr val="tx2">
+              <a:lumMod val="0"/>
+              <a:lumOff val="100000"/>
+              <a:alpha val="72157"/>
+            </a:schemeClr>
+          </a:solidFill>
+          <a:ln xmlns:a="http://schemas.openxmlformats.org/drawingml/2006/main">
+            <a:noFill/>
+          </a:ln>
+        </p:spPr>
+        <p:style>
+          <a:lnRef xmlns:a="http://schemas.openxmlformats.org/drawingml/2006/main" idx="2">
+            <a:schemeClr val="accent1">
+              <a:lumMod val="75000"/>
+            </a:schemeClr>
+          </a:lnRef>
+          <a:fillRef xmlns:a="http://schemas.openxmlformats.org/drawingml/2006/main" idx="1">
+            <a:schemeClr val="accent1"/>
+          </a:fillRef>
+          <a:effectRef xmlns:a="http://schemas.openxmlformats.org/drawingml/2006/main" idx="0">
+            <a:srgbClr val="FFFFFF"/>
+          </a:effectRef>
+          <a:fontRef xmlns:a="http://schemas.openxmlformats.org/drawingml/2006/main" idx="minor">
+            <a:schemeClr val="lt1"/>
+          </a:fontRef>
+        </p:style>
+        <p:txBody>
+          <a:bodyPr xmlns:a="http://schemas.openxmlformats.org/drawingml/2006/main" anchor="ctr"/>
+          <a:lstStyle xmlns:a="http://schemas.openxmlformats.org/drawingml/2006/main"/>
+          <a:p xmlns:a="http://schemas.openxmlformats.org/drawingml/2006/main">
+            <a:pPr algn="ctr">
+              <a:buNone/>
+            </a:pPr>
+            <a:endParaRPr/>
+          </a:p>
+        </p:txBody>
+      </p:sp>
+      <p:sp>
+        <p:nvSpPr>
+          <p:cNvPr id="31" name="文本框 30">
+            <a:extLst xmlns:a="http://schemas.openxmlformats.org/drawingml/2006/main">
+              <a:ext uri="{FF2B5EF4-FFF2-40B4-BE49-F238E27FC236}">
+                <a16:creationId xmlns:a16="http://schemas.microsoft.com/office/drawing/2014/main" id="{B2488C39-F781-4BC1-94B3-AB28F000EC91}"/>
+              </a:ext>
+            </a:extLst>
+          </p:cNvPr>
+          <p:cNvSpPr>
+            <a:spLocks xmlns:a="http://schemas.openxmlformats.org/drawingml/2006/main" noGrp="1"/>
+          </p:cNvSpPr>
+          <p:nvPr/>
+        </p:nvSpPr>
+        <p:spPr>
+          <a:xfrm xmlns:a="http://schemas.openxmlformats.org/drawingml/2006/main">
+            <a:off x="8311972" y="3932872"/>
+            <a:ext cx="2914945" cy="297180"/>
+          </a:xfrm>
+          <a:prstGeom xmlns:a="http://schemas.openxmlformats.org/drawingml/2006/main" prst="rect">
+            <a:avLst/>
+          </a:prstGeom>
+          <a:noFill xmlns:a="http://schemas.openxmlformats.org/drawingml/2006/main"/>
+        </p:spPr>
+        <p:txBody>
+          <a:bodyPr xmlns:a="http://schemas.openxmlformats.org/drawingml/2006/main" wrap="square" lIns="0" tIns="0" rIns="0" bIns="0" anchor="t">
+            <a:noAutofit/>
+          </a:bodyPr>
+          <a:lstStyle xmlns:a="http://schemas.openxmlformats.org/drawingml/2006/main"/>
+          <a:p xmlns:a="http://schemas.openxmlformats.org/drawingml/2006/main">
+            <a:pPr algn="l">
+              <a:lnSpc>
+                <a:spcPct val="133000"/>
+              </a:lnSpc>
+              <a:buNone/>
+            </a:pPr>
+            <a:r>
+              <a:rPr sz="1350">
+                <a:solidFill>
+                  <a:schemeClr val="tx2">
+                    <a:lumMod val="0"/>
+                    <a:lumOff val="100000"/>
+                    <a:alpha val="72157"/>
+                  </a:schemeClr>
+                </a:solidFill>
+                <a:latin typeface="Microsoft YaHei"/>
+                <a:ea typeface="Microsoft YaHei"/>
+                <a:cs typeface="Microsoft YaHei"/>
+              </a:rPr>
+              <a:t>合并结果并继续路由</a:t>
+            </a:r>
+            <a:endParaRPr sz="1350" b="1">
+              <a:solidFill>
+                <a:schemeClr val="tx2">
+                  <a:lumMod val="4356"/>
+                  <a:lumOff val="95644"/>
+                </a:schemeClr>
+              </a:solidFill>
+              <a:latin typeface="Microsoft YaHei"/>
+              <a:ea typeface="Microsoft YaHei"/>
+              <a:cs typeface="Microsoft YaHei"/>
+            </a:endParaRPr>
+          </a:p>
+        </p:txBody>
+      </p:sp>
+      <p:sp>
+        <p:nvSpPr>
+          <p:cNvPr id="32" name="任意多边形 31">
+            <a:extLst xmlns:a="http://schemas.openxmlformats.org/drawingml/2006/main">
+              <a:ext uri="{FF2B5EF4-FFF2-40B4-BE49-F238E27FC236}">
+                <a16:creationId xmlns:a16="http://schemas.microsoft.com/office/drawing/2014/main" id="{CAC4BAFF-A550-4C77-80F9-FC53B3C365AB}"/>
+              </a:ext>
+            </a:extLst>
+          </p:cNvPr>
+          <p:cNvSpPr>
+            <a:spLocks xmlns:a="http://schemas.openxmlformats.org/drawingml/2006/main" noGrp="1"/>
+          </p:cNvSpPr>
+          <p:nvPr/>
+        </p:nvSpPr>
+        <p:spPr>
+          <a:xfrm xmlns:a="http://schemas.openxmlformats.org/drawingml/2006/main">
+            <a:off x="8216265" y="4355465"/>
+            <a:ext cx="57150" cy="57150"/>
+          </a:xfrm>
+          <a:custGeom xmlns:a="http://schemas.openxmlformats.org/drawingml/2006/main">
+            <a:gdLst>
+              <a:gd name="sw" fmla="*/ 1 w 90"/>
+              <a:gd name="sh" fmla="*/ 1 h 90"/>
+              <a:gd name="mins" fmla="min sw sh"/>
+              <a:gd name="dsw" fmla="+- 0 sw mins"/>
+              <a:gd name="dsh" fmla="+- 0 sh mins"/>
+              <a:gd name="p0x0" fmla="*/ 45 w 90"/>
+              <a:gd name="p0y0" fmla="*/ 0 h 90"/>
+              <a:gd name="p0x1" fmla="*/ 69 w 90"/>
+              <a:gd name="p0y1" fmla="*/ 0 h 90"/>
+              <a:gd name="p0x2" fmla="*/ 90 w 90"/>
+              <a:gd name="p0y2" fmla="*/ 20 h 90"/>
+              <a:gd name="p0x3" fmla="*/ 90 w 90"/>
+              <a:gd name="p0y3" fmla="*/ 45 h 90"/>
+              <a:gd name="p0x4" fmla="*/ 90 w 90"/>
+              <a:gd name="p0y4" fmla="*/ 69 h 90"/>
+              <a:gd name="p0x5" fmla="*/ 69 w 90"/>
+              <a:gd name="p0y5" fmla="*/ 90 h 90"/>
+              <a:gd name="p0x6" fmla="*/ 45 w 90"/>
+              <a:gd name="p0y6" fmla="*/ 90 h 90"/>
+              <a:gd name="p0x7" fmla="*/ 20 w 90"/>
+              <a:gd name="p0y7" fmla="*/ 90 h 90"/>
+              <a:gd name="p0x8" fmla="*/ 0 w 90"/>
+              <a:gd name="p0y8" fmla="*/ 69 h 90"/>
+              <a:gd name="p0x9" fmla="*/ 0 w 90"/>
+              <a:gd name="p0y9" fmla="*/ 45 h 90"/>
+              <a:gd name="p0x10" fmla="*/ 0 w 90"/>
+              <a:gd name="p0y10" fmla="*/ 20 h 90"/>
+              <a:gd name="p0x11" fmla="*/ 20 w 90"/>
+              <a:gd name="p0y11" fmla="*/ 0 h 90"/>
+              <a:gd name="p0x12" fmla="*/ 45 w 90"/>
+              <a:gd name="p0y12" fmla="*/ 0 h 90"/>
+            </a:gdLst>
+            <a:pathLst>
+              <a:path w="0" h="0">
+                <a:moveTo>
+                  <a:pt x="0" y="0"/>
+                </a:moveTo>
+                <a:cubicBezTo>
+                  <a:pt x="0" y="0"/>
+                  <a:pt x="0" y="0"/>
+                  <a:pt x="0" y="0"/>
+                </a:cubicBezTo>
+                <a:cubicBezTo>
+                  <a:pt x="0" y="0"/>
+                  <a:pt x="0" y="0"/>
+                  <a:pt x="0" y="0"/>
+                </a:cubicBezTo>
+                <a:cubicBezTo>
+                  <a:pt x="0" y="0"/>
+                  <a:pt x="0" y="0"/>
+                  <a:pt x="0" y="0"/>
+                </a:cubicBezTo>
+                <a:cubicBezTo>
+                  <a:pt x="0" y="0"/>
+                  <a:pt x="0" y="0"/>
+                  <a:pt x="0" y="0"/>
+                </a:cubicBezTo>
+                <a:close/>
+              </a:path>
+            </a:pathLst>
+          </a:custGeom>
+          <a:solidFill xmlns:a="http://schemas.openxmlformats.org/drawingml/2006/main">
+            <a:schemeClr val="tx2">
+              <a:lumMod val="0"/>
+              <a:lumOff val="100000"/>
+              <a:alpha val="72157"/>
+            </a:schemeClr>
+          </a:solidFill>
+          <a:ln xmlns:a="http://schemas.openxmlformats.org/drawingml/2006/main">
+            <a:noFill/>
+          </a:ln>
+        </p:spPr>
+        <p:style>
+          <a:lnRef xmlns:a="http://schemas.openxmlformats.org/drawingml/2006/main" idx="2">
+            <a:schemeClr val="accent1">
+              <a:lumMod val="75000"/>
+            </a:schemeClr>
+          </a:lnRef>
+          <a:fillRef xmlns:a="http://schemas.openxmlformats.org/drawingml/2006/main" idx="1">
+            <a:schemeClr val="accent1"/>
+          </a:fillRef>
+          <a:effectRef xmlns:a="http://schemas.openxmlformats.org/drawingml/2006/main" idx="0">
+            <a:srgbClr val="FFFFFF"/>
+          </a:effectRef>
+          <a:fontRef xmlns:a="http://schemas.openxmlformats.org/drawingml/2006/main" idx="minor">
+            <a:schemeClr val="lt1"/>
+          </a:fontRef>
+        </p:style>
+        <p:txBody>
+          <a:bodyPr xmlns:a="http://schemas.openxmlformats.org/drawingml/2006/main" anchor="ctr"/>
+          <a:lstStyle xmlns:a="http://schemas.openxmlformats.org/drawingml/2006/main"/>
+          <a:p xmlns:a="http://schemas.openxmlformats.org/drawingml/2006/main">
+            <a:pPr algn="ctr">
+              <a:buNone/>
+            </a:pPr>
+            <a:endParaRPr/>
+          </a:p>
+        </p:txBody>
+      </p:sp>
+      <p:sp>
+        <p:nvSpPr>
+          <p:cNvPr id="33" name="文本框 32">
+            <a:extLst xmlns:a="http://schemas.openxmlformats.org/drawingml/2006/main">
+              <a:ext uri="{FF2B5EF4-FFF2-40B4-BE49-F238E27FC236}">
+                <a16:creationId xmlns:a16="http://schemas.microsoft.com/office/drawing/2014/main" id="{51FAFA76-A965-4FE5-9F9A-EF7A4C172384}"/>
+              </a:ext>
+            </a:extLst>
+          </p:cNvPr>
+          <p:cNvSpPr>
+            <a:spLocks xmlns:a="http://schemas.openxmlformats.org/drawingml/2006/main" noGrp="1"/>
+          </p:cNvSpPr>
+          <p:nvPr/>
+        </p:nvSpPr>
+        <p:spPr>
+          <a:xfrm xmlns:a="http://schemas.openxmlformats.org/drawingml/2006/main">
+            <a:off x="8311972" y="4245264"/>
+            <a:ext cx="2400528" cy="297180"/>
+          </a:xfrm>
+          <a:prstGeom xmlns:a="http://schemas.openxmlformats.org/drawingml/2006/main" prst="rect">
+            <a:avLst/>
+          </a:prstGeom>
+          <a:noFill xmlns:a="http://schemas.openxmlformats.org/drawingml/2006/main"/>
+        </p:spPr>
+        <p:txBody>
+          <a:bodyPr xmlns:a="http://schemas.openxmlformats.org/drawingml/2006/main" wrap="square" lIns="0" tIns="0" rIns="0" bIns="0" anchor="t">
+            <a:noAutofit/>
+          </a:bodyPr>
+          <a:lstStyle xmlns:a="http://schemas.openxmlformats.org/drawingml/2006/main"/>
+          <a:p xmlns:a="http://schemas.openxmlformats.org/drawingml/2006/main">
+            <a:pPr algn="l">
+              <a:lnSpc>
+                <a:spcPct val="133000"/>
+              </a:lnSpc>
+              <a:buNone/>
+            </a:pPr>
+            <a:r>
+              <a:rPr sz="1350">
+                <a:solidFill>
+                  <a:schemeClr val="tx2">
+                    <a:lumMod val="0"/>
+                    <a:lumOff val="100000"/>
+                    <a:alpha val="72157"/>
+                  </a:schemeClr>
+                </a:solidFill>
+                <a:latin typeface="Microsoft YaHei"/>
+                <a:ea typeface="Microsoft YaHei"/>
+                <a:cs typeface="Microsoft YaHei"/>
+              </a:rPr>
+              <a:t>人工约束状态冲突</a:t>
+            </a:r>
+            <a:endParaRPr sz="1350">
+              <a:solidFill>
+                <a:schemeClr val="tx2">
+                  <a:lumMod val="0"/>
+                  <a:lumOff val="100000"/>
+                  <a:alpha val="72157"/>
+                </a:schemeClr>
+              </a:solidFill>
+              <a:latin typeface="Microsoft YaHei"/>
+              <a:ea typeface="Microsoft YaHei"/>
+              <a:cs typeface="Microsoft YaHei"/>
+            </a:endParaRPr>
+          </a:p>
+        </p:txBody>
+      </p:sp>
+      <p:sp>
+        <p:nvSpPr>
+          <p:cNvPr id="34" name="任意多边形 33">
+            <a:extLst xmlns:a="http://schemas.openxmlformats.org/drawingml/2006/main">
+              <a:ext uri="{FF2B5EF4-FFF2-40B4-BE49-F238E27FC236}">
+                <a16:creationId xmlns:a16="http://schemas.microsoft.com/office/drawing/2014/main" id="{86F0B51A-4FE4-40A5-A6C3-73B282494645}"/>
+              </a:ext>
+            </a:extLst>
+          </p:cNvPr>
+          <p:cNvSpPr>
+            <a:spLocks xmlns:a="http://schemas.openxmlformats.org/drawingml/2006/main" noGrp="1"/>
+          </p:cNvSpPr>
+          <p:nvPr/>
+        </p:nvSpPr>
+        <p:spPr>
+          <a:xfrm xmlns:a="http://schemas.openxmlformats.org/drawingml/2006/main">
+            <a:off x="8216265" y="4667885"/>
+            <a:ext cx="57150" cy="57150"/>
+          </a:xfrm>
+          <a:custGeom xmlns:a="http://schemas.openxmlformats.org/drawingml/2006/main">
+            <a:gdLst>
+              <a:gd name="sw" fmla="*/ 1 w 90"/>
+              <a:gd name="sh" fmla="*/ 1 h 90"/>
+              <a:gd name="mins" fmla="min sw sh"/>
+              <a:gd name="dsw" fmla="+- 0 sw mins"/>
+              <a:gd name="dsh" fmla="+- 0 sh mins"/>
+              <a:gd name="p0x0" fmla="*/ 45 w 90"/>
+              <a:gd name="p0y0" fmla="*/ 0 h 90"/>
+              <a:gd name="p0x1" fmla="*/ 69 w 90"/>
+              <a:gd name="p0y1" fmla="*/ 0 h 90"/>
+              <a:gd name="p0x2" fmla="*/ 90 w 90"/>
+              <a:gd name="p0y2" fmla="*/ 20 h 90"/>
+              <a:gd name="p0x3" fmla="*/ 90 w 90"/>
+              <a:gd name="p0y3" fmla="*/ 45 h 90"/>
+              <a:gd name="p0x4" fmla="*/ 90 w 90"/>
+              <a:gd name="p0y4" fmla="*/ 69 h 90"/>
+              <a:gd name="p0x5" fmla="*/ 69 w 90"/>
+              <a:gd name="p0y5" fmla="*/ 90 h 90"/>
+              <a:gd name="p0x6" fmla="*/ 45 w 90"/>
+              <a:gd name="p0y6" fmla="*/ 90 h 90"/>
+              <a:gd name="p0x7" fmla="*/ 20 w 90"/>
+              <a:gd name="p0y7" fmla="*/ 90 h 90"/>
+              <a:gd name="p0x8" fmla="*/ 0 w 90"/>
+              <a:gd name="p0y8" fmla="*/ 69 h 90"/>
+              <a:gd name="p0x9" fmla="*/ 0 w 90"/>
+              <a:gd name="p0y9" fmla="*/ 45 h 90"/>
+              <a:gd name="p0x10" fmla="*/ 0 w 90"/>
+              <a:gd name="p0y10" fmla="*/ 20 h 90"/>
+              <a:gd name="p0x11" fmla="*/ 20 w 90"/>
+              <a:gd name="p0y11" fmla="*/ 0 h 90"/>
+              <a:gd name="p0x12" fmla="*/ 45 w 90"/>
+              <a:gd name="p0y12" fmla="*/ 0 h 90"/>
+            </a:gdLst>
+            <a:pathLst>
+              <a:path w="0" h="0">
+                <a:moveTo>
+                  <a:pt x="0" y="0"/>
+                </a:moveTo>
+                <a:cubicBezTo>
+                  <a:pt x="0" y="0"/>
+                  <a:pt x="0" y="0"/>
+                  <a:pt x="0" y="0"/>
+                </a:cubicBezTo>
+                <a:cubicBezTo>
+                  <a:pt x="0" y="0"/>
+                  <a:pt x="0" y="0"/>
+                  <a:pt x="0" y="0"/>
+                </a:cubicBezTo>
+                <a:cubicBezTo>
+                  <a:pt x="0" y="0"/>
+                  <a:pt x="0" y="0"/>
+                  <a:pt x="0" y="0"/>
+                </a:cubicBezTo>
+                <a:cubicBezTo>
+                  <a:pt x="0" y="0"/>
+                  <a:pt x="0" y="0"/>
+                  <a:pt x="0" y="0"/>
+                </a:cubicBezTo>
+                <a:close/>
+              </a:path>
+            </a:pathLst>
+          </a:custGeom>
+          <a:solidFill xmlns:a="http://schemas.openxmlformats.org/drawingml/2006/main">
+            <a:schemeClr val="tx2">
+              <a:lumMod val="0"/>
+              <a:lumOff val="100000"/>
+              <a:alpha val="72157"/>
+            </a:schemeClr>
+          </a:solidFill>
+          <a:ln xmlns:a="http://schemas.openxmlformats.org/drawingml/2006/main">
+            <a:noFill/>
+          </a:ln>
+        </p:spPr>
+        <p:style>
+          <a:lnRef xmlns:a="http://schemas.openxmlformats.org/drawingml/2006/main" idx="2">
+            <a:schemeClr val="accent1">
+              <a:lumMod val="75000"/>
+            </a:schemeClr>
+          </a:lnRef>
+          <a:fillRef xmlns:a="http://schemas.openxmlformats.org/drawingml/2006/main" idx="1">
+            <a:schemeClr val="accent1"/>
+          </a:fillRef>
+          <a:effectRef xmlns:a="http://schemas.openxmlformats.org/drawingml/2006/main" idx="0">
+            <a:srgbClr val="FFFFFF"/>
+          </a:effectRef>
+          <a:fontRef xmlns:a="http://schemas.openxmlformats.org/drawingml/2006/main" idx="minor">
+            <a:schemeClr val="lt1"/>
+          </a:fontRef>
+        </p:style>
+        <p:txBody>
+          <a:bodyPr xmlns:a="http://schemas.openxmlformats.org/drawingml/2006/main" anchor="ctr"/>
+          <a:lstStyle xmlns:a="http://schemas.openxmlformats.org/drawingml/2006/main"/>
+          <a:p xmlns:a="http://schemas.openxmlformats.org/drawingml/2006/main">
+            <a:pPr algn="ctr">
+              <a:buNone/>
+            </a:pPr>
+            <a:endParaRPr/>
+          </a:p>
+        </p:txBody>
+      </p:sp>
+      <p:sp>
+        <p:nvSpPr>
+          <p:cNvPr id="35" name="文本框 34">
+            <a:extLst xmlns:a="http://schemas.openxmlformats.org/drawingml/2006/main">
+              <a:ext uri="{FF2B5EF4-FFF2-40B4-BE49-F238E27FC236}">
+                <a16:creationId xmlns:a16="http://schemas.microsoft.com/office/drawing/2014/main" id="{D55D9BDC-6B4C-4BF6-B92F-11A736CAC924}"/>
+              </a:ext>
+            </a:extLst>
+          </p:cNvPr>
+          <p:cNvSpPr>
+            <a:spLocks xmlns:a="http://schemas.openxmlformats.org/drawingml/2006/main" noGrp="1"/>
+          </p:cNvSpPr>
+          <p:nvPr/>
+        </p:nvSpPr>
+        <p:spPr>
+          <a:xfrm xmlns:a="http://schemas.openxmlformats.org/drawingml/2006/main">
+            <a:off x="8311972" y="4557656"/>
+            <a:ext cx="2400528" cy="297180"/>
+          </a:xfrm>
+          <a:prstGeom xmlns:a="http://schemas.openxmlformats.org/drawingml/2006/main" prst="rect">
+            <a:avLst/>
+          </a:prstGeom>
+          <a:noFill xmlns:a="http://schemas.openxmlformats.org/drawingml/2006/main"/>
+        </p:spPr>
+        <p:txBody>
+          <a:bodyPr xmlns:a="http://schemas.openxmlformats.org/drawingml/2006/main" wrap="square" lIns="0" tIns="0" rIns="0" bIns="0" anchor="t">
+            <a:noAutofit/>
+          </a:bodyPr>
+          <a:lstStyle xmlns:a="http://schemas.openxmlformats.org/drawingml/2006/main"/>
+          <a:p xmlns:a="http://schemas.openxmlformats.org/drawingml/2006/main">
+            <a:pPr algn="l">
+              <a:lnSpc>
+                <a:spcPct val="133000"/>
+              </a:lnSpc>
+              <a:buNone/>
+            </a:pPr>
+            <a:r>
+              <a:rPr sz="1350">
+                <a:solidFill>
+                  <a:schemeClr val="tx2">
+                    <a:lumMod val="0"/>
+                    <a:lumOff val="100000"/>
+                    <a:alpha val="72157"/>
+                  </a:schemeClr>
+                </a:solidFill>
+                <a:latin typeface="Microsoft YaHei"/>
+                <a:ea typeface="Microsoft YaHei"/>
+                <a:cs typeface="Microsoft YaHei"/>
+              </a:rPr>
+              <a:t>整轮 checkpoint 恢复</a:t>
+            </a:r>
+            <a:endParaRPr sz="1350">
+              <a:solidFill>
+                <a:schemeClr val="tx2">
+                  <a:lumMod val="0"/>
+                  <a:lumOff val="100000"/>
+                  <a:alpha val="72157"/>
+                </a:schemeClr>
+              </a:solidFill>
+              <a:latin typeface="Microsoft YaHei"/>
+              <a:ea typeface="Microsoft YaHei"/>
+              <a:cs typeface="Microsoft YaHei"/>
+            </a:endParaRPr>
+          </a:p>
+        </p:txBody>
+      </p:sp>
+      <p:sp>
+        <p:nvSpPr>
+          <p:cNvPr id="36" name="任意多边形 35">
+            <a:extLst xmlns:a="http://schemas.openxmlformats.org/drawingml/2006/main">
+              <a:ext uri="{FF2B5EF4-FFF2-40B4-BE49-F238E27FC236}">
+                <a16:creationId xmlns:a16="http://schemas.microsoft.com/office/drawing/2014/main" id="{547DAB24-7F2C-4D15-B11D-C232276CF33B}"/>
+              </a:ext>
+            </a:extLst>
+          </p:cNvPr>
+          <p:cNvSpPr>
+            <a:spLocks xmlns:a="http://schemas.openxmlformats.org/drawingml/2006/main" noGrp="1"/>
+          </p:cNvSpPr>
+          <p:nvPr/>
+        </p:nvSpPr>
+        <p:spPr>
+          <a:xfrm xmlns:a="http://schemas.openxmlformats.org/drawingml/2006/main">
+            <a:off x="8216265" y="4980305"/>
+            <a:ext cx="57150" cy="57150"/>
+          </a:xfrm>
+          <a:custGeom xmlns:a="http://schemas.openxmlformats.org/drawingml/2006/main">
+            <a:gdLst>
+              <a:gd name="sw" fmla="*/ 1 w 90"/>
+              <a:gd name="sh" fmla="*/ 1 h 90"/>
+              <a:gd name="mins" fmla="min sw sh"/>
+              <a:gd name="dsw" fmla="+- 0 sw mins"/>
+              <a:gd name="dsh" fmla="+- 0 sh mins"/>
+              <a:gd name="p0x0" fmla="*/ 45 w 90"/>
+              <a:gd name="p0y0" fmla="*/ 0 h 90"/>
+              <a:gd name="p0x1" fmla="*/ 69 w 90"/>
+              <a:gd name="p0y1" fmla="*/ 0 h 90"/>
+              <a:gd name="p0x2" fmla="*/ 90 w 90"/>
+              <a:gd name="p0y2" fmla="*/ 20 h 90"/>
+              <a:gd name="p0x3" fmla="*/ 90 w 90"/>
+              <a:gd name="p0y3" fmla="*/ 45 h 90"/>
+              <a:gd name="p0x4" fmla="*/ 90 w 90"/>
+              <a:gd name="p0y4" fmla="*/ 69 h 90"/>
+              <a:gd name="p0x5" fmla="*/ 69 w 90"/>
+              <a:gd name="p0y5" fmla="*/ 90 h 90"/>
+              <a:gd name="p0x6" fmla="*/ 45 w 90"/>
+              <a:gd name="p0y6" fmla="*/ 90 h 90"/>
+              <a:gd name="p0x7" fmla="*/ 20 w 90"/>
+              <a:gd name="p0y7" fmla="*/ 90 h 90"/>
+              <a:gd name="p0x8" fmla="*/ 0 w 90"/>
+              <a:gd name="p0y8" fmla="*/ 69 h 90"/>
+              <a:gd name="p0x9" fmla="*/ 0 w 90"/>
+              <a:gd name="p0y9" fmla="*/ 45 h 90"/>
+              <a:gd name="p0x10" fmla="*/ 0 w 90"/>
+              <a:gd name="p0y10" fmla="*/ 20 h 90"/>
+              <a:gd name="p0x11" fmla="*/ 20 w 90"/>
+              <a:gd name="p0y11" fmla="*/ 0 h 90"/>
+              <a:gd name="p0x12" fmla="*/ 45 w 90"/>
+              <a:gd name="p0y12" fmla="*/ 0 h 90"/>
+            </a:gdLst>
+            <a:pathLst>
+              <a:path w="0" h="0">
+                <a:moveTo>
+                  <a:pt x="0" y="0"/>
+                </a:moveTo>
+                <a:cubicBezTo>
+                  <a:pt x="0" y="0"/>
+                  <a:pt x="0" y="0"/>
+                  <a:pt x="0" y="0"/>
+                </a:cubicBezTo>
+                <a:cubicBezTo>
+                  <a:pt x="0" y="0"/>
+                  <a:pt x="0" y="0"/>
+                  <a:pt x="0" y="0"/>
+                </a:cubicBezTo>
+                <a:cubicBezTo>
+                  <a:pt x="0" y="0"/>
+                  <a:pt x="0" y="0"/>
+                  <a:pt x="0" y="0"/>
+                </a:cubicBezTo>
+                <a:cubicBezTo>
+                  <a:pt x="0" y="0"/>
+                  <a:pt x="0" y="0"/>
+                  <a:pt x="0" y="0"/>
+                </a:cubicBezTo>
+                <a:close/>
+              </a:path>
+            </a:pathLst>
+          </a:custGeom>
+          <a:solidFill xmlns:a="http://schemas.openxmlformats.org/drawingml/2006/main">
+            <a:schemeClr val="tx2">
+              <a:lumMod val="0"/>
+              <a:lumOff val="100000"/>
+              <a:alpha val="72157"/>
+            </a:schemeClr>
+          </a:solidFill>
+          <a:ln xmlns:a="http://schemas.openxmlformats.org/drawingml/2006/main">
+            <a:noFill/>
+          </a:ln>
+        </p:spPr>
+        <p:style>
+          <a:lnRef xmlns:a="http://schemas.openxmlformats.org/drawingml/2006/main" idx="2">
+            <a:schemeClr val="accent1">
+              <a:lumMod val="75000"/>
+            </a:schemeClr>
+          </a:lnRef>
+          <a:fillRef xmlns:a="http://schemas.openxmlformats.org/drawingml/2006/main" idx="1">
+            <a:schemeClr val="accent1"/>
+          </a:fillRef>
+          <a:effectRef xmlns:a="http://schemas.openxmlformats.org/drawingml/2006/main" idx="0">
+            <a:srgbClr val="FFFFFF"/>
+          </a:effectRef>
+          <a:fontRef xmlns:a="http://schemas.openxmlformats.org/drawingml/2006/main" idx="minor">
+            <a:schemeClr val="lt1"/>
+          </a:fontRef>
+        </p:style>
+        <p:txBody>
+          <a:bodyPr xmlns:a="http://schemas.openxmlformats.org/drawingml/2006/main" anchor="ctr"/>
+          <a:lstStyle xmlns:a="http://schemas.openxmlformats.org/drawingml/2006/main"/>
+          <a:p xmlns:a="http://schemas.openxmlformats.org/drawingml/2006/main">
+            <a:pPr algn="ctr">
+              <a:buNone/>
+            </a:pPr>
+            <a:endParaRPr/>
+          </a:p>
+        </p:txBody>
+      </p:sp>
+      <p:sp>
+        <p:nvSpPr>
+          <p:cNvPr id="37" name="文本框 36">
+            <a:extLst xmlns:a="http://schemas.openxmlformats.org/drawingml/2006/main">
+              <a:ext uri="{FF2B5EF4-FFF2-40B4-BE49-F238E27FC236}">
+                <a16:creationId xmlns:a16="http://schemas.microsoft.com/office/drawing/2014/main" id="{29696D6E-3C52-4BE5-9665-16946393D8E0}"/>
+              </a:ext>
+            </a:extLst>
+          </p:cNvPr>
+          <p:cNvSpPr>
+            <a:spLocks xmlns:a="http://schemas.openxmlformats.org/drawingml/2006/main" noGrp="1"/>
+          </p:cNvSpPr>
+          <p:nvPr/>
+        </p:nvSpPr>
+        <p:spPr>
+          <a:xfrm xmlns:a="http://schemas.openxmlformats.org/drawingml/2006/main">
+            <a:off x="8311972" y="4870047"/>
+            <a:ext cx="3257778" cy="297180"/>
+          </a:xfrm>
+          <a:prstGeom xmlns:a="http://schemas.openxmlformats.org/drawingml/2006/main" prst="rect">
+            <a:avLst/>
+          </a:prstGeom>
+          <a:noFill xmlns:a="http://schemas.openxmlformats.org/drawingml/2006/main"/>
+        </p:spPr>
+        <p:txBody>
+          <a:bodyPr xmlns:a="http://schemas.openxmlformats.org/drawingml/2006/main" wrap="square" lIns="0" tIns="0" rIns="0" bIns="0" anchor="t">
+            <a:noAutofit/>
+          </a:bodyPr>
+          <a:lstStyle xmlns:a="http://schemas.openxmlformats.org/drawingml/2006/main"/>
+          <a:p xmlns:a="http://schemas.openxmlformats.org/drawingml/2006/main">
+            <a:pPr algn="l">
+              <a:lnSpc>
+                <a:spcPct val="133000"/>
+              </a:lnSpc>
+              <a:buNone/>
+            </a:pPr>
+            <a:r>
+              <a:rPr sz="1350">
+                <a:solidFill>
+                  <a:schemeClr val="tx2">
+                    <a:lumMod val="0"/>
+                    <a:lumOff val="100000"/>
+                    <a:alpha val="72157"/>
+                  </a:schemeClr>
+                </a:solidFill>
+                <a:latin typeface="Microsoft YaHei"/>
+                <a:ea typeface="Microsoft YaHei"/>
+                <a:cs typeface="Microsoft YaHei"/>
+              </a:rPr>
+              <a:t>本质：子图编排，未形成层级协作</a:t>
+            </a:r>
+            <a:endParaRPr sz="1350">
+              <a:solidFill>
+                <a:schemeClr val="tx2">
+                  <a:lumMod val="0"/>
+                  <a:lumOff val="100000"/>
+                  <a:alpha val="72157"/>
+                </a:schemeClr>
+              </a:solidFill>
+              <a:latin typeface="Microsoft YaHei"/>
+              <a:ea typeface="Microsoft YaHei"/>
+              <a:cs typeface="Microsoft YaHei"/>
+            </a:endParaRPr>
+          </a:p>
+        </p:txBody>
+      </p:sp>
+    </p:spTree>
+    <p:extLst>
+      <p:ext uri="{BB962C8B-B14F-4D97-AF65-F5344CB8AC3E}">
+        <p14:creationId xmlns:p14="http://schemas.microsoft.com/office/powerpoint/2010/main" val="1856013594"/>
+      </p:ext>
+    </p:extLst>
+  </p:cSld>
+</p:sld>
+</file>
+
+<file path=ppt/slides/slide4.xml><?xml version="1.0" encoding="utf-8"?>
+<p:sld xmlns:p="http://schemas.openxmlformats.org/presentationml/2006/main">
+  <p:cSld>
+    <p:spTree>
+      <p:nvGrpSpPr>
+        <p:cNvPr id="1" name=""/>
+        <p:cNvGrpSpPr/>
+        <p:nvPr/>
+      </p:nvGrpSpPr>
+      <p:grpSpPr>
+        <a:xfrm xmlns:a="http://schemas.openxmlformats.org/drawingml/2006/main"/>
+      </p:grpSpPr>
+      <p:sp>
+        <p:nvSpPr>
+          <p:cNvPr id="3" name="文本框 2">
+            <a:extLst xmlns:a="http://schemas.openxmlformats.org/drawingml/2006/main">
+              <a:ext uri="{FF2B5EF4-FFF2-40B4-BE49-F238E27FC236}">
+                <a16:creationId xmlns:a16="http://schemas.microsoft.com/office/drawing/2014/main" id="{E270F8AA-5D3A-4362-A4A3-64472F5802B6}"/>
+              </a:ext>
+            </a:extLst>
+          </p:cNvPr>
+          <p:cNvSpPr>
+            <a:spLocks xmlns:a="http://schemas.openxmlformats.org/drawingml/2006/main" noGrp="1"/>
+          </p:cNvSpPr>
+          <p:nvPr/>
+        </p:nvSpPr>
+        <p:spPr>
+          <a:xfrm xmlns:a="http://schemas.openxmlformats.org/drawingml/2006/main">
+            <a:off x="533400" y="357188"/>
+            <a:ext cx="11125200" cy="500063"/>
+          </a:xfrm>
+          <a:prstGeom xmlns:a="http://schemas.openxmlformats.org/drawingml/2006/main" prst="rect">
+            <a:avLst/>
+          </a:prstGeom>
+          <a:noFill xmlns:a="http://schemas.openxmlformats.org/drawingml/2006/main"/>
+        </p:spPr>
+        <p:txBody>
+          <a:bodyPr xmlns:a="http://schemas.openxmlformats.org/drawingml/2006/main" wrap="square" lIns="0" tIns="0" rIns="0" bIns="0" anchor="t">
+            <a:noAutofit/>
+          </a:bodyPr>
+          <a:lstStyle xmlns:a="http://schemas.openxmlformats.org/drawingml/2006/main"/>
+          <a:p xmlns:a="http://schemas.openxmlformats.org/drawingml/2006/main">
+            <a:pPr algn="l">
+              <a:lnSpc>
+                <a:spcPct val="100000"/>
+              </a:lnSpc>
+              <a:buNone/>
+            </a:pPr>
+            <a:r>
+              <a:rPr sz="3000" b="1">
+                <a:solidFill>
+                  <a:srgbClr val="F4F4F5"/>
+                </a:solidFill>
+                <a:latin typeface="Microsoft YaHei"/>
+                <a:ea typeface="Microsoft YaHei"/>
+                <a:cs typeface="Microsoft YaHei"/>
+              </a:rPr>
+              <a:t>新做法：Supervisor 统一控制协作边界</a:t>
+            </a:r>
+            <a:endParaRPr sz="3000" b="1">
+              <a:solidFill>
+                <a:srgbClr val="F4F4F5"/>
+              </a:solidFill>
+              <a:latin typeface="Microsoft YaHei"/>
+              <a:ea typeface="Microsoft YaHei"/>
+              <a:cs typeface="Microsoft YaHei"/>
+            </a:endParaRPr>
+          </a:p>
+        </p:txBody>
+      </p:sp>
+      <p:sp>
+        <p:nvSpPr>
+          <p:cNvPr id="4" name="任意多边形 3">
+            <a:extLst xmlns:a="http://schemas.openxmlformats.org/drawingml/2006/main">
+              <a:ext uri="{FF2B5EF4-FFF2-40B4-BE49-F238E27FC236}">
+                <a16:creationId xmlns:a16="http://schemas.microsoft.com/office/drawing/2014/main" id="{7FF950EB-003D-4809-9950-E6F4FEC43A8C}"/>
+              </a:ext>
+            </a:extLst>
+          </p:cNvPr>
+          <p:cNvSpPr>
+            <a:spLocks xmlns:a="http://schemas.openxmlformats.org/drawingml/2006/main" noGrp="1"/>
+          </p:cNvSpPr>
+          <p:nvPr/>
+        </p:nvSpPr>
+        <p:spPr>
+          <a:xfrm xmlns:a="http://schemas.openxmlformats.org/drawingml/2006/main">
+            <a:off x="571500" y="1104900"/>
+            <a:ext cx="11049000" cy="932180"/>
+          </a:xfrm>
+          <a:custGeom xmlns:a="http://schemas.openxmlformats.org/drawingml/2006/main">
+            <a:gdLst>
+              <a:gd name="sw" fmla="*/ 1 w 17400"/>
+              <a:gd name="sh" fmla="*/ 1 h 1468"/>
+              <a:gd name="mins" fmla="min sw sh"/>
+              <a:gd name="dsw" fmla="+- 0 sw mins"/>
+              <a:gd name="dsh" fmla="+- 0 sh mins"/>
+              <a:gd name="p0x0" fmla="*/ 120 w 17400"/>
+              <a:gd name="p0y0" fmla="*/ 0 h 1468"/>
+              <a:gd name="p0x1" fmla="*/ 17280 w 17400"/>
+              <a:gd name="p0y1" fmla="*/ 0 h 1468"/>
+              <a:gd name="p0x2" fmla="*/ 17346 w 17400"/>
+              <a:gd name="p0y2" fmla="*/ 0 h 1468"/>
+              <a:gd name="p0x3" fmla="*/ 17400 w 17400"/>
+              <a:gd name="p0y3" fmla="*/ 53 h 1468"/>
+              <a:gd name="p0x4" fmla="*/ 17400 w 17400"/>
+              <a:gd name="p0y4" fmla="*/ 120 h 1468"/>
+              <a:gd name="p0x5" fmla="*/ 17400 w 17400"/>
+              <a:gd name="p0y5" fmla="*/ 1348 h 1468"/>
+              <a:gd name="p0x6" fmla="*/ 17400 w 17400"/>
+              <a:gd name="p0y6" fmla="*/ 1415 h 1468"/>
+              <a:gd name="p0x7" fmla="*/ 17346 w 17400"/>
+              <a:gd name="p0y7" fmla="*/ 1468 h 1468"/>
+              <a:gd name="p0x8" fmla="*/ 17280 w 17400"/>
+              <a:gd name="p0y8" fmla="*/ 1468 h 1468"/>
+              <a:gd name="p0x9" fmla="*/ 120 w 17400"/>
+              <a:gd name="p0y9" fmla="*/ 1468 h 1468"/>
+              <a:gd name="p0x10" fmla="*/ 53 w 17400"/>
+              <a:gd name="p0y10" fmla="*/ 1468 h 1468"/>
+              <a:gd name="p0x11" fmla="*/ 0 w 17400"/>
+              <a:gd name="p0y11" fmla="*/ 1415 h 1468"/>
+              <a:gd name="p0x12" fmla="*/ 0 w 17400"/>
+              <a:gd name="p0y12" fmla="*/ 1348 h 1468"/>
+              <a:gd name="p0x13" fmla="*/ 0 w 17400"/>
+              <a:gd name="p0y13" fmla="*/ 120 h 1468"/>
+              <a:gd name="p0x14" fmla="*/ 0 w 17400"/>
+              <a:gd name="p0y14" fmla="*/ 53 h 1468"/>
+              <a:gd name="p0x15" fmla="*/ 53 w 17400"/>
+              <a:gd name="p0y15" fmla="*/ 0 h 1468"/>
+              <a:gd name="p0x16" fmla="*/ 120 w 17400"/>
+              <a:gd name="p0y16" fmla="*/ 0 h 1468"/>
+            </a:gdLst>
+            <a:pathLst>
+              <a:path w="0" h="0">
+                <a:moveTo>
+                  <a:pt x="0" y="0"/>
+                </a:moveTo>
+                <a:lnTo>
+                  <a:pt x="0" y="0"/>
+                </a:lnTo>
+                <a:cubicBezTo>
+                  <a:pt x="0" y="0"/>
+                  <a:pt x="0" y="0"/>
+                  <a:pt x="0" y="0"/>
+                </a:cubicBezTo>
+                <a:lnTo>
+                  <a:pt x="0" y="0"/>
+                </a:lnTo>
+                <a:cubicBezTo>
+                  <a:pt x="0" y="0"/>
+                  <a:pt x="0" y="0"/>
+                  <a:pt x="0" y="0"/>
+                </a:cubicBezTo>
+                <a:lnTo>
+                  <a:pt x="0" y="0"/>
+                </a:lnTo>
+                <a:cubicBezTo>
+                  <a:pt x="0" y="0"/>
+                  <a:pt x="0" y="0"/>
+                  <a:pt x="0" y="0"/>
+                </a:cubicBezTo>
+                <a:lnTo>
+                  <a:pt x="0" y="0"/>
+                </a:lnTo>
+                <a:cubicBezTo>
+                  <a:pt x="0" y="0"/>
+                  <a:pt x="0" y="0"/>
+                  <a:pt x="0" y="0"/>
+                </a:cubicBezTo>
+                <a:close/>
+              </a:path>
+            </a:pathLst>
+          </a:custGeom>
+          <a:solidFill xmlns:a="http://schemas.openxmlformats.org/drawingml/2006/main">
+            <a:schemeClr val="accent1">
+              <a:lumMod val="69069"/>
+            </a:schemeClr>
+          </a:solidFill>
+          <a:ln xmlns:a="http://schemas.openxmlformats.org/drawingml/2006/main">
+            <a:noFill/>
+          </a:ln>
+          <a:effectLst xmlns:a="http://schemas.openxmlformats.org/drawingml/2006/main">
+            <a:outerShdw blurRad="142875" algn="ctr" rotWithShape="0">
+              <a:schemeClr val="accent2">
+                <a:alpha val="12157"/>
+              </a:schemeClr>
+            </a:outerShdw>
+          </a:effectLst>
+        </p:spPr>
+        <p:style>
+          <a:lnRef xmlns:a="http://schemas.openxmlformats.org/drawingml/2006/main" idx="2">
+            <a:schemeClr val="accent1">
+              <a:lumMod val="75000"/>
+            </a:schemeClr>
+          </a:lnRef>
+          <a:fillRef xmlns:a="http://schemas.openxmlformats.org/drawingml/2006/main" idx="1">
+            <a:schemeClr val="accent1"/>
+          </a:fillRef>
+          <a:effectRef xmlns:a="http://schemas.openxmlformats.org/drawingml/2006/main" idx="0">
+            <a:srgbClr val="FFFFFF"/>
+          </a:effectRef>
+          <a:fontRef xmlns:a="http://schemas.openxmlformats.org/drawingml/2006/main" idx="minor">
+            <a:schemeClr val="lt1"/>
+          </a:fontRef>
+        </p:style>
+        <p:txBody>
+          <a:bodyPr xmlns:a="http://schemas.openxmlformats.org/drawingml/2006/main" anchor="ctr"/>
+          <a:lstStyle xmlns:a="http://schemas.openxmlformats.org/drawingml/2006/main"/>
+          <a:p xmlns:a="http://schemas.openxmlformats.org/drawingml/2006/main">
+            <a:pPr algn="ctr">
+              <a:buNone/>
+            </a:pPr>
+            <a:endParaRPr/>
+          </a:p>
+        </p:txBody>
+      </p:sp>
+      <p:sp>
+        <p:nvSpPr>
+          <p:cNvPr id="5" name="文本框 4">
+            <a:extLst xmlns:a="http://schemas.openxmlformats.org/drawingml/2006/main">
+              <a:ext uri="{FF2B5EF4-FFF2-40B4-BE49-F238E27FC236}">
+                <a16:creationId xmlns:a16="http://schemas.microsoft.com/office/drawing/2014/main" id="{37C51489-F4E7-4600-A22F-74F473FB6E30}"/>
+              </a:ext>
+            </a:extLst>
+          </p:cNvPr>
+          <p:cNvSpPr>
+            <a:spLocks xmlns:a="http://schemas.openxmlformats.org/drawingml/2006/main" noGrp="1"/>
+          </p:cNvSpPr>
+          <p:nvPr/>
+        </p:nvSpPr>
+        <p:spPr>
+          <a:xfrm xmlns:a="http://schemas.openxmlformats.org/drawingml/2006/main">
+            <a:off x="762000" y="1413139"/>
+            <a:ext cx="6092285" cy="311468"/>
+          </a:xfrm>
+          <a:prstGeom xmlns:a="http://schemas.openxmlformats.org/drawingml/2006/main" prst="rect">
+            <a:avLst/>
+          </a:prstGeom>
+          <a:noFill xmlns:a="http://schemas.openxmlformats.org/drawingml/2006/main"/>
+        </p:spPr>
+        <p:txBody>
+          <a:bodyPr xmlns:a="http://schemas.openxmlformats.org/drawingml/2006/main" wrap="square" lIns="0" tIns="0" rIns="0" bIns="0" anchor="t">
+            <a:noAutofit/>
+          </a:bodyPr>
+          <a:lstStyle xmlns:a="http://schemas.openxmlformats.org/drawingml/2006/main"/>
+          <a:p xmlns:a="http://schemas.openxmlformats.org/drawingml/2006/main">
+            <a:pPr algn="l">
+              <a:lnSpc>
+                <a:spcPct val="104000"/>
+              </a:lnSpc>
+              <a:buNone/>
+            </a:pPr>
+            <a:r>
+              <a:rPr b="1">
+                <a:solidFill>
+                  <a:srgbClr val="FFFFFF"/>
+                </a:solidFill>
+                <a:latin typeface="Microsoft YaHei"/>
+                <a:ea typeface="Microsoft YaHei"/>
+                <a:cs typeface="Microsoft YaHei"/>
+              </a:rPr>
+              <a:t>任务向下派发，proposal 向上合并，Agent 之间不直连</a:t>
+            </a:r>
+            <a:endParaRPr>
+              <a:solidFill>
+                <a:srgbClr val="FFFFFF"/>
+              </a:solidFill>
+              <a:latin typeface="Microsoft YaHei"/>
+              <a:ea typeface="Microsoft YaHei"/>
+              <a:cs typeface="Microsoft YaHei"/>
+            </a:endParaRPr>
+          </a:p>
+        </p:txBody>
+      </p:sp>
+      <p:sp>
+        <p:nvSpPr>
+          <p:cNvPr id="6" name="任意多边形 5">
+            <a:extLst xmlns:a="http://schemas.openxmlformats.org/drawingml/2006/main">
+              <a:ext uri="{FF2B5EF4-FFF2-40B4-BE49-F238E27FC236}">
+                <a16:creationId xmlns:a16="http://schemas.microsoft.com/office/drawing/2014/main" id="{3D9AA4B5-9EB7-414E-BB33-50192833666D}"/>
+              </a:ext>
+            </a:extLst>
+          </p:cNvPr>
+          <p:cNvSpPr>
+            <a:spLocks xmlns:a="http://schemas.openxmlformats.org/drawingml/2006/main" noGrp="1"/>
+          </p:cNvSpPr>
+          <p:nvPr/>
+        </p:nvSpPr>
+        <p:spPr>
+          <a:xfrm xmlns:a="http://schemas.openxmlformats.org/drawingml/2006/main">
+            <a:off x="575945" y="2308860"/>
+            <a:ext cx="3521075" cy="4163060"/>
+          </a:xfrm>
+          <a:custGeom xmlns:a="http://schemas.openxmlformats.org/drawingml/2006/main">
+            <a:gdLst>
+              <a:gd name="sw" fmla="*/ 1 w 5544"/>
+              <a:gd name="sh" fmla="*/ 1 h 6556"/>
+              <a:gd name="mins" fmla="min sw sh"/>
+              <a:gd name="dsw" fmla="+- 0 sw mins"/>
+              <a:gd name="dsh" fmla="+- 0 sh mins"/>
+              <a:gd name="p0x0" fmla="*/ 120 w 5544"/>
+              <a:gd name="p0y0" fmla="*/ 0 h 6556"/>
+              <a:gd name="p0x1" fmla="*/ 5424 w 5544"/>
+              <a:gd name="p0y1" fmla="*/ 0 h 6556"/>
+              <a:gd name="p0x2" fmla="*/ 5491 w 5544"/>
+              <a:gd name="p0y2" fmla="*/ 0 h 6556"/>
+              <a:gd name="p0x3" fmla="*/ 5544 w 5544"/>
+              <a:gd name="p0y3" fmla="*/ 53 h 6556"/>
+              <a:gd name="p0x4" fmla="*/ 5544 w 5544"/>
+              <a:gd name="p0y4" fmla="*/ 120 h 6556"/>
+              <a:gd name="p0x5" fmla="*/ 5544 w 5544"/>
+              <a:gd name="p0y5" fmla="*/ 6436 h 6556"/>
+              <a:gd name="p0x6" fmla="*/ 5544 w 5544"/>
+              <a:gd name="p0y6" fmla="*/ 6502 h 6556"/>
+              <a:gd name="p0x7" fmla="*/ 5491 w 5544"/>
+              <a:gd name="p0y7" fmla="*/ 6556 h 6556"/>
+              <a:gd name="p0x8" fmla="*/ 5424 w 5544"/>
+              <a:gd name="p0y8" fmla="*/ 6556 h 6556"/>
+              <a:gd name="p0x9" fmla="*/ 120 w 5544"/>
+              <a:gd name="p0y9" fmla="*/ 6556 h 6556"/>
+              <a:gd name="p0x10" fmla="*/ 53 w 5544"/>
+              <a:gd name="p0y10" fmla="*/ 6556 h 6556"/>
+              <a:gd name="p0x11" fmla="*/ 0 w 5544"/>
+              <a:gd name="p0y11" fmla="*/ 6502 h 6556"/>
+              <a:gd name="p0x12" fmla="*/ 0 w 5544"/>
+              <a:gd name="p0y12" fmla="*/ 6436 h 6556"/>
+              <a:gd name="p0x13" fmla="*/ 0 w 5544"/>
+              <a:gd name="p0y13" fmla="*/ 120 h 6556"/>
+              <a:gd name="p0x14" fmla="*/ 0 w 5544"/>
+              <a:gd name="p0y14" fmla="*/ 53 h 6556"/>
+              <a:gd name="p0x15" fmla="*/ 53 w 5544"/>
+              <a:gd name="p0y15" fmla="*/ 0 h 6556"/>
+              <a:gd name="p0x16" fmla="*/ 120 w 5544"/>
+              <a:gd name="p0y16" fmla="*/ 0 h 6556"/>
+            </a:gdLst>
+            <a:pathLst>
+              <a:path w="0" h="0">
+                <a:moveTo>
+                  <a:pt x="0" y="0"/>
+                </a:moveTo>
+                <a:lnTo>
+                  <a:pt x="0" y="0"/>
+                </a:lnTo>
+                <a:cubicBezTo>
+                  <a:pt x="0" y="0"/>
+                  <a:pt x="0" y="0"/>
+                  <a:pt x="0" y="0"/>
+                </a:cubicBezTo>
+                <a:lnTo>
+                  <a:pt x="0" y="0"/>
+                </a:lnTo>
+                <a:cubicBezTo>
+                  <a:pt x="0" y="0"/>
+                  <a:pt x="0" y="0"/>
+                  <a:pt x="0" y="0"/>
+                </a:cubicBezTo>
+                <a:lnTo>
+                  <a:pt x="0" y="0"/>
+                </a:lnTo>
+                <a:cubicBezTo>
+                  <a:pt x="0" y="0"/>
+                  <a:pt x="0" y="0"/>
+                  <a:pt x="0" y="0"/>
+                </a:cubicBezTo>
+                <a:lnTo>
+                  <a:pt x="0" y="0"/>
+                </a:lnTo>
+                <a:cubicBezTo>
+                  <a:pt x="0" y="0"/>
+                  <a:pt x="0" y="0"/>
+                  <a:pt x="0" y="0"/>
+                </a:cubicBezTo>
+                <a:close/>
+              </a:path>
+            </a:pathLst>
+          </a:custGeom>
+          <a:solidFill xmlns:a="http://schemas.openxmlformats.org/drawingml/2006/main">
+            <a:srgbClr val="FFFFFF">
+              <a:alpha val="10980"/>
+            </a:srgbClr>
+          </a:solidFill>
+          <a:ln xmlns:a="http://schemas.openxmlformats.org/drawingml/2006/main" w="9525" cmpd="sng">
+            <a:solidFill>
+              <a:srgbClr val="FFFFFF">
+                <a:alpha val="10980"/>
+              </a:srgbClr>
+            </a:solidFill>
+            <a:prstDash val="solid"/>
+          </a:ln>
+          <a:effectLst xmlns:a="http://schemas.openxmlformats.org/drawingml/2006/main">
+            <a:outerShdw blurRad="142875" algn="ctr" rotWithShape="0">
+              <a:schemeClr val="accent2">
+                <a:alpha val="12157"/>
+              </a:schemeClr>
+            </a:outerShdw>
+          </a:effectLst>
+        </p:spPr>
+        <p:style>
+          <a:lnRef xmlns:a="http://schemas.openxmlformats.org/drawingml/2006/main" idx="2">
+            <a:schemeClr val="accent1">
+              <a:lumMod val="75000"/>
+            </a:schemeClr>
+          </a:lnRef>
+          <a:fillRef xmlns:a="http://schemas.openxmlformats.org/drawingml/2006/main" idx="1">
+            <a:schemeClr val="accent1"/>
+          </a:fillRef>
+          <a:effectRef xmlns:a="http://schemas.openxmlformats.org/drawingml/2006/main" idx="0">
+            <a:srgbClr val="FFFFFF"/>
+          </a:effectRef>
+          <a:fontRef xmlns:a="http://schemas.openxmlformats.org/drawingml/2006/main" idx="minor">
+            <a:schemeClr val="lt1"/>
+          </a:fontRef>
+        </p:style>
+        <p:txBody>
+          <a:bodyPr xmlns:a="http://schemas.openxmlformats.org/drawingml/2006/main" anchor="ctr"/>
+          <a:lstStyle xmlns:a="http://schemas.openxmlformats.org/drawingml/2006/main"/>
+          <a:p xmlns:a="http://schemas.openxmlformats.org/drawingml/2006/main">
+            <a:pPr algn="ctr">
+              <a:buNone/>
+            </a:pPr>
+            <a:endParaRPr/>
+          </a:p>
+        </p:txBody>
+      </p:sp>
+      <p:sp>
+        <p:nvSpPr>
+          <p:cNvPr id="7" name="文本框 6">
+            <a:extLst xmlns:a="http://schemas.openxmlformats.org/drawingml/2006/main">
+              <a:ext uri="{FF2B5EF4-FFF2-40B4-BE49-F238E27FC236}">
+                <a16:creationId xmlns:a16="http://schemas.microsoft.com/office/drawing/2014/main" id="{2ECEDF3D-E695-4B4C-AB85-926629277B45}"/>
+              </a:ext>
+            </a:extLst>
+          </p:cNvPr>
+          <p:cNvSpPr>
+            <a:spLocks xmlns:a="http://schemas.openxmlformats.org/drawingml/2006/main" noGrp="1"/>
+          </p:cNvSpPr>
+          <p:nvPr/>
+        </p:nvSpPr>
+        <p:spPr>
+          <a:xfrm xmlns:a="http://schemas.openxmlformats.org/drawingml/2006/main">
+            <a:off x="771525" y="2745686"/>
+            <a:ext cx="3130525" cy="365760"/>
+          </a:xfrm>
+          <a:prstGeom xmlns:a="http://schemas.openxmlformats.org/drawingml/2006/main" prst="rect">
+            <a:avLst/>
+          </a:prstGeom>
+          <a:noFill xmlns:a="http://schemas.openxmlformats.org/drawingml/2006/main"/>
+        </p:spPr>
+        <p:txBody>
+          <a:bodyPr xmlns:a="http://schemas.openxmlformats.org/drawingml/2006/main" wrap="square" lIns="0" tIns="0" rIns="0" bIns="0" anchor="t">
+            <a:noAutofit/>
+          </a:bodyPr>
+          <a:lstStyle xmlns:a="http://schemas.openxmlformats.org/drawingml/2006/main"/>
+          <a:p xmlns:a="http://schemas.openxmlformats.org/drawingml/2006/main">
+            <a:pPr algn="l">
+              <a:lnSpc>
+                <a:spcPct val="104000"/>
+              </a:lnSpc>
+              <a:buNone/>
+            </a:pPr>
+            <a:r>
+              <a:rPr sz="2100" b="1" spc="42">
+                <a:solidFill>
+                  <a:srgbClr val="F4F4F5"/>
+                </a:solidFill>
+                <a:latin typeface="Microsoft YaHei"/>
+                <a:ea typeface="Microsoft YaHei"/>
+                <a:cs typeface="Microsoft YaHei"/>
+              </a:rPr>
+              <a:t>控制面</a:t>
+            </a:r>
+            <a:endParaRPr sz="2100" b="1" spc="42">
+              <a:solidFill>
+                <a:srgbClr val="F4F4F5"/>
+              </a:solidFill>
+              <a:latin typeface="Microsoft YaHei"/>
+              <a:ea typeface="Microsoft YaHei"/>
+              <a:cs typeface="Microsoft YaHei"/>
+            </a:endParaRPr>
+          </a:p>
+        </p:txBody>
+      </p:sp>
+      <p:sp>
+        <p:nvSpPr>
+          <p:cNvPr id="8" name="任意多边形 7">
+            <a:extLst xmlns:a="http://schemas.openxmlformats.org/drawingml/2006/main">
+              <a:ext uri="{FF2B5EF4-FFF2-40B4-BE49-F238E27FC236}">
+                <a16:creationId xmlns:a16="http://schemas.microsoft.com/office/drawing/2014/main" id="{F274DBE9-1F73-449A-A282-C44F58B061E3}"/>
+              </a:ext>
+            </a:extLst>
+          </p:cNvPr>
+          <p:cNvSpPr>
+            <a:spLocks xmlns:a="http://schemas.openxmlformats.org/drawingml/2006/main" noGrp="1"/>
+          </p:cNvSpPr>
+          <p:nvPr/>
+        </p:nvSpPr>
+        <p:spPr>
+          <a:xfrm xmlns:a="http://schemas.openxmlformats.org/drawingml/2006/main">
+            <a:off x="771525" y="3171190"/>
+            <a:ext cx="419100" cy="419100"/>
+          </a:xfrm>
+          <a:custGeom xmlns:a="http://schemas.openxmlformats.org/drawingml/2006/main">
+            <a:gdLst>
+              <a:gd name="sw" fmla="*/ 1 w 660"/>
+              <a:gd name="sh" fmla="*/ 1 h 660"/>
+              <a:gd name="mins" fmla="min sw sh"/>
+              <a:gd name="dsw" fmla="+- 0 sw mins"/>
+              <a:gd name="dsh" fmla="+- 0 sh mins"/>
+              <a:gd name="p0x0" fmla="*/ 120 w 660"/>
+              <a:gd name="p0y0" fmla="*/ 0 h 660"/>
+              <a:gd name="p0x1" fmla="*/ 540 w 660"/>
+              <a:gd name="p0y1" fmla="*/ 0 h 660"/>
+              <a:gd name="p0x2" fmla="*/ 606 w 660"/>
+              <a:gd name="p0y2" fmla="*/ 0 h 660"/>
+              <a:gd name="p0x3" fmla="*/ 660 w 660"/>
+              <a:gd name="p0y3" fmla="*/ 53 h 660"/>
+              <a:gd name="p0x4" fmla="*/ 660 w 660"/>
+              <a:gd name="p0y4" fmla="*/ 120 h 660"/>
+              <a:gd name="p0x5" fmla="*/ 660 w 660"/>
+              <a:gd name="p0y5" fmla="*/ 540 h 660"/>
+              <a:gd name="p0x6" fmla="*/ 660 w 660"/>
+              <a:gd name="p0y6" fmla="*/ 606 h 660"/>
+              <a:gd name="p0x7" fmla="*/ 606 w 660"/>
+              <a:gd name="p0y7" fmla="*/ 660 h 660"/>
+              <a:gd name="p0x8" fmla="*/ 540 w 660"/>
+              <a:gd name="p0y8" fmla="*/ 660 h 660"/>
+              <a:gd name="p0x9" fmla="*/ 120 w 660"/>
+              <a:gd name="p0y9" fmla="*/ 660 h 660"/>
+              <a:gd name="p0x10" fmla="*/ 53 w 660"/>
+              <a:gd name="p0y10" fmla="*/ 660 h 660"/>
+              <a:gd name="p0x11" fmla="*/ 0 w 660"/>
+              <a:gd name="p0y11" fmla="*/ 606 h 660"/>
+              <a:gd name="p0x12" fmla="*/ 0 w 660"/>
+              <a:gd name="p0y12" fmla="*/ 540 h 660"/>
+              <a:gd name="p0x13" fmla="*/ 0 w 660"/>
+              <a:gd name="p0y13" fmla="*/ 120 h 660"/>
+              <a:gd name="p0x14" fmla="*/ 0 w 660"/>
+              <a:gd name="p0y14" fmla="*/ 53 h 660"/>
+              <a:gd name="p0x15" fmla="*/ 53 w 660"/>
+              <a:gd name="p0y15" fmla="*/ 0 h 660"/>
+              <a:gd name="p0x16" fmla="*/ 120 w 660"/>
+              <a:gd name="p0y16" fmla="*/ 0 h 660"/>
+            </a:gdLst>
+            <a:pathLst>
+              <a:path w="660" h="660">
+                <a:moveTo>
+                  <a:pt x="120" y="0"/>
+                </a:moveTo>
+                <a:lnTo>
+                  <a:pt x="540" y="0"/>
+                </a:lnTo>
+                <a:cubicBezTo>
+                  <a:pt x="606" y="0"/>
+                  <a:pt x="660" y="54"/>
+                  <a:pt x="660" y="120"/>
+                </a:cubicBezTo>
+                <a:lnTo>
+                  <a:pt x="660" y="540"/>
+                </a:lnTo>
+                <a:cubicBezTo>
+                  <a:pt x="660" y="606"/>
+                  <a:pt x="606" y="660"/>
+                  <a:pt x="540" y="660"/>
+                </a:cubicBezTo>
+                <a:lnTo>
+                  <a:pt x="120" y="660"/>
+                </a:lnTo>
+                <a:cubicBezTo>
+                  <a:pt x="54" y="660"/>
+                  <a:pt x="0" y="606"/>
+                  <a:pt x="0" y="540"/>
+                </a:cubicBezTo>
+                <a:lnTo>
+                  <a:pt x="0" y="120"/>
+                </a:lnTo>
+                <a:cubicBezTo>
+                  <a:pt x="0" y="54"/>
+                  <a:pt x="54" y="0"/>
+                  <a:pt x="120" y="0"/>
+                </a:cubicBezTo>
+                <a:close/>
+              </a:path>
+            </a:pathLst>
+          </a:custGeom>
+          <a:solidFill xmlns:a="http://schemas.openxmlformats.org/drawingml/2006/main">
+            <a:schemeClr val="accent1">
+              <a:alpha val="16078"/>
+            </a:schemeClr>
+          </a:solidFill>
+          <a:ln xmlns:a="http://schemas.openxmlformats.org/drawingml/2006/main">
+            <a:noFill/>
+          </a:ln>
+        </p:spPr>
+        <p:style>
+          <a:lnRef xmlns:a="http://schemas.openxmlformats.org/drawingml/2006/main" idx="2">
+            <a:schemeClr val="accent1">
+              <a:lumMod val="75000"/>
+            </a:schemeClr>
+          </a:lnRef>
+          <a:fillRef xmlns:a="http://schemas.openxmlformats.org/drawingml/2006/main" idx="1">
+            <a:schemeClr val="accent1"/>
+          </a:fillRef>
+          <a:effectRef xmlns:a="http://schemas.openxmlformats.org/drawingml/2006/main" idx="0">
+            <a:srgbClr val="FFFFFF"/>
+          </a:effectRef>
+          <a:fontRef xmlns:a="http://schemas.openxmlformats.org/drawingml/2006/main" idx="minor">
+            <a:schemeClr val="lt1"/>
+          </a:fontRef>
+        </p:style>
+        <p:txBody>
+          <a:bodyPr xmlns:a="http://schemas.openxmlformats.org/drawingml/2006/main" wrap="square" anchor="ctr">
+            <a:noAutofit/>
+          </a:bodyPr>
+          <a:lstStyle xmlns:a="http://schemas.openxmlformats.org/drawingml/2006/main"/>
+          <a:p xmlns:a="http://schemas.openxmlformats.org/drawingml/2006/main">
+            <a:pPr algn="ctr">
+              <a:buNone/>
+            </a:pPr>
+            <a:endParaRPr/>
+          </a:p>
+        </p:txBody>
+      </p:sp>
+      <p:pic>
+        <p:nvPicPr>
+          <p:cNvPr id="50" name="图片 8"/>
+          <p:cNvPicPr>
+            <a:picLocks xmlns:a="http://schemas.openxmlformats.org/drawingml/2006/main" noChangeAspect="1"/>
+          </p:cNvPicPr>
+          <p:nvPr/>
+        </p:nvPicPr>
+        <p:blipFill>
+          <a:blip xmlns:r="http://schemas.openxmlformats.org/officeDocument/2006/relationships" xmlns:a="http://schemas.openxmlformats.org/drawingml/2006/main" r:embed="R371111184f8c4206">
+            <a:extLst>
+              <a:ext uri="{96DAC541-7B7A-43D3-8B79-37D633B846F1}">
+                <asvg:svgBlip xmlns:asvg="http://schemas.microsoft.com/office/drawing/2016/SVG/main" r:embed="R56654aef403b4a43"/>
+              </a:ext>
+            </a:extLst>
+          </a:blip>
+          <a:srcRect xmlns:a="http://schemas.openxmlformats.org/drawingml/2006/main" l="-10123" t="-1026" r="-10123" b="-1026"/>
+          <a:stretch xmlns:a="http://schemas.openxmlformats.org/drawingml/2006/main">
+            <a:fillRect l="0" t="0" r="0" b="0"/>
+          </a:stretch>
+        </p:blipFill>
+        <p:spPr>
+          <a:xfrm xmlns:a="http://schemas.openxmlformats.org/drawingml/2006/main">
+            <a:off x="826135" y="3251835"/>
+            <a:ext cx="309245" cy="252730"/>
+          </a:xfrm>
+          <a:prstGeom xmlns:a="http://schemas.openxmlformats.org/drawingml/2006/main" prst="rect">
+            <a:avLst/>
+          </a:prstGeom>
+        </p:spPr>
+      </p:pic>
+      <p:sp>
+        <p:nvSpPr>
+          <p:cNvPr id="10" name="文本框 9">
+            <a:extLst xmlns:a="http://schemas.openxmlformats.org/drawingml/2006/main">
+              <a:ext uri="{FF2B5EF4-FFF2-40B4-BE49-F238E27FC236}">
+                <a16:creationId xmlns:a16="http://schemas.microsoft.com/office/drawing/2014/main" id="{F9C16E28-B44D-418D-9BD4-0155C847896B}"/>
+              </a:ext>
+            </a:extLst>
+          </p:cNvPr>
+          <p:cNvSpPr>
+            <a:spLocks xmlns:a="http://schemas.openxmlformats.org/drawingml/2006/main" noGrp="1"/>
+          </p:cNvSpPr>
+          <p:nvPr/>
+        </p:nvSpPr>
+        <p:spPr>
+          <a:xfrm xmlns:a="http://schemas.openxmlformats.org/drawingml/2006/main">
+            <a:off x="1343025" y="3156214"/>
+            <a:ext cx="2559025" cy="311467"/>
+          </a:xfrm>
+          <a:prstGeom xmlns:a="http://schemas.openxmlformats.org/drawingml/2006/main" prst="rect">
+            <a:avLst/>
+          </a:prstGeom>
+          <a:noFill xmlns:a="http://schemas.openxmlformats.org/drawingml/2006/main"/>
+        </p:spPr>
+        <p:txBody>
+          <a:bodyPr xmlns:a="http://schemas.openxmlformats.org/drawingml/2006/main" wrap="square" lIns="0" tIns="0" rIns="0" bIns="0" anchor="t">
+            <a:noAutofit/>
+          </a:bodyPr>
+          <a:lstStyle xmlns:a="http://schemas.openxmlformats.org/drawingml/2006/main"/>
+          <a:p xmlns:a="http://schemas.openxmlformats.org/drawingml/2006/main">
+            <a:pPr algn="l">
+              <a:lnSpc>
+                <a:spcPct val="104000"/>
+              </a:lnSpc>
+              <a:buNone/>
+            </a:pPr>
+            <a:r>
+              <a:rPr b="1" spc="36">
+                <a:solidFill>
+                  <a:srgbClr val="F4F4F5"/>
+                </a:solidFill>
+                <a:latin typeface="Microsoft YaHei"/>
+                <a:ea typeface="Microsoft YaHei"/>
+                <a:cs typeface="Microsoft YaHei"/>
+              </a:rPr>
+              <a:t>确定性任务 DAG</a:t>
+            </a:r>
+            <a:endParaRPr b="1" spc="36">
+              <a:solidFill>
+                <a:srgbClr val="F4F4F5"/>
+              </a:solidFill>
+              <a:latin typeface="Microsoft YaHei"/>
+              <a:ea typeface="Microsoft YaHei"/>
+              <a:cs typeface="Microsoft YaHei"/>
+            </a:endParaRPr>
+          </a:p>
+        </p:txBody>
+      </p:sp>
+      <p:sp>
+        <p:nvSpPr>
+          <p:cNvPr id="11" name="文本框 10">
+            <a:extLst xmlns:a="http://schemas.openxmlformats.org/drawingml/2006/main">
+              <a:ext uri="{FF2B5EF4-FFF2-40B4-BE49-F238E27FC236}">
+                <a16:creationId xmlns:a16="http://schemas.microsoft.com/office/drawing/2014/main" id="{45FD8119-0552-4EDA-ACEF-9DD2DB6A5FEB}"/>
+              </a:ext>
+            </a:extLst>
+          </p:cNvPr>
+          <p:cNvSpPr>
+            <a:spLocks xmlns:a="http://schemas.openxmlformats.org/drawingml/2006/main" noGrp="1"/>
+          </p:cNvSpPr>
+          <p:nvPr/>
+        </p:nvSpPr>
+        <p:spPr>
+          <a:xfrm xmlns:a="http://schemas.openxmlformats.org/drawingml/2006/main">
+            <a:off x="1343025" y="3480064"/>
+            <a:ext cx="2559025" cy="571471"/>
+          </a:xfrm>
+          <a:prstGeom xmlns:a="http://schemas.openxmlformats.org/drawingml/2006/main" prst="rect">
+            <a:avLst/>
+          </a:prstGeom>
+          <a:noFill xmlns:a="http://schemas.openxmlformats.org/drawingml/2006/main"/>
+        </p:spPr>
+        <p:txBody>
+          <a:bodyPr xmlns:a="http://schemas.openxmlformats.org/drawingml/2006/main" wrap="square" lIns="0" tIns="0" rIns="0" bIns="0" anchor="t">
+            <a:noAutofit/>
+          </a:bodyPr>
+          <a:lstStyle xmlns:a="http://schemas.openxmlformats.org/drawingml/2006/main"/>
+          <a:p xmlns:a="http://schemas.openxmlformats.org/drawingml/2006/main">
+            <a:pPr algn="l">
+              <a:lnSpc>
+                <a:spcPct val="133000"/>
+              </a:lnSpc>
+              <a:buNone/>
+            </a:pPr>
+            <a:r>
+              <a:rPr sz="1350">
+                <a:solidFill>
+                  <a:schemeClr val="tx2">
+                    <a:lumMod val="0"/>
+                    <a:lumOff val="100000"/>
+                    <a:alpha val="72157"/>
+                  </a:schemeClr>
+                </a:solidFill>
+                <a:latin typeface="Microsoft YaHei"/>
+                <a:ea typeface="Microsoft YaHei"/>
+                <a:cs typeface="Microsoft YaHei"/>
+              </a:rPr>
+              <a:t>Planner 校验依赖、预算与
+capability allowlist</a:t>
+            </a:r>
+            <a:endParaRPr sz="1350">
+              <a:solidFill>
+                <a:schemeClr val="tx2">
+                  <a:lumMod val="0"/>
+                  <a:lumOff val="100000"/>
+                  <a:alpha val="72157"/>
+                </a:schemeClr>
+              </a:solidFill>
+              <a:latin typeface="Microsoft YaHei"/>
+              <a:ea typeface="Microsoft YaHei"/>
+              <a:cs typeface="Microsoft YaHei"/>
+            </a:endParaRPr>
+          </a:p>
+        </p:txBody>
+      </p:sp>
+      <p:sp>
+        <p:nvSpPr>
+          <p:cNvPr id="12" name="任意多边形 11">
+            <a:extLst xmlns:a="http://schemas.openxmlformats.org/drawingml/2006/main">
+              <a:ext uri="{FF2B5EF4-FFF2-40B4-BE49-F238E27FC236}">
+                <a16:creationId xmlns:a16="http://schemas.microsoft.com/office/drawing/2014/main" id="{0DA044E1-2487-42CB-B63F-3A2DBE63C4B9}"/>
+              </a:ext>
+            </a:extLst>
+          </p:cNvPr>
+          <p:cNvSpPr>
+            <a:spLocks xmlns:a="http://schemas.openxmlformats.org/drawingml/2006/main" noGrp="1"/>
+          </p:cNvSpPr>
+          <p:nvPr/>
+        </p:nvSpPr>
+        <p:spPr>
+          <a:xfrm xmlns:a="http://schemas.openxmlformats.org/drawingml/2006/main">
+            <a:off x="771525" y="4157980"/>
+            <a:ext cx="419100" cy="419100"/>
+          </a:xfrm>
+          <a:custGeom xmlns:a="http://schemas.openxmlformats.org/drawingml/2006/main">
+            <a:gdLst>
+              <a:gd name="sw" fmla="*/ 1 w 660"/>
+              <a:gd name="sh" fmla="*/ 1 h 660"/>
+              <a:gd name="mins" fmla="min sw sh"/>
+              <a:gd name="dsw" fmla="+- 0 sw mins"/>
+              <a:gd name="dsh" fmla="+- 0 sh mins"/>
+              <a:gd name="p0x0" fmla="*/ 120 w 660"/>
+              <a:gd name="p0y0" fmla="*/ 0 h 660"/>
+              <a:gd name="p0x1" fmla="*/ 540 w 660"/>
+              <a:gd name="p0y1" fmla="*/ 0 h 660"/>
+              <a:gd name="p0x2" fmla="*/ 606 w 660"/>
+              <a:gd name="p0y2" fmla="*/ 0 h 660"/>
+              <a:gd name="p0x3" fmla="*/ 660 w 660"/>
+              <a:gd name="p0y3" fmla="*/ 53 h 660"/>
+              <a:gd name="p0x4" fmla="*/ 660 w 660"/>
+              <a:gd name="p0y4" fmla="*/ 120 h 660"/>
+              <a:gd name="p0x5" fmla="*/ 660 w 660"/>
+              <a:gd name="p0y5" fmla="*/ 540 h 660"/>
+              <a:gd name="p0x6" fmla="*/ 660 w 660"/>
+              <a:gd name="p0y6" fmla="*/ 606 h 660"/>
+              <a:gd name="p0x7" fmla="*/ 606 w 660"/>
+              <a:gd name="p0y7" fmla="*/ 660 h 660"/>
+              <a:gd name="p0x8" fmla="*/ 540 w 660"/>
+              <a:gd name="p0y8" fmla="*/ 660 h 660"/>
+              <a:gd name="p0x9" fmla="*/ 120 w 660"/>
+              <a:gd name="p0y9" fmla="*/ 660 h 660"/>
+              <a:gd name="p0x10" fmla="*/ 53 w 660"/>
+              <a:gd name="p0y10" fmla="*/ 660 h 660"/>
+              <a:gd name="p0x11" fmla="*/ 0 w 660"/>
+              <a:gd name="p0y11" fmla="*/ 606 h 660"/>
+              <a:gd name="p0x12" fmla="*/ 0 w 660"/>
+              <a:gd name="p0y12" fmla="*/ 540 h 660"/>
+              <a:gd name="p0x13" fmla="*/ 0 w 660"/>
+              <a:gd name="p0y13" fmla="*/ 120 h 660"/>
+              <a:gd name="p0x14" fmla="*/ 0 w 660"/>
+              <a:gd name="p0y14" fmla="*/ 53 h 660"/>
+              <a:gd name="p0x15" fmla="*/ 53 w 660"/>
+              <a:gd name="p0y15" fmla="*/ 0 h 660"/>
+              <a:gd name="p0x16" fmla="*/ 120 w 660"/>
+              <a:gd name="p0y16" fmla="*/ 0 h 660"/>
+            </a:gdLst>
+            <a:pathLst>
+              <a:path w="660" h="660">
+                <a:moveTo>
+                  <a:pt x="120" y="0"/>
+                </a:moveTo>
+                <a:lnTo>
+                  <a:pt x="540" y="0"/>
+                </a:lnTo>
+                <a:cubicBezTo>
+                  <a:pt x="606" y="0"/>
+                  <a:pt x="660" y="54"/>
+                  <a:pt x="660" y="120"/>
+                </a:cubicBezTo>
+                <a:lnTo>
+                  <a:pt x="660" y="540"/>
+                </a:lnTo>
+                <a:cubicBezTo>
+                  <a:pt x="660" y="606"/>
+                  <a:pt x="606" y="660"/>
+                  <a:pt x="540" y="660"/>
+                </a:cubicBezTo>
+                <a:lnTo>
+                  <a:pt x="120" y="660"/>
+                </a:lnTo>
+                <a:cubicBezTo>
+                  <a:pt x="54" y="660"/>
+                  <a:pt x="0" y="606"/>
+                  <a:pt x="0" y="540"/>
+                </a:cubicBezTo>
+                <a:lnTo>
+                  <a:pt x="0" y="120"/>
+                </a:lnTo>
+                <a:cubicBezTo>
+                  <a:pt x="0" y="54"/>
+                  <a:pt x="54" y="0"/>
+                  <a:pt x="120" y="0"/>
+                </a:cubicBezTo>
+                <a:close/>
+              </a:path>
+            </a:pathLst>
+          </a:custGeom>
+          <a:solidFill xmlns:a="http://schemas.openxmlformats.org/drawingml/2006/main">
+            <a:schemeClr val="accent1">
+              <a:alpha val="16078"/>
+            </a:schemeClr>
+          </a:solidFill>
+          <a:ln xmlns:a="http://schemas.openxmlformats.org/drawingml/2006/main">
+            <a:noFill/>
+          </a:ln>
+        </p:spPr>
+        <p:style>
+          <a:lnRef xmlns:a="http://schemas.openxmlformats.org/drawingml/2006/main" idx="2">
+            <a:schemeClr val="accent1">
+              <a:lumMod val="75000"/>
+            </a:schemeClr>
+          </a:lnRef>
+          <a:fillRef xmlns:a="http://schemas.openxmlformats.org/drawingml/2006/main" idx="1">
+            <a:schemeClr val="accent1"/>
+          </a:fillRef>
+          <a:effectRef xmlns:a="http://schemas.openxmlformats.org/drawingml/2006/main" idx="0">
+            <a:srgbClr val="FFFFFF"/>
+          </a:effectRef>
+          <a:fontRef xmlns:a="http://schemas.openxmlformats.org/drawingml/2006/main" idx="minor">
+            <a:schemeClr val="lt1"/>
+          </a:fontRef>
+        </p:style>
+        <p:txBody>
+          <a:bodyPr xmlns:a="http://schemas.openxmlformats.org/drawingml/2006/main" wrap="square" anchor="ctr">
+            <a:noAutofit/>
+          </a:bodyPr>
+          <a:lstStyle xmlns:a="http://schemas.openxmlformats.org/drawingml/2006/main"/>
+          <a:p xmlns:a="http://schemas.openxmlformats.org/drawingml/2006/main">
+            <a:pPr algn="ctr">
+              <a:buNone/>
+            </a:pPr>
+            <a:endParaRPr/>
+          </a:p>
+        </p:txBody>
+      </p:sp>
+      <p:pic>
+        <p:nvPicPr>
+          <p:cNvPr id="54" name="图片 12"/>
+          <p:cNvPicPr>
+            <a:picLocks xmlns:a="http://schemas.openxmlformats.org/drawingml/2006/main" noChangeAspect="1"/>
+          </p:cNvPicPr>
+          <p:nvPr/>
+        </p:nvPicPr>
+        <p:blipFill>
+          <a:blip xmlns:r="http://schemas.openxmlformats.org/officeDocument/2006/relationships" xmlns:a="http://schemas.openxmlformats.org/drawingml/2006/main" r:embed="Rd459f11215514c7b">
+            <a:extLst>
+              <a:ext uri="{96DAC541-7B7A-43D3-8B79-37D633B846F1}">
+                <asvg:svgBlip xmlns:asvg="http://schemas.microsoft.com/office/drawing/2016/SVG/main" r:embed="Rcca6f9160c5046ff"/>
+              </a:ext>
+            </a:extLst>
+          </a:blip>
+          <a:srcRect xmlns:a="http://schemas.openxmlformats.org/drawingml/2006/main" l="-6522" t="-3067" r="-6522" b="-3067"/>
+          <a:stretch xmlns:a="http://schemas.openxmlformats.org/drawingml/2006/main">
+            <a:fillRect l="0" t="0" r="0" b="0"/>
+          </a:stretch>
+        </p:blipFill>
+        <p:spPr>
+          <a:xfrm xmlns:a="http://schemas.openxmlformats.org/drawingml/2006/main">
+            <a:off x="857250" y="4238625"/>
+            <a:ext cx="247650" cy="252730"/>
+          </a:xfrm>
+          <a:prstGeom xmlns:a="http://schemas.openxmlformats.org/drawingml/2006/main" prst="rect">
+            <a:avLst/>
+          </a:prstGeom>
+        </p:spPr>
+      </p:pic>
+      <p:sp>
+        <p:nvSpPr>
+          <p:cNvPr id="14" name="文本框 13">
+            <a:extLst xmlns:a="http://schemas.openxmlformats.org/drawingml/2006/main">
+              <a:ext uri="{FF2B5EF4-FFF2-40B4-BE49-F238E27FC236}">
+                <a16:creationId xmlns:a16="http://schemas.microsoft.com/office/drawing/2014/main" id="{9D6421FD-B57F-40E9-9C81-B938FCF9A94C}"/>
+              </a:ext>
+            </a:extLst>
+          </p:cNvPr>
+          <p:cNvSpPr>
+            <a:spLocks xmlns:a="http://schemas.openxmlformats.org/drawingml/2006/main" noGrp="1"/>
+          </p:cNvSpPr>
+          <p:nvPr/>
+        </p:nvSpPr>
+        <p:spPr>
+          <a:xfrm xmlns:a="http://schemas.openxmlformats.org/drawingml/2006/main">
+            <a:off x="1343025" y="4142946"/>
+            <a:ext cx="2559025" cy="311467"/>
+          </a:xfrm>
+          <a:prstGeom xmlns:a="http://schemas.openxmlformats.org/drawingml/2006/main" prst="rect">
+            <a:avLst/>
+          </a:prstGeom>
+          <a:noFill xmlns:a="http://schemas.openxmlformats.org/drawingml/2006/main"/>
+        </p:spPr>
+        <p:txBody>
+          <a:bodyPr xmlns:a="http://schemas.openxmlformats.org/drawingml/2006/main" wrap="square" lIns="0" tIns="0" rIns="0" bIns="0" anchor="t">
+            <a:noAutofit/>
+          </a:bodyPr>
+          <a:lstStyle xmlns:a="http://schemas.openxmlformats.org/drawingml/2006/main"/>
+          <a:p xmlns:a="http://schemas.openxmlformats.org/drawingml/2006/main">
+            <a:pPr algn="l">
+              <a:lnSpc>
+                <a:spcPct val="104000"/>
+              </a:lnSpc>
+              <a:buNone/>
+            </a:pPr>
+            <a:r>
+              <a:rPr b="1" spc="36">
+                <a:solidFill>
+                  <a:srgbClr val="F4F4F5"/>
+                </a:solidFill>
+                <a:latin typeface="Microsoft YaHei"/>
+                <a:ea typeface="Microsoft YaHei"/>
+                <a:cs typeface="Microsoft YaHei"/>
+              </a:rPr>
+              <a:t>HITL 与副作用</a:t>
+            </a:r>
+            <a:endParaRPr b="1" spc="36">
+              <a:solidFill>
+                <a:srgbClr val="F4F4F5"/>
+              </a:solidFill>
+              <a:latin typeface="Microsoft YaHei"/>
+              <a:ea typeface="Microsoft YaHei"/>
+              <a:cs typeface="Microsoft YaHei"/>
+            </a:endParaRPr>
+          </a:p>
+        </p:txBody>
+      </p:sp>
+      <p:sp>
+        <p:nvSpPr>
+          <p:cNvPr id="15" name="文本框 14">
+            <a:extLst xmlns:a="http://schemas.openxmlformats.org/drawingml/2006/main">
+              <a:ext uri="{FF2B5EF4-FFF2-40B4-BE49-F238E27FC236}">
+                <a16:creationId xmlns:a16="http://schemas.microsoft.com/office/drawing/2014/main" id="{5C37DA5A-A392-4641-A2D4-77E912ADE5D0}"/>
+              </a:ext>
+            </a:extLst>
+          </p:cNvPr>
+          <p:cNvSpPr>
+            <a:spLocks xmlns:a="http://schemas.openxmlformats.org/drawingml/2006/main" noGrp="1"/>
+          </p:cNvSpPr>
+          <p:nvPr/>
+        </p:nvSpPr>
+        <p:spPr>
+          <a:xfrm xmlns:a="http://schemas.openxmlformats.org/drawingml/2006/main">
+            <a:off x="1343025" y="4466796"/>
+            <a:ext cx="2559025" cy="571471"/>
+          </a:xfrm>
+          <a:prstGeom xmlns:a="http://schemas.openxmlformats.org/drawingml/2006/main" prst="rect">
+            <a:avLst/>
+          </a:prstGeom>
+          <a:noFill xmlns:a="http://schemas.openxmlformats.org/drawingml/2006/main"/>
+        </p:spPr>
+        <p:txBody>
+          <a:bodyPr xmlns:a="http://schemas.openxmlformats.org/drawingml/2006/main" wrap="square" lIns="0" tIns="0" rIns="0" bIns="0" anchor="t">
+            <a:noAutofit/>
+          </a:bodyPr>
+          <a:lstStyle xmlns:a="http://schemas.openxmlformats.org/drawingml/2006/main"/>
+          <a:p xmlns:a="http://schemas.openxmlformats.org/drawingml/2006/main">
+            <a:pPr algn="l">
+              <a:lnSpc>
+                <a:spcPct val="133000"/>
+              </a:lnSpc>
+              <a:buNone/>
+            </a:pPr>
+            <a:r>
+              <a:rPr sz="1350">
+                <a:solidFill>
+                  <a:schemeClr val="tx2">
+                    <a:lumMod val="0"/>
+                    <a:lumOff val="100000"/>
+                    <a:alpha val="72157"/>
+                  </a:schemeClr>
+                </a:solidFill>
+                <a:latin typeface="Microsoft YaHei"/>
+                <a:ea typeface="Microsoft YaHei"/>
+                <a:cs typeface="Microsoft YaHei"/>
+              </a:rPr>
+              <a:t>handoff、replan、Memory commit
+都必须经过 Supervisor</a:t>
+            </a:r>
+            <a:endParaRPr sz="1350">
+              <a:solidFill>
+                <a:schemeClr val="tx2">
+                  <a:lumMod val="0"/>
+                  <a:lumOff val="100000"/>
+                  <a:alpha val="72157"/>
+                </a:schemeClr>
+              </a:solidFill>
+              <a:latin typeface="Microsoft YaHei"/>
+              <a:ea typeface="Microsoft YaHei"/>
+              <a:cs typeface="Microsoft YaHei"/>
+            </a:endParaRPr>
+          </a:p>
+        </p:txBody>
+      </p:sp>
+      <p:sp>
+        <p:nvSpPr>
+          <p:cNvPr id="17" name="任意多边形 16">
+            <a:extLst xmlns:a="http://schemas.openxmlformats.org/drawingml/2006/main">
+              <a:ext uri="{FF2B5EF4-FFF2-40B4-BE49-F238E27FC236}">
+                <a16:creationId xmlns:a16="http://schemas.microsoft.com/office/drawing/2014/main" id="{76D81A27-0684-45E7-BB2D-651BE93071FC}"/>
+              </a:ext>
+            </a:extLst>
+          </p:cNvPr>
+          <p:cNvSpPr>
+            <a:spLocks xmlns:a="http://schemas.openxmlformats.org/drawingml/2006/main" noGrp="1"/>
+          </p:cNvSpPr>
+          <p:nvPr/>
+        </p:nvSpPr>
+        <p:spPr>
+          <a:xfrm xmlns:a="http://schemas.openxmlformats.org/drawingml/2006/main">
+            <a:off x="4335145" y="2308860"/>
+            <a:ext cx="3521075" cy="4163060"/>
+          </a:xfrm>
+          <a:custGeom xmlns:a="http://schemas.openxmlformats.org/drawingml/2006/main">
+            <a:gdLst>
+              <a:gd name="sw" fmla="*/ 1 w 5544"/>
+              <a:gd name="sh" fmla="*/ 1 h 6556"/>
+              <a:gd name="mins" fmla="min sw sh"/>
+              <a:gd name="dsw" fmla="+- 0 sw mins"/>
+              <a:gd name="dsh" fmla="+- 0 sh mins"/>
+              <a:gd name="p0x0" fmla="*/ 120 w 5544"/>
+              <a:gd name="p0y0" fmla="*/ 0 h 6556"/>
+              <a:gd name="p0x1" fmla="*/ 5424 w 5544"/>
+              <a:gd name="p0y1" fmla="*/ 0 h 6556"/>
+              <a:gd name="p0x2" fmla="*/ 5491 w 5544"/>
+              <a:gd name="p0y2" fmla="*/ 0 h 6556"/>
+              <a:gd name="p0x3" fmla="*/ 5544 w 5544"/>
+              <a:gd name="p0y3" fmla="*/ 53 h 6556"/>
+              <a:gd name="p0x4" fmla="*/ 5544 w 5544"/>
+              <a:gd name="p0y4" fmla="*/ 120 h 6556"/>
+              <a:gd name="p0x5" fmla="*/ 5544 w 5544"/>
+              <a:gd name="p0y5" fmla="*/ 6436 h 6556"/>
+              <a:gd name="p0x6" fmla="*/ 5544 w 5544"/>
+              <a:gd name="p0y6" fmla="*/ 6502 h 6556"/>
+              <a:gd name="p0x7" fmla="*/ 5491 w 5544"/>
+              <a:gd name="p0y7" fmla="*/ 6556 h 6556"/>
+              <a:gd name="p0x8" fmla="*/ 5424 w 5544"/>
+              <a:gd name="p0y8" fmla="*/ 6556 h 6556"/>
+              <a:gd name="p0x9" fmla="*/ 120 w 5544"/>
+              <a:gd name="p0y9" fmla="*/ 6556 h 6556"/>
+              <a:gd name="p0x10" fmla="*/ 53 w 5544"/>
+              <a:gd name="p0y10" fmla="*/ 6556 h 6556"/>
+              <a:gd name="p0x11" fmla="*/ 0 w 5544"/>
+              <a:gd name="p0y11" fmla="*/ 6502 h 6556"/>
+              <a:gd name="p0x12" fmla="*/ 0 w 5544"/>
+              <a:gd name="p0y12" fmla="*/ 6436 h 6556"/>
+              <a:gd name="p0x13" fmla="*/ 0 w 5544"/>
+              <a:gd name="p0y13" fmla="*/ 120 h 6556"/>
+              <a:gd name="p0x14" fmla="*/ 0 w 5544"/>
+              <a:gd name="p0y14" fmla="*/ 53 h 6556"/>
+              <a:gd name="p0x15" fmla="*/ 53 w 5544"/>
+              <a:gd name="p0y15" fmla="*/ 0 h 6556"/>
+              <a:gd name="p0x16" fmla="*/ 120 w 5544"/>
+              <a:gd name="p0y16" fmla="*/ 0 h 6556"/>
+            </a:gdLst>
+            <a:pathLst>
+              <a:path w="0" h="0">
+                <a:moveTo>
+                  <a:pt x="0" y="0"/>
+                </a:moveTo>
+                <a:lnTo>
+                  <a:pt x="0" y="0"/>
+                </a:lnTo>
+                <a:cubicBezTo>
+                  <a:pt x="0" y="0"/>
+                  <a:pt x="0" y="0"/>
+                  <a:pt x="0" y="0"/>
+                </a:cubicBezTo>
+                <a:lnTo>
+                  <a:pt x="0" y="0"/>
+                </a:lnTo>
+                <a:cubicBezTo>
+                  <a:pt x="0" y="0"/>
+                  <a:pt x="0" y="0"/>
+                  <a:pt x="0" y="0"/>
+                </a:cubicBezTo>
+                <a:lnTo>
+                  <a:pt x="0" y="0"/>
+                </a:lnTo>
+                <a:cubicBezTo>
+                  <a:pt x="0" y="0"/>
+                  <a:pt x="0" y="0"/>
+                  <a:pt x="0" y="0"/>
+                </a:cubicBezTo>
+                <a:lnTo>
+                  <a:pt x="0" y="0"/>
+                </a:lnTo>
+                <a:cubicBezTo>
+                  <a:pt x="0" y="0"/>
+                  <a:pt x="0" y="0"/>
+                  <a:pt x="0" y="0"/>
+                </a:cubicBezTo>
+                <a:close/>
+              </a:path>
+            </a:pathLst>
+          </a:custGeom>
+          <a:solidFill xmlns:a="http://schemas.openxmlformats.org/drawingml/2006/main">
+            <a:srgbClr val="FFFFFF">
+              <a:alpha val="10980"/>
+            </a:srgbClr>
+          </a:solidFill>
+          <a:ln xmlns:a="http://schemas.openxmlformats.org/drawingml/2006/main" w="9525" cmpd="sng">
+            <a:solidFill>
+              <a:srgbClr val="FFFFFF">
+                <a:alpha val="10980"/>
+              </a:srgbClr>
+            </a:solidFill>
+            <a:prstDash val="solid"/>
+          </a:ln>
+          <a:effectLst xmlns:a="http://schemas.openxmlformats.org/drawingml/2006/main">
+            <a:outerShdw blurRad="142875" algn="ctr" rotWithShape="0">
+              <a:schemeClr val="accent2">
+                <a:alpha val="12157"/>
+              </a:schemeClr>
+            </a:outerShdw>
+          </a:effectLst>
+        </p:spPr>
+        <p:style>
+          <a:lnRef xmlns:a="http://schemas.openxmlformats.org/drawingml/2006/main" idx="2">
+            <a:schemeClr val="accent1">
+              <a:lumMod val="75000"/>
+            </a:schemeClr>
+          </a:lnRef>
+          <a:fillRef xmlns:a="http://schemas.openxmlformats.org/drawingml/2006/main" idx="1">
+            <a:schemeClr val="accent1"/>
+          </a:fillRef>
+          <a:effectRef xmlns:a="http://schemas.openxmlformats.org/drawingml/2006/main" idx="0">
+            <a:srgbClr val="FFFFFF"/>
+          </a:effectRef>
+          <a:fontRef xmlns:a="http://schemas.openxmlformats.org/drawingml/2006/main" idx="minor">
+            <a:schemeClr val="lt1"/>
+          </a:fontRef>
+        </p:style>
+        <p:txBody>
+          <a:bodyPr xmlns:a="http://schemas.openxmlformats.org/drawingml/2006/main" anchor="ctr"/>
+          <a:lstStyle xmlns:a="http://schemas.openxmlformats.org/drawingml/2006/main"/>
+          <a:p xmlns:a="http://schemas.openxmlformats.org/drawingml/2006/main">
+            <a:pPr algn="ctr">
+              <a:buNone/>
+            </a:pPr>
+            <a:endParaRPr/>
+          </a:p>
+        </p:txBody>
+      </p:sp>
+      <p:sp>
+        <p:nvSpPr>
+          <p:cNvPr id="18" name="文本框 17">
+            <a:extLst xmlns:a="http://schemas.openxmlformats.org/drawingml/2006/main">
+              <a:ext uri="{FF2B5EF4-FFF2-40B4-BE49-F238E27FC236}">
+                <a16:creationId xmlns:a16="http://schemas.microsoft.com/office/drawing/2014/main" id="{6510DEB2-6CAA-4442-A4DE-39FC30488262}"/>
+              </a:ext>
+            </a:extLst>
+          </p:cNvPr>
+          <p:cNvSpPr>
+            <a:spLocks xmlns:a="http://schemas.openxmlformats.org/drawingml/2006/main" noGrp="1"/>
+          </p:cNvSpPr>
+          <p:nvPr/>
+        </p:nvSpPr>
+        <p:spPr>
+          <a:xfrm xmlns:a="http://schemas.openxmlformats.org/drawingml/2006/main">
+            <a:off x="4530699" y="2745686"/>
+            <a:ext cx="3130525" cy="365760"/>
+          </a:xfrm>
+          <a:prstGeom xmlns:a="http://schemas.openxmlformats.org/drawingml/2006/main" prst="rect">
+            <a:avLst/>
+          </a:prstGeom>
+          <a:noFill xmlns:a="http://schemas.openxmlformats.org/drawingml/2006/main"/>
+        </p:spPr>
+        <p:txBody>
+          <a:bodyPr xmlns:a="http://schemas.openxmlformats.org/drawingml/2006/main" wrap="square" lIns="0" tIns="0" rIns="0" bIns="0" anchor="t">
+            <a:noAutofit/>
+          </a:bodyPr>
+          <a:lstStyle xmlns:a="http://schemas.openxmlformats.org/drawingml/2006/main"/>
+          <a:p xmlns:a="http://schemas.openxmlformats.org/drawingml/2006/main">
+            <a:pPr algn="l">
+              <a:lnSpc>
+                <a:spcPct val="104000"/>
+              </a:lnSpc>
+              <a:buNone/>
+            </a:pPr>
+            <a:r>
+              <a:rPr sz="2100" b="1" spc="42">
+                <a:solidFill>
+                  <a:srgbClr val="F4F4F5"/>
+                </a:solidFill>
+                <a:latin typeface="Microsoft YaHei"/>
+                <a:ea typeface="Microsoft YaHei"/>
+                <a:cs typeface="Microsoft YaHei"/>
+              </a:rPr>
+              <a:t>任务协议</a:t>
+            </a:r>
+            <a:endParaRPr sz="2100" b="1" spc="42">
+              <a:solidFill>
+                <a:srgbClr val="F4F4F5"/>
+              </a:solidFill>
+              <a:latin typeface="Microsoft YaHei"/>
+              <a:ea typeface="Microsoft YaHei"/>
+              <a:cs typeface="Microsoft YaHei"/>
+            </a:endParaRPr>
+          </a:p>
+        </p:txBody>
+      </p:sp>
+      <p:sp>
+        <p:nvSpPr>
+          <p:cNvPr id="19" name="任意多边形 18">
+            <a:extLst xmlns:a="http://schemas.openxmlformats.org/drawingml/2006/main">
+              <a:ext uri="{FF2B5EF4-FFF2-40B4-BE49-F238E27FC236}">
+                <a16:creationId xmlns:a16="http://schemas.microsoft.com/office/drawing/2014/main" id="{3F9FA3E4-96F0-4CD4-BEC0-8012795F5AC5}"/>
+              </a:ext>
+            </a:extLst>
+          </p:cNvPr>
+          <p:cNvSpPr>
+            <a:spLocks xmlns:a="http://schemas.openxmlformats.org/drawingml/2006/main" noGrp="1"/>
+          </p:cNvSpPr>
+          <p:nvPr/>
+        </p:nvSpPr>
+        <p:spPr>
+          <a:xfrm xmlns:a="http://schemas.openxmlformats.org/drawingml/2006/main">
+            <a:off x="4530090" y="3171190"/>
+            <a:ext cx="419100" cy="419100"/>
+          </a:xfrm>
+          <a:custGeom xmlns:a="http://schemas.openxmlformats.org/drawingml/2006/main">
+            <a:gdLst>
+              <a:gd name="sw" fmla="*/ 1 w 660"/>
+              <a:gd name="sh" fmla="*/ 1 h 660"/>
+              <a:gd name="mins" fmla="min sw sh"/>
+              <a:gd name="dsw" fmla="+- 0 sw mins"/>
+              <a:gd name="dsh" fmla="+- 0 sh mins"/>
+              <a:gd name="p0x0" fmla="*/ 120 w 660"/>
+              <a:gd name="p0y0" fmla="*/ 0 h 660"/>
+              <a:gd name="p0x1" fmla="*/ 540 w 660"/>
+              <a:gd name="p0y1" fmla="*/ 0 h 660"/>
+              <a:gd name="p0x2" fmla="*/ 606 w 660"/>
+              <a:gd name="p0y2" fmla="*/ 0 h 660"/>
+              <a:gd name="p0x3" fmla="*/ 660 w 660"/>
+              <a:gd name="p0y3" fmla="*/ 53 h 660"/>
+              <a:gd name="p0x4" fmla="*/ 660 w 660"/>
+              <a:gd name="p0y4" fmla="*/ 120 h 660"/>
+              <a:gd name="p0x5" fmla="*/ 660 w 660"/>
+              <a:gd name="p0y5" fmla="*/ 540 h 660"/>
+              <a:gd name="p0x6" fmla="*/ 660 w 660"/>
+              <a:gd name="p0y6" fmla="*/ 606 h 660"/>
+              <a:gd name="p0x7" fmla="*/ 606 w 660"/>
+              <a:gd name="p0y7" fmla="*/ 660 h 660"/>
+              <a:gd name="p0x8" fmla="*/ 540 w 660"/>
+              <a:gd name="p0y8" fmla="*/ 660 h 660"/>
+              <a:gd name="p0x9" fmla="*/ 120 w 660"/>
+              <a:gd name="p0y9" fmla="*/ 660 h 660"/>
+              <a:gd name="p0x10" fmla="*/ 53 w 660"/>
+              <a:gd name="p0y10" fmla="*/ 660 h 660"/>
+              <a:gd name="p0x11" fmla="*/ 0 w 660"/>
+              <a:gd name="p0y11" fmla="*/ 606 h 660"/>
+              <a:gd name="p0x12" fmla="*/ 0 w 660"/>
+              <a:gd name="p0y12" fmla="*/ 540 h 660"/>
+              <a:gd name="p0x13" fmla="*/ 0 w 660"/>
+              <a:gd name="p0y13" fmla="*/ 120 h 660"/>
+              <a:gd name="p0x14" fmla="*/ 0 w 660"/>
+              <a:gd name="p0y14" fmla="*/ 53 h 660"/>
+              <a:gd name="p0x15" fmla="*/ 53 w 660"/>
+              <a:gd name="p0y15" fmla="*/ 0 h 660"/>
+              <a:gd name="p0x16" fmla="*/ 120 w 660"/>
+              <a:gd name="p0y16" fmla="*/ 0 h 660"/>
+            </a:gdLst>
+            <a:pathLst>
+              <a:path w="660" h="660">
+                <a:moveTo>
+                  <a:pt x="120" y="0"/>
+                </a:moveTo>
+                <a:lnTo>
+                  <a:pt x="540" y="0"/>
+                </a:lnTo>
+                <a:cubicBezTo>
+                  <a:pt x="606" y="0"/>
+                  <a:pt x="660" y="54"/>
+                  <a:pt x="660" y="120"/>
+                </a:cubicBezTo>
+                <a:lnTo>
+                  <a:pt x="660" y="540"/>
+                </a:lnTo>
+                <a:cubicBezTo>
+                  <a:pt x="660" y="606"/>
+                  <a:pt x="606" y="660"/>
+                  <a:pt x="540" y="660"/>
+                </a:cubicBezTo>
+                <a:lnTo>
+                  <a:pt x="120" y="660"/>
+                </a:lnTo>
+                <a:cubicBezTo>
+                  <a:pt x="54" y="660"/>
+                  <a:pt x="0" y="606"/>
+                  <a:pt x="0" y="540"/>
+                </a:cubicBezTo>
+                <a:lnTo>
+                  <a:pt x="0" y="120"/>
+                </a:lnTo>
+                <a:cubicBezTo>
+                  <a:pt x="0" y="54"/>
+                  <a:pt x="54" y="0"/>
+                  <a:pt x="120" y="0"/>
+                </a:cubicBezTo>
+                <a:close/>
+              </a:path>
+            </a:pathLst>
+          </a:custGeom>
+          <a:solidFill xmlns:a="http://schemas.openxmlformats.org/drawingml/2006/main">
+            <a:schemeClr val="accent1">
+              <a:alpha val="16078"/>
+            </a:schemeClr>
+          </a:solidFill>
+          <a:ln xmlns:a="http://schemas.openxmlformats.org/drawingml/2006/main">
+            <a:noFill/>
+          </a:ln>
+        </p:spPr>
+        <p:style>
+          <a:lnRef xmlns:a="http://schemas.openxmlformats.org/drawingml/2006/main" idx="2">
+            <a:schemeClr val="accent1">
+              <a:lumMod val="75000"/>
+            </a:schemeClr>
+          </a:lnRef>
+          <a:fillRef xmlns:a="http://schemas.openxmlformats.org/drawingml/2006/main" idx="1">
+            <a:schemeClr val="accent1"/>
+          </a:fillRef>
+          <a:effectRef xmlns:a="http://schemas.openxmlformats.org/drawingml/2006/main" idx="0">
+            <a:srgbClr val="FFFFFF"/>
+          </a:effectRef>
+          <a:fontRef xmlns:a="http://schemas.openxmlformats.org/drawingml/2006/main" idx="minor">
+            <a:schemeClr val="lt1"/>
+          </a:fontRef>
+        </p:style>
+        <p:txBody>
+          <a:bodyPr xmlns:a="http://schemas.openxmlformats.org/drawingml/2006/main" wrap="square" anchor="ctr">
+            <a:noAutofit/>
+          </a:bodyPr>
+          <a:lstStyle xmlns:a="http://schemas.openxmlformats.org/drawingml/2006/main"/>
+          <a:p xmlns:a="http://schemas.openxmlformats.org/drawingml/2006/main">
+            <a:pPr algn="ctr">
+              <a:buNone/>
+            </a:pPr>
+            <a:endParaRPr/>
+          </a:p>
+        </p:txBody>
+      </p:sp>
+      <p:pic>
+        <p:nvPicPr>
+          <p:cNvPr id="60" name="图片 19"/>
+          <p:cNvPicPr>
+            <a:picLocks xmlns:a="http://schemas.openxmlformats.org/drawingml/2006/main" noChangeAspect="1"/>
+          </p:cNvPicPr>
+          <p:nvPr/>
+        </p:nvPicPr>
+        <p:blipFill>
+          <a:blip xmlns:r="http://schemas.openxmlformats.org/officeDocument/2006/relationships" xmlns:a="http://schemas.openxmlformats.org/drawingml/2006/main" r:embed="Rba95a4536b10405e">
+            <a:extLst>
+              <a:ext uri="{96DAC541-7B7A-43D3-8B79-37D633B846F1}">
+                <asvg:svgBlip xmlns:asvg="http://schemas.microsoft.com/office/drawing/2016/SVG/main" r:embed="R0b8ec3f52e97410f"/>
+              </a:ext>
+            </a:extLst>
+          </a:blip>
+          <a:srcRect xmlns:a="http://schemas.openxmlformats.org/drawingml/2006/main" l="-2000" t="-10303" r="-2000" b="-10303"/>
+          <a:stretch xmlns:a="http://schemas.openxmlformats.org/drawingml/2006/main">
+            <a:fillRect l="0" t="0" r="0" b="0"/>
+          </a:stretch>
+        </p:blipFill>
+        <p:spPr>
+          <a:xfrm xmlns:a="http://schemas.openxmlformats.org/drawingml/2006/main">
+            <a:off x="4615815" y="3251835"/>
+            <a:ext cx="247650" cy="252730"/>
+          </a:xfrm>
+          <a:prstGeom xmlns:a="http://schemas.openxmlformats.org/drawingml/2006/main" prst="rect">
+            <a:avLst/>
+          </a:prstGeom>
+        </p:spPr>
+      </p:pic>
+      <p:sp>
+        <p:nvSpPr>
+          <p:cNvPr id="21" name="文本框 20">
+            <a:extLst xmlns:a="http://schemas.openxmlformats.org/drawingml/2006/main">
+              <a:ext uri="{FF2B5EF4-FFF2-40B4-BE49-F238E27FC236}">
+                <a16:creationId xmlns:a16="http://schemas.microsoft.com/office/drawing/2014/main" id="{56C1A88A-87AF-4DC3-A844-50CF535D0B7F}"/>
+              </a:ext>
+            </a:extLst>
+          </p:cNvPr>
+          <p:cNvSpPr>
+            <a:spLocks xmlns:a="http://schemas.openxmlformats.org/drawingml/2006/main" noGrp="1"/>
+          </p:cNvSpPr>
+          <p:nvPr/>
+        </p:nvSpPr>
+        <p:spPr>
+          <a:xfrm xmlns:a="http://schemas.openxmlformats.org/drawingml/2006/main">
+            <a:off x="5102199" y="3156214"/>
+            <a:ext cx="2559025" cy="311467"/>
+          </a:xfrm>
+          <a:prstGeom xmlns:a="http://schemas.openxmlformats.org/drawingml/2006/main" prst="rect">
+            <a:avLst/>
+          </a:prstGeom>
+          <a:noFill xmlns:a="http://schemas.openxmlformats.org/drawingml/2006/main"/>
+        </p:spPr>
+        <p:txBody>
+          <a:bodyPr xmlns:a="http://schemas.openxmlformats.org/drawingml/2006/main" wrap="square" lIns="0" tIns="0" rIns="0" bIns="0" anchor="t">
+            <a:noAutofit/>
+          </a:bodyPr>
+          <a:lstStyle xmlns:a="http://schemas.openxmlformats.org/drawingml/2006/main"/>
+          <a:p xmlns:a="http://schemas.openxmlformats.org/drawingml/2006/main">
+            <a:pPr algn="l">
+              <a:lnSpc>
+                <a:spcPct val="104000"/>
+              </a:lnSpc>
+              <a:buNone/>
+            </a:pPr>
+            <a:r>
+              <a:rPr b="1" spc="36">
+                <a:solidFill>
+                  <a:srgbClr val="F4F4F5"/>
+                </a:solidFill>
+                <a:latin typeface="Microsoft YaHei"/>
+                <a:ea typeface="Microsoft YaHei"/>
+                <a:cs typeface="Microsoft YaHei"/>
+              </a:rPr>
+              <a:t>AgentTaskV2</a:t>
+            </a:r>
+            <a:endParaRPr b="1" spc="36">
+              <a:solidFill>
+                <a:srgbClr val="F4F4F5"/>
+              </a:solidFill>
+              <a:latin typeface="Microsoft YaHei"/>
+              <a:ea typeface="Microsoft YaHei"/>
+              <a:cs typeface="Microsoft YaHei"/>
+            </a:endParaRPr>
+          </a:p>
+        </p:txBody>
+      </p:sp>
+      <p:sp>
+        <p:nvSpPr>
+          <p:cNvPr id="22" name="文本框 21">
+            <a:extLst xmlns:a="http://schemas.openxmlformats.org/drawingml/2006/main">
+              <a:ext uri="{FF2B5EF4-FFF2-40B4-BE49-F238E27FC236}">
+                <a16:creationId xmlns:a16="http://schemas.microsoft.com/office/drawing/2014/main" id="{9AAE9473-1265-4B09-A90C-EAC091F0718A}"/>
+              </a:ext>
+            </a:extLst>
+          </p:cNvPr>
+          <p:cNvSpPr>
+            <a:spLocks xmlns:a="http://schemas.openxmlformats.org/drawingml/2006/main" noGrp="1"/>
+          </p:cNvSpPr>
+          <p:nvPr/>
+        </p:nvSpPr>
+        <p:spPr>
+          <a:xfrm xmlns:a="http://schemas.openxmlformats.org/drawingml/2006/main">
+            <a:off x="5102199" y="3480064"/>
+            <a:ext cx="2559025" cy="571471"/>
+          </a:xfrm>
+          <a:prstGeom xmlns:a="http://schemas.openxmlformats.org/drawingml/2006/main" prst="rect">
+            <a:avLst/>
+          </a:prstGeom>
+          <a:noFill xmlns:a="http://schemas.openxmlformats.org/drawingml/2006/main"/>
+        </p:spPr>
+        <p:txBody>
+          <a:bodyPr xmlns:a="http://schemas.openxmlformats.org/drawingml/2006/main" wrap="square" lIns="0" tIns="0" rIns="0" bIns="0" anchor="t">
+            <a:noAutofit/>
+          </a:bodyPr>
+          <a:lstStyle xmlns:a="http://schemas.openxmlformats.org/drawingml/2006/main"/>
+          <a:p xmlns:a="http://schemas.openxmlformats.org/drawingml/2006/main">
+            <a:pPr algn="l">
+              <a:lnSpc>
+                <a:spcPct val="133000"/>
+              </a:lnSpc>
+              <a:buNone/>
+            </a:pPr>
+            <a:r>
+              <a:rPr sz="1350">
+                <a:solidFill>
+                  <a:schemeClr val="tx2">
+                    <a:lumMod val="0"/>
+                    <a:lumOff val="100000"/>
+                    <a:alpha val="72157"/>
+                  </a:schemeClr>
+                </a:solidFill>
+                <a:latin typeface="Microsoft YaHei"/>
+                <a:ea typeface="Microsoft YaHei"/>
+                <a:cs typeface="Microsoft YaHei"/>
+              </a:rPr>
+              <a:t>严格输入 discriminator
+只携带任务所需数据</a:t>
+            </a:r>
+            <a:endParaRPr sz="1350">
+              <a:solidFill>
+                <a:schemeClr val="tx2">
+                  <a:lumMod val="0"/>
+                  <a:lumOff val="100000"/>
+                  <a:alpha val="72157"/>
+                </a:schemeClr>
+              </a:solidFill>
+              <a:latin typeface="Microsoft YaHei"/>
+              <a:ea typeface="Microsoft YaHei"/>
+              <a:cs typeface="Microsoft YaHei"/>
+            </a:endParaRPr>
+          </a:p>
+        </p:txBody>
+      </p:sp>
+      <p:sp>
+        <p:nvSpPr>
+          <p:cNvPr id="23" name="任意多边形 22">
+            <a:extLst xmlns:a="http://schemas.openxmlformats.org/drawingml/2006/main">
+              <a:ext uri="{FF2B5EF4-FFF2-40B4-BE49-F238E27FC236}">
+                <a16:creationId xmlns:a16="http://schemas.microsoft.com/office/drawing/2014/main" id="{639ED79F-CE32-4587-9F9C-BB95D8ACD951}"/>
+              </a:ext>
+            </a:extLst>
+          </p:cNvPr>
+          <p:cNvSpPr>
+            <a:spLocks xmlns:a="http://schemas.openxmlformats.org/drawingml/2006/main" noGrp="1"/>
+          </p:cNvSpPr>
+          <p:nvPr/>
+        </p:nvSpPr>
+        <p:spPr>
+          <a:xfrm xmlns:a="http://schemas.openxmlformats.org/drawingml/2006/main">
+            <a:off x="4530090" y="4157980"/>
+            <a:ext cx="419100" cy="419100"/>
+          </a:xfrm>
+          <a:custGeom xmlns:a="http://schemas.openxmlformats.org/drawingml/2006/main">
+            <a:gdLst>
+              <a:gd name="sw" fmla="*/ 1 w 660"/>
+              <a:gd name="sh" fmla="*/ 1 h 660"/>
+              <a:gd name="mins" fmla="min sw sh"/>
+              <a:gd name="dsw" fmla="+- 0 sw mins"/>
+              <a:gd name="dsh" fmla="+- 0 sh mins"/>
+              <a:gd name="p0x0" fmla="*/ 120 w 660"/>
+              <a:gd name="p0y0" fmla="*/ 0 h 660"/>
+              <a:gd name="p0x1" fmla="*/ 540 w 660"/>
+              <a:gd name="p0y1" fmla="*/ 0 h 660"/>
+              <a:gd name="p0x2" fmla="*/ 606 w 660"/>
+              <a:gd name="p0y2" fmla="*/ 0 h 660"/>
+              <a:gd name="p0x3" fmla="*/ 660 w 660"/>
+              <a:gd name="p0y3" fmla="*/ 53 h 660"/>
+              <a:gd name="p0x4" fmla="*/ 660 w 660"/>
+              <a:gd name="p0y4" fmla="*/ 120 h 660"/>
+              <a:gd name="p0x5" fmla="*/ 660 w 660"/>
+              <a:gd name="p0y5" fmla="*/ 540 h 660"/>
+              <a:gd name="p0x6" fmla="*/ 660 w 660"/>
+              <a:gd name="p0y6" fmla="*/ 606 h 660"/>
+              <a:gd name="p0x7" fmla="*/ 606 w 660"/>
+              <a:gd name="p0y7" fmla="*/ 660 h 660"/>
+              <a:gd name="p0x8" fmla="*/ 540 w 660"/>
+              <a:gd name="p0y8" fmla="*/ 660 h 660"/>
+              <a:gd name="p0x9" fmla="*/ 120 w 660"/>
+              <a:gd name="p0y9" fmla="*/ 660 h 660"/>
+              <a:gd name="p0x10" fmla="*/ 53 w 660"/>
+              <a:gd name="p0y10" fmla="*/ 660 h 660"/>
+              <a:gd name="p0x11" fmla="*/ 0 w 660"/>
+              <a:gd name="p0y11" fmla="*/ 606 h 660"/>
+              <a:gd name="p0x12" fmla="*/ 0 w 660"/>
+              <a:gd name="p0y12" fmla="*/ 540 h 660"/>
+              <a:gd name="p0x13" fmla="*/ 0 w 660"/>
+              <a:gd name="p0y13" fmla="*/ 120 h 660"/>
+              <a:gd name="p0x14" fmla="*/ 0 w 660"/>
+              <a:gd name="p0y14" fmla="*/ 53 h 660"/>
+              <a:gd name="p0x15" fmla="*/ 53 w 660"/>
+              <a:gd name="p0y15" fmla="*/ 0 h 660"/>
+              <a:gd name="p0x16" fmla="*/ 120 w 660"/>
+              <a:gd name="p0y16" fmla="*/ 0 h 660"/>
+            </a:gdLst>
+            <a:pathLst>
+              <a:path w="660" h="660">
+                <a:moveTo>
+                  <a:pt x="120" y="0"/>
+                </a:moveTo>
+                <a:lnTo>
+                  <a:pt x="540" y="0"/>
+                </a:lnTo>
+                <a:cubicBezTo>
+                  <a:pt x="606" y="0"/>
+                  <a:pt x="660" y="54"/>
+                  <a:pt x="660" y="120"/>
+                </a:cubicBezTo>
+                <a:lnTo>
+                  <a:pt x="660" y="540"/>
+                </a:lnTo>
+                <a:cubicBezTo>
+                  <a:pt x="660" y="606"/>
+                  <a:pt x="606" y="660"/>
+                  <a:pt x="540" y="660"/>
+                </a:cubicBezTo>
+                <a:lnTo>
+                  <a:pt x="120" y="660"/>
+                </a:lnTo>
+                <a:cubicBezTo>
+                  <a:pt x="54" y="660"/>
+                  <a:pt x="0" y="606"/>
+                  <a:pt x="0" y="540"/>
+                </a:cubicBezTo>
+                <a:lnTo>
+                  <a:pt x="0" y="120"/>
+                </a:lnTo>
+                <a:cubicBezTo>
+                  <a:pt x="0" y="54"/>
+                  <a:pt x="54" y="0"/>
+                  <a:pt x="120" y="0"/>
+                </a:cubicBezTo>
+                <a:close/>
+              </a:path>
+            </a:pathLst>
+          </a:custGeom>
+          <a:solidFill xmlns:a="http://schemas.openxmlformats.org/drawingml/2006/main">
+            <a:schemeClr val="accent1">
+              <a:alpha val="16078"/>
+            </a:schemeClr>
+          </a:solidFill>
+          <a:ln xmlns:a="http://schemas.openxmlformats.org/drawingml/2006/main">
+            <a:noFill/>
+          </a:ln>
+        </p:spPr>
+        <p:style>
+          <a:lnRef xmlns:a="http://schemas.openxmlformats.org/drawingml/2006/main" idx="2">
+            <a:schemeClr val="accent1">
+              <a:lumMod val="75000"/>
+            </a:schemeClr>
+          </a:lnRef>
+          <a:fillRef xmlns:a="http://schemas.openxmlformats.org/drawingml/2006/main" idx="1">
+            <a:schemeClr val="accent1"/>
+          </a:fillRef>
+          <a:effectRef xmlns:a="http://schemas.openxmlformats.org/drawingml/2006/main" idx="0">
+            <a:srgbClr val="FFFFFF"/>
+          </a:effectRef>
+          <a:fontRef xmlns:a="http://schemas.openxmlformats.org/drawingml/2006/main" idx="minor">
+            <a:schemeClr val="lt1"/>
+          </a:fontRef>
+        </p:style>
+        <p:txBody>
+          <a:bodyPr xmlns:a="http://schemas.openxmlformats.org/drawingml/2006/main" wrap="square" anchor="ctr">
+            <a:noAutofit/>
+          </a:bodyPr>
+          <a:lstStyle xmlns:a="http://schemas.openxmlformats.org/drawingml/2006/main"/>
+          <a:p xmlns:a="http://schemas.openxmlformats.org/drawingml/2006/main">
+            <a:pPr algn="ctr">
+              <a:buNone/>
+            </a:pPr>
+            <a:endParaRPr/>
+          </a:p>
+        </p:txBody>
+      </p:sp>
+      <p:pic>
+        <p:nvPicPr>
+          <p:cNvPr id="64" name="图片 23"/>
+          <p:cNvPicPr>
+            <a:picLocks xmlns:a="http://schemas.openxmlformats.org/drawingml/2006/main" noChangeAspect="1"/>
+          </p:cNvPicPr>
+          <p:nvPr/>
+        </p:nvPicPr>
+        <p:blipFill>
+          <a:blip xmlns:r="http://schemas.openxmlformats.org/officeDocument/2006/relationships" xmlns:a="http://schemas.openxmlformats.org/drawingml/2006/main" r:embed="R668ceeac12994091">
+            <a:extLst>
+              <a:ext uri="{96DAC541-7B7A-43D3-8B79-37D633B846F1}">
+                <asvg:svgBlip xmlns:asvg="http://schemas.microsoft.com/office/drawing/2016/SVG/main" r:embed="R1eff743b43ef4ca9"/>
+              </a:ext>
+            </a:extLst>
+          </a:blip>
+          <a:srcRect xmlns:a="http://schemas.openxmlformats.org/drawingml/2006/main" l="-7500" t="-5278" r="-7500" b="-5278"/>
+          <a:stretch xmlns:a="http://schemas.openxmlformats.org/drawingml/2006/main">
+            <a:fillRect l="0" t="0" r="0" b="0"/>
+          </a:stretch>
+        </p:blipFill>
+        <p:spPr>
+          <a:xfrm xmlns:a="http://schemas.openxmlformats.org/drawingml/2006/main">
+            <a:off x="4630420" y="4238625"/>
+            <a:ext cx="219075" cy="252730"/>
+          </a:xfrm>
+          <a:prstGeom xmlns:a="http://schemas.openxmlformats.org/drawingml/2006/main" prst="rect">
+            <a:avLst/>
+          </a:prstGeom>
+        </p:spPr>
+      </p:pic>
+      <p:sp>
+        <p:nvSpPr>
+          <p:cNvPr id="25" name="文本框 24">
+            <a:extLst xmlns:a="http://schemas.openxmlformats.org/drawingml/2006/main">
+              <a:ext uri="{FF2B5EF4-FFF2-40B4-BE49-F238E27FC236}">
+                <a16:creationId xmlns:a16="http://schemas.microsoft.com/office/drawing/2014/main" id="{F4CAD34B-87FB-4832-9F80-5C46F203501E}"/>
+              </a:ext>
+            </a:extLst>
+          </p:cNvPr>
+          <p:cNvSpPr>
+            <a:spLocks xmlns:a="http://schemas.openxmlformats.org/drawingml/2006/main" noGrp="1"/>
+          </p:cNvSpPr>
+          <p:nvPr/>
+        </p:nvSpPr>
+        <p:spPr>
+          <a:xfrm xmlns:a="http://schemas.openxmlformats.org/drawingml/2006/main">
+            <a:off x="5102199" y="4142946"/>
+            <a:ext cx="2559025" cy="311467"/>
+          </a:xfrm>
+          <a:prstGeom xmlns:a="http://schemas.openxmlformats.org/drawingml/2006/main" prst="rect">
+            <a:avLst/>
+          </a:prstGeom>
+          <a:noFill xmlns:a="http://schemas.openxmlformats.org/drawingml/2006/main"/>
+        </p:spPr>
+        <p:txBody>
+          <a:bodyPr xmlns:a="http://schemas.openxmlformats.org/drawingml/2006/main" wrap="square" lIns="0" tIns="0" rIns="0" bIns="0" anchor="t">
+            <a:noAutofit/>
+          </a:bodyPr>
+          <a:lstStyle xmlns:a="http://schemas.openxmlformats.org/drawingml/2006/main"/>
+          <a:p xmlns:a="http://schemas.openxmlformats.org/drawingml/2006/main">
+            <a:pPr algn="l">
+              <a:lnSpc>
+                <a:spcPct val="104000"/>
+              </a:lnSpc>
+              <a:buNone/>
+            </a:pPr>
+            <a:r>
+              <a:rPr b="1" spc="36">
+                <a:solidFill>
+                  <a:srgbClr val="F4F4F5"/>
+                </a:solidFill>
+                <a:latin typeface="Microsoft YaHei"/>
+                <a:ea typeface="Microsoft YaHei"/>
+                <a:cs typeface="Microsoft YaHei"/>
+              </a:rPr>
+              <a:t>AgentResultV2</a:t>
+            </a:r>
+            <a:endParaRPr b="1" spc="36">
+              <a:solidFill>
+                <a:srgbClr val="F4F4F5"/>
+              </a:solidFill>
+              <a:latin typeface="Microsoft YaHei"/>
+              <a:ea typeface="Microsoft YaHei"/>
+              <a:cs typeface="Microsoft YaHei"/>
+            </a:endParaRPr>
+          </a:p>
+        </p:txBody>
+      </p:sp>
+      <p:sp>
+        <p:nvSpPr>
+          <p:cNvPr id="26" name="文本框 25">
+            <a:extLst xmlns:a="http://schemas.openxmlformats.org/drawingml/2006/main">
+              <a:ext uri="{FF2B5EF4-FFF2-40B4-BE49-F238E27FC236}">
+                <a16:creationId xmlns:a16="http://schemas.microsoft.com/office/drawing/2014/main" id="{C399695C-AAA9-4F44-A57A-A1EC5BF8F982}"/>
+              </a:ext>
+            </a:extLst>
+          </p:cNvPr>
+          <p:cNvSpPr>
+            <a:spLocks xmlns:a="http://schemas.openxmlformats.org/drawingml/2006/main" noGrp="1"/>
+          </p:cNvSpPr>
+          <p:nvPr/>
+        </p:nvSpPr>
+        <p:spPr>
+          <a:xfrm xmlns:a="http://schemas.openxmlformats.org/drawingml/2006/main">
+            <a:off x="5102199" y="4466796"/>
+            <a:ext cx="2559025" cy="571471"/>
+          </a:xfrm>
+          <a:prstGeom xmlns:a="http://schemas.openxmlformats.org/drawingml/2006/main" prst="rect">
+            <a:avLst/>
+          </a:prstGeom>
+          <a:noFill xmlns:a="http://schemas.openxmlformats.org/drawingml/2006/main"/>
+        </p:spPr>
+        <p:txBody>
+          <a:bodyPr xmlns:a="http://schemas.openxmlformats.org/drawingml/2006/main" wrap="square" lIns="0" tIns="0" rIns="0" bIns="0" anchor="t">
+            <a:noAutofit/>
+          </a:bodyPr>
+          <a:lstStyle xmlns:a="http://schemas.openxmlformats.org/drawingml/2006/main"/>
+          <a:p xmlns:a="http://schemas.openxmlformats.org/drawingml/2006/main">
+            <a:pPr algn="l">
+              <a:lnSpc>
+                <a:spcPct val="133000"/>
+              </a:lnSpc>
+              <a:buNone/>
+            </a:pPr>
+            <a:r>
+              <a:rPr sz="1350">
+                <a:solidFill>
+                  <a:schemeClr val="tx2">
+                    <a:lumMod val="0"/>
+                    <a:lumOff val="100000"/>
+                    <a:alpha val="72157"/>
+                  </a:schemeClr>
+                </a:solidFill>
+                <a:latin typeface="Microsoft YaHei"/>
+                <a:ea typeface="Microsoft YaHei"/>
+                <a:cs typeface="Microsoft YaHei"/>
+              </a:rPr>
+              <a:t>Specialist 只提交 proposal
+不直接修改规范状态</a:t>
+            </a:r>
+            <a:endParaRPr sz="1350">
+              <a:solidFill>
+                <a:schemeClr val="tx2">
+                  <a:lumMod val="0"/>
+                  <a:lumOff val="100000"/>
+                  <a:alpha val="72157"/>
+                </a:schemeClr>
+              </a:solidFill>
+              <a:latin typeface="Microsoft YaHei"/>
+              <a:ea typeface="Microsoft YaHei"/>
+              <a:cs typeface="Microsoft YaHei"/>
+            </a:endParaRPr>
+          </a:p>
+        </p:txBody>
+      </p:sp>
+      <p:sp>
+        <p:nvSpPr>
+          <p:cNvPr id="27" name="任意多边形 26">
+            <a:extLst xmlns:a="http://schemas.openxmlformats.org/drawingml/2006/main">
+              <a:ext uri="{FF2B5EF4-FFF2-40B4-BE49-F238E27FC236}">
+                <a16:creationId xmlns:a16="http://schemas.microsoft.com/office/drawing/2014/main" id="{CB280CF0-2BCC-484D-9739-BED0E6D1AE46}"/>
+              </a:ext>
+            </a:extLst>
+          </p:cNvPr>
+          <p:cNvSpPr>
+            <a:spLocks xmlns:a="http://schemas.openxmlformats.org/drawingml/2006/main" noGrp="1"/>
+          </p:cNvSpPr>
+          <p:nvPr/>
+        </p:nvSpPr>
+        <p:spPr>
+          <a:xfrm xmlns:a="http://schemas.openxmlformats.org/drawingml/2006/main">
+            <a:off x="4530090" y="5144770"/>
+            <a:ext cx="419100" cy="419100"/>
+          </a:xfrm>
+          <a:custGeom xmlns:a="http://schemas.openxmlformats.org/drawingml/2006/main">
+            <a:gdLst>
+              <a:gd name="sw" fmla="*/ 1 w 660"/>
+              <a:gd name="sh" fmla="*/ 1 h 660"/>
+              <a:gd name="mins" fmla="min sw sh"/>
+              <a:gd name="dsw" fmla="+- 0 sw mins"/>
+              <a:gd name="dsh" fmla="+- 0 sh mins"/>
+              <a:gd name="p0x0" fmla="*/ 120 w 660"/>
+              <a:gd name="p0y0" fmla="*/ 0 h 660"/>
+              <a:gd name="p0x1" fmla="*/ 540 w 660"/>
+              <a:gd name="p0y1" fmla="*/ 0 h 660"/>
+              <a:gd name="p0x2" fmla="*/ 606 w 660"/>
+              <a:gd name="p0y2" fmla="*/ 0 h 660"/>
+              <a:gd name="p0x3" fmla="*/ 660 w 660"/>
+              <a:gd name="p0y3" fmla="*/ 53 h 660"/>
+              <a:gd name="p0x4" fmla="*/ 660 w 660"/>
+              <a:gd name="p0y4" fmla="*/ 120 h 660"/>
+              <a:gd name="p0x5" fmla="*/ 660 w 660"/>
+              <a:gd name="p0y5" fmla="*/ 540 h 660"/>
+              <a:gd name="p0x6" fmla="*/ 660 w 660"/>
+              <a:gd name="p0y6" fmla="*/ 606 h 660"/>
+              <a:gd name="p0x7" fmla="*/ 606 w 660"/>
+              <a:gd name="p0y7" fmla="*/ 660 h 660"/>
+              <a:gd name="p0x8" fmla="*/ 540 w 660"/>
+              <a:gd name="p0y8" fmla="*/ 660 h 660"/>
+              <a:gd name="p0x9" fmla="*/ 120 w 660"/>
+              <a:gd name="p0y9" fmla="*/ 660 h 660"/>
+              <a:gd name="p0x10" fmla="*/ 53 w 660"/>
+              <a:gd name="p0y10" fmla="*/ 660 h 660"/>
+              <a:gd name="p0x11" fmla="*/ 0 w 660"/>
+              <a:gd name="p0y11" fmla="*/ 606 h 660"/>
+              <a:gd name="p0x12" fmla="*/ 0 w 660"/>
+              <a:gd name="p0y12" fmla="*/ 540 h 660"/>
+              <a:gd name="p0x13" fmla="*/ 0 w 660"/>
+              <a:gd name="p0y13" fmla="*/ 120 h 660"/>
+              <a:gd name="p0x14" fmla="*/ 0 w 660"/>
+              <a:gd name="p0y14" fmla="*/ 53 h 660"/>
+              <a:gd name="p0x15" fmla="*/ 53 w 660"/>
+              <a:gd name="p0y15" fmla="*/ 0 h 660"/>
+              <a:gd name="p0x16" fmla="*/ 120 w 660"/>
+              <a:gd name="p0y16" fmla="*/ 0 h 660"/>
+            </a:gdLst>
+            <a:pathLst>
+              <a:path w="660" h="660">
+                <a:moveTo>
+                  <a:pt x="120" y="0"/>
+                </a:moveTo>
+                <a:lnTo>
+                  <a:pt x="540" y="0"/>
+                </a:lnTo>
+                <a:cubicBezTo>
+                  <a:pt x="606" y="0"/>
+                  <a:pt x="660" y="54"/>
+                  <a:pt x="660" y="120"/>
+                </a:cubicBezTo>
+                <a:lnTo>
+                  <a:pt x="660" y="540"/>
+                </a:lnTo>
+                <a:cubicBezTo>
+                  <a:pt x="660" y="606"/>
+                  <a:pt x="606" y="660"/>
+                  <a:pt x="540" y="660"/>
+                </a:cubicBezTo>
+                <a:lnTo>
+                  <a:pt x="120" y="660"/>
+                </a:lnTo>
+                <a:cubicBezTo>
+                  <a:pt x="54" y="660"/>
+                  <a:pt x="0" y="606"/>
+                  <a:pt x="0" y="540"/>
+                </a:cubicBezTo>
+                <a:lnTo>
+                  <a:pt x="0" y="120"/>
+                </a:lnTo>
+                <a:cubicBezTo>
+                  <a:pt x="0" y="54"/>
+                  <a:pt x="54" y="0"/>
+                  <a:pt x="120" y="0"/>
+                </a:cubicBezTo>
+                <a:close/>
+              </a:path>
+            </a:pathLst>
+          </a:custGeom>
+          <a:solidFill xmlns:a="http://schemas.openxmlformats.org/drawingml/2006/main">
+            <a:schemeClr val="accent1">
+              <a:alpha val="16078"/>
+            </a:schemeClr>
+          </a:solidFill>
+          <a:ln xmlns:a="http://schemas.openxmlformats.org/drawingml/2006/main">
+            <a:noFill/>
+          </a:ln>
+        </p:spPr>
+        <p:style>
+          <a:lnRef xmlns:a="http://schemas.openxmlformats.org/drawingml/2006/main" idx="2">
+            <a:schemeClr val="accent1">
+              <a:lumMod val="75000"/>
+            </a:schemeClr>
+          </a:lnRef>
+          <a:fillRef xmlns:a="http://schemas.openxmlformats.org/drawingml/2006/main" idx="1">
+            <a:schemeClr val="accent1"/>
+          </a:fillRef>
+          <a:effectRef xmlns:a="http://schemas.openxmlformats.org/drawingml/2006/main" idx="0">
+            <a:srgbClr val="FFFFFF"/>
+          </a:effectRef>
+          <a:fontRef xmlns:a="http://schemas.openxmlformats.org/drawingml/2006/main" idx="minor">
+            <a:schemeClr val="lt1"/>
+          </a:fontRef>
+        </p:style>
+        <p:txBody>
+          <a:bodyPr xmlns:a="http://schemas.openxmlformats.org/drawingml/2006/main" wrap="square" anchor="ctr">
+            <a:noAutofit/>
+          </a:bodyPr>
+          <a:lstStyle xmlns:a="http://schemas.openxmlformats.org/drawingml/2006/main"/>
+          <a:p xmlns:a="http://schemas.openxmlformats.org/drawingml/2006/main">
+            <a:pPr algn="ctr">
+              <a:buNone/>
+            </a:pPr>
+            <a:endParaRPr/>
+          </a:p>
+        </p:txBody>
+      </p:sp>
+      <p:pic>
+        <p:nvPicPr>
+          <p:cNvPr id="68" name="图片 27"/>
+          <p:cNvPicPr>
+            <a:picLocks xmlns:a="http://schemas.openxmlformats.org/drawingml/2006/main" noChangeAspect="1"/>
+          </p:cNvPicPr>
+          <p:nvPr/>
+        </p:nvPicPr>
+        <p:blipFill>
+          <a:blip xmlns:r="http://schemas.openxmlformats.org/officeDocument/2006/relationships" xmlns:a="http://schemas.openxmlformats.org/drawingml/2006/main" r:embed="R9275398ec9b0470e">
+            <a:extLst>
+              <a:ext uri="{96DAC541-7B7A-43D3-8B79-37D633B846F1}">
+                <asvg:svgBlip xmlns:asvg="http://schemas.microsoft.com/office/drawing/2016/SVG/main" r:embed="R85463d84cd2c4da4"/>
+              </a:ext>
+            </a:extLst>
+          </a:blip>
+          <a:srcRect xmlns:a="http://schemas.openxmlformats.org/drawingml/2006/main" l="-4691" t="-1026" r="-4691" b="-1026"/>
+          <a:stretch xmlns:a="http://schemas.openxmlformats.org/drawingml/2006/main">
+            <a:fillRect l="0" t="0" r="0" b="0"/>
+          </a:stretch>
+        </p:blipFill>
+        <p:spPr>
+          <a:xfrm xmlns:a="http://schemas.openxmlformats.org/drawingml/2006/main">
+            <a:off x="4599305" y="5225415"/>
+            <a:ext cx="281305" cy="252730"/>
+          </a:xfrm>
+          <a:prstGeom xmlns:a="http://schemas.openxmlformats.org/drawingml/2006/main" prst="rect">
+            <a:avLst/>
+          </a:prstGeom>
+        </p:spPr>
+      </p:pic>
+      <p:sp>
+        <p:nvSpPr>
+          <p:cNvPr id="29" name="文本框 28">
+            <a:extLst xmlns:a="http://schemas.openxmlformats.org/drawingml/2006/main">
+              <a:ext uri="{FF2B5EF4-FFF2-40B4-BE49-F238E27FC236}">
+                <a16:creationId xmlns:a16="http://schemas.microsoft.com/office/drawing/2014/main" id="{605334CF-B5AA-412D-A07C-251A09AFD861}"/>
+              </a:ext>
+            </a:extLst>
+          </p:cNvPr>
+          <p:cNvSpPr>
+            <a:spLocks xmlns:a="http://schemas.openxmlformats.org/drawingml/2006/main" noGrp="1"/>
+          </p:cNvSpPr>
+          <p:nvPr/>
+        </p:nvSpPr>
+        <p:spPr>
+          <a:xfrm xmlns:a="http://schemas.openxmlformats.org/drawingml/2006/main">
+            <a:off x="5102199" y="5129679"/>
+            <a:ext cx="2559025" cy="311467"/>
+          </a:xfrm>
+          <a:prstGeom xmlns:a="http://schemas.openxmlformats.org/drawingml/2006/main" prst="rect">
+            <a:avLst/>
+          </a:prstGeom>
+          <a:noFill xmlns:a="http://schemas.openxmlformats.org/drawingml/2006/main"/>
+        </p:spPr>
+        <p:txBody>
+          <a:bodyPr xmlns:a="http://schemas.openxmlformats.org/drawingml/2006/main" wrap="square" lIns="0" tIns="0" rIns="0" bIns="0" anchor="t">
+            <a:noAutofit/>
+          </a:bodyPr>
+          <a:lstStyle xmlns:a="http://schemas.openxmlformats.org/drawingml/2006/main"/>
+          <a:p xmlns:a="http://schemas.openxmlformats.org/drawingml/2006/main">
+            <a:pPr algn="l">
+              <a:lnSpc>
+                <a:spcPct val="104000"/>
+              </a:lnSpc>
+              <a:buNone/>
+            </a:pPr>
+            <a:r>
+              <a:rPr b="1" spc="36">
+                <a:solidFill>
+                  <a:srgbClr val="F4F4F5"/>
+                </a:solidFill>
+                <a:latin typeface="Microsoft YaHei"/>
+                <a:ea typeface="Microsoft YaHei"/>
+                <a:cs typeface="Microsoft YaHei"/>
+              </a:rPr>
+              <a:t>私有 State</a:t>
+            </a:r>
+            <a:endParaRPr b="1" spc="36">
+              <a:solidFill>
+                <a:srgbClr val="F4F4F5"/>
+              </a:solidFill>
+              <a:latin typeface="Microsoft YaHei"/>
+              <a:ea typeface="Microsoft YaHei"/>
+              <a:cs typeface="Microsoft YaHei"/>
+            </a:endParaRPr>
+          </a:p>
+        </p:txBody>
+      </p:sp>
+      <p:sp>
+        <p:nvSpPr>
+          <p:cNvPr id="30" name="文本框 29">
+            <a:extLst xmlns:a="http://schemas.openxmlformats.org/drawingml/2006/main">
+              <a:ext uri="{FF2B5EF4-FFF2-40B4-BE49-F238E27FC236}">
+                <a16:creationId xmlns:a16="http://schemas.microsoft.com/office/drawing/2014/main" id="{F0634930-95DD-42FD-B943-16C34E1D7CD0}"/>
+              </a:ext>
+            </a:extLst>
+          </p:cNvPr>
+          <p:cNvSpPr>
+            <a:spLocks xmlns:a="http://schemas.openxmlformats.org/drawingml/2006/main" noGrp="1"/>
+          </p:cNvSpPr>
+          <p:nvPr/>
+        </p:nvSpPr>
+        <p:spPr>
+          <a:xfrm xmlns:a="http://schemas.openxmlformats.org/drawingml/2006/main">
+            <a:off x="5102199" y="5453529"/>
+            <a:ext cx="2559025" cy="571471"/>
+          </a:xfrm>
+          <a:prstGeom xmlns:a="http://schemas.openxmlformats.org/drawingml/2006/main" prst="rect">
+            <a:avLst/>
+          </a:prstGeom>
+          <a:noFill xmlns:a="http://schemas.openxmlformats.org/drawingml/2006/main"/>
+        </p:spPr>
+        <p:txBody>
+          <a:bodyPr xmlns:a="http://schemas.openxmlformats.org/drawingml/2006/main" wrap="square" lIns="0" tIns="0" rIns="0" bIns="0" anchor="t">
+            <a:noAutofit/>
+          </a:bodyPr>
+          <a:lstStyle xmlns:a="http://schemas.openxmlformats.org/drawingml/2006/main"/>
+          <a:p xmlns:a="http://schemas.openxmlformats.org/drawingml/2006/main">
+            <a:pPr algn="l">
+              <a:lnSpc>
+                <a:spcPct val="133000"/>
+              </a:lnSpc>
+              <a:buNone/>
+            </a:pPr>
+            <a:r>
+              <a:rPr sz="1350">
+                <a:solidFill>
+                  <a:schemeClr val="tx2">
+                    <a:lumMod val="0"/>
+                    <a:lumOff val="100000"/>
+                    <a:alpha val="72157"/>
+                  </a:schemeClr>
+                </a:solidFill>
+                <a:latin typeface="Microsoft YaHei"/>
+                <a:ea typeface="Microsoft YaHei"/>
+                <a:cs typeface="Microsoft YaHei"/>
+              </a:rPr>
+              <a:t>独立 input / state / output
+schema</a:t>
+            </a:r>
+            <a:endParaRPr sz="1350">
+              <a:solidFill>
+                <a:schemeClr val="tx2">
+                  <a:lumMod val="0"/>
+                  <a:lumOff val="100000"/>
+                  <a:alpha val="72157"/>
+                </a:schemeClr>
+              </a:solidFill>
+              <a:latin typeface="Microsoft YaHei"/>
+              <a:ea typeface="Microsoft YaHei"/>
+              <a:cs typeface="Microsoft YaHei"/>
+            </a:endParaRPr>
+          </a:p>
+        </p:txBody>
+      </p:sp>
+      <p:sp>
+        <p:nvSpPr>
+          <p:cNvPr id="32" name="任意多边形 31">
+            <a:extLst xmlns:a="http://schemas.openxmlformats.org/drawingml/2006/main">
+              <a:ext uri="{FF2B5EF4-FFF2-40B4-BE49-F238E27FC236}">
+                <a16:creationId xmlns:a16="http://schemas.microsoft.com/office/drawing/2014/main" id="{8C88369B-3FD0-4820-898D-3D8BC31C7849}"/>
+              </a:ext>
+            </a:extLst>
+          </p:cNvPr>
+          <p:cNvSpPr>
+            <a:spLocks xmlns:a="http://schemas.openxmlformats.org/drawingml/2006/main" noGrp="1"/>
+          </p:cNvSpPr>
+          <p:nvPr/>
+        </p:nvSpPr>
+        <p:spPr>
+          <a:xfrm xmlns:a="http://schemas.openxmlformats.org/drawingml/2006/main">
+            <a:off x="8094345" y="2308860"/>
+            <a:ext cx="3521075" cy="4163060"/>
+          </a:xfrm>
+          <a:custGeom xmlns:a="http://schemas.openxmlformats.org/drawingml/2006/main">
+            <a:gdLst>
+              <a:gd name="sw" fmla="*/ 1 w 5544"/>
+              <a:gd name="sh" fmla="*/ 1 h 6556"/>
+              <a:gd name="mins" fmla="min sw sh"/>
+              <a:gd name="dsw" fmla="+- 0 sw mins"/>
+              <a:gd name="dsh" fmla="+- 0 sh mins"/>
+              <a:gd name="p0x0" fmla="*/ 120 w 5544"/>
+              <a:gd name="p0y0" fmla="*/ 0 h 6556"/>
+              <a:gd name="p0x1" fmla="*/ 5424 w 5544"/>
+              <a:gd name="p0y1" fmla="*/ 0 h 6556"/>
+              <a:gd name="p0x2" fmla="*/ 5491 w 5544"/>
+              <a:gd name="p0y2" fmla="*/ 0 h 6556"/>
+              <a:gd name="p0x3" fmla="*/ 5544 w 5544"/>
+              <a:gd name="p0y3" fmla="*/ 53 h 6556"/>
+              <a:gd name="p0x4" fmla="*/ 5544 w 5544"/>
+              <a:gd name="p0y4" fmla="*/ 120 h 6556"/>
+              <a:gd name="p0x5" fmla="*/ 5544 w 5544"/>
+              <a:gd name="p0y5" fmla="*/ 6436 h 6556"/>
+              <a:gd name="p0x6" fmla="*/ 5544 w 5544"/>
+              <a:gd name="p0y6" fmla="*/ 6502 h 6556"/>
+              <a:gd name="p0x7" fmla="*/ 5491 w 5544"/>
+              <a:gd name="p0y7" fmla="*/ 6556 h 6556"/>
+              <a:gd name="p0x8" fmla="*/ 5424 w 5544"/>
+              <a:gd name="p0y8" fmla="*/ 6556 h 6556"/>
+              <a:gd name="p0x9" fmla="*/ 120 w 5544"/>
+              <a:gd name="p0y9" fmla="*/ 6556 h 6556"/>
+              <a:gd name="p0x10" fmla="*/ 53 w 5544"/>
+              <a:gd name="p0y10" fmla="*/ 6556 h 6556"/>
+              <a:gd name="p0x11" fmla="*/ 0 w 5544"/>
+              <a:gd name="p0y11" fmla="*/ 6502 h 6556"/>
+              <a:gd name="p0x12" fmla="*/ 0 w 5544"/>
+              <a:gd name="p0y12" fmla="*/ 6436 h 6556"/>
+              <a:gd name="p0x13" fmla="*/ 0 w 5544"/>
+              <a:gd name="p0y13" fmla="*/ 120 h 6556"/>
+              <a:gd name="p0x14" fmla="*/ 0 w 5544"/>
+              <a:gd name="p0y14" fmla="*/ 53 h 6556"/>
+              <a:gd name="p0x15" fmla="*/ 53 w 5544"/>
+              <a:gd name="p0y15" fmla="*/ 0 h 6556"/>
+              <a:gd name="p0x16" fmla="*/ 120 w 5544"/>
+              <a:gd name="p0y16" fmla="*/ 0 h 6556"/>
+            </a:gdLst>
+            <a:pathLst>
+              <a:path w="0" h="0">
+                <a:moveTo>
+                  <a:pt x="0" y="0"/>
+                </a:moveTo>
+                <a:lnTo>
+                  <a:pt x="0" y="0"/>
+                </a:lnTo>
+                <a:cubicBezTo>
+                  <a:pt x="0" y="0"/>
+                  <a:pt x="0" y="0"/>
+                  <a:pt x="0" y="0"/>
+                </a:cubicBezTo>
+                <a:lnTo>
+                  <a:pt x="0" y="0"/>
+                </a:lnTo>
+                <a:cubicBezTo>
+                  <a:pt x="0" y="0"/>
+                  <a:pt x="0" y="0"/>
+                  <a:pt x="0" y="0"/>
+                </a:cubicBezTo>
+                <a:lnTo>
+                  <a:pt x="0" y="0"/>
+                </a:lnTo>
+                <a:cubicBezTo>
+                  <a:pt x="0" y="0"/>
+                  <a:pt x="0" y="0"/>
+                  <a:pt x="0" y="0"/>
+                </a:cubicBezTo>
+                <a:lnTo>
+                  <a:pt x="0" y="0"/>
+                </a:lnTo>
+                <a:cubicBezTo>
+                  <a:pt x="0" y="0"/>
+                  <a:pt x="0" y="0"/>
+                  <a:pt x="0" y="0"/>
+                </a:cubicBezTo>
+                <a:close/>
+              </a:path>
+            </a:pathLst>
+          </a:custGeom>
+          <a:solidFill xmlns:a="http://schemas.openxmlformats.org/drawingml/2006/main">
+            <a:srgbClr val="FFFFFF">
+              <a:alpha val="10980"/>
+            </a:srgbClr>
+          </a:solidFill>
+          <a:ln xmlns:a="http://schemas.openxmlformats.org/drawingml/2006/main" w="9525" cmpd="sng">
+            <a:solidFill>
+              <a:srgbClr val="FFFFFF">
+                <a:alpha val="10980"/>
+              </a:srgbClr>
+            </a:solidFill>
+            <a:prstDash val="solid"/>
+          </a:ln>
+          <a:effectLst xmlns:a="http://schemas.openxmlformats.org/drawingml/2006/main">
+            <a:outerShdw blurRad="142875" algn="ctr" rotWithShape="0">
+              <a:schemeClr val="accent2">
+                <a:alpha val="12157"/>
+              </a:schemeClr>
+            </a:outerShdw>
+          </a:effectLst>
+        </p:spPr>
+        <p:style>
+          <a:lnRef xmlns:a="http://schemas.openxmlformats.org/drawingml/2006/main" idx="2">
+            <a:schemeClr val="accent1">
+              <a:lumMod val="75000"/>
+            </a:schemeClr>
+          </a:lnRef>
+          <a:fillRef xmlns:a="http://schemas.openxmlformats.org/drawingml/2006/main" idx="1">
+            <a:schemeClr val="accent1"/>
+          </a:fillRef>
+          <a:effectRef xmlns:a="http://schemas.openxmlformats.org/drawingml/2006/main" idx="0">
+            <a:srgbClr val="FFFFFF"/>
+          </a:effectRef>
+          <a:fontRef xmlns:a="http://schemas.openxmlformats.org/drawingml/2006/main" idx="minor">
+            <a:schemeClr val="lt1"/>
+          </a:fontRef>
+        </p:style>
+        <p:txBody>
+          <a:bodyPr xmlns:a="http://schemas.openxmlformats.org/drawingml/2006/main" anchor="ctr"/>
+          <a:lstStyle xmlns:a="http://schemas.openxmlformats.org/drawingml/2006/main"/>
+          <a:p xmlns:a="http://schemas.openxmlformats.org/drawingml/2006/main">
+            <a:pPr algn="ctr">
+              <a:buNone/>
+            </a:pPr>
+            <a:endParaRPr/>
+          </a:p>
+        </p:txBody>
+      </p:sp>
+      <p:sp>
+        <p:nvSpPr>
+          <p:cNvPr id="33" name="文本框 32">
+            <a:extLst xmlns:a="http://schemas.openxmlformats.org/drawingml/2006/main">
+              <a:ext uri="{FF2B5EF4-FFF2-40B4-BE49-F238E27FC236}">
+                <a16:creationId xmlns:a16="http://schemas.microsoft.com/office/drawing/2014/main" id="{1CEBCEF0-119B-4930-B102-CDF4E6EFD3F3}"/>
+              </a:ext>
+            </a:extLst>
+          </p:cNvPr>
+          <p:cNvSpPr>
+            <a:spLocks xmlns:a="http://schemas.openxmlformats.org/drawingml/2006/main" noGrp="1"/>
+          </p:cNvSpPr>
+          <p:nvPr/>
+        </p:nvSpPr>
+        <p:spPr>
+          <a:xfrm xmlns:a="http://schemas.openxmlformats.org/drawingml/2006/main">
+            <a:off x="8289874" y="2745686"/>
+            <a:ext cx="3130525" cy="365760"/>
+          </a:xfrm>
+          <a:prstGeom xmlns:a="http://schemas.openxmlformats.org/drawingml/2006/main" prst="rect">
+            <a:avLst/>
+          </a:prstGeom>
+          <a:noFill xmlns:a="http://schemas.openxmlformats.org/drawingml/2006/main"/>
+        </p:spPr>
+        <p:txBody>
+          <a:bodyPr xmlns:a="http://schemas.openxmlformats.org/drawingml/2006/main" wrap="square" lIns="0" tIns="0" rIns="0" bIns="0" anchor="t">
+            <a:noAutofit/>
+          </a:bodyPr>
+          <a:lstStyle xmlns:a="http://schemas.openxmlformats.org/drawingml/2006/main"/>
+          <a:p xmlns:a="http://schemas.openxmlformats.org/drawingml/2006/main">
+            <a:pPr algn="l">
+              <a:lnSpc>
+                <a:spcPct val="104000"/>
+              </a:lnSpc>
+              <a:buNone/>
+            </a:pPr>
+            <a:r>
+              <a:rPr sz="2100" b="1" spc="42">
+                <a:solidFill>
+                  <a:srgbClr val="F4F4F5"/>
+                </a:solidFill>
+                <a:latin typeface="Microsoft YaHei"/>
+                <a:ea typeface="Microsoft YaHei"/>
+                <a:cs typeface="Microsoft YaHei"/>
+              </a:rPr>
+              <a:t>五个 Specialist</a:t>
+            </a:r>
+            <a:endParaRPr sz="2100" b="1" spc="42">
+              <a:solidFill>
+                <a:srgbClr val="F4F4F5"/>
+              </a:solidFill>
+              <a:latin typeface="Microsoft YaHei"/>
+              <a:ea typeface="Microsoft YaHei"/>
+              <a:cs typeface="Microsoft YaHei"/>
+            </a:endParaRPr>
+          </a:p>
+        </p:txBody>
+      </p:sp>
+      <p:sp>
+        <p:nvSpPr>
+          <p:cNvPr id="34" name="任意多边形 33">
+            <a:extLst xmlns:a="http://schemas.openxmlformats.org/drawingml/2006/main">
+              <a:ext uri="{FF2B5EF4-FFF2-40B4-BE49-F238E27FC236}">
+                <a16:creationId xmlns:a16="http://schemas.microsoft.com/office/drawing/2014/main" id="{6E516739-6D9B-496B-8E64-2D534642E2EB}"/>
+              </a:ext>
+            </a:extLst>
+          </p:cNvPr>
+          <p:cNvSpPr>
+            <a:spLocks xmlns:a="http://schemas.openxmlformats.org/drawingml/2006/main" noGrp="1"/>
+          </p:cNvSpPr>
+          <p:nvPr/>
+        </p:nvSpPr>
+        <p:spPr>
+          <a:xfrm xmlns:a="http://schemas.openxmlformats.org/drawingml/2006/main">
+            <a:off x="9606915" y="3171190"/>
+            <a:ext cx="495300" cy="495300"/>
+          </a:xfrm>
+          <a:custGeom xmlns:a="http://schemas.openxmlformats.org/drawingml/2006/main">
+            <a:gdLst>
+              <a:gd name="sw" fmla="*/ 1 w 780"/>
+              <a:gd name="sh" fmla="*/ 1 h 780"/>
+              <a:gd name="mins" fmla="min sw sh"/>
+              <a:gd name="dsw" fmla="+- 0 sw mins"/>
+              <a:gd name="dsh" fmla="+- 0 sh mins"/>
+              <a:gd name="p0x0" fmla="*/ 120 w 780"/>
+              <a:gd name="p0y0" fmla="*/ 0 h 780"/>
+              <a:gd name="p0x1" fmla="*/ 660 w 780"/>
+              <a:gd name="p0y1" fmla="*/ 0 h 780"/>
+              <a:gd name="p0x2" fmla="*/ 726 w 780"/>
+              <a:gd name="p0y2" fmla="*/ 0 h 780"/>
+              <a:gd name="p0x3" fmla="*/ 780 w 780"/>
+              <a:gd name="p0y3" fmla="*/ 53 h 780"/>
+              <a:gd name="p0x4" fmla="*/ 780 w 780"/>
+              <a:gd name="p0y4" fmla="*/ 120 h 780"/>
+              <a:gd name="p0x5" fmla="*/ 780 w 780"/>
+              <a:gd name="p0y5" fmla="*/ 660 h 780"/>
+              <a:gd name="p0x6" fmla="*/ 780 w 780"/>
+              <a:gd name="p0y6" fmla="*/ 726 h 780"/>
+              <a:gd name="p0x7" fmla="*/ 726 w 780"/>
+              <a:gd name="p0y7" fmla="*/ 780 h 780"/>
+              <a:gd name="p0x8" fmla="*/ 660 w 780"/>
+              <a:gd name="p0y8" fmla="*/ 780 h 780"/>
+              <a:gd name="p0x9" fmla="*/ 120 w 780"/>
+              <a:gd name="p0y9" fmla="*/ 780 h 780"/>
+              <a:gd name="p0x10" fmla="*/ 53 w 780"/>
+              <a:gd name="p0y10" fmla="*/ 780 h 780"/>
+              <a:gd name="p0x11" fmla="*/ 0 w 780"/>
+              <a:gd name="p0y11" fmla="*/ 726 h 780"/>
+              <a:gd name="p0x12" fmla="*/ 0 w 780"/>
+              <a:gd name="p0y12" fmla="*/ 660 h 780"/>
+              <a:gd name="p0x13" fmla="*/ 0 w 780"/>
+              <a:gd name="p0y13" fmla="*/ 120 h 780"/>
+              <a:gd name="p0x14" fmla="*/ 0 w 780"/>
+              <a:gd name="p0y14" fmla="*/ 53 h 780"/>
+              <a:gd name="p0x15" fmla="*/ 53 w 780"/>
+              <a:gd name="p0y15" fmla="*/ 0 h 780"/>
+              <a:gd name="p0x16" fmla="*/ 120 w 780"/>
+              <a:gd name="p0y16" fmla="*/ 0 h 780"/>
+            </a:gdLst>
+            <a:pathLst>
+              <a:path w="780" h="780">
+                <a:moveTo>
+                  <a:pt x="120" y="0"/>
+                </a:moveTo>
+                <a:lnTo>
+                  <a:pt x="660" y="0"/>
+                </a:lnTo>
+                <a:cubicBezTo>
+                  <a:pt x="726" y="0"/>
+                  <a:pt x="780" y="54"/>
+                  <a:pt x="780" y="120"/>
+                </a:cubicBezTo>
+                <a:lnTo>
+                  <a:pt x="780" y="660"/>
+                </a:lnTo>
+                <a:cubicBezTo>
+                  <a:pt x="780" y="726"/>
+                  <a:pt x="726" y="780"/>
+                  <a:pt x="660" y="780"/>
+                </a:cubicBezTo>
+                <a:lnTo>
+                  <a:pt x="120" y="780"/>
+                </a:lnTo>
+                <a:cubicBezTo>
+                  <a:pt x="54" y="780"/>
+                  <a:pt x="0" y="726"/>
+                  <a:pt x="0" y="660"/>
+                </a:cubicBezTo>
+                <a:lnTo>
+                  <a:pt x="0" y="120"/>
+                </a:lnTo>
+                <a:cubicBezTo>
+                  <a:pt x="0" y="54"/>
+                  <a:pt x="54" y="0"/>
+                  <a:pt x="120" y="0"/>
+                </a:cubicBezTo>
+                <a:close/>
+              </a:path>
+            </a:pathLst>
+          </a:custGeom>
+          <a:solidFill xmlns:a="http://schemas.openxmlformats.org/drawingml/2006/main">
+            <a:schemeClr val="accent1">
+              <a:alpha val="16078"/>
+            </a:schemeClr>
+          </a:solidFill>
+          <a:ln xmlns:a="http://schemas.openxmlformats.org/drawingml/2006/main">
+            <a:noFill/>
+          </a:ln>
+        </p:spPr>
+        <p:style>
+          <a:lnRef xmlns:a="http://schemas.openxmlformats.org/drawingml/2006/main" idx="2">
+            <a:schemeClr val="accent1">
+              <a:lumMod val="75000"/>
+            </a:schemeClr>
+          </a:lnRef>
+          <a:fillRef xmlns:a="http://schemas.openxmlformats.org/drawingml/2006/main" idx="1">
+            <a:schemeClr val="accent1"/>
+          </a:fillRef>
+          <a:effectRef xmlns:a="http://schemas.openxmlformats.org/drawingml/2006/main" idx="0">
+            <a:srgbClr val="FFFFFF"/>
+          </a:effectRef>
+          <a:fontRef xmlns:a="http://schemas.openxmlformats.org/drawingml/2006/main" idx="minor">
+            <a:schemeClr val="lt1"/>
+          </a:fontRef>
+        </p:style>
+        <p:txBody>
+          <a:bodyPr xmlns:a="http://schemas.openxmlformats.org/drawingml/2006/main" wrap="square" anchor="ctr">
+            <a:noAutofit/>
+          </a:bodyPr>
+          <a:lstStyle xmlns:a="http://schemas.openxmlformats.org/drawingml/2006/main"/>
+          <a:p xmlns:a="http://schemas.openxmlformats.org/drawingml/2006/main">
+            <a:pPr algn="ctr">
+              <a:buNone/>
+            </a:pPr>
+            <a:endParaRPr/>
+          </a:p>
+        </p:txBody>
+      </p:sp>
+      <p:pic>
+        <p:nvPicPr>
+          <p:cNvPr id="74" name="图片 34"/>
+          <p:cNvPicPr>
+            <a:picLocks xmlns:a="http://schemas.openxmlformats.org/drawingml/2006/main" noChangeAspect="1"/>
+          </p:cNvPicPr>
+          <p:nvPr/>
+        </p:nvPicPr>
+        <p:blipFill>
+          <a:blip xmlns:r="http://schemas.openxmlformats.org/officeDocument/2006/relationships" xmlns:a="http://schemas.openxmlformats.org/drawingml/2006/main" r:embed="Raef91694f37a4cbb">
+            <a:extLst>
+              <a:ext uri="{96DAC541-7B7A-43D3-8B79-37D633B846F1}">
+                <asvg:svgBlip xmlns:asvg="http://schemas.microsoft.com/office/drawing/2016/SVG/main" r:embed="R14834e18938d4409"/>
+              </a:ext>
+            </a:extLst>
+          </a:blip>
+          <a:srcRect xmlns:a="http://schemas.openxmlformats.org/drawingml/2006/main" l="0" t="0" r="0" b="0"/>
+          <a:stretch xmlns:a="http://schemas.openxmlformats.org/drawingml/2006/main">
+            <a:fillRect l="0" t="0" r="0" b="0"/>
+          </a:stretch>
+        </p:blipFill>
+        <p:spPr>
+          <a:xfrm xmlns:a="http://schemas.openxmlformats.org/drawingml/2006/main">
+            <a:off x="9702165" y="3266440"/>
+            <a:ext cx="304800" cy="304800"/>
+          </a:xfrm>
+          <a:prstGeom xmlns:a="http://schemas.openxmlformats.org/drawingml/2006/main" prst="rect">
+            <a:avLst/>
+          </a:prstGeom>
+        </p:spPr>
+      </p:pic>
+      <p:sp>
+        <p:nvSpPr>
+          <p:cNvPr id="36" name="文本框 35">
+            <a:extLst xmlns:a="http://schemas.openxmlformats.org/drawingml/2006/main">
+              <a:ext uri="{FF2B5EF4-FFF2-40B4-BE49-F238E27FC236}">
+                <a16:creationId xmlns:a16="http://schemas.microsoft.com/office/drawing/2014/main" id="{B02CBC3D-3CCE-4A4D-BF51-47F5DDBB95E4}"/>
+              </a:ext>
+            </a:extLst>
+          </p:cNvPr>
+          <p:cNvSpPr>
+            <a:spLocks xmlns:a="http://schemas.openxmlformats.org/drawingml/2006/main" noGrp="1"/>
+          </p:cNvSpPr>
+          <p:nvPr/>
+        </p:nvSpPr>
+        <p:spPr>
+          <a:xfrm xmlns:a="http://schemas.openxmlformats.org/drawingml/2006/main">
+            <a:off x="9043759" y="3765814"/>
+            <a:ext cx="1622669" cy="311467"/>
+          </a:xfrm>
+          <a:prstGeom xmlns:a="http://schemas.openxmlformats.org/drawingml/2006/main" prst="rect">
+            <a:avLst/>
+          </a:prstGeom>
+          <a:noFill xmlns:a="http://schemas.openxmlformats.org/drawingml/2006/main"/>
+        </p:spPr>
+        <p:txBody>
+          <a:bodyPr xmlns:a="http://schemas.openxmlformats.org/drawingml/2006/main" wrap="square" lIns="0" tIns="0" rIns="0" bIns="0" anchor="t">
+            <a:noAutofit/>
+          </a:bodyPr>
+          <a:lstStyle xmlns:a="http://schemas.openxmlformats.org/drawingml/2006/main"/>
+          <a:p xmlns:a="http://schemas.openxmlformats.org/drawingml/2006/main">
+            <a:pPr algn="ctr">
+              <a:lnSpc>
+                <a:spcPct val="104000"/>
+              </a:lnSpc>
+              <a:buNone/>
+            </a:pPr>
+            <a:r>
+              <a:rPr b="1" spc="36">
+                <a:solidFill>
+                  <a:srgbClr val="F4F4F5"/>
+                </a:solidFill>
+                <a:latin typeface="Microsoft YaHei"/>
+                <a:ea typeface="Microsoft YaHei"/>
+                <a:cs typeface="Microsoft YaHei"/>
+              </a:rPr>
+              <a:t>私有 Agent</a:t>
+            </a:r>
+            <a:endParaRPr b="1" spc="36">
+              <a:solidFill>
+                <a:srgbClr val="F4F4F5"/>
+              </a:solidFill>
+              <a:latin typeface="Microsoft YaHei"/>
+              <a:ea typeface="Microsoft YaHei"/>
+              <a:cs typeface="Microsoft YaHei"/>
+            </a:endParaRPr>
+          </a:p>
+        </p:txBody>
+      </p:sp>
+      <p:sp>
+        <p:nvSpPr>
+          <p:cNvPr id="37" name="文本框 36">
+            <a:extLst xmlns:a="http://schemas.openxmlformats.org/drawingml/2006/main">
+              <a:ext uri="{FF2B5EF4-FFF2-40B4-BE49-F238E27FC236}">
+                <a16:creationId xmlns:a16="http://schemas.microsoft.com/office/drawing/2014/main" id="{C4650388-F20E-4457-B696-9E83AA296F0E}"/>
+              </a:ext>
+            </a:extLst>
+          </p:cNvPr>
+          <p:cNvSpPr>
+            <a:spLocks xmlns:a="http://schemas.openxmlformats.org/drawingml/2006/main" noGrp="1"/>
+          </p:cNvSpPr>
+          <p:nvPr/>
+        </p:nvSpPr>
+        <p:spPr>
+          <a:xfrm xmlns:a="http://schemas.openxmlformats.org/drawingml/2006/main">
+            <a:off x="8569147" y="4089664"/>
+            <a:ext cx="2571826" cy="571471"/>
+          </a:xfrm>
+          <a:prstGeom xmlns:a="http://schemas.openxmlformats.org/drawingml/2006/main" prst="rect">
+            <a:avLst/>
+          </a:prstGeom>
+          <a:noFill xmlns:a="http://schemas.openxmlformats.org/drawingml/2006/main"/>
+        </p:spPr>
+        <p:txBody>
+          <a:bodyPr xmlns:a="http://schemas.openxmlformats.org/drawingml/2006/main" wrap="square" lIns="0" tIns="0" rIns="0" bIns="0" anchor="t">
+            <a:noAutofit/>
+          </a:bodyPr>
+          <a:lstStyle xmlns:a="http://schemas.openxmlformats.org/drawingml/2006/main"/>
+          <a:p xmlns:a="http://schemas.openxmlformats.org/drawingml/2006/main">
+            <a:pPr algn="ctr">
+              <a:lnSpc>
+                <a:spcPct val="133000"/>
+              </a:lnSpc>
+              <a:buNone/>
+            </a:pPr>
+            <a:r>
+              <a:rPr sz="1350">
+                <a:solidFill>
+                  <a:schemeClr val="tx2">
+                    <a:lumMod val="0"/>
+                    <a:lumOff val="100000"/>
+                    <a:alpha val="72157"/>
+                  </a:schemeClr>
+                </a:solidFill>
+                <a:latin typeface="Microsoft YaHei"/>
+                <a:ea typeface="Microsoft YaHei"/>
+                <a:cs typeface="Microsoft YaHei"/>
+              </a:rPr>
+              <a:t>Recognition · Intent
+Retrieval · Explanation
+Memory</a:t>
+            </a:r>
+            <a:endParaRPr sz="1350">
+              <a:solidFill>
+                <a:schemeClr val="tx2">
+                  <a:lumMod val="0"/>
+                  <a:lumOff val="100000"/>
+                  <a:alpha val="72157"/>
+                </a:schemeClr>
+              </a:solidFill>
+              <a:latin typeface="Microsoft YaHei"/>
+              <a:ea typeface="Microsoft YaHei"/>
+              <a:cs typeface="Microsoft YaHei"/>
+            </a:endParaRPr>
+          </a:p>
+        </p:txBody>
+      </p:sp>
+    </p:spTree>
+    <p:extLst>
+      <p:ext uri="{BB962C8B-B14F-4D97-AF65-F5344CB8AC3E}">
+        <p14:creationId xmlns:p14="http://schemas.microsoft.com/office/powerpoint/2010/main" val="231882694"/>
       </p:ext>
     </p:extLst>
   </p:cSld>
